--- a/mon/ngu_van/slide/lop12/Slide_NGUVAN12_Bai2_NhungTheGioiTho_T12-22.pptx
+++ b/mon/ngu_van/slide/lop12/Slide_NGUVAN12_Bai2_NhungTheGioiTho_T12-22.pptx
@@ -39,6 +39,10 @@
     <p:sldId id="287" r:id="rId39"/>
     <p:sldId id="288" r:id="rId40"/>
     <p:sldId id="289" r:id="rId41"/>
+    <p:sldId id="290" r:id="rId42"/>
+    <p:sldId id="291" r:id="rId43"/>
+    <p:sldId id="292" r:id="rId44"/>
+    <p:sldId id="293" r:id="rId45"/>
   </p:sldIdLst>
   <p:sldSz cx="12191695" cy="6858000" type="screen4x3"/>
   <p:notesSz cx="6858000" cy="9144000"/>
@@ -605,7 +609,7 @@
           <a:lstStyle/>
           <a:p>
             <a:r>
-              <a:t>Slide ĐỀ BÀI – cho HS suy nghĩ, thảo luận (không chiếu lời giải). </a:t>
+              <a:t>Câu hỏi Trước khi đọc SGK tr.44; chiếu bản đồ địa bàn Tây Tiến.</a:t>
             </a:r>
           </a:p>
         </p:txBody>
@@ -675,7 +679,7 @@
           <a:lstStyle/>
           <a:p>
             <a:r>
-              <a:t>Slide LỜI GIẢI – GV chốt sau khi HS trình bày. </a:t>
+              <a:t>Bấm vào đường link hoặc quét mã QR để mở video (cần Internet). </a:t>
             </a:r>
           </a:p>
         </p:txBody>
@@ -885,7 +889,7 @@
           <a:lstStyle/>
           <a:p>
             <a:r>
-              <a:t>Câu hỏi Trước khi đọc SGK tr.48; nghe nhạc ghi ta Tây Ban Nha.</a:t>
+              <a:t>Slide ĐỀ BÀI – cho HS suy nghĩ, thảo luận (không chiếu lời giải). </a:t>
             </a:r>
           </a:p>
         </p:txBody>
@@ -955,7 +959,7 @@
           <a:lstStyle/>
           <a:p>
             <a:r>
-              <a:t>Slide ĐỀ BÀI – cho HS suy nghĩ, thảo luận (không chiếu lời giải). </a:t>
+              <a:t>Slide LỜI GIẢI – GV chốt sau khi HS trình bày. </a:t>
             </a:r>
           </a:p>
         </p:txBody>
@@ -1025,7 +1029,7 @@
           <a:lstStyle/>
           <a:p>
             <a:r>
-              <a:t>Slide LỜI GIẢI – GV chốt sau khi HS trình bày. </a:t>
+              <a:t>Câu hỏi Trước khi đọc SGK tr.48; nghe nhạc ghi ta Tây Ban Nha.</a:t>
             </a:r>
           </a:p>
         </p:txBody>
@@ -1095,7 +1099,7 @@
           <a:lstStyle/>
           <a:p>
             <a:r>
-              <a:t>Slide ĐỀ BÀI – cho HS suy nghĩ, thảo luận (không chiếu lời giải). </a:t>
+              <a:t>Bấm vào đường link hoặc quét mã QR để mở video (cần Internet). </a:t>
             </a:r>
           </a:p>
         </p:txBody>
@@ -1165,7 +1169,7 @@
           <a:lstStyle/>
           <a:p>
             <a:r>
-              <a:t>Slide LỜI GIẢI – GV chốt sau khi HS trình bày. </a:t>
+              <a:t>Slide ĐỀ BÀI – cho HS suy nghĩ, thảo luận (không chiếu lời giải). </a:t>
             </a:r>
           </a:p>
         </p:txBody>
@@ -1235,7 +1239,7 @@
           <a:lstStyle/>
           <a:p>
             <a:r>
-              <a:t>Slide ĐỀ BÀI – cho HS suy nghĩ, thảo luận (không chiếu lời giải). </a:t>
+              <a:t>Slide LỜI GIẢI – GV chốt sau khi HS trình bày. </a:t>
             </a:r>
           </a:p>
         </p:txBody>
@@ -1375,7 +1379,7 @@
           <a:lstStyle/>
           <a:p>
             <a:r>
-              <a:t>Slide LỜI GIẢI – GV chốt sau khi HS trình bày. </a:t>
+              <a:t>Bấm vào đường link hoặc quét mã QR để mở video (cần Internet). </a:t>
             </a:r>
           </a:p>
         </p:txBody>
@@ -1680,6 +1684,286 @@
 </p:notes>
 </file>
 
+<file path=ppt/notesSlides/notesSlide25.xml><?xml version="1.0" encoding="utf-8"?>
+<p:notes xmlns:a="http://schemas.openxmlformats.org/drawingml/2006/main" xmlns:p="http://schemas.openxmlformats.org/presentationml/2006/main" xmlns:r="http://schemas.openxmlformats.org/officeDocument/2006/relationships">
+  <p:cSld>
+    <p:spTree>
+      <p:nvGrpSpPr>
+        <p:cNvPr id="1" name=""/>
+        <p:cNvGrpSpPr/>
+        <p:nvPr/>
+      </p:nvGrpSpPr>
+      <p:grpSpPr>
+        <a:xfrm>
+          <a:off x="0" y="0"/>
+          <a:ext cx="0" cy="0"/>
+          <a:chOff x="0" y="0"/>
+          <a:chExt cx="0" cy="0"/>
+        </a:xfrm>
+      </p:grpSpPr>
+      <p:sp>
+        <p:nvSpPr>
+          <p:cNvPr id="2" name="Slide Image Placeholder 1"/>
+          <p:cNvSpPr>
+            <a:spLocks noGrp="1"/>
+          </p:cNvSpPr>
+          <p:nvPr>
+            <p:ph type="sldImg" idx="2"/>
+          </p:nvPr>
+        </p:nvSpPr>
+        <p:spPr/>
+      </p:sp>
+      <p:sp>
+        <p:nvSpPr>
+          <p:cNvPr id="3" name="Notes Placeholder 2"/>
+          <p:cNvSpPr>
+            <a:spLocks noGrp="1"/>
+          </p:cNvSpPr>
+          <p:nvPr>
+            <p:ph type="body" idx="3" sz="quarter"/>
+          </p:nvPr>
+        </p:nvSpPr>
+        <p:spPr/>
+        <p:txBody>
+          <a:bodyPr/>
+          <a:lstStyle/>
+          <a:p>
+            <a:r>
+              <a:t>Slide ĐỀ BÀI – cho HS suy nghĩ, thảo luận (không chiếu lời giải). </a:t>
+            </a:r>
+          </a:p>
+        </p:txBody>
+      </p:sp>
+      <p:sp>
+        <p:nvSpPr>
+          <p:cNvPr id="4" name="Slide Number Placeholder 3"/>
+          <p:cNvSpPr>
+            <a:spLocks noGrp="1"/>
+          </p:cNvSpPr>
+          <p:nvPr>
+            <p:ph type="sldNum" idx="5" sz="quarter"/>
+          </p:nvPr>
+        </p:nvSpPr>
+        <p:spPr/>
+      </p:sp>
+    </p:spTree>
+  </p:cSld>
+  <p:clrMapOvr>
+    <a:masterClrMapping/>
+  </p:clrMapOvr>
+</p:notes>
+</file>
+
+<file path=ppt/notesSlides/notesSlide26.xml><?xml version="1.0" encoding="utf-8"?>
+<p:notes xmlns:a="http://schemas.openxmlformats.org/drawingml/2006/main" xmlns:p="http://schemas.openxmlformats.org/presentationml/2006/main" xmlns:r="http://schemas.openxmlformats.org/officeDocument/2006/relationships">
+  <p:cSld>
+    <p:spTree>
+      <p:nvGrpSpPr>
+        <p:cNvPr id="1" name=""/>
+        <p:cNvGrpSpPr/>
+        <p:nvPr/>
+      </p:nvGrpSpPr>
+      <p:grpSpPr>
+        <a:xfrm>
+          <a:off x="0" y="0"/>
+          <a:ext cx="0" cy="0"/>
+          <a:chOff x="0" y="0"/>
+          <a:chExt cx="0" cy="0"/>
+        </a:xfrm>
+      </p:grpSpPr>
+      <p:sp>
+        <p:nvSpPr>
+          <p:cNvPr id="2" name="Slide Image Placeholder 1"/>
+          <p:cNvSpPr>
+            <a:spLocks noGrp="1"/>
+          </p:cNvSpPr>
+          <p:nvPr>
+            <p:ph type="sldImg" idx="2"/>
+          </p:nvPr>
+        </p:nvSpPr>
+        <p:spPr/>
+      </p:sp>
+      <p:sp>
+        <p:nvSpPr>
+          <p:cNvPr id="3" name="Notes Placeholder 2"/>
+          <p:cNvSpPr>
+            <a:spLocks noGrp="1"/>
+          </p:cNvSpPr>
+          <p:nvPr>
+            <p:ph type="body" idx="3" sz="quarter"/>
+          </p:nvPr>
+        </p:nvSpPr>
+        <p:spPr/>
+        <p:txBody>
+          <a:bodyPr/>
+          <a:lstStyle/>
+          <a:p>
+            <a:r>
+              <a:t>Slide LỜI GIẢI – GV chốt sau khi HS trình bày. </a:t>
+            </a:r>
+          </a:p>
+        </p:txBody>
+      </p:sp>
+      <p:sp>
+        <p:nvSpPr>
+          <p:cNvPr id="4" name="Slide Number Placeholder 3"/>
+          <p:cNvSpPr>
+            <a:spLocks noGrp="1"/>
+          </p:cNvSpPr>
+          <p:nvPr>
+            <p:ph type="sldNum" idx="5" sz="quarter"/>
+          </p:nvPr>
+        </p:nvSpPr>
+        <p:spPr/>
+      </p:sp>
+    </p:spTree>
+  </p:cSld>
+  <p:clrMapOvr>
+    <a:masterClrMapping/>
+  </p:clrMapOvr>
+</p:notes>
+</file>
+
+<file path=ppt/notesSlides/notesSlide27.xml><?xml version="1.0" encoding="utf-8"?>
+<p:notes xmlns:a="http://schemas.openxmlformats.org/drawingml/2006/main" xmlns:p="http://schemas.openxmlformats.org/presentationml/2006/main" xmlns:r="http://schemas.openxmlformats.org/officeDocument/2006/relationships">
+  <p:cSld>
+    <p:spTree>
+      <p:nvGrpSpPr>
+        <p:cNvPr id="1" name=""/>
+        <p:cNvGrpSpPr/>
+        <p:nvPr/>
+      </p:nvGrpSpPr>
+      <p:grpSpPr>
+        <a:xfrm>
+          <a:off x="0" y="0"/>
+          <a:ext cx="0" cy="0"/>
+          <a:chOff x="0" y="0"/>
+          <a:chExt cx="0" cy="0"/>
+        </a:xfrm>
+      </p:grpSpPr>
+      <p:sp>
+        <p:nvSpPr>
+          <p:cNvPr id="2" name="Slide Image Placeholder 1"/>
+          <p:cNvSpPr>
+            <a:spLocks noGrp="1"/>
+          </p:cNvSpPr>
+          <p:nvPr>
+            <p:ph type="sldImg" idx="2"/>
+          </p:nvPr>
+        </p:nvSpPr>
+        <p:spPr/>
+      </p:sp>
+      <p:sp>
+        <p:nvSpPr>
+          <p:cNvPr id="3" name="Notes Placeholder 2"/>
+          <p:cNvSpPr>
+            <a:spLocks noGrp="1"/>
+          </p:cNvSpPr>
+          <p:nvPr>
+            <p:ph type="body" idx="3" sz="quarter"/>
+          </p:nvPr>
+        </p:nvSpPr>
+        <p:spPr/>
+        <p:txBody>
+          <a:bodyPr/>
+          <a:lstStyle/>
+          <a:p>
+            <a:r>
+              <a:t>Slide ĐỀ BÀI – cho HS suy nghĩ, thảo luận (không chiếu lời giải). </a:t>
+            </a:r>
+          </a:p>
+        </p:txBody>
+      </p:sp>
+      <p:sp>
+        <p:nvSpPr>
+          <p:cNvPr id="4" name="Slide Number Placeholder 3"/>
+          <p:cNvSpPr>
+            <a:spLocks noGrp="1"/>
+          </p:cNvSpPr>
+          <p:nvPr>
+            <p:ph type="sldNum" idx="5" sz="quarter"/>
+          </p:nvPr>
+        </p:nvSpPr>
+        <p:spPr/>
+      </p:sp>
+    </p:spTree>
+  </p:cSld>
+  <p:clrMapOvr>
+    <a:masterClrMapping/>
+  </p:clrMapOvr>
+</p:notes>
+</file>
+
+<file path=ppt/notesSlides/notesSlide28.xml><?xml version="1.0" encoding="utf-8"?>
+<p:notes xmlns:a="http://schemas.openxmlformats.org/drawingml/2006/main" xmlns:p="http://schemas.openxmlformats.org/presentationml/2006/main" xmlns:r="http://schemas.openxmlformats.org/officeDocument/2006/relationships">
+  <p:cSld>
+    <p:spTree>
+      <p:nvGrpSpPr>
+        <p:cNvPr id="1" name=""/>
+        <p:cNvGrpSpPr/>
+        <p:nvPr/>
+      </p:nvGrpSpPr>
+      <p:grpSpPr>
+        <a:xfrm>
+          <a:off x="0" y="0"/>
+          <a:ext cx="0" cy="0"/>
+          <a:chOff x="0" y="0"/>
+          <a:chExt cx="0" cy="0"/>
+        </a:xfrm>
+      </p:grpSpPr>
+      <p:sp>
+        <p:nvSpPr>
+          <p:cNvPr id="2" name="Slide Image Placeholder 1"/>
+          <p:cNvSpPr>
+            <a:spLocks noGrp="1"/>
+          </p:cNvSpPr>
+          <p:nvPr>
+            <p:ph type="sldImg" idx="2"/>
+          </p:nvPr>
+        </p:nvSpPr>
+        <p:spPr/>
+      </p:sp>
+      <p:sp>
+        <p:nvSpPr>
+          <p:cNvPr id="3" name="Notes Placeholder 2"/>
+          <p:cNvSpPr>
+            <a:spLocks noGrp="1"/>
+          </p:cNvSpPr>
+          <p:nvPr>
+            <p:ph type="body" idx="3" sz="quarter"/>
+          </p:nvPr>
+        </p:nvSpPr>
+        <p:spPr/>
+        <p:txBody>
+          <a:bodyPr/>
+          <a:lstStyle/>
+          <a:p>
+            <a:r>
+              <a:t>Slide LỜI GIẢI – GV chốt sau khi HS trình bày. </a:t>
+            </a:r>
+          </a:p>
+        </p:txBody>
+      </p:sp>
+      <p:sp>
+        <p:nvSpPr>
+          <p:cNvPr id="4" name="Slide Number Placeholder 3"/>
+          <p:cNvSpPr>
+            <a:spLocks noGrp="1"/>
+          </p:cNvSpPr>
+          <p:nvPr>
+            <p:ph type="sldNum" idx="5" sz="quarter"/>
+          </p:nvPr>
+        </p:nvSpPr>
+        <p:spPr/>
+      </p:sp>
+    </p:spTree>
+  </p:cSld>
+  <p:clrMapOvr>
+    <a:masterClrMapping/>
+  </p:clrMapOvr>
+</p:notes>
+</file>
+
 <file path=ppt/notesSlides/notesSlide3.xml><?xml version="1.0" encoding="utf-8"?>
 <p:notes xmlns:a="http://schemas.openxmlformats.org/drawingml/2006/main" xmlns:p="http://schemas.openxmlformats.org/presentationml/2006/main" xmlns:r="http://schemas.openxmlformats.org/officeDocument/2006/relationships">
   <p:cSld>
@@ -1725,7 +2009,7 @@
           <a:lstStyle/>
           <a:p>
             <a:r>
-              <a:t>Slide ĐỀ BÀI – cho HS suy nghĩ, thảo luận (không chiếu lời giải). </a:t>
+              <a:t>Bấm vào đường link hoặc quét mã QR để mở video (cần Internet). </a:t>
             </a:r>
           </a:p>
         </p:txBody>
@@ -1795,7 +2079,7 @@
           <a:lstStyle/>
           <a:p>
             <a:r>
-              <a:t>Slide LỜI GIẢI – GV chốt sau khi HS trình bày. </a:t>
+              <a:t>Slide ĐỀ BÀI – cho HS suy nghĩ, thảo luận (không chiếu lời giải). </a:t>
             </a:r>
           </a:p>
         </p:txBody>
@@ -1865,7 +2149,7 @@
           <a:lstStyle/>
           <a:p>
             <a:r>
-              <a:t>Slide ĐỀ BÀI – cho HS suy nghĩ, thảo luận (không chiếu lời giải). </a:t>
+              <a:t>Slide LỜI GIẢI – GV chốt sau khi HS trình bày. </a:t>
             </a:r>
           </a:p>
         </p:txBody>
@@ -1935,7 +2219,7 @@
           <a:lstStyle/>
           <a:p>
             <a:r>
-              <a:t>Slide LỜI GIẢI – GV chốt sau khi HS trình bày. </a:t>
+              <a:t>Slide ĐỀ BÀI – cho HS suy nghĩ, thảo luận (không chiếu lời giải). </a:t>
             </a:r>
           </a:p>
         </p:txBody>
@@ -2005,7 +2289,7 @@
           <a:lstStyle/>
           <a:p>
             <a:r>
-              <a:t>Slide ĐỀ BÀI – cho HS suy nghĩ, thảo luận (không chiếu lời giải). </a:t>
+              <a:t>Slide LỜI GIẢI – GV chốt sau khi HS trình bày. </a:t>
             </a:r>
           </a:p>
         </p:txBody>
@@ -2075,7 +2359,7 @@
           <a:lstStyle/>
           <a:p>
             <a:r>
-              <a:t>Slide LỜI GIẢI – GV chốt sau khi HS trình bày. </a:t>
+              <a:t>Slide ĐỀ BÀI – cho HS suy nghĩ, thảo luận (không chiếu lời giải). </a:t>
             </a:r>
           </a:p>
         </p:txBody>
@@ -2145,7 +2429,7 @@
           <a:lstStyle/>
           <a:p>
             <a:r>
-              <a:t>Câu hỏi Trước khi đọc SGK tr.44; chiếu bản đồ địa bàn Tây Tiến.</a:t>
+              <a:t>Slide LỜI GIẢI – GV chốt sau khi HS trình bày. </a:t>
             </a:r>
           </a:p>
         </p:txBody>
@@ -5375,14 +5659,14 @@
         </p:nvSpPr>
         <p:spPr>
           <a:xfrm>
-            <a:off x="10253167" y="457200"/>
-            <a:ext cx="1389888" cy="457200"/>
+            <a:off x="9942271" y="457200"/>
+            <a:ext cx="1700784" cy="457200"/>
           </a:xfrm>
           <a:prstGeom prst="roundRect">
             <a:avLst/>
           </a:prstGeom>
           <a:solidFill>
-            <a:srgbClr val="1E40AF"/>
+            <a:srgbClr val="991B1B"/>
           </a:solidFill>
           <a:ln>
             <a:noFill/>
@@ -5415,7 +5699,7 @@
                 </a:solidFill>
                 <a:latin typeface="Arial"/>
               </a:rPr>
-              <a:t>ĐỀ BÀI</a:t>
+              <a:t>LỜI GIẢI</a:t>
             </a:r>
           </a:p>
         </p:txBody>
@@ -5429,7 +5713,7 @@
         <p:spPr>
           <a:xfrm>
             <a:off x="731520" y="274320"/>
-            <a:ext cx="9582912" cy="868680"/>
+            <a:ext cx="9272016" cy="868680"/>
           </a:xfrm>
           <a:prstGeom prst="rect">
             <a:avLst/>
@@ -5449,7 +5733,7 @@
                 </a:solidFill>
                 <a:latin typeface="Arial"/>
               </a:rPr>
-              <a:t>HÌNH ẢNH MÀI GƯƠM DƯỚI TRĂNG</a:t>
+              <a:t>BIỂU TƯỢNG TRONG HAI CÂU LUẬN</a:t>
             </a:r>
           </a:p>
         </p:txBody>
@@ -5542,7 +5826,7 @@
         <p:spPr>
           <a:xfrm>
             <a:off x="731520" y="1463040"/>
-            <a:ext cx="10789920" cy="3566160"/>
+            <a:ext cx="10789920" cy="3474720"/>
           </a:xfrm>
           <a:prstGeom prst="rect">
             <a:avLst/>
@@ -5555,19 +5839,66 @@
           </a:bodyPr>
           <a:lstStyle/>
           <a:p>
-            <a:pPr algn="l">
+            <a:pPr algn="l" marL="365760" indent="-365760">
               <a:spcAft>
                 <a:spcPts val="800"/>
               </a:spcAft>
+              <a:buClr>
+                <a:srgbClr val="1E40AF"/>
+              </a:buClr>
+              <a:buFont typeface="Arial"/>
+              <a:buChar char="•"/>
             </a:pPr>
             <a:r>
-              <a:rPr sz="2600" b="1">
+              <a:rPr sz="2300">
                 <a:solidFill>
                   <a:srgbClr val="1E293B"/>
                 </a:solidFill>
                 <a:latin typeface="Calibri"/>
               </a:rPr>
-              <a:t>Phân tích ý nghĩa hình ảnh người tráng sĩ mài gươm trong hai câu kết. Nêu biểu hiện của phong cách cổ điển.</a:t>
+              <a:t>“Xoay trục đất”: xoay chuyển vận mệnh đất nước.</a:t>
+            </a:r>
+          </a:p>
+          <a:p>
+            <a:pPr algn="l" marL="365760" indent="-365760">
+              <a:spcAft>
+                <a:spcPts val="800"/>
+              </a:spcAft>
+              <a:buClr>
+                <a:srgbClr val="1E40AF"/>
+              </a:buClr>
+              <a:buFont typeface="Arial"/>
+              <a:buChar char="•"/>
+            </a:pPr>
+            <a:r>
+              <a:rPr sz="2300">
+                <a:solidFill>
+                  <a:srgbClr val="1E293B"/>
+                </a:solidFill>
+                <a:latin typeface="Calibri"/>
+              </a:rPr>
+              <a:t>“Rửa binh khí”, “kéo sông Ngân”: dẹp yên chiến tranh, lập lại thái bình.</a:t>
+            </a:r>
+          </a:p>
+          <a:p>
+            <a:pPr algn="l" marL="365760" indent="-365760">
+              <a:spcAft>
+                <a:spcPts val="800"/>
+              </a:spcAft>
+              <a:buClr>
+                <a:srgbClr val="1E40AF"/>
+              </a:buClr>
+              <a:buFont typeface="Arial"/>
+              <a:buChar char="•"/>
+            </a:pPr>
+            <a:r>
+              <a:rPr sz="2300">
+                <a:solidFill>
+                  <a:srgbClr val="1E293B"/>
+                </a:solidFill>
+                <a:latin typeface="Calibri"/>
+              </a:rPr>
+              <a:t>Chí lớn kinh bang tế thế mà “khôn lối” – nỗi đau bất lực.</a:t>
             </a:r>
           </a:p>
         </p:txBody>
@@ -5580,8 +5911,8 @@
         </p:nvSpPr>
         <p:spPr>
           <a:xfrm>
-            <a:off x="731520" y="5120640"/>
-            <a:ext cx="10789920" cy="693420"/>
+            <a:off x="731520" y="5074920"/>
+            <a:ext cx="10789920" cy="731520"/>
           </a:xfrm>
           <a:prstGeom prst="roundRect">
             <a:avLst>
@@ -5589,11 +5920,11 @@
             </a:avLst>
           </a:prstGeom>
           <a:solidFill>
-            <a:srgbClr val="EFF4FF"/>
+            <a:srgbClr val="FEF2F2"/>
           </a:solidFill>
           <a:ln w="19050">
             <a:solidFill>
-              <a:srgbClr val="1E40AF"/>
+              <a:srgbClr val="991B1B"/>
             </a:solidFill>
           </a:ln>
           <a:effectLst/>
@@ -5628,8 +5959,8 @@
         </p:nvSpPr>
         <p:spPr>
           <a:xfrm>
-            <a:off x="914400" y="5120640"/>
-            <a:ext cx="10424160" cy="693420"/>
+            <a:off x="914400" y="5074920"/>
+            <a:ext cx="10424160" cy="731520"/>
           </a:xfrm>
           <a:prstGeom prst="rect">
             <a:avLst/>
@@ -5648,13 +5979,13 @@
               </a:spcAft>
             </a:pPr>
             <a:r>
-              <a:rPr sz="2200" b="1">
-                <a:solidFill>
-                  <a:srgbClr val="1E40AF"/>
+              <a:rPr sz="2400" b="1">
+                <a:solidFill>
+                  <a:srgbClr val="991B1B"/>
                 </a:solidFill>
                 <a:latin typeface="Calibri"/>
               </a:rPr>
-              <a:t>💡 “Bao phen” gợi điều gì?</a:t>
+              <a:t>Biểu tượng mang tầm vũ trụ – chí lớn của bậc anh hùng.</a:t>
             </a:r>
           </a:p>
         </p:txBody>
@@ -5737,6 +6068,368 @@
         </p:nvSpPr>
         <p:spPr>
           <a:xfrm>
+            <a:off x="10253167" y="457200"/>
+            <a:ext cx="1389888" cy="457200"/>
+          </a:xfrm>
+          <a:prstGeom prst="roundRect">
+            <a:avLst/>
+          </a:prstGeom>
+          <a:solidFill>
+            <a:srgbClr val="1E40AF"/>
+          </a:solidFill>
+          <a:ln>
+            <a:noFill/>
+          </a:ln>
+          <a:effectLst/>
+        </p:spPr>
+        <p:style>
+          <a:lnRef idx="1">
+            <a:schemeClr val="accent1"/>
+          </a:lnRef>
+          <a:fillRef idx="3">
+            <a:schemeClr val="accent1"/>
+          </a:fillRef>
+          <a:effectRef idx="2">
+            <a:schemeClr val="accent1"/>
+          </a:effectRef>
+          <a:fontRef idx="minor">
+            <a:schemeClr val="lt1"/>
+          </a:fontRef>
+        </p:style>
+        <p:txBody>
+          <a:bodyPr rtlCol="0" anchor="ctr" wrap="none" tIns="0" bIns="0"/>
+          <a:lstStyle/>
+          <a:p>
+            <a:pPr algn="ctr"/>
+            <a:r>
+              <a:rPr sz="1400" b="1">
+                <a:solidFill>
+                  <a:srgbClr val="FFFFFF"/>
+                </a:solidFill>
+                <a:latin typeface="Arial"/>
+              </a:rPr>
+              <a:t>ĐỀ BÀI</a:t>
+            </a:r>
+          </a:p>
+        </p:txBody>
+      </p:sp>
+      <p:sp>
+        <p:nvSpPr>
+          <p:cNvPr id="4" name="TextBox 3"/>
+          <p:cNvSpPr txBox="1"/>
+          <p:nvPr/>
+        </p:nvSpPr>
+        <p:spPr>
+          <a:xfrm>
+            <a:off x="731520" y="274320"/>
+            <a:ext cx="9582912" cy="868680"/>
+          </a:xfrm>
+          <a:prstGeom prst="rect">
+            <a:avLst/>
+          </a:prstGeom>
+          <a:noFill/>
+        </p:spPr>
+        <p:txBody>
+          <a:bodyPr wrap="square" anchor="ctr">
+            <a:spAutoFit/>
+          </a:bodyPr>
+          <a:lstStyle/>
+          <a:p>
+            <a:r>
+              <a:rPr sz="3600" b="1">
+                <a:solidFill>
+                  <a:srgbClr val="1E40AF"/>
+                </a:solidFill>
+                <a:latin typeface="Arial"/>
+              </a:rPr>
+              <a:t>HÌNH ẢNH MÀI GƯƠM DƯỚI TRĂNG</a:t>
+            </a:r>
+          </a:p>
+        </p:txBody>
+      </p:sp>
+      <p:sp>
+        <p:nvSpPr>
+          <p:cNvPr id="5" name="Rectangle 4"/>
+          <p:cNvSpPr/>
+          <p:nvPr/>
+        </p:nvSpPr>
+        <p:spPr>
+          <a:xfrm>
+            <a:off x="457200" y="1207008"/>
+            <a:ext cx="11274552" cy="22000"/>
+          </a:xfrm>
+          <a:prstGeom prst="rect">
+            <a:avLst/>
+          </a:prstGeom>
+          <a:solidFill>
+            <a:srgbClr val="E2E8F0"/>
+          </a:solidFill>
+          <a:ln>
+            <a:noFill/>
+          </a:ln>
+          <a:effectLst/>
+        </p:spPr>
+        <p:style>
+          <a:lnRef idx="1">
+            <a:schemeClr val="accent1"/>
+          </a:lnRef>
+          <a:fillRef idx="3">
+            <a:schemeClr val="accent1"/>
+          </a:fillRef>
+          <a:effectRef idx="2">
+            <a:schemeClr val="accent1"/>
+          </a:effectRef>
+          <a:fontRef idx="minor">
+            <a:schemeClr val="lt1"/>
+          </a:fontRef>
+        </p:style>
+        <p:txBody>
+          <a:bodyPr rtlCol="0" anchor="ctr"/>
+          <a:lstStyle/>
+          <a:p>
+            <a:pPr algn="ctr"/>
+          </a:p>
+        </p:txBody>
+      </p:sp>
+      <p:sp>
+        <p:nvSpPr>
+          <p:cNvPr id="6" name="TextBox 5"/>
+          <p:cNvSpPr txBox="1"/>
+          <p:nvPr/>
+        </p:nvSpPr>
+        <p:spPr>
+          <a:xfrm>
+            <a:off x="457200" y="6355080"/>
+            <a:ext cx="11274552" cy="365760"/>
+          </a:xfrm>
+          <a:prstGeom prst="rect">
+            <a:avLst/>
+          </a:prstGeom>
+          <a:noFill/>
+        </p:spPr>
+        <p:txBody>
+          <a:bodyPr wrap="none">
+            <a:spAutoFit/>
+          </a:bodyPr>
+          <a:lstStyle/>
+          <a:p>
+            <a:pPr algn="r"/>
+            <a:r>
+              <a:rPr sz="1200">
+                <a:solidFill>
+                  <a:srgbClr val="64748B"/>
+                </a:solidFill>
+                <a:latin typeface="Calibri"/>
+              </a:rPr>
+              <a:t>Ngữ văn 12 · Bài 2: Những Thế Giới Thơ          11</a:t>
+            </a:r>
+          </a:p>
+        </p:txBody>
+      </p:sp>
+      <p:sp>
+        <p:nvSpPr>
+          <p:cNvPr id="7" name="TextBox 6"/>
+          <p:cNvSpPr txBox="1"/>
+          <p:nvPr/>
+        </p:nvSpPr>
+        <p:spPr>
+          <a:xfrm>
+            <a:off x="731520" y="1463040"/>
+            <a:ext cx="10789920" cy="3566160"/>
+          </a:xfrm>
+          <a:prstGeom prst="rect">
+            <a:avLst/>
+          </a:prstGeom>
+          <a:noFill/>
+        </p:spPr>
+        <p:txBody>
+          <a:bodyPr wrap="square" anchor="t" lIns="45720" rIns="45720">
+            <a:spAutoFit/>
+          </a:bodyPr>
+          <a:lstStyle/>
+          <a:p>
+            <a:pPr algn="l">
+              <a:spcAft>
+                <a:spcPts val="800"/>
+              </a:spcAft>
+            </a:pPr>
+            <a:r>
+              <a:rPr sz="2600" b="1">
+                <a:solidFill>
+                  <a:srgbClr val="1E293B"/>
+                </a:solidFill>
+                <a:latin typeface="Calibri"/>
+              </a:rPr>
+              <a:t>Phân tích ý nghĩa hình ảnh người tráng sĩ mài gươm trong hai câu kết. Nêu biểu hiện của phong cách cổ điển.</a:t>
+            </a:r>
+          </a:p>
+        </p:txBody>
+      </p:sp>
+      <p:sp>
+        <p:nvSpPr>
+          <p:cNvPr id="8" name="Rounded Rectangle 7"/>
+          <p:cNvSpPr/>
+          <p:nvPr/>
+        </p:nvSpPr>
+        <p:spPr>
+          <a:xfrm>
+            <a:off x="731520" y="5120640"/>
+            <a:ext cx="10789920" cy="693420"/>
+          </a:xfrm>
+          <a:prstGeom prst="roundRect">
+            <a:avLst>
+              <a:gd name="adj" fmla="val 8000"/>
+            </a:avLst>
+          </a:prstGeom>
+          <a:solidFill>
+            <a:srgbClr val="EFF4FF"/>
+          </a:solidFill>
+          <a:ln w="19050">
+            <a:solidFill>
+              <a:srgbClr val="1E40AF"/>
+            </a:solidFill>
+          </a:ln>
+          <a:effectLst/>
+        </p:spPr>
+        <p:style>
+          <a:lnRef idx="1">
+            <a:schemeClr val="accent1"/>
+          </a:lnRef>
+          <a:fillRef idx="3">
+            <a:schemeClr val="accent1"/>
+          </a:fillRef>
+          <a:effectRef idx="2">
+            <a:schemeClr val="accent1"/>
+          </a:effectRef>
+          <a:fontRef idx="minor">
+            <a:schemeClr val="lt1"/>
+          </a:fontRef>
+        </p:style>
+        <p:txBody>
+          <a:bodyPr rtlCol="0" anchor="ctr"/>
+          <a:lstStyle/>
+          <a:p>
+            <a:pPr algn="ctr"/>
+          </a:p>
+        </p:txBody>
+      </p:sp>
+      <p:sp>
+        <p:nvSpPr>
+          <p:cNvPr id="9" name="TextBox 8"/>
+          <p:cNvSpPr txBox="1"/>
+          <p:nvPr/>
+        </p:nvSpPr>
+        <p:spPr>
+          <a:xfrm>
+            <a:off x="914400" y="5120640"/>
+            <a:ext cx="10424160" cy="693420"/>
+          </a:xfrm>
+          <a:prstGeom prst="rect">
+            <a:avLst/>
+          </a:prstGeom>
+          <a:noFill/>
+        </p:spPr>
+        <p:txBody>
+          <a:bodyPr wrap="square" anchor="ctr" lIns="45720" rIns="45720">
+            <a:spAutoFit/>
+          </a:bodyPr>
+          <a:lstStyle/>
+          <a:p>
+            <a:pPr algn="l">
+              <a:spcAft>
+                <a:spcPts val="400"/>
+              </a:spcAft>
+            </a:pPr>
+            <a:r>
+              <a:rPr sz="2200" b="1">
+                <a:solidFill>
+                  <a:srgbClr val="1E40AF"/>
+                </a:solidFill>
+                <a:latin typeface="Calibri"/>
+              </a:rPr>
+              <a:t>💡 “Bao phen” gợi điều gì?</a:t>
+            </a:r>
+          </a:p>
+        </p:txBody>
+      </p:sp>
+    </p:spTree>
+  </p:cSld>
+  <p:clrMapOvr>
+    <a:masterClrMapping/>
+  </p:clrMapOvr>
+</p:sld>
+</file>
+
+<file path=ppt/slides/slide12.xml><?xml version="1.0" encoding="utf-8"?>
+<p:sld xmlns:a="http://schemas.openxmlformats.org/drawingml/2006/main" xmlns:p="http://schemas.openxmlformats.org/presentationml/2006/main" xmlns:r="http://schemas.openxmlformats.org/officeDocument/2006/relationships">
+  <p:cSld>
+    <p:bg>
+      <p:bgPr>
+        <a:solidFill>
+          <a:srgbClr val="FFFFFF"/>
+        </a:solidFill>
+        <a:effectLst/>
+      </p:bgPr>
+    </p:bg>
+    <p:spTree>
+      <p:nvGrpSpPr>
+        <p:cNvPr id="1" name=""/>
+        <p:cNvGrpSpPr/>
+        <p:nvPr/>
+      </p:nvGrpSpPr>
+      <p:grpSpPr/>
+      <p:sp>
+        <p:nvSpPr>
+          <p:cNvPr id="2" name="Rectangle 1"/>
+          <p:cNvSpPr/>
+          <p:nvPr/>
+        </p:nvSpPr>
+        <p:spPr>
+          <a:xfrm>
+            <a:off x="457200" y="384048"/>
+            <a:ext cx="109728" cy="658368"/>
+          </a:xfrm>
+          <a:prstGeom prst="rect">
+            <a:avLst/>
+          </a:prstGeom>
+          <a:solidFill>
+            <a:srgbClr val="1E40AF"/>
+          </a:solidFill>
+          <a:ln>
+            <a:noFill/>
+          </a:ln>
+          <a:effectLst/>
+        </p:spPr>
+        <p:style>
+          <a:lnRef idx="1">
+            <a:schemeClr val="accent1"/>
+          </a:lnRef>
+          <a:fillRef idx="3">
+            <a:schemeClr val="accent1"/>
+          </a:fillRef>
+          <a:effectRef idx="2">
+            <a:schemeClr val="accent1"/>
+          </a:effectRef>
+          <a:fontRef idx="minor">
+            <a:schemeClr val="lt1"/>
+          </a:fontRef>
+        </p:style>
+        <p:txBody>
+          <a:bodyPr rtlCol="0" anchor="ctr"/>
+          <a:lstStyle/>
+          <a:p>
+            <a:pPr algn="ctr"/>
+          </a:p>
+        </p:txBody>
+      </p:sp>
+      <p:sp>
+        <p:nvSpPr>
+          <p:cNvPr id="3" name="Rounded Rectangle 2"/>
+          <p:cNvSpPr/>
+          <p:nvPr/>
+        </p:nvSpPr>
+        <p:spPr>
+          <a:xfrm>
             <a:off x="9942271" y="457200"/>
             <a:ext cx="1700784" cy="457200"/>
           </a:xfrm>
@@ -5890,7 +6583,7 @@
                 </a:solidFill>
                 <a:latin typeface="Calibri"/>
               </a:rPr>
-              <a:t>Ngữ văn 12 · Bài 2: Những Thế Giới Thơ          11</a:t>
+              <a:t>Ngữ văn 12 · Bài 2: Những Thế Giới Thơ          12</a:t>
             </a:r>
           </a:p>
         </p:txBody>
@@ -6076,7 +6769,7 @@
 </p:sld>
 </file>
 
-<file path=ppt/slides/slide12.xml><?xml version="1.0" encoding="utf-8"?>
+<file path=ppt/slides/slide13.xml><?xml version="1.0" encoding="utf-8"?>
 <p:sld xmlns:a="http://schemas.openxmlformats.org/drawingml/2006/main" xmlns:p="http://schemas.openxmlformats.org/presentationml/2006/main" xmlns:r="http://schemas.openxmlformats.org/officeDocument/2006/relationships">
   <p:cSld>
     <p:bg>
@@ -6173,297 +6866,6 @@
                 <a:latin typeface="Calibri"/>
               </a:rPr>
               <a:t>TIẾT 14 – 16: TÂY TIẾN (Quang Dũng)</a:t>
-            </a:r>
-          </a:p>
-        </p:txBody>
-      </p:sp>
-    </p:spTree>
-  </p:cSld>
-  <p:clrMapOvr>
-    <a:masterClrMapping/>
-  </p:clrMapOvr>
-</p:sld>
-</file>
-
-<file path=ppt/slides/slide13.xml><?xml version="1.0" encoding="utf-8"?>
-<p:sld xmlns:a="http://schemas.openxmlformats.org/drawingml/2006/main" xmlns:p="http://schemas.openxmlformats.org/presentationml/2006/main" xmlns:r="http://schemas.openxmlformats.org/officeDocument/2006/relationships">
-  <p:cSld>
-    <p:bg>
-      <p:bgPr>
-        <a:solidFill>
-          <a:srgbClr val="FFFFFF"/>
-        </a:solidFill>
-        <a:effectLst/>
-      </p:bgPr>
-    </p:bg>
-    <p:spTree>
-      <p:nvGrpSpPr>
-        <p:cNvPr id="1" name=""/>
-        <p:cNvGrpSpPr/>
-        <p:nvPr/>
-      </p:nvGrpSpPr>
-      <p:grpSpPr/>
-      <p:sp>
-        <p:nvSpPr>
-          <p:cNvPr id="2" name="Rectangle 1"/>
-          <p:cNvSpPr/>
-          <p:nvPr/>
-        </p:nvSpPr>
-        <p:spPr>
-          <a:xfrm>
-            <a:off x="457200" y="384048"/>
-            <a:ext cx="109728" cy="658368"/>
-          </a:xfrm>
-          <a:prstGeom prst="rect">
-            <a:avLst/>
-          </a:prstGeom>
-          <a:solidFill>
-            <a:srgbClr val="1E40AF"/>
-          </a:solidFill>
-          <a:ln>
-            <a:noFill/>
-          </a:ln>
-          <a:effectLst/>
-        </p:spPr>
-        <p:style>
-          <a:lnRef idx="1">
-            <a:schemeClr val="accent1"/>
-          </a:lnRef>
-          <a:fillRef idx="3">
-            <a:schemeClr val="accent1"/>
-          </a:fillRef>
-          <a:effectRef idx="2">
-            <a:schemeClr val="accent1"/>
-          </a:effectRef>
-          <a:fontRef idx="minor">
-            <a:schemeClr val="lt1"/>
-          </a:fontRef>
-        </p:style>
-        <p:txBody>
-          <a:bodyPr rtlCol="0" anchor="ctr"/>
-          <a:lstStyle/>
-          <a:p>
-            <a:pPr algn="ctr"/>
-          </a:p>
-        </p:txBody>
-      </p:sp>
-      <p:sp>
-        <p:nvSpPr>
-          <p:cNvPr id="3" name="Rounded Rectangle 2"/>
-          <p:cNvSpPr/>
-          <p:nvPr/>
-        </p:nvSpPr>
-        <p:spPr>
-          <a:xfrm>
-            <a:off x="9786823" y="457200"/>
-            <a:ext cx="1856232" cy="457200"/>
-          </a:xfrm>
-          <a:prstGeom prst="roundRect">
-            <a:avLst/>
-          </a:prstGeom>
-          <a:solidFill>
-            <a:srgbClr val="1E40AF"/>
-          </a:solidFill>
-          <a:ln>
-            <a:noFill/>
-          </a:ln>
-          <a:effectLst/>
-        </p:spPr>
-        <p:style>
-          <a:lnRef idx="1">
-            <a:schemeClr val="accent1"/>
-          </a:lnRef>
-          <a:fillRef idx="3">
-            <a:schemeClr val="accent1"/>
-          </a:fillRef>
-          <a:effectRef idx="2">
-            <a:schemeClr val="accent1"/>
-          </a:effectRef>
-          <a:fontRef idx="minor">
-            <a:schemeClr val="lt1"/>
-          </a:fontRef>
-        </p:style>
-        <p:txBody>
-          <a:bodyPr rtlCol="0" anchor="ctr" wrap="none" tIns="0" bIns="0"/>
-          <a:lstStyle/>
-          <a:p>
-            <a:pPr algn="ctr"/>
-            <a:r>
-              <a:rPr sz="1400" b="1">
-                <a:solidFill>
-                  <a:srgbClr val="FFFFFF"/>
-                </a:solidFill>
-                <a:latin typeface="Arial"/>
-              </a:rPr>
-              <a:t>KHỞI ĐỘNG</a:t>
-            </a:r>
-          </a:p>
-        </p:txBody>
-      </p:sp>
-      <p:sp>
-        <p:nvSpPr>
-          <p:cNvPr id="4" name="TextBox 3"/>
-          <p:cNvSpPr txBox="1"/>
-          <p:nvPr/>
-        </p:nvSpPr>
-        <p:spPr>
-          <a:xfrm>
-            <a:off x="731520" y="274320"/>
-            <a:ext cx="9116568" cy="868680"/>
-          </a:xfrm>
-          <a:prstGeom prst="rect">
-            <a:avLst/>
-          </a:prstGeom>
-          <a:noFill/>
-        </p:spPr>
-        <p:txBody>
-          <a:bodyPr wrap="square" anchor="ctr">
-            <a:spAutoFit/>
-          </a:bodyPr>
-          <a:lstStyle/>
-          <a:p>
-            <a:r>
-              <a:rPr sz="3600" b="1">
-                <a:solidFill>
-                  <a:srgbClr val="1E40AF"/>
-                </a:solidFill>
-                <a:latin typeface="Arial"/>
-              </a:rPr>
-              <a:t>TRƯỚC KHI ĐỌC</a:t>
-            </a:r>
-          </a:p>
-        </p:txBody>
-      </p:sp>
-      <p:sp>
-        <p:nvSpPr>
-          <p:cNvPr id="5" name="Rectangle 4"/>
-          <p:cNvSpPr/>
-          <p:nvPr/>
-        </p:nvSpPr>
-        <p:spPr>
-          <a:xfrm>
-            <a:off x="457200" y="1207008"/>
-            <a:ext cx="11274552" cy="22000"/>
-          </a:xfrm>
-          <a:prstGeom prst="rect">
-            <a:avLst/>
-          </a:prstGeom>
-          <a:solidFill>
-            <a:srgbClr val="E2E8F0"/>
-          </a:solidFill>
-          <a:ln>
-            <a:noFill/>
-          </a:ln>
-          <a:effectLst/>
-        </p:spPr>
-        <p:style>
-          <a:lnRef idx="1">
-            <a:schemeClr val="accent1"/>
-          </a:lnRef>
-          <a:fillRef idx="3">
-            <a:schemeClr val="accent1"/>
-          </a:fillRef>
-          <a:effectRef idx="2">
-            <a:schemeClr val="accent1"/>
-          </a:effectRef>
-          <a:fontRef idx="minor">
-            <a:schemeClr val="lt1"/>
-          </a:fontRef>
-        </p:style>
-        <p:txBody>
-          <a:bodyPr rtlCol="0" anchor="ctr"/>
-          <a:lstStyle/>
-          <a:p>
-            <a:pPr algn="ctr"/>
-          </a:p>
-        </p:txBody>
-      </p:sp>
-      <p:sp>
-        <p:nvSpPr>
-          <p:cNvPr id="6" name="TextBox 5"/>
-          <p:cNvSpPr txBox="1"/>
-          <p:nvPr/>
-        </p:nvSpPr>
-        <p:spPr>
-          <a:xfrm>
-            <a:off x="457200" y="6355080"/>
-            <a:ext cx="11274552" cy="365760"/>
-          </a:xfrm>
-          <a:prstGeom prst="rect">
-            <a:avLst/>
-          </a:prstGeom>
-          <a:noFill/>
-        </p:spPr>
-        <p:txBody>
-          <a:bodyPr wrap="none">
-            <a:spAutoFit/>
-          </a:bodyPr>
-          <a:lstStyle/>
-          <a:p>
-            <a:pPr algn="r"/>
-            <a:r>
-              <a:rPr sz="1200">
-                <a:solidFill>
-                  <a:srgbClr val="64748B"/>
-                </a:solidFill>
-                <a:latin typeface="Calibri"/>
-              </a:rPr>
-              <a:t>Ngữ văn 12 · Bài 2: Những Thế Giới Thơ          13</a:t>
-            </a:r>
-          </a:p>
-        </p:txBody>
-      </p:sp>
-      <p:sp>
-        <p:nvSpPr>
-          <p:cNvPr id="7" name="TextBox 6"/>
-          <p:cNvSpPr txBox="1"/>
-          <p:nvPr/>
-        </p:nvSpPr>
-        <p:spPr>
-          <a:xfrm>
-            <a:off x="731520" y="1463040"/>
-            <a:ext cx="10789920" cy="4572000"/>
-          </a:xfrm>
-          <a:prstGeom prst="rect">
-            <a:avLst/>
-          </a:prstGeom>
-          <a:noFill/>
-        </p:spPr>
-        <p:txBody>
-          <a:bodyPr wrap="square" anchor="t" lIns="45720" rIns="45720">
-            <a:spAutoFit/>
-          </a:bodyPr>
-          <a:lstStyle/>
-          <a:p>
-            <a:pPr algn="l">
-              <a:spcAft>
-                <a:spcPts val="800"/>
-              </a:spcAft>
-            </a:pPr>
-            <a:r>
-              <a:rPr sz="2600" b="1">
-                <a:solidFill>
-                  <a:srgbClr val="1E293B"/>
-                </a:solidFill>
-                <a:latin typeface="Calibri"/>
-              </a:rPr>
-              <a:t>Bạn đã học, đã đọc những bài thơ nào viết về người lính cách mạng Việt Nam?</a:t>
-            </a:r>
-          </a:p>
-          <a:p>
-            <a:pPr algn="l">
-              <a:spcAft>
-                <a:spcPts val="800"/>
-              </a:spcAft>
-            </a:pPr>
-            <a:r>
-              <a:rPr sz="2600" b="1">
-                <a:solidFill>
-                  <a:srgbClr val="1E293B"/>
-                </a:solidFill>
-                <a:latin typeface="Calibri"/>
-              </a:rPr>
-              <a:t>Đọc diễn cảm một đoạn thơ bạn yêu thích.</a:t>
             </a:r>
           </a:p>
         </p:txBody>
@@ -6546,8 +6948,8 @@
         </p:nvSpPr>
         <p:spPr>
           <a:xfrm>
-            <a:off x="10253167" y="457200"/>
-            <a:ext cx="1389888" cy="457200"/>
+            <a:off x="9786823" y="457200"/>
+            <a:ext cx="1856232" cy="457200"/>
           </a:xfrm>
           <a:prstGeom prst="roundRect">
             <a:avLst/>
@@ -6586,7 +6988,7 @@
                 </a:solidFill>
                 <a:latin typeface="Arial"/>
               </a:rPr>
-              <a:t>ĐỀ BÀI</a:t>
+              <a:t>KHỞI ĐỘNG</a:t>
             </a:r>
           </a:p>
         </p:txBody>
@@ -6600,7 +7002,7 @@
         <p:spPr>
           <a:xfrm>
             <a:off x="731520" y="274320"/>
-            <a:ext cx="9582912" cy="868680"/>
+            <a:ext cx="9116568" cy="868680"/>
           </a:xfrm>
           <a:prstGeom prst="rect">
             <a:avLst/>
@@ -6620,7 +7022,7 @@
                 </a:solidFill>
                 <a:latin typeface="Arial"/>
               </a:rPr>
-              <a:t>THIÊN NHIÊN VÀ CON ĐƯỜNG HÀNH QUÂN</a:t>
+              <a:t>TRƯỚC KHI ĐỌC</a:t>
             </a:r>
           </a:p>
         </p:txBody>
@@ -6713,7 +7115,7 @@
         <p:spPr>
           <a:xfrm>
             <a:off x="731520" y="1463040"/>
-            <a:ext cx="10789920" cy="3566160"/>
+            <a:ext cx="10789920" cy="4572000"/>
           </a:xfrm>
           <a:prstGeom prst="rect">
             <a:avLst/>
@@ -6738,94 +7140,23 @@
                 </a:solidFill>
                 <a:latin typeface="Calibri"/>
               </a:rPr>
-              <a:t>Đọc đoạn thơ 1: Nêu ấn tượng về cảm xúc ở hai câu mở đầu; hình dung bức tranh thiên nhiên, con đường hành quân; cảm nhận chất nhạc, chất hoạ trong bốn câu “Dốc lên khúc khuỷu…”.</a:t>
-            </a:r>
-          </a:p>
-        </p:txBody>
-      </p:sp>
-      <p:sp>
-        <p:nvSpPr>
-          <p:cNvPr id="8" name="Rounded Rectangle 7"/>
-          <p:cNvSpPr/>
-          <p:nvPr/>
-        </p:nvSpPr>
-        <p:spPr>
-          <a:xfrm>
-            <a:off x="731520" y="5120640"/>
-            <a:ext cx="10789920" cy="693420"/>
-          </a:xfrm>
-          <a:prstGeom prst="roundRect">
-            <a:avLst>
-              <a:gd name="adj" fmla="val 8000"/>
-            </a:avLst>
-          </a:prstGeom>
-          <a:solidFill>
-            <a:srgbClr val="EFF4FF"/>
-          </a:solidFill>
-          <a:ln w="19050">
-            <a:solidFill>
-              <a:srgbClr val="1E40AF"/>
-            </a:solidFill>
-          </a:ln>
-          <a:effectLst/>
-        </p:spPr>
-        <p:style>
-          <a:lnRef idx="1">
-            <a:schemeClr val="accent1"/>
-          </a:lnRef>
-          <a:fillRef idx="3">
-            <a:schemeClr val="accent1"/>
-          </a:fillRef>
-          <a:effectRef idx="2">
-            <a:schemeClr val="accent1"/>
-          </a:effectRef>
-          <a:fontRef idx="minor">
-            <a:schemeClr val="lt1"/>
-          </a:fontRef>
-        </p:style>
-        <p:txBody>
-          <a:bodyPr rtlCol="0" anchor="ctr"/>
-          <a:lstStyle/>
-          <a:p>
-            <a:pPr algn="ctr"/>
-          </a:p>
-        </p:txBody>
-      </p:sp>
-      <p:sp>
-        <p:nvSpPr>
-          <p:cNvPr id="9" name="TextBox 8"/>
-          <p:cNvSpPr txBox="1"/>
-          <p:nvPr/>
-        </p:nvSpPr>
-        <p:spPr>
-          <a:xfrm>
-            <a:off x="914400" y="5120640"/>
-            <a:ext cx="10424160" cy="693420"/>
-          </a:xfrm>
-          <a:prstGeom prst="rect">
-            <a:avLst/>
-          </a:prstGeom>
-          <a:noFill/>
-        </p:spPr>
-        <p:txBody>
-          <a:bodyPr wrap="square" anchor="ctr" lIns="45720" rIns="45720">
-            <a:spAutoFit/>
-          </a:bodyPr>
-          <a:lstStyle/>
+              <a:t>Bạn đã học, đã đọc những bài thơ nào viết về người lính cách mạng Việt Nam?</a:t>
+            </a:r>
+          </a:p>
           <a:p>
             <a:pPr algn="l">
               <a:spcAft>
-                <a:spcPts val="400"/>
+                <a:spcPts val="800"/>
               </a:spcAft>
             </a:pPr>
             <a:r>
-              <a:rPr sz="2200" b="1">
-                <a:solidFill>
-                  <a:srgbClr val="1E40AF"/>
+              <a:rPr sz="2600" b="1">
+                <a:solidFill>
+                  <a:srgbClr val="1E293B"/>
                 </a:solidFill>
                 <a:latin typeface="Calibri"/>
               </a:rPr>
-              <a:t>💡 Đếm thanh bằng, thanh trắc trong bốn câu thơ.</a:t>
+              <a:t>Đọc diễn cảm một đoạn thơ bạn yêu thích.</a:t>
             </a:r>
           </a:p>
         </p:txBody>
@@ -6908,8 +7239,8 @@
         </p:nvSpPr>
         <p:spPr>
           <a:xfrm>
-            <a:off x="9942271" y="457200"/>
-            <a:ext cx="1700784" cy="457200"/>
+            <a:off x="10408615" y="457200"/>
+            <a:ext cx="1234440" cy="457200"/>
           </a:xfrm>
           <a:prstGeom prst="roundRect">
             <a:avLst/>
@@ -6948,7 +7279,7 @@
                 </a:solidFill>
                 <a:latin typeface="Arial"/>
               </a:rPr>
-              <a:t>LỜI GIẢI</a:t>
+              <a:t>VIDEO</a:t>
             </a:r>
           </a:p>
         </p:txBody>
@@ -6962,7 +7293,7 @@
         <p:spPr>
           <a:xfrm>
             <a:off x="731520" y="274320"/>
-            <a:ext cx="9272016" cy="868680"/>
+            <a:ext cx="9738360" cy="868680"/>
           </a:xfrm>
           <a:prstGeom prst="rect">
             <a:avLst/>
@@ -6982,7 +7313,7 @@
                 </a:solidFill>
                 <a:latin typeface="Arial"/>
               </a:rPr>
-              <a:t>THIÊN NHIÊN VÀ CON ĐƯỜNG HÀNH QUÂN</a:t>
+              <a:t>VIDEO THAM KHẢO</a:t>
             </a:r>
           </a:p>
         </p:txBody>
@@ -7066,16 +7397,40 @@
           </a:p>
         </p:txBody>
       </p:sp>
-      <p:sp>
-        <p:nvSpPr>
-          <p:cNvPr id="7" name="TextBox 6"/>
+      <p:pic>
+        <p:nvPicPr>
+          <p:cNvPr id="7" name="Picture 6" descr="QR_video_K3n2fB2UV44.png"/>
+          <p:cNvPicPr>
+            <a:picLocks noChangeAspect="1"/>
+          </p:cNvPicPr>
+          <p:nvPr/>
+        </p:nvPicPr>
+        <p:blipFill>
+          <a:blip r:embed="rId2"/>
+          <a:stretch>
+            <a:fillRect/>
+          </a:stretch>
+        </p:blipFill>
+        <p:spPr>
+          <a:xfrm>
+            <a:off x="8412480" y="1554480"/>
+            <a:ext cx="3108960" cy="3108960"/>
+          </a:xfrm>
+          <a:prstGeom prst="rect">
+            <a:avLst/>
+          </a:prstGeom>
+        </p:spPr>
+      </p:pic>
+      <p:sp>
+        <p:nvSpPr>
+          <p:cNvPr id="8" name="TextBox 7"/>
           <p:cNvSpPr txBox="1"/>
           <p:nvPr/>
         </p:nvSpPr>
         <p:spPr>
           <a:xfrm>
-            <a:off x="731520" y="1463040"/>
-            <a:ext cx="10789920" cy="3474720"/>
+            <a:off x="731520" y="1554480"/>
+            <a:ext cx="7498079" cy="4206240"/>
           </a:xfrm>
           <a:prstGeom prst="rect">
             <a:avLst/>
@@ -7087,6 +7442,38 @@
             <a:spAutoFit/>
           </a:bodyPr>
           <a:lstStyle/>
+          <a:p>
+            <a:pPr algn="l">
+              <a:spcAft>
+                <a:spcPts val="800"/>
+              </a:spcAft>
+            </a:pPr>
+            <a:r>
+              <a:rPr sz="2600" b="1">
+                <a:solidFill>
+                  <a:srgbClr val="1E293B"/>
+                </a:solidFill>
+                <a:latin typeface="Calibri"/>
+              </a:rPr>
+              <a:t>🎬 Ngâm thơ: Tây Tiến, sáng tác Quang Dũng</a:t>
+            </a:r>
+          </a:p>
+          <a:p>
+            <a:pPr algn="l">
+              <a:spcAft>
+                <a:spcPts val="800"/>
+              </a:spcAft>
+            </a:pPr>
+            <a:r>
+              <a:rPr sz="2000">
+                <a:solidFill>
+                  <a:srgbClr val="64748B"/>
+                </a:solidFill>
+                <a:latin typeface="Calibri"/>
+              </a:rPr>
+              <a:t>Kênh: Hồng Đinh</a:t>
+            </a:r>
+          </a:p>
           <a:p>
             <a:pPr algn="l" marL="365760" indent="-365760">
               <a:spcAft>
@@ -7099,163 +7486,30 @@
               <a:buChar char="•"/>
             </a:pPr>
             <a:r>
-              <a:rPr sz="2300">
+              <a:rPr sz="2000">
                 <a:solidFill>
                   <a:srgbClr val="1E293B"/>
                 </a:solidFill>
                 <a:latin typeface="Calibri"/>
               </a:rPr>
-              <a:t>“Nhớ về rừng núi nhớ chơi vơi” – nỗi nhớ trào dâng, chơi vơi.</a:t>
-            </a:r>
-          </a:p>
-          <a:p>
-            <a:pPr algn="l" marL="365760" indent="-365760">
+              <a:t>Đọc diễn cảm Tây Tiến</a:t>
+            </a:r>
+          </a:p>
+          <a:p>
+            <a:pPr algn="l">
               <a:spcAft>
                 <a:spcPts val="800"/>
               </a:spcAft>
-              <a:buClr>
-                <a:srgbClr val="1E40AF"/>
-              </a:buClr>
-              <a:buFont typeface="Arial"/>
-              <a:buChar char="•"/>
             </a:pPr>
             <a:r>
-              <a:rPr sz="2300">
-                <a:solidFill>
-                  <a:srgbClr val="1E293B"/>
+              <a:rPr sz="1600">
+                <a:solidFill>
+                  <a:srgbClr val="64748B"/>
                 </a:solidFill>
                 <a:latin typeface="Calibri"/>
-              </a:rPr>
-              <a:t>Thiên nhiên hiểm trở, hùng vĩ, dữ dội: dốc thăm thẳm, cồn mây, thác gầm, cọp trêu.</a:t>
-            </a:r>
-          </a:p>
-          <a:p>
-            <a:pPr algn="l" marL="365760" indent="-365760">
-              <a:spcAft>
-                <a:spcPts val="800"/>
-              </a:spcAft>
-              <a:buClr>
-                <a:srgbClr val="1E40AF"/>
-              </a:buClr>
-              <a:buFont typeface="Arial"/>
-              <a:buChar char="•"/>
-            </a:pPr>
-            <a:r>
-              <a:rPr sz="2300">
-                <a:solidFill>
-                  <a:srgbClr val="1E293B"/>
-                </a:solidFill>
-                <a:latin typeface="Calibri"/>
-              </a:rPr>
-              <a:t>Ba câu nhiều thanh trắc – gian nan; câu “Nhà ai Pha Luông mưa xa khơi” toàn thanh bằng – thư thái.</a:t>
-            </a:r>
-          </a:p>
-          <a:p>
-            <a:pPr algn="l" marL="365760" indent="-365760">
-              <a:spcAft>
-                <a:spcPts val="800"/>
-              </a:spcAft>
-              <a:buClr>
-                <a:srgbClr val="1E40AF"/>
-              </a:buClr>
-              <a:buFont typeface="Arial"/>
-              <a:buChar char="•"/>
-            </a:pPr>
-            <a:r>
-              <a:rPr sz="2300">
-                <a:solidFill>
-                  <a:srgbClr val="1E293B"/>
-                </a:solidFill>
-                <a:latin typeface="Calibri"/>
-              </a:rPr>
-              <a:t>Điệp từ, phép đối lên – xuống: bức tranh núi rừng sống động.</a:t>
-            </a:r>
-          </a:p>
-        </p:txBody>
-      </p:sp>
-      <p:sp>
-        <p:nvSpPr>
-          <p:cNvPr id="8" name="Rounded Rectangle 7"/>
-          <p:cNvSpPr/>
-          <p:nvPr/>
-        </p:nvSpPr>
-        <p:spPr>
-          <a:xfrm>
-            <a:off x="731520" y="5074920"/>
-            <a:ext cx="10789920" cy="731520"/>
-          </a:xfrm>
-          <a:prstGeom prst="roundRect">
-            <a:avLst>
-              <a:gd name="adj" fmla="val 8000"/>
-            </a:avLst>
-          </a:prstGeom>
-          <a:solidFill>
-            <a:srgbClr val="FEF2F2"/>
-          </a:solidFill>
-          <a:ln w="19050">
-            <a:solidFill>
-              <a:srgbClr val="991B1B"/>
-            </a:solidFill>
-          </a:ln>
-          <a:effectLst/>
-        </p:spPr>
-        <p:style>
-          <a:lnRef idx="1">
-            <a:schemeClr val="accent1"/>
-          </a:lnRef>
-          <a:fillRef idx="3">
-            <a:schemeClr val="accent1"/>
-          </a:fillRef>
-          <a:effectRef idx="2">
-            <a:schemeClr val="accent1"/>
-          </a:effectRef>
-          <a:fontRef idx="minor">
-            <a:schemeClr val="lt1"/>
-          </a:fontRef>
-        </p:style>
-        <p:txBody>
-          <a:bodyPr rtlCol="0" anchor="ctr"/>
-          <a:lstStyle/>
-          <a:p>
-            <a:pPr algn="ctr"/>
-          </a:p>
-        </p:txBody>
-      </p:sp>
-      <p:sp>
-        <p:nvSpPr>
-          <p:cNvPr id="9" name="TextBox 8"/>
-          <p:cNvSpPr txBox="1"/>
-          <p:nvPr/>
-        </p:nvSpPr>
-        <p:spPr>
-          <a:xfrm>
-            <a:off x="914400" y="5074920"/>
-            <a:ext cx="10424160" cy="731520"/>
-          </a:xfrm>
-          <a:prstGeom prst="rect">
-            <a:avLst/>
-          </a:prstGeom>
-          <a:noFill/>
-        </p:spPr>
-        <p:txBody>
-          <a:bodyPr wrap="square" anchor="ctr" lIns="45720" rIns="45720">
-            <a:spAutoFit/>
-          </a:bodyPr>
-          <a:lstStyle/>
-          <a:p>
-            <a:pPr algn="l">
-              <a:spcAft>
-                <a:spcPts val="400"/>
-              </a:spcAft>
-            </a:pPr>
-            <a:r>
-              <a:rPr sz="2400" b="1">
-                <a:solidFill>
-                  <a:srgbClr val="991B1B"/>
-                </a:solidFill>
-                <a:latin typeface="Calibri"/>
-              </a:rPr>
-              <a:t>Chất nhạc, chất hoạ – bút pháp lãng mạn.</a:t>
+                <a:hlinkClick r:id="rId3"/>
+              </a:rPr>
+              <a:t>https://www.youtube.com/watch?v=K3n2fB2UV44</a:t>
             </a:r>
           </a:p>
         </p:txBody>
@@ -7412,7 +7666,7 @@
                 </a:solidFill>
                 <a:latin typeface="Arial"/>
               </a:rPr>
-              <a:t>HÌNH TƯỢNG NGƯỜI LÍNH TÂY TIẾN</a:t>
+              <a:t>THIÊN NHIÊN VÀ CON ĐƯỜNG HÀNH QUÂN</a:t>
             </a:r>
           </a:p>
         </p:txBody>
@@ -7530,7 +7784,7 @@
                 </a:solidFill>
                 <a:latin typeface="Calibri"/>
               </a:rPr>
-              <a:t>Trong đoạn thơ 3, 4, hình tượng người lính được gợi ra qua những từ ngữ, hình ảnh nào? Khái quát đặc điểm hình tượng này.</a:t>
+              <a:t>Đọc đoạn thơ 1: Nêu ấn tượng về cảm xúc ở hai câu mở đầu; hình dung bức tranh thiên nhiên, con đường hành quân; cảm nhận chất nhạc, chất hoạ trong bốn câu “Dốc lên khúc khuỷu…”.</a:t>
             </a:r>
           </a:p>
         </p:txBody>
@@ -7617,7 +7871,7 @@
                 </a:solidFill>
                 <a:latin typeface="Calibri"/>
               </a:rPr>
-              <a:t>💡 Chú ý các từ Hán Việt trang trọng.</a:t>
+              <a:t>💡 Đếm thanh bằng, thanh trắc trong bốn câu thơ.</a:t>
             </a:r>
           </a:p>
         </p:txBody>
@@ -7774,7 +8028,7 @@
                 </a:solidFill>
                 <a:latin typeface="Arial"/>
               </a:rPr>
-              <a:t>HÌNH TƯỢNG NGƯỜI LÍNH TÂY TIẾN</a:t>
+              <a:t>THIÊN NHIÊN VÀ CON ĐƯỜNG HÀNH QUÂN</a:t>
             </a:r>
           </a:p>
         </p:txBody>
@@ -7897,7 +8151,7 @@
                 </a:solidFill>
                 <a:latin typeface="Calibri"/>
               </a:rPr>
-              <a:t>“không mọc tóc”, “quân xanh màu lá dữ oai hùm” – gian khổ mà oai phong.</a:t>
+              <a:t>“Nhớ về rừng núi nhớ chơi vơi” – nỗi nhớ trào dâng, chơi vơi.</a:t>
             </a:r>
           </a:p>
           <a:p>
@@ -7918,7 +8172,7 @@
                 </a:solidFill>
                 <a:latin typeface="Calibri"/>
               </a:rPr>
-              <a:t>“mắt trừng gửi mộng”, “đêm mơ Hà Nội dáng kiều thơm” – hào hoa, lãng mạn.</a:t>
+              <a:t>Thiên nhiên hiểm trở, hùng vĩ, dữ dội: dốc thăm thẳm, cồn mây, thác gầm, cọp trêu.</a:t>
             </a:r>
           </a:p>
           <a:p>
@@ -7939,7 +8193,28 @@
                 </a:solidFill>
                 <a:latin typeface="Calibri"/>
               </a:rPr>
-              <a:t>“áo bào thay chiếu, anh về đất”, “sông Mã gầm lên khúc độc hành” – bi tráng.</a:t>
+              <a:t>Ba câu nhiều thanh trắc – gian nan; câu “Nhà ai Pha Luông mưa xa khơi” toàn thanh bằng – thư thái.</a:t>
+            </a:r>
+          </a:p>
+          <a:p>
+            <a:pPr algn="l" marL="365760" indent="-365760">
+              <a:spcAft>
+                <a:spcPts val="800"/>
+              </a:spcAft>
+              <a:buClr>
+                <a:srgbClr val="1E40AF"/>
+              </a:buClr>
+              <a:buFont typeface="Arial"/>
+              <a:buChar char="•"/>
+            </a:pPr>
+            <a:r>
+              <a:rPr sz="2300">
+                <a:solidFill>
+                  <a:srgbClr val="1E293B"/>
+                </a:solidFill>
+                <a:latin typeface="Calibri"/>
+              </a:rPr>
+              <a:t>Điệp từ, phép đối lên – xuống: bức tranh núi rừng sống động.</a:t>
             </a:r>
           </a:p>
         </p:txBody>
@@ -8026,7 +8301,7 @@
                 </a:solidFill>
                 <a:latin typeface="Calibri"/>
               </a:rPr>
-              <a:t>Người lính hào hùng, hào hoa, bi tráng.</a:t>
+              <a:t>Chất nhạc, chất hoạ – bút pháp lãng mạn.</a:t>
             </a:r>
           </a:p>
         </p:txBody>
@@ -8045,7 +8320,7 @@
     <p:bg>
       <p:bgPr>
         <a:solidFill>
-          <a:srgbClr val="F8F9FA"/>
+          <a:srgbClr val="FFFFFF"/>
         </a:solidFill>
         <a:effectLst/>
       </p:bgPr>
@@ -8065,14 +8340,14 @@
         </p:nvSpPr>
         <p:spPr>
           <a:xfrm>
-            <a:off x="548640" y="2926080"/>
-            <a:ext cx="164592" cy="1005840"/>
+            <a:off x="457200" y="384048"/>
+            <a:ext cx="109728" cy="658368"/>
           </a:xfrm>
           <a:prstGeom prst="rect">
             <a:avLst/>
           </a:prstGeom>
           <a:solidFill>
-            <a:srgbClr val="991B1B"/>
+            <a:srgbClr val="1E40AF"/>
           </a:solidFill>
           <a:ln>
             <a:noFill/>
@@ -8103,14 +8378,67 @@
       </p:sp>
       <p:sp>
         <p:nvSpPr>
-          <p:cNvPr id="3" name="TextBox 2"/>
+          <p:cNvPr id="3" name="Rounded Rectangle 2"/>
+          <p:cNvSpPr/>
+          <p:nvPr/>
+        </p:nvSpPr>
+        <p:spPr>
+          <a:xfrm>
+            <a:off x="10253167" y="457200"/>
+            <a:ext cx="1389888" cy="457200"/>
+          </a:xfrm>
+          <a:prstGeom prst="roundRect">
+            <a:avLst/>
+          </a:prstGeom>
+          <a:solidFill>
+            <a:srgbClr val="1E40AF"/>
+          </a:solidFill>
+          <a:ln>
+            <a:noFill/>
+          </a:ln>
+          <a:effectLst/>
+        </p:spPr>
+        <p:style>
+          <a:lnRef idx="1">
+            <a:schemeClr val="accent1"/>
+          </a:lnRef>
+          <a:fillRef idx="3">
+            <a:schemeClr val="accent1"/>
+          </a:fillRef>
+          <a:effectRef idx="2">
+            <a:schemeClr val="accent1"/>
+          </a:effectRef>
+          <a:fontRef idx="minor">
+            <a:schemeClr val="lt1"/>
+          </a:fontRef>
+        </p:style>
+        <p:txBody>
+          <a:bodyPr rtlCol="0" anchor="ctr" wrap="none" tIns="0" bIns="0"/>
+          <a:lstStyle/>
+          <a:p>
+            <a:pPr algn="ctr"/>
+            <a:r>
+              <a:rPr sz="1400" b="1">
+                <a:solidFill>
+                  <a:srgbClr val="FFFFFF"/>
+                </a:solidFill>
+                <a:latin typeface="Arial"/>
+              </a:rPr>
+              <a:t>ĐỀ BÀI</a:t>
+            </a:r>
+          </a:p>
+        </p:txBody>
+      </p:sp>
+      <p:sp>
+        <p:nvSpPr>
+          <p:cNvPr id="4" name="TextBox 3"/>
           <p:cNvSpPr txBox="1"/>
           <p:nvPr/>
         </p:nvSpPr>
         <p:spPr>
           <a:xfrm>
-            <a:off x="914400" y="2743200"/>
-            <a:ext cx="10515600" cy="1371600"/>
+            <a:off x="731520" y="274320"/>
+            <a:ext cx="9582912" cy="868680"/>
           </a:xfrm>
           <a:prstGeom prst="rect">
             <a:avLst/>
@@ -8118,7 +8446,120 @@
           <a:noFill/>
         </p:spPr>
         <p:txBody>
-          <a:bodyPr wrap="square" anchor="ctr" lIns="45720" rIns="45720">
+          <a:bodyPr wrap="square" anchor="ctr">
+            <a:spAutoFit/>
+          </a:bodyPr>
+          <a:lstStyle/>
+          <a:p>
+            <a:r>
+              <a:rPr sz="3600" b="1">
+                <a:solidFill>
+                  <a:srgbClr val="1E40AF"/>
+                </a:solidFill>
+                <a:latin typeface="Arial"/>
+              </a:rPr>
+              <a:t>HÌNH TƯỢNG NGƯỜI LÍNH TÂY TIẾN</a:t>
+            </a:r>
+          </a:p>
+        </p:txBody>
+      </p:sp>
+      <p:sp>
+        <p:nvSpPr>
+          <p:cNvPr id="5" name="Rectangle 4"/>
+          <p:cNvSpPr/>
+          <p:nvPr/>
+        </p:nvSpPr>
+        <p:spPr>
+          <a:xfrm>
+            <a:off x="457200" y="1207008"/>
+            <a:ext cx="11274552" cy="22000"/>
+          </a:xfrm>
+          <a:prstGeom prst="rect">
+            <a:avLst/>
+          </a:prstGeom>
+          <a:solidFill>
+            <a:srgbClr val="E2E8F0"/>
+          </a:solidFill>
+          <a:ln>
+            <a:noFill/>
+          </a:ln>
+          <a:effectLst/>
+        </p:spPr>
+        <p:style>
+          <a:lnRef idx="1">
+            <a:schemeClr val="accent1"/>
+          </a:lnRef>
+          <a:fillRef idx="3">
+            <a:schemeClr val="accent1"/>
+          </a:fillRef>
+          <a:effectRef idx="2">
+            <a:schemeClr val="accent1"/>
+          </a:effectRef>
+          <a:fontRef idx="minor">
+            <a:schemeClr val="lt1"/>
+          </a:fontRef>
+        </p:style>
+        <p:txBody>
+          <a:bodyPr rtlCol="0" anchor="ctr"/>
+          <a:lstStyle/>
+          <a:p>
+            <a:pPr algn="ctr"/>
+          </a:p>
+        </p:txBody>
+      </p:sp>
+      <p:sp>
+        <p:nvSpPr>
+          <p:cNvPr id="6" name="TextBox 5"/>
+          <p:cNvSpPr txBox="1"/>
+          <p:nvPr/>
+        </p:nvSpPr>
+        <p:spPr>
+          <a:xfrm>
+            <a:off x="457200" y="6355080"/>
+            <a:ext cx="11274552" cy="365760"/>
+          </a:xfrm>
+          <a:prstGeom prst="rect">
+            <a:avLst/>
+          </a:prstGeom>
+          <a:noFill/>
+        </p:spPr>
+        <p:txBody>
+          <a:bodyPr wrap="none">
+            <a:spAutoFit/>
+          </a:bodyPr>
+          <a:lstStyle/>
+          <a:p>
+            <a:pPr algn="r"/>
+            <a:r>
+              <a:rPr sz="1200">
+                <a:solidFill>
+                  <a:srgbClr val="64748B"/>
+                </a:solidFill>
+                <a:latin typeface="Calibri"/>
+              </a:rPr>
+              <a:t>Ngữ văn 12 · Bài 2: Những Thế Giới Thơ          18</a:t>
+            </a:r>
+          </a:p>
+        </p:txBody>
+      </p:sp>
+      <p:sp>
+        <p:nvSpPr>
+          <p:cNvPr id="7" name="TextBox 6"/>
+          <p:cNvSpPr txBox="1"/>
+          <p:nvPr/>
+        </p:nvSpPr>
+        <p:spPr>
+          <a:xfrm>
+            <a:off x="731520" y="1463040"/>
+            <a:ext cx="10789920" cy="3566160"/>
+          </a:xfrm>
+          <a:prstGeom prst="rect">
+            <a:avLst/>
+          </a:prstGeom>
+          <a:noFill/>
+        </p:spPr>
+        <p:txBody>
+          <a:bodyPr wrap="square" anchor="t" lIns="45720" rIns="45720">
             <a:spAutoFit/>
           </a:bodyPr>
           <a:lstStyle/>
@@ -8129,13 +8570,100 @@
               </a:spcAft>
             </a:pPr>
             <a:r>
-              <a:rPr sz="3600" b="1">
+              <a:rPr sz="2600" b="1">
+                <a:solidFill>
+                  <a:srgbClr val="1E293B"/>
+                </a:solidFill>
+                <a:latin typeface="Calibri"/>
+              </a:rPr>
+              <a:t>Trong đoạn thơ 3, 4, hình tượng người lính được gợi ra qua những từ ngữ, hình ảnh nào? Khái quát đặc điểm hình tượng này.</a:t>
+            </a:r>
+          </a:p>
+        </p:txBody>
+      </p:sp>
+      <p:sp>
+        <p:nvSpPr>
+          <p:cNvPr id="8" name="Rounded Rectangle 7"/>
+          <p:cNvSpPr/>
+          <p:nvPr/>
+        </p:nvSpPr>
+        <p:spPr>
+          <a:xfrm>
+            <a:off x="731520" y="5120640"/>
+            <a:ext cx="10789920" cy="693420"/>
+          </a:xfrm>
+          <a:prstGeom prst="roundRect">
+            <a:avLst>
+              <a:gd name="adj" fmla="val 8000"/>
+            </a:avLst>
+          </a:prstGeom>
+          <a:solidFill>
+            <a:srgbClr val="EFF4FF"/>
+          </a:solidFill>
+          <a:ln w="19050">
+            <a:solidFill>
+              <a:srgbClr val="1E40AF"/>
+            </a:solidFill>
+          </a:ln>
+          <a:effectLst/>
+        </p:spPr>
+        <p:style>
+          <a:lnRef idx="1">
+            <a:schemeClr val="accent1"/>
+          </a:lnRef>
+          <a:fillRef idx="3">
+            <a:schemeClr val="accent1"/>
+          </a:fillRef>
+          <a:effectRef idx="2">
+            <a:schemeClr val="accent1"/>
+          </a:effectRef>
+          <a:fontRef idx="minor">
+            <a:schemeClr val="lt1"/>
+          </a:fontRef>
+        </p:style>
+        <p:txBody>
+          <a:bodyPr rtlCol="0" anchor="ctr"/>
+          <a:lstStyle/>
+          <a:p>
+            <a:pPr algn="ctr"/>
+          </a:p>
+        </p:txBody>
+      </p:sp>
+      <p:sp>
+        <p:nvSpPr>
+          <p:cNvPr id="9" name="TextBox 8"/>
+          <p:cNvSpPr txBox="1"/>
+          <p:nvPr/>
+        </p:nvSpPr>
+        <p:spPr>
+          <a:xfrm>
+            <a:off x="914400" y="5120640"/>
+            <a:ext cx="10424160" cy="693420"/>
+          </a:xfrm>
+          <a:prstGeom prst="rect">
+            <a:avLst/>
+          </a:prstGeom>
+          <a:noFill/>
+        </p:spPr>
+        <p:txBody>
+          <a:bodyPr wrap="square" anchor="ctr" lIns="45720" rIns="45720">
+            <a:spAutoFit/>
+          </a:bodyPr>
+          <a:lstStyle/>
+          <a:p>
+            <a:pPr algn="l">
+              <a:spcAft>
+                <a:spcPts val="400"/>
+              </a:spcAft>
+            </a:pPr>
+            <a:r>
+              <a:rPr sz="2200" b="1">
                 <a:solidFill>
                   <a:srgbClr val="1E40AF"/>
                 </a:solidFill>
                 <a:latin typeface="Calibri"/>
               </a:rPr>
-              <a:t>TIẾT 17 – 18: ĐÀN GHI TA CỦA LOR-CA (Thanh Thảo)</a:t>
+              <a:t>💡 Chú ý các từ Hán Việt trang trọng.</a:t>
             </a:r>
           </a:p>
         </p:txBody>
@@ -8218,14 +8746,14 @@
         </p:nvSpPr>
         <p:spPr>
           <a:xfrm>
-            <a:off x="9786823" y="457200"/>
-            <a:ext cx="1856232" cy="457200"/>
+            <a:off x="9942271" y="457200"/>
+            <a:ext cx="1700784" cy="457200"/>
           </a:xfrm>
           <a:prstGeom prst="roundRect">
             <a:avLst/>
           </a:prstGeom>
           <a:solidFill>
-            <a:srgbClr val="1E40AF"/>
+            <a:srgbClr val="991B1B"/>
           </a:solidFill>
           <a:ln>
             <a:noFill/>
@@ -8258,7 +8786,7 @@
                 </a:solidFill>
                 <a:latin typeface="Arial"/>
               </a:rPr>
-              <a:t>KHỞI ĐỘNG</a:t>
+              <a:t>LỜI GIẢI</a:t>
             </a:r>
           </a:p>
         </p:txBody>
@@ -8272,7 +8800,7 @@
         <p:spPr>
           <a:xfrm>
             <a:off x="731520" y="274320"/>
-            <a:ext cx="9116568" cy="868680"/>
+            <a:ext cx="9272016" cy="868680"/>
           </a:xfrm>
           <a:prstGeom prst="rect">
             <a:avLst/>
@@ -8292,7 +8820,7 @@
                 </a:solidFill>
                 <a:latin typeface="Arial"/>
               </a:rPr>
-              <a:t>TRƯỚC KHI ĐỌC</a:t>
+              <a:t>HÌNH TƯỢNG NGƯỜI LÍNH TÂY TIẾN</a:t>
             </a:r>
           </a:p>
         </p:txBody>
@@ -8385,7 +8913,7 @@
         <p:spPr>
           <a:xfrm>
             <a:off x="731520" y="1463040"/>
-            <a:ext cx="10789920" cy="4572000"/>
+            <a:ext cx="10789920" cy="3474720"/>
           </a:xfrm>
           <a:prstGeom prst="rect">
             <a:avLst/>
@@ -8398,35 +8926,153 @@
           </a:bodyPr>
           <a:lstStyle/>
           <a:p>
-            <a:pPr algn="l">
+            <a:pPr algn="l" marL="365760" indent="-365760">
               <a:spcAft>
                 <a:spcPts val="800"/>
               </a:spcAft>
+              <a:buClr>
+                <a:srgbClr val="1E40AF"/>
+              </a:buClr>
+              <a:buFont typeface="Arial"/>
+              <a:buChar char="•"/>
             </a:pPr>
             <a:r>
-              <a:rPr sz="2600" b="1">
+              <a:rPr sz="2300">
                 <a:solidFill>
                   <a:srgbClr val="1E293B"/>
                 </a:solidFill>
                 <a:latin typeface="Calibri"/>
               </a:rPr>
-              <a:t>Theo bạn, sứ mệnh cao cả của người nghệ sĩ là gì?</a:t>
-            </a:r>
-          </a:p>
-          <a:p>
-            <a:pPr algn="l">
+              <a:t>“không mọc tóc”, “quân xanh màu lá dữ oai hùm” – gian khổ mà oai phong.</a:t>
+            </a:r>
+          </a:p>
+          <a:p>
+            <a:pPr algn="l" marL="365760" indent="-365760">
               <a:spcAft>
                 <a:spcPts val="800"/>
               </a:spcAft>
+              <a:buClr>
+                <a:srgbClr val="1E40AF"/>
+              </a:buClr>
+              <a:buFont typeface="Arial"/>
+              <a:buChar char="•"/>
             </a:pPr>
             <a:r>
-              <a:rPr sz="2600" b="1">
+              <a:rPr sz="2300">
                 <a:solidFill>
                   <a:srgbClr val="1E293B"/>
                 </a:solidFill>
                 <a:latin typeface="Calibri"/>
               </a:rPr>
-              <a:t>Bạn biết gì về đất nước Tây Ban Nha?</a:t>
+              <a:t>“mắt trừng gửi mộng”, “đêm mơ Hà Nội dáng kiều thơm” – hào hoa, lãng mạn.</a:t>
+            </a:r>
+          </a:p>
+          <a:p>
+            <a:pPr algn="l" marL="365760" indent="-365760">
+              <a:spcAft>
+                <a:spcPts val="800"/>
+              </a:spcAft>
+              <a:buClr>
+                <a:srgbClr val="1E40AF"/>
+              </a:buClr>
+              <a:buFont typeface="Arial"/>
+              <a:buChar char="•"/>
+            </a:pPr>
+            <a:r>
+              <a:rPr sz="2300">
+                <a:solidFill>
+                  <a:srgbClr val="1E293B"/>
+                </a:solidFill>
+                <a:latin typeface="Calibri"/>
+              </a:rPr>
+              <a:t>“áo bào thay chiếu, anh về đất”, “sông Mã gầm lên khúc độc hành” – bi tráng.</a:t>
+            </a:r>
+          </a:p>
+        </p:txBody>
+      </p:sp>
+      <p:sp>
+        <p:nvSpPr>
+          <p:cNvPr id="8" name="Rounded Rectangle 7"/>
+          <p:cNvSpPr/>
+          <p:nvPr/>
+        </p:nvSpPr>
+        <p:spPr>
+          <a:xfrm>
+            <a:off x="731520" y="5074920"/>
+            <a:ext cx="10789920" cy="731520"/>
+          </a:xfrm>
+          <a:prstGeom prst="roundRect">
+            <a:avLst>
+              <a:gd name="adj" fmla="val 8000"/>
+            </a:avLst>
+          </a:prstGeom>
+          <a:solidFill>
+            <a:srgbClr val="FEF2F2"/>
+          </a:solidFill>
+          <a:ln w="19050">
+            <a:solidFill>
+              <a:srgbClr val="991B1B"/>
+            </a:solidFill>
+          </a:ln>
+          <a:effectLst/>
+        </p:spPr>
+        <p:style>
+          <a:lnRef idx="1">
+            <a:schemeClr val="accent1"/>
+          </a:lnRef>
+          <a:fillRef idx="3">
+            <a:schemeClr val="accent1"/>
+          </a:fillRef>
+          <a:effectRef idx="2">
+            <a:schemeClr val="accent1"/>
+          </a:effectRef>
+          <a:fontRef idx="minor">
+            <a:schemeClr val="lt1"/>
+          </a:fontRef>
+        </p:style>
+        <p:txBody>
+          <a:bodyPr rtlCol="0" anchor="ctr"/>
+          <a:lstStyle/>
+          <a:p>
+            <a:pPr algn="ctr"/>
+          </a:p>
+        </p:txBody>
+      </p:sp>
+      <p:sp>
+        <p:nvSpPr>
+          <p:cNvPr id="9" name="TextBox 8"/>
+          <p:cNvSpPr txBox="1"/>
+          <p:nvPr/>
+        </p:nvSpPr>
+        <p:spPr>
+          <a:xfrm>
+            <a:off x="914400" y="5074920"/>
+            <a:ext cx="10424160" cy="731520"/>
+          </a:xfrm>
+          <a:prstGeom prst="rect">
+            <a:avLst/>
+          </a:prstGeom>
+          <a:noFill/>
+        </p:spPr>
+        <p:txBody>
+          <a:bodyPr wrap="square" anchor="ctr" lIns="45720" rIns="45720">
+            <a:spAutoFit/>
+          </a:bodyPr>
+          <a:lstStyle/>
+          <a:p>
+            <a:pPr algn="l">
+              <a:spcAft>
+                <a:spcPts val="400"/>
+              </a:spcAft>
+            </a:pPr>
+            <a:r>
+              <a:rPr sz="2400" b="1">
+                <a:solidFill>
+                  <a:srgbClr val="991B1B"/>
+                </a:solidFill>
+                <a:latin typeface="Calibri"/>
+              </a:rPr>
+              <a:t>Người lính hào hùng, hào hoa, bi tráng.</a:t>
             </a:r>
           </a:p>
         </p:txBody>
@@ -8830,7 +9476,7 @@
     <p:bg>
       <p:bgPr>
         <a:solidFill>
-          <a:srgbClr val="FFFFFF"/>
+          <a:srgbClr val="F8F9FA"/>
         </a:solidFill>
         <a:effectLst/>
       </p:bgPr>
@@ -8850,14 +9496,14 @@
         </p:nvSpPr>
         <p:spPr>
           <a:xfrm>
-            <a:off x="457200" y="384048"/>
-            <a:ext cx="109728" cy="658368"/>
+            <a:off x="548640" y="2926080"/>
+            <a:ext cx="164592" cy="1005840"/>
           </a:xfrm>
           <a:prstGeom prst="rect">
             <a:avLst/>
           </a:prstGeom>
           <a:solidFill>
-            <a:srgbClr val="1E40AF"/>
+            <a:srgbClr val="991B1B"/>
           </a:solidFill>
           <a:ln>
             <a:noFill/>
@@ -8888,67 +9534,14 @@
       </p:sp>
       <p:sp>
         <p:nvSpPr>
-          <p:cNvPr id="3" name="Rounded Rectangle 2"/>
-          <p:cNvSpPr/>
-          <p:nvPr/>
-        </p:nvSpPr>
-        <p:spPr>
-          <a:xfrm>
-            <a:off x="10253167" y="457200"/>
-            <a:ext cx="1389888" cy="457200"/>
-          </a:xfrm>
-          <a:prstGeom prst="roundRect">
-            <a:avLst/>
-          </a:prstGeom>
-          <a:solidFill>
-            <a:srgbClr val="1E40AF"/>
-          </a:solidFill>
-          <a:ln>
-            <a:noFill/>
-          </a:ln>
-          <a:effectLst/>
-        </p:spPr>
-        <p:style>
-          <a:lnRef idx="1">
-            <a:schemeClr val="accent1"/>
-          </a:lnRef>
-          <a:fillRef idx="3">
-            <a:schemeClr val="accent1"/>
-          </a:fillRef>
-          <a:effectRef idx="2">
-            <a:schemeClr val="accent1"/>
-          </a:effectRef>
-          <a:fontRef idx="minor">
-            <a:schemeClr val="lt1"/>
-          </a:fontRef>
-        </p:style>
-        <p:txBody>
-          <a:bodyPr rtlCol="0" anchor="ctr" wrap="none" tIns="0" bIns="0"/>
-          <a:lstStyle/>
-          <a:p>
-            <a:pPr algn="ctr"/>
-            <a:r>
-              <a:rPr sz="1400" b="1">
-                <a:solidFill>
-                  <a:srgbClr val="FFFFFF"/>
-                </a:solidFill>
-                <a:latin typeface="Arial"/>
-              </a:rPr>
-              <a:t>ĐỀ BÀI</a:t>
-            </a:r>
-          </a:p>
-        </p:txBody>
-      </p:sp>
-      <p:sp>
-        <p:nvSpPr>
-          <p:cNvPr id="4" name="TextBox 3"/>
+          <p:cNvPr id="3" name="TextBox 2"/>
           <p:cNvSpPr txBox="1"/>
           <p:nvPr/>
         </p:nvSpPr>
         <p:spPr>
           <a:xfrm>
-            <a:off x="731520" y="274320"/>
-            <a:ext cx="9582912" cy="868680"/>
+            <a:off x="914400" y="2743200"/>
+            <a:ext cx="10515600" cy="1371600"/>
           </a:xfrm>
           <a:prstGeom prst="rect">
             <a:avLst/>
@@ -8956,120 +9549,7 @@
           <a:noFill/>
         </p:spPr>
         <p:txBody>
-          <a:bodyPr wrap="square" anchor="ctr">
-            <a:spAutoFit/>
-          </a:bodyPr>
-          <a:lstStyle/>
-          <a:p>
-            <a:r>
-              <a:rPr sz="3600" b="1">
-                <a:solidFill>
-                  <a:srgbClr val="1E40AF"/>
-                </a:solidFill>
-                <a:latin typeface="Arial"/>
-              </a:rPr>
-              <a:t>HÌNH TƯỢNG LOR-CA</a:t>
-            </a:r>
-          </a:p>
-        </p:txBody>
-      </p:sp>
-      <p:sp>
-        <p:nvSpPr>
-          <p:cNvPr id="5" name="Rectangle 4"/>
-          <p:cNvSpPr/>
-          <p:nvPr/>
-        </p:nvSpPr>
-        <p:spPr>
-          <a:xfrm>
-            <a:off x="457200" y="1207008"/>
-            <a:ext cx="11274552" cy="22000"/>
-          </a:xfrm>
-          <a:prstGeom prst="rect">
-            <a:avLst/>
-          </a:prstGeom>
-          <a:solidFill>
-            <a:srgbClr val="E2E8F0"/>
-          </a:solidFill>
-          <a:ln>
-            <a:noFill/>
-          </a:ln>
-          <a:effectLst/>
-        </p:spPr>
-        <p:style>
-          <a:lnRef idx="1">
-            <a:schemeClr val="accent1"/>
-          </a:lnRef>
-          <a:fillRef idx="3">
-            <a:schemeClr val="accent1"/>
-          </a:fillRef>
-          <a:effectRef idx="2">
-            <a:schemeClr val="accent1"/>
-          </a:effectRef>
-          <a:fontRef idx="minor">
-            <a:schemeClr val="lt1"/>
-          </a:fontRef>
-        </p:style>
-        <p:txBody>
-          <a:bodyPr rtlCol="0" anchor="ctr"/>
-          <a:lstStyle/>
-          <a:p>
-            <a:pPr algn="ctr"/>
-          </a:p>
-        </p:txBody>
-      </p:sp>
-      <p:sp>
-        <p:nvSpPr>
-          <p:cNvPr id="6" name="TextBox 5"/>
-          <p:cNvSpPr txBox="1"/>
-          <p:nvPr/>
-        </p:nvSpPr>
-        <p:spPr>
-          <a:xfrm>
-            <a:off x="457200" y="6355080"/>
-            <a:ext cx="11274552" cy="365760"/>
-          </a:xfrm>
-          <a:prstGeom prst="rect">
-            <a:avLst/>
-          </a:prstGeom>
-          <a:noFill/>
-        </p:spPr>
-        <p:txBody>
-          <a:bodyPr wrap="none">
-            <a:spAutoFit/>
-          </a:bodyPr>
-          <a:lstStyle/>
-          <a:p>
-            <a:pPr algn="r"/>
-            <a:r>
-              <a:rPr sz="1200">
-                <a:solidFill>
-                  <a:srgbClr val="64748B"/>
-                </a:solidFill>
-                <a:latin typeface="Calibri"/>
-              </a:rPr>
-              <a:t>Ngữ văn 12 · Bài 2: Những Thế Giới Thơ          20</a:t>
-            </a:r>
-          </a:p>
-        </p:txBody>
-      </p:sp>
-      <p:sp>
-        <p:nvSpPr>
-          <p:cNvPr id="7" name="TextBox 6"/>
-          <p:cNvSpPr txBox="1"/>
-          <p:nvPr/>
-        </p:nvSpPr>
-        <p:spPr>
-          <a:xfrm>
-            <a:off x="731520" y="1463040"/>
-            <a:ext cx="10789920" cy="3566160"/>
-          </a:xfrm>
-          <a:prstGeom prst="rect">
-            <a:avLst/>
-          </a:prstGeom>
-          <a:noFill/>
-        </p:spPr>
-        <p:txBody>
-          <a:bodyPr wrap="square" anchor="t" lIns="45720" rIns="45720">
+          <a:bodyPr wrap="square" anchor="ctr" lIns="45720" rIns="45720">
             <a:spAutoFit/>
           </a:bodyPr>
           <a:lstStyle/>
@@ -9080,100 +9560,13 @@
               </a:spcAft>
             </a:pPr>
             <a:r>
-              <a:rPr sz="2600" b="1">
-                <a:solidFill>
-                  <a:srgbClr val="1E293B"/>
+              <a:rPr sz="3600" b="1">
+                <a:solidFill>
+                  <a:srgbClr val="1E40AF"/>
                 </a:solidFill>
                 <a:latin typeface="Calibri"/>
               </a:rPr>
-              <a:t>Hình tượng Lor-ca được thể hiện thế nào trong hai đoạn thơ đầu? Chi tiết nào cho thấy mối quan hệ giữa nghệ sĩ với đất nước Tây Ban Nha?</a:t>
-            </a:r>
-          </a:p>
-        </p:txBody>
-      </p:sp>
-      <p:sp>
-        <p:nvSpPr>
-          <p:cNvPr id="8" name="Rounded Rectangle 7"/>
-          <p:cNvSpPr/>
-          <p:nvPr/>
-        </p:nvSpPr>
-        <p:spPr>
-          <a:xfrm>
-            <a:off x="731520" y="5120640"/>
-            <a:ext cx="10789920" cy="693420"/>
-          </a:xfrm>
-          <a:prstGeom prst="roundRect">
-            <a:avLst>
-              <a:gd name="adj" fmla="val 8000"/>
-            </a:avLst>
-          </a:prstGeom>
-          <a:solidFill>
-            <a:srgbClr val="EFF4FF"/>
-          </a:solidFill>
-          <a:ln w="19050">
-            <a:solidFill>
-              <a:srgbClr val="1E40AF"/>
-            </a:solidFill>
-          </a:ln>
-          <a:effectLst/>
-        </p:spPr>
-        <p:style>
-          <a:lnRef idx="1">
-            <a:schemeClr val="accent1"/>
-          </a:lnRef>
-          <a:fillRef idx="3">
-            <a:schemeClr val="accent1"/>
-          </a:fillRef>
-          <a:effectRef idx="2">
-            <a:schemeClr val="accent1"/>
-          </a:effectRef>
-          <a:fontRef idx="minor">
-            <a:schemeClr val="lt1"/>
-          </a:fontRef>
-        </p:style>
-        <p:txBody>
-          <a:bodyPr rtlCol="0" anchor="ctr"/>
-          <a:lstStyle/>
-          <a:p>
-            <a:pPr algn="ctr"/>
-          </a:p>
-        </p:txBody>
-      </p:sp>
-      <p:sp>
-        <p:nvSpPr>
-          <p:cNvPr id="9" name="TextBox 8"/>
-          <p:cNvSpPr txBox="1"/>
-          <p:nvPr/>
-        </p:nvSpPr>
-        <p:spPr>
-          <a:xfrm>
-            <a:off x="914400" y="5120640"/>
-            <a:ext cx="10424160" cy="693420"/>
-          </a:xfrm>
-          <a:prstGeom prst="rect">
-            <a:avLst/>
-          </a:prstGeom>
-          <a:noFill/>
-        </p:spPr>
-        <p:txBody>
-          <a:bodyPr wrap="square" anchor="ctr" lIns="45720" rIns="45720">
-            <a:spAutoFit/>
-          </a:bodyPr>
-          <a:lstStyle/>
-          <a:p>
-            <a:pPr algn="l">
-              <a:spcAft>
-                <a:spcPts val="400"/>
-              </a:spcAft>
-            </a:pPr>
-            <a:r>
-              <a:rPr sz="2200" b="1">
-                <a:solidFill>
-                  <a:srgbClr val="1E40AF"/>
-                </a:solidFill>
-                <a:latin typeface="Calibri"/>
-              </a:rPr>
-              <a:t>💡 So sánh “áo choàng đỏ gắt” với “áo choàng bê bết đỏ”.</a:t>
+              <a:t>TIẾT 17 – 18: ĐÀN GHI TA CỦA LOR-CA (Thanh Thảo)</a:t>
             </a:r>
           </a:p>
         </p:txBody>
@@ -9256,14 +9649,14 @@
         </p:nvSpPr>
         <p:spPr>
           <a:xfrm>
-            <a:off x="9942271" y="457200"/>
-            <a:ext cx="1700784" cy="457200"/>
+            <a:off x="9786823" y="457200"/>
+            <a:ext cx="1856232" cy="457200"/>
           </a:xfrm>
           <a:prstGeom prst="roundRect">
             <a:avLst/>
           </a:prstGeom>
           <a:solidFill>
-            <a:srgbClr val="991B1B"/>
+            <a:srgbClr val="1E40AF"/>
           </a:solidFill>
           <a:ln>
             <a:noFill/>
@@ -9296,7 +9689,7 @@
                 </a:solidFill>
                 <a:latin typeface="Arial"/>
               </a:rPr>
-              <a:t>LỜI GIẢI</a:t>
+              <a:t>KHỞI ĐỘNG</a:t>
             </a:r>
           </a:p>
         </p:txBody>
@@ -9310,7 +9703,7 @@
         <p:spPr>
           <a:xfrm>
             <a:off x="731520" y="274320"/>
-            <a:ext cx="9272016" cy="868680"/>
+            <a:ext cx="9116568" cy="868680"/>
           </a:xfrm>
           <a:prstGeom prst="rect">
             <a:avLst/>
@@ -9330,7 +9723,7 @@
                 </a:solidFill>
                 <a:latin typeface="Arial"/>
               </a:rPr>
-              <a:t>HÌNH TƯỢNG LOR-CA</a:t>
+              <a:t>TRƯỚC KHI ĐỌC</a:t>
             </a:r>
           </a:p>
         </p:txBody>
@@ -9423,7 +9816,7 @@
         <p:spPr>
           <a:xfrm>
             <a:off x="731520" y="1463040"/>
-            <a:ext cx="10789920" cy="3474720"/>
+            <a:ext cx="10789920" cy="4572000"/>
           </a:xfrm>
           <a:prstGeom prst="rect">
             <a:avLst/>
@@ -9436,153 +9829,35 @@
           </a:bodyPr>
           <a:lstStyle/>
           <a:p>
-            <a:pPr algn="l" marL="365760" indent="-365760">
+            <a:pPr algn="l">
               <a:spcAft>
                 <a:spcPts val="800"/>
               </a:spcAft>
-              <a:buClr>
-                <a:srgbClr val="1E40AF"/>
-              </a:buClr>
-              <a:buFont typeface="Arial"/>
-              <a:buChar char="•"/>
             </a:pPr>
             <a:r>
-              <a:rPr sz="2300">
+              <a:rPr sz="2600" b="1">
                 <a:solidFill>
                   <a:srgbClr val="1E293B"/>
                 </a:solidFill>
                 <a:latin typeface="Calibri"/>
               </a:rPr>
-              <a:t>Nghệ sĩ lãng du, tự do: “đi lang thang về miền đơn độc / với vầng trăng chếnh choáng”.</a:t>
-            </a:r>
-          </a:p>
-          <a:p>
-            <a:pPr algn="l" marL="365760" indent="-365760">
+              <a:t>Theo bạn, sứ mệnh cao cả của người nghệ sĩ là gì?</a:t>
+            </a:r>
+          </a:p>
+          <a:p>
+            <a:pPr algn="l">
               <a:spcAft>
                 <a:spcPts val="800"/>
               </a:spcAft>
-              <a:buClr>
-                <a:srgbClr val="1E40AF"/>
-              </a:buClr>
-              <a:buFont typeface="Arial"/>
-              <a:buChar char="•"/>
             </a:pPr>
             <a:r>
-              <a:rPr sz="2300">
+              <a:rPr sz="2600" b="1">
                 <a:solidFill>
                   <a:srgbClr val="1E293B"/>
                 </a:solidFill>
                 <a:latin typeface="Calibri"/>
               </a:rPr>
-              <a:t>“Tây Ban Nha / hát nghêu ngao / bỗng kinh hoàng” – gắn với số phận đất nước.</a:t>
-            </a:r>
-          </a:p>
-          <a:p>
-            <a:pPr algn="l" marL="365760" indent="-365760">
-              <a:spcAft>
-                <a:spcPts val="800"/>
-              </a:spcAft>
-              <a:buClr>
-                <a:srgbClr val="1E40AF"/>
-              </a:buClr>
-              <a:buFont typeface="Arial"/>
-              <a:buChar char="•"/>
-            </a:pPr>
-            <a:r>
-              <a:rPr sz="2300">
-                <a:solidFill>
-                  <a:srgbClr val="1E293B"/>
-                </a:solidFill>
-                <a:latin typeface="Calibri"/>
-              </a:rPr>
-              <a:t>“áo choàng bê bết đỏ / Lor-ca bị điệu về bãi bắn” – cái chết oan khuất.</a:t>
-            </a:r>
-          </a:p>
-        </p:txBody>
-      </p:sp>
-      <p:sp>
-        <p:nvSpPr>
-          <p:cNvPr id="8" name="Rounded Rectangle 7"/>
-          <p:cNvSpPr/>
-          <p:nvPr/>
-        </p:nvSpPr>
-        <p:spPr>
-          <a:xfrm>
-            <a:off x="731520" y="5074920"/>
-            <a:ext cx="10789920" cy="731520"/>
-          </a:xfrm>
-          <a:prstGeom prst="roundRect">
-            <a:avLst>
-              <a:gd name="adj" fmla="val 8000"/>
-            </a:avLst>
-          </a:prstGeom>
-          <a:solidFill>
-            <a:srgbClr val="FEF2F2"/>
-          </a:solidFill>
-          <a:ln w="19050">
-            <a:solidFill>
-              <a:srgbClr val="991B1B"/>
-            </a:solidFill>
-          </a:ln>
-          <a:effectLst/>
-        </p:spPr>
-        <p:style>
-          <a:lnRef idx="1">
-            <a:schemeClr val="accent1"/>
-          </a:lnRef>
-          <a:fillRef idx="3">
-            <a:schemeClr val="accent1"/>
-          </a:fillRef>
-          <a:effectRef idx="2">
-            <a:schemeClr val="accent1"/>
-          </a:effectRef>
-          <a:fontRef idx="minor">
-            <a:schemeClr val="lt1"/>
-          </a:fontRef>
-        </p:style>
-        <p:txBody>
-          <a:bodyPr rtlCol="0" anchor="ctr"/>
-          <a:lstStyle/>
-          <a:p>
-            <a:pPr algn="ctr"/>
-          </a:p>
-        </p:txBody>
-      </p:sp>
-      <p:sp>
-        <p:nvSpPr>
-          <p:cNvPr id="9" name="TextBox 8"/>
-          <p:cNvSpPr txBox="1"/>
-          <p:nvPr/>
-        </p:nvSpPr>
-        <p:spPr>
-          <a:xfrm>
-            <a:off x="914400" y="5074920"/>
-            <a:ext cx="10424160" cy="731520"/>
-          </a:xfrm>
-          <a:prstGeom prst="rect">
-            <a:avLst/>
-          </a:prstGeom>
-          <a:noFill/>
-        </p:spPr>
-        <p:txBody>
-          <a:bodyPr wrap="square" anchor="ctr" lIns="45720" rIns="45720">
-            <a:spAutoFit/>
-          </a:bodyPr>
-          <a:lstStyle/>
-          <a:p>
-            <a:pPr algn="l">
-              <a:spcAft>
-                <a:spcPts val="400"/>
-              </a:spcAft>
-            </a:pPr>
-            <a:r>
-              <a:rPr sz="2400" b="1">
-                <a:solidFill>
-                  <a:srgbClr val="991B1B"/>
-                </a:solidFill>
-                <a:latin typeface="Calibri"/>
-              </a:rPr>
-              <a:t>Người nghệ sĩ tự do, cô đơn, bị bạo lực vùi dập.</a:t>
+              <a:t>Bạn biết gì về đất nước Tây Ban Nha?</a:t>
             </a:r>
           </a:p>
         </p:txBody>
@@ -9665,14 +9940,14 @@
         </p:nvSpPr>
         <p:spPr>
           <a:xfrm>
-            <a:off x="10253167" y="457200"/>
-            <a:ext cx="1389888" cy="457200"/>
+            <a:off x="10408615" y="457200"/>
+            <a:ext cx="1234440" cy="457200"/>
           </a:xfrm>
           <a:prstGeom prst="roundRect">
             <a:avLst/>
           </a:prstGeom>
           <a:solidFill>
-            <a:srgbClr val="1E40AF"/>
+            <a:srgbClr val="991B1B"/>
           </a:solidFill>
           <a:ln>
             <a:noFill/>
@@ -9705,7 +9980,7 @@
                 </a:solidFill>
                 <a:latin typeface="Arial"/>
               </a:rPr>
-              <a:t>ĐỀ BÀI</a:t>
+              <a:t>VIDEO</a:t>
             </a:r>
           </a:p>
         </p:txBody>
@@ -9719,7 +9994,7 @@
         <p:spPr>
           <a:xfrm>
             <a:off x="731520" y="274320"/>
-            <a:ext cx="9582912" cy="868680"/>
+            <a:ext cx="9738360" cy="868680"/>
           </a:xfrm>
           <a:prstGeom prst="rect">
             <a:avLst/>
@@ -9739,7 +10014,7 @@
                 </a:solidFill>
                 <a:latin typeface="Arial"/>
               </a:rPr>
-              <a:t>TIẾNG ĐÀN – CÁI CHẾT VÀ SỰ BẤT TỬ</a:t>
+              <a:t>VIDEO THAM KHẢO</a:t>
             </a:r>
           </a:p>
         </p:txBody>
@@ -9823,16 +10098,40 @@
           </a:p>
         </p:txBody>
       </p:sp>
-      <p:sp>
-        <p:nvSpPr>
-          <p:cNvPr id="7" name="TextBox 6"/>
+      <p:pic>
+        <p:nvPicPr>
+          <p:cNvPr id="7" name="Picture 6" descr="QR_video_S8Ny3x08s3g.png"/>
+          <p:cNvPicPr>
+            <a:picLocks noChangeAspect="1"/>
+          </p:cNvPicPr>
+          <p:nvPr/>
+        </p:nvPicPr>
+        <p:blipFill>
+          <a:blip r:embed="rId2"/>
+          <a:stretch>
+            <a:fillRect/>
+          </a:stretch>
+        </p:blipFill>
+        <p:spPr>
+          <a:xfrm>
+            <a:off x="8412480" y="1554480"/>
+            <a:ext cx="3108960" cy="3108960"/>
+          </a:xfrm>
+          <a:prstGeom prst="rect">
+            <a:avLst/>
+          </a:prstGeom>
+        </p:spPr>
+      </p:pic>
+      <p:sp>
+        <p:nvSpPr>
+          <p:cNvPr id="8" name="TextBox 7"/>
           <p:cNvSpPr txBox="1"/>
           <p:nvPr/>
         </p:nvSpPr>
         <p:spPr>
           <a:xfrm>
-            <a:off x="731520" y="1463040"/>
-            <a:ext cx="10789920" cy="3566160"/>
+            <a:off x="731520" y="1554480"/>
+            <a:ext cx="7498079" cy="4206240"/>
           </a:xfrm>
           <a:prstGeom prst="rect">
             <a:avLst/>
@@ -9857,94 +10156,61 @@
                 </a:solidFill>
                 <a:latin typeface="Calibri"/>
               </a:rPr>
-              <a:t>Chỉ ra biện pháp tu từ miêu tả tiếng đàn; ý nghĩa hình ảnh biểu tượng; hình ảnh thực – ảo về cái chết và sự bất tử của Lor-ca.</a:t>
-            </a:r>
-          </a:p>
-        </p:txBody>
-      </p:sp>
-      <p:sp>
-        <p:nvSpPr>
-          <p:cNvPr id="8" name="Rounded Rectangle 7"/>
-          <p:cNvSpPr/>
-          <p:nvPr/>
-        </p:nvSpPr>
-        <p:spPr>
-          <a:xfrm>
-            <a:off x="731520" y="5120640"/>
-            <a:ext cx="10789920" cy="693420"/>
-          </a:xfrm>
-          <a:prstGeom prst="roundRect">
-            <a:avLst>
-              <a:gd name="adj" fmla="val 8000"/>
-            </a:avLst>
-          </a:prstGeom>
-          <a:solidFill>
-            <a:srgbClr val="EFF4FF"/>
-          </a:solidFill>
-          <a:ln w="19050">
-            <a:solidFill>
-              <a:srgbClr val="1E40AF"/>
-            </a:solidFill>
-          </a:ln>
-          <a:effectLst/>
-        </p:spPr>
-        <p:style>
-          <a:lnRef idx="1">
-            <a:schemeClr val="accent1"/>
-          </a:lnRef>
-          <a:fillRef idx="3">
-            <a:schemeClr val="accent1"/>
-          </a:fillRef>
-          <a:effectRef idx="2">
-            <a:schemeClr val="accent1"/>
-          </a:effectRef>
-          <a:fontRef idx="minor">
-            <a:schemeClr val="lt1"/>
-          </a:fontRef>
-        </p:style>
-        <p:txBody>
-          <a:bodyPr rtlCol="0" anchor="ctr"/>
-          <a:lstStyle/>
-          <a:p>
-            <a:pPr algn="ctr"/>
-          </a:p>
-        </p:txBody>
-      </p:sp>
-      <p:sp>
-        <p:nvSpPr>
-          <p:cNvPr id="9" name="TextBox 8"/>
-          <p:cNvSpPr txBox="1"/>
-          <p:nvPr/>
-        </p:nvSpPr>
-        <p:spPr>
-          <a:xfrm>
-            <a:off x="914400" y="5120640"/>
-            <a:ext cx="10424160" cy="693420"/>
-          </a:xfrm>
-          <a:prstGeom prst="rect">
-            <a:avLst/>
-          </a:prstGeom>
-          <a:noFill/>
-        </p:spPr>
-        <p:txBody>
-          <a:bodyPr wrap="square" anchor="ctr" lIns="45720" rIns="45720">
-            <a:spAutoFit/>
-          </a:bodyPr>
-          <a:lstStyle/>
+              <a:t>🎬 Đàn ghita của Lorca – thơ Thanh Thảo – Thụy Anh đọc</a:t>
+            </a:r>
+          </a:p>
           <a:p>
             <a:pPr algn="l">
               <a:spcAft>
-                <a:spcPts val="400"/>
+                <a:spcPts val="800"/>
               </a:spcAft>
             </a:pPr>
             <a:r>
-              <a:rPr sz="2200" b="1">
-                <a:solidFill>
-                  <a:srgbClr val="1E40AF"/>
+              <a:rPr sz="2000">
+                <a:solidFill>
+                  <a:srgbClr val="64748B"/>
                 </a:solidFill>
                 <a:latin typeface="Calibri"/>
               </a:rPr>
-              <a:t>💡 Tiếng đàn được “nhìn” bằng màu sắc, hình khối nào?</a:t>
+              <a:t>Kênh: Nguyen</a:t>
+            </a:r>
+          </a:p>
+          <a:p>
+            <a:pPr algn="l" marL="365760" indent="-365760">
+              <a:spcAft>
+                <a:spcPts val="800"/>
+              </a:spcAft>
+              <a:buClr>
+                <a:srgbClr val="1E40AF"/>
+              </a:buClr>
+              <a:buFont typeface="Arial"/>
+              <a:buChar char="•"/>
+            </a:pPr>
+            <a:r>
+              <a:rPr sz="2000">
+                <a:solidFill>
+                  <a:srgbClr val="1E293B"/>
+                </a:solidFill>
+                <a:latin typeface="Calibri"/>
+              </a:rPr>
+              <a:t>Đọc diễn cảm Đàn ghi ta của Lor-ca</a:t>
+            </a:r>
+          </a:p>
+          <a:p>
+            <a:pPr algn="l">
+              <a:spcAft>
+                <a:spcPts val="800"/>
+              </a:spcAft>
+            </a:pPr>
+            <a:r>
+              <a:rPr sz="1600">
+                <a:solidFill>
+                  <a:srgbClr val="64748B"/>
+                </a:solidFill>
+                <a:latin typeface="Calibri"/>
+                <a:hlinkClick r:id="rId3"/>
+              </a:rPr>
+              <a:t>https://www.youtube.com/watch?v=S8Ny3x08s3g</a:t>
             </a:r>
           </a:p>
         </p:txBody>
@@ -10027,14 +10293,14 @@
         </p:nvSpPr>
         <p:spPr>
           <a:xfrm>
-            <a:off x="9942271" y="457200"/>
-            <a:ext cx="1700784" cy="457200"/>
+            <a:off x="10253167" y="457200"/>
+            <a:ext cx="1389888" cy="457200"/>
           </a:xfrm>
           <a:prstGeom prst="roundRect">
             <a:avLst/>
           </a:prstGeom>
           <a:solidFill>
-            <a:srgbClr val="991B1B"/>
+            <a:srgbClr val="1E40AF"/>
           </a:solidFill>
           <a:ln>
             <a:noFill/>
@@ -10067,7 +10333,7 @@
                 </a:solidFill>
                 <a:latin typeface="Arial"/>
               </a:rPr>
-              <a:t>LỜI GIẢI</a:t>
+              <a:t>ĐỀ BÀI</a:t>
             </a:r>
           </a:p>
         </p:txBody>
@@ -10081,7 +10347,7 @@
         <p:spPr>
           <a:xfrm>
             <a:off x="731520" y="274320"/>
-            <a:ext cx="9272016" cy="868680"/>
+            <a:ext cx="9582912" cy="868680"/>
           </a:xfrm>
           <a:prstGeom prst="rect">
             <a:avLst/>
@@ -10101,7 +10367,7 @@
                 </a:solidFill>
                 <a:latin typeface="Arial"/>
               </a:rPr>
-              <a:t>TIẾNG ĐÀN – CÁI CHẾT VÀ SỰ BẤT TỬ</a:t>
+              <a:t>HÌNH TƯỢNG LOR-CA</a:t>
             </a:r>
           </a:p>
         </p:txBody>
@@ -10194,7 +10460,7 @@
         <p:spPr>
           <a:xfrm>
             <a:off x="731520" y="1463040"/>
-            <a:ext cx="10789920" cy="3474720"/>
+            <a:ext cx="10789920" cy="3566160"/>
           </a:xfrm>
           <a:prstGeom prst="rect">
             <a:avLst/>
@@ -10207,87 +10473,19 @@
           </a:bodyPr>
           <a:lstStyle/>
           <a:p>
-            <a:pPr algn="l" marL="365760" indent="-365760">
+            <a:pPr algn="l">
               <a:spcAft>
                 <a:spcPts val="800"/>
               </a:spcAft>
-              <a:buClr>
-                <a:srgbClr val="1E40AF"/>
-              </a:buClr>
-              <a:buFont typeface="Arial"/>
-              <a:buChar char="•"/>
             </a:pPr>
             <a:r>
-              <a:rPr sz="2300">
+              <a:rPr sz="2600" b="1">
                 <a:solidFill>
                   <a:srgbClr val="1E293B"/>
                 </a:solidFill>
                 <a:latin typeface="Calibri"/>
               </a:rPr>
-              <a:t>Điệp “tiếng ghi ta” + chuyển đổi cảm giác: nâu, lá xanh, tròn bọt nước, ròng ròng máu chảy.</a:t>
-            </a:r>
-          </a:p>
-          <a:p>
-            <a:pPr algn="l" marL="365760" indent="-365760">
-              <a:spcAft>
-                <a:spcPts val="800"/>
-              </a:spcAft>
-              <a:buClr>
-                <a:srgbClr val="1E40AF"/>
-              </a:buClr>
-              <a:buFont typeface="Arial"/>
-              <a:buChar char="•"/>
-            </a:pPr>
-            <a:r>
-              <a:rPr sz="2300">
-                <a:solidFill>
-                  <a:srgbClr val="1E293B"/>
-                </a:solidFill>
-                <a:latin typeface="Calibri"/>
-              </a:rPr>
-              <a:t>“không ai chôn cất tiếng đàn / tiếng đàn như cỏ mọc hoang” – bất tử.</a:t>
-            </a:r>
-          </a:p>
-          <a:p>
-            <a:pPr algn="l" marL="365760" indent="-365760">
-              <a:spcAft>
-                <a:spcPts val="800"/>
-              </a:spcAft>
-              <a:buClr>
-                <a:srgbClr val="1E40AF"/>
-              </a:buClr>
-              <a:buFont typeface="Arial"/>
-              <a:buChar char="•"/>
-            </a:pPr>
-            <a:r>
-              <a:rPr sz="2300">
-                <a:solidFill>
-                  <a:srgbClr val="1E293B"/>
-                </a:solidFill>
-                <a:latin typeface="Calibri"/>
-              </a:rPr>
-              <a:t>“Lor-ca bơi sang ngang trên chiếc ghi ta màu bạc” – cái chết hoá giải thoát.</a:t>
-            </a:r>
-          </a:p>
-          <a:p>
-            <a:pPr algn="l" marL="365760" indent="-365760">
-              <a:spcAft>
-                <a:spcPts val="800"/>
-              </a:spcAft>
-              <a:buClr>
-                <a:srgbClr val="1E40AF"/>
-              </a:buClr>
-              <a:buFont typeface="Arial"/>
-              <a:buChar char="•"/>
-            </a:pPr>
-            <a:r>
-              <a:rPr sz="2300">
-                <a:solidFill>
-                  <a:srgbClr val="1E293B"/>
-                </a:solidFill>
-                <a:latin typeface="Calibri"/>
-              </a:rPr>
-              <a:t>Dòng kết “li-la li-la li-la…” – tiếng đàn tiễn biệt.</a:t>
+              <a:t>Hình tượng Lor-ca được thể hiện thế nào trong hai đoạn thơ đầu? Chi tiết nào cho thấy mối quan hệ giữa nghệ sĩ với đất nước Tây Ban Nha?</a:t>
             </a:r>
           </a:p>
         </p:txBody>
@@ -10300,8 +10498,8 @@
         </p:nvSpPr>
         <p:spPr>
           <a:xfrm>
-            <a:off x="731520" y="5074920"/>
-            <a:ext cx="10789920" cy="731520"/>
+            <a:off x="731520" y="5120640"/>
+            <a:ext cx="10789920" cy="693420"/>
           </a:xfrm>
           <a:prstGeom prst="roundRect">
             <a:avLst>
@@ -10309,11 +10507,11 @@
             </a:avLst>
           </a:prstGeom>
           <a:solidFill>
-            <a:srgbClr val="FEF2F2"/>
+            <a:srgbClr val="EFF4FF"/>
           </a:solidFill>
           <a:ln w="19050">
             <a:solidFill>
-              <a:srgbClr val="991B1B"/>
+              <a:srgbClr val="1E40AF"/>
             </a:solidFill>
           </a:ln>
           <a:effectLst/>
@@ -10348,8 +10546,8 @@
         </p:nvSpPr>
         <p:spPr>
           <a:xfrm>
-            <a:off x="914400" y="5074920"/>
-            <a:ext cx="10424160" cy="731520"/>
+            <a:off x="914400" y="5120640"/>
+            <a:ext cx="10424160" cy="693420"/>
           </a:xfrm>
           <a:prstGeom prst="rect">
             <a:avLst/>
@@ -10368,13 +10566,13 @@
               </a:spcAft>
             </a:pPr>
             <a:r>
-              <a:rPr sz="2400" b="1">
-                <a:solidFill>
-                  <a:srgbClr val="991B1B"/>
+              <a:rPr sz="2200" b="1">
+                <a:solidFill>
+                  <a:srgbClr val="1E40AF"/>
                 </a:solidFill>
                 <a:latin typeface="Calibri"/>
               </a:rPr>
-              <a:t>Nghệ thuật chân chính bất tử.</a:t>
+              <a:t>💡 So sánh “áo choàng đỏ gắt” với “áo choàng bê bết đỏ”.</a:t>
             </a:r>
           </a:p>
         </p:txBody>
@@ -10393,7 +10591,7 @@
     <p:bg>
       <p:bgPr>
         <a:solidFill>
-          <a:srgbClr val="F8F9FA"/>
+          <a:srgbClr val="FFFFFF"/>
         </a:solidFill>
         <a:effectLst/>
       </p:bgPr>
@@ -10413,10 +10611,54 @@
         </p:nvSpPr>
         <p:spPr>
           <a:xfrm>
-            <a:off x="548640" y="2926080"/>
-            <a:ext cx="164592" cy="1005840"/>
-          </a:xfrm>
-          <a:prstGeom prst="rect">
+            <a:off x="457200" y="384048"/>
+            <a:ext cx="109728" cy="658368"/>
+          </a:xfrm>
+          <a:prstGeom prst="rect">
+            <a:avLst/>
+          </a:prstGeom>
+          <a:solidFill>
+            <a:srgbClr val="1E40AF"/>
+          </a:solidFill>
+          <a:ln>
+            <a:noFill/>
+          </a:ln>
+          <a:effectLst/>
+        </p:spPr>
+        <p:style>
+          <a:lnRef idx="1">
+            <a:schemeClr val="accent1"/>
+          </a:lnRef>
+          <a:fillRef idx="3">
+            <a:schemeClr val="accent1"/>
+          </a:fillRef>
+          <a:effectRef idx="2">
+            <a:schemeClr val="accent1"/>
+          </a:effectRef>
+          <a:fontRef idx="minor">
+            <a:schemeClr val="lt1"/>
+          </a:fontRef>
+        </p:style>
+        <p:txBody>
+          <a:bodyPr rtlCol="0" anchor="ctr"/>
+          <a:lstStyle/>
+          <a:p>
+            <a:pPr algn="ctr"/>
+          </a:p>
+        </p:txBody>
+      </p:sp>
+      <p:sp>
+        <p:nvSpPr>
+          <p:cNvPr id="3" name="Rounded Rectangle 2"/>
+          <p:cNvSpPr/>
+          <p:nvPr/>
+        </p:nvSpPr>
+        <p:spPr>
+          <a:xfrm>
+            <a:off x="9942271" y="457200"/>
+            <a:ext cx="1700784" cy="457200"/>
+          </a:xfrm>
+          <a:prstGeom prst="roundRect">
             <a:avLst/>
           </a:prstGeom>
           <a:solidFill>
@@ -10442,6 +10684,93 @@
           </a:fontRef>
         </p:style>
         <p:txBody>
+          <a:bodyPr rtlCol="0" anchor="ctr" wrap="none" tIns="0" bIns="0"/>
+          <a:lstStyle/>
+          <a:p>
+            <a:pPr algn="ctr"/>
+            <a:r>
+              <a:rPr sz="1400" b="1">
+                <a:solidFill>
+                  <a:srgbClr val="FFFFFF"/>
+                </a:solidFill>
+                <a:latin typeface="Arial"/>
+              </a:rPr>
+              <a:t>LỜI GIẢI</a:t>
+            </a:r>
+          </a:p>
+        </p:txBody>
+      </p:sp>
+      <p:sp>
+        <p:nvSpPr>
+          <p:cNvPr id="4" name="TextBox 3"/>
+          <p:cNvSpPr txBox="1"/>
+          <p:nvPr/>
+        </p:nvSpPr>
+        <p:spPr>
+          <a:xfrm>
+            <a:off x="731520" y="274320"/>
+            <a:ext cx="9272016" cy="868680"/>
+          </a:xfrm>
+          <a:prstGeom prst="rect">
+            <a:avLst/>
+          </a:prstGeom>
+          <a:noFill/>
+        </p:spPr>
+        <p:txBody>
+          <a:bodyPr wrap="square" anchor="ctr">
+            <a:spAutoFit/>
+          </a:bodyPr>
+          <a:lstStyle/>
+          <a:p>
+            <a:r>
+              <a:rPr sz="3600" b="1">
+                <a:solidFill>
+                  <a:srgbClr val="1E40AF"/>
+                </a:solidFill>
+                <a:latin typeface="Arial"/>
+              </a:rPr>
+              <a:t>HÌNH TƯỢNG LOR-CA</a:t>
+            </a:r>
+          </a:p>
+        </p:txBody>
+      </p:sp>
+      <p:sp>
+        <p:nvSpPr>
+          <p:cNvPr id="5" name="Rectangle 4"/>
+          <p:cNvSpPr/>
+          <p:nvPr/>
+        </p:nvSpPr>
+        <p:spPr>
+          <a:xfrm>
+            <a:off x="457200" y="1207008"/>
+            <a:ext cx="11274552" cy="22000"/>
+          </a:xfrm>
+          <a:prstGeom prst="rect">
+            <a:avLst/>
+          </a:prstGeom>
+          <a:solidFill>
+            <a:srgbClr val="E2E8F0"/>
+          </a:solidFill>
+          <a:ln>
+            <a:noFill/>
+          </a:ln>
+          <a:effectLst/>
+        </p:spPr>
+        <p:style>
+          <a:lnRef idx="1">
+            <a:schemeClr val="accent1"/>
+          </a:lnRef>
+          <a:fillRef idx="3">
+            <a:schemeClr val="accent1"/>
+          </a:fillRef>
+          <a:effectRef idx="2">
+            <a:schemeClr val="accent1"/>
+          </a:effectRef>
+          <a:fontRef idx="minor">
+            <a:schemeClr val="lt1"/>
+          </a:fontRef>
+        </p:style>
+        <p:txBody>
           <a:bodyPr rtlCol="0" anchor="ctr"/>
           <a:lstStyle/>
           <a:p>
@@ -10451,14 +10780,183 @@
       </p:sp>
       <p:sp>
         <p:nvSpPr>
-          <p:cNvPr id="3" name="TextBox 2"/>
+          <p:cNvPr id="6" name="TextBox 5"/>
           <p:cNvSpPr txBox="1"/>
           <p:nvPr/>
         </p:nvSpPr>
         <p:spPr>
           <a:xfrm>
-            <a:off x="914400" y="2743200"/>
-            <a:ext cx="10515600" cy="1371600"/>
+            <a:off x="457200" y="6355080"/>
+            <a:ext cx="11274552" cy="365760"/>
+          </a:xfrm>
+          <a:prstGeom prst="rect">
+            <a:avLst/>
+          </a:prstGeom>
+          <a:noFill/>
+        </p:spPr>
+        <p:txBody>
+          <a:bodyPr wrap="none">
+            <a:spAutoFit/>
+          </a:bodyPr>
+          <a:lstStyle/>
+          <a:p>
+            <a:pPr algn="r"/>
+            <a:r>
+              <a:rPr sz="1200">
+                <a:solidFill>
+                  <a:srgbClr val="64748B"/>
+                </a:solidFill>
+                <a:latin typeface="Calibri"/>
+              </a:rPr>
+              <a:t>Ngữ văn 12 · Bài 2: Những Thế Giới Thơ          24</a:t>
+            </a:r>
+          </a:p>
+        </p:txBody>
+      </p:sp>
+      <p:sp>
+        <p:nvSpPr>
+          <p:cNvPr id="7" name="TextBox 6"/>
+          <p:cNvSpPr txBox="1"/>
+          <p:nvPr/>
+        </p:nvSpPr>
+        <p:spPr>
+          <a:xfrm>
+            <a:off x="731520" y="1463040"/>
+            <a:ext cx="10789920" cy="3474720"/>
+          </a:xfrm>
+          <a:prstGeom prst="rect">
+            <a:avLst/>
+          </a:prstGeom>
+          <a:noFill/>
+        </p:spPr>
+        <p:txBody>
+          <a:bodyPr wrap="square" anchor="t" lIns="45720" rIns="45720">
+            <a:spAutoFit/>
+          </a:bodyPr>
+          <a:lstStyle/>
+          <a:p>
+            <a:pPr algn="l" marL="365760" indent="-365760">
+              <a:spcAft>
+                <a:spcPts val="800"/>
+              </a:spcAft>
+              <a:buClr>
+                <a:srgbClr val="1E40AF"/>
+              </a:buClr>
+              <a:buFont typeface="Arial"/>
+              <a:buChar char="•"/>
+            </a:pPr>
+            <a:r>
+              <a:rPr sz="2300">
+                <a:solidFill>
+                  <a:srgbClr val="1E293B"/>
+                </a:solidFill>
+                <a:latin typeface="Calibri"/>
+              </a:rPr>
+              <a:t>Nghệ sĩ lãng du, tự do: “đi lang thang về miền đơn độc / với vầng trăng chếnh choáng”.</a:t>
+            </a:r>
+          </a:p>
+          <a:p>
+            <a:pPr algn="l" marL="365760" indent="-365760">
+              <a:spcAft>
+                <a:spcPts val="800"/>
+              </a:spcAft>
+              <a:buClr>
+                <a:srgbClr val="1E40AF"/>
+              </a:buClr>
+              <a:buFont typeface="Arial"/>
+              <a:buChar char="•"/>
+            </a:pPr>
+            <a:r>
+              <a:rPr sz="2300">
+                <a:solidFill>
+                  <a:srgbClr val="1E293B"/>
+                </a:solidFill>
+                <a:latin typeface="Calibri"/>
+              </a:rPr>
+              <a:t>“Tây Ban Nha / hát nghêu ngao / bỗng kinh hoàng” – gắn với số phận đất nước.</a:t>
+            </a:r>
+          </a:p>
+          <a:p>
+            <a:pPr algn="l" marL="365760" indent="-365760">
+              <a:spcAft>
+                <a:spcPts val="800"/>
+              </a:spcAft>
+              <a:buClr>
+                <a:srgbClr val="1E40AF"/>
+              </a:buClr>
+              <a:buFont typeface="Arial"/>
+              <a:buChar char="•"/>
+            </a:pPr>
+            <a:r>
+              <a:rPr sz="2300">
+                <a:solidFill>
+                  <a:srgbClr val="1E293B"/>
+                </a:solidFill>
+                <a:latin typeface="Calibri"/>
+              </a:rPr>
+              <a:t>“áo choàng bê bết đỏ / Lor-ca bị điệu về bãi bắn” – cái chết oan khuất.</a:t>
+            </a:r>
+          </a:p>
+        </p:txBody>
+      </p:sp>
+      <p:sp>
+        <p:nvSpPr>
+          <p:cNvPr id="8" name="Rounded Rectangle 7"/>
+          <p:cNvSpPr/>
+          <p:nvPr/>
+        </p:nvSpPr>
+        <p:spPr>
+          <a:xfrm>
+            <a:off x="731520" y="5074920"/>
+            <a:ext cx="10789920" cy="731520"/>
+          </a:xfrm>
+          <a:prstGeom prst="roundRect">
+            <a:avLst>
+              <a:gd name="adj" fmla="val 8000"/>
+            </a:avLst>
+          </a:prstGeom>
+          <a:solidFill>
+            <a:srgbClr val="FEF2F2"/>
+          </a:solidFill>
+          <a:ln w="19050">
+            <a:solidFill>
+              <a:srgbClr val="991B1B"/>
+            </a:solidFill>
+          </a:ln>
+          <a:effectLst/>
+        </p:spPr>
+        <p:style>
+          <a:lnRef idx="1">
+            <a:schemeClr val="accent1"/>
+          </a:lnRef>
+          <a:fillRef idx="3">
+            <a:schemeClr val="accent1"/>
+          </a:fillRef>
+          <a:effectRef idx="2">
+            <a:schemeClr val="accent1"/>
+          </a:effectRef>
+          <a:fontRef idx="minor">
+            <a:schemeClr val="lt1"/>
+          </a:fontRef>
+        </p:style>
+        <p:txBody>
+          <a:bodyPr rtlCol="0" anchor="ctr"/>
+          <a:lstStyle/>
+          <a:p>
+            <a:pPr algn="ctr"/>
+          </a:p>
+        </p:txBody>
+      </p:sp>
+      <p:sp>
+        <p:nvSpPr>
+          <p:cNvPr id="9" name="TextBox 8"/>
+          <p:cNvSpPr txBox="1"/>
+          <p:nvPr/>
+        </p:nvSpPr>
+        <p:spPr>
+          <a:xfrm>
+            <a:off x="914400" y="5074920"/>
+            <a:ext cx="10424160" cy="731520"/>
           </a:xfrm>
           <a:prstGeom prst="rect">
             <a:avLst/>
@@ -10473,17 +10971,17 @@
           <a:p>
             <a:pPr algn="l">
               <a:spcAft>
-                <a:spcPts val="800"/>
+                <a:spcPts val="400"/>
               </a:spcAft>
             </a:pPr>
             <a:r>
-              <a:rPr sz="3600" b="1">
-                <a:solidFill>
-                  <a:srgbClr val="1E40AF"/>
+              <a:rPr sz="2400" b="1">
+                <a:solidFill>
+                  <a:srgbClr val="991B1B"/>
                 </a:solidFill>
                 <a:latin typeface="Calibri"/>
               </a:rPr>
-              <a:t>TIẾT 19: THỰC HÀNH TIẾNG VIỆT</a:t>
+              <a:t>Người nghệ sĩ tự do, cô đơn, bị bạo lực vùi dập.</a:t>
             </a:r>
           </a:p>
         </p:txBody>
@@ -10566,14 +11064,14 @@
         </p:nvSpPr>
         <p:spPr>
           <a:xfrm>
-            <a:off x="10253167" y="457200"/>
-            <a:ext cx="1389888" cy="457200"/>
+            <a:off x="10408615" y="457200"/>
+            <a:ext cx="1234440" cy="457200"/>
           </a:xfrm>
           <a:prstGeom prst="roundRect">
             <a:avLst/>
           </a:prstGeom>
           <a:solidFill>
-            <a:srgbClr val="1E40AF"/>
+            <a:srgbClr val="991B1B"/>
           </a:solidFill>
           <a:ln>
             <a:noFill/>
@@ -10606,7 +11104,7 @@
                 </a:solidFill>
                 <a:latin typeface="Arial"/>
               </a:rPr>
-              <a:t>ĐỀ BÀI</a:t>
+              <a:t>VIDEO</a:t>
             </a:r>
           </a:p>
         </p:txBody>
@@ -10620,7 +11118,7 @@
         <p:spPr>
           <a:xfrm>
             <a:off x="731520" y="274320"/>
-            <a:ext cx="9582912" cy="868680"/>
+            <a:ext cx="9738360" cy="868680"/>
           </a:xfrm>
           <a:prstGeom prst="rect">
             <a:avLst/>
@@ -10640,7 +11138,7 @@
                 </a:solidFill>
                 <a:latin typeface="Arial"/>
               </a:rPr>
-              <a:t>ẨN DỤ TRONG TÂY TIẾN</a:t>
+              <a:t>VIDEO THAM KHẢO</a:t>
             </a:r>
           </a:p>
         </p:txBody>
@@ -10724,16 +11222,40 @@
           </a:p>
         </p:txBody>
       </p:sp>
-      <p:sp>
-        <p:nvSpPr>
-          <p:cNvPr id="7" name="TextBox 6"/>
+      <p:pic>
+        <p:nvPicPr>
+          <p:cNvPr id="7" name="Picture 6" descr="QR_video_886dLSSIYnk.png"/>
+          <p:cNvPicPr>
+            <a:picLocks noChangeAspect="1"/>
+          </p:cNvPicPr>
+          <p:nvPr/>
+        </p:nvPicPr>
+        <p:blipFill>
+          <a:blip r:embed="rId2"/>
+          <a:stretch>
+            <a:fillRect/>
+          </a:stretch>
+        </p:blipFill>
+        <p:spPr>
+          <a:xfrm>
+            <a:off x="8412480" y="1554480"/>
+            <a:ext cx="3108960" cy="3108960"/>
+          </a:xfrm>
+          <a:prstGeom prst="rect">
+            <a:avLst/>
+          </a:prstGeom>
+        </p:spPr>
+      </p:pic>
+      <p:sp>
+        <p:nvSpPr>
+          <p:cNvPr id="8" name="TextBox 7"/>
           <p:cNvSpPr txBox="1"/>
           <p:nvPr/>
         </p:nvSpPr>
         <p:spPr>
           <a:xfrm>
-            <a:off x="731520" y="1463040"/>
-            <a:ext cx="10789920" cy="3566160"/>
+            <a:off x="731520" y="1554480"/>
+            <a:ext cx="7498079" cy="4206240"/>
           </a:xfrm>
           <a:prstGeom prst="rect">
             <a:avLst/>
@@ -10758,94 +11280,61 @@
                 </a:solidFill>
                 <a:latin typeface="Calibri"/>
               </a:rPr>
-              <a:t>Làm rõ mục đích và cách sử dụng ẩn dụ trong đoạn: “Tây Tiến đoàn binh không mọc tóc / Quân xanh màu lá dữ oai hùm / Mắt trừng gửi mộng qua biên giới / Đêm mơ Hà Nội dáng kiều thơm”.</a:t>
-            </a:r>
-          </a:p>
-        </p:txBody>
-      </p:sp>
-      <p:sp>
-        <p:nvSpPr>
-          <p:cNvPr id="8" name="Rounded Rectangle 7"/>
-          <p:cNvSpPr/>
-          <p:nvPr/>
-        </p:nvSpPr>
-        <p:spPr>
-          <a:xfrm>
-            <a:off x="731520" y="5120640"/>
-            <a:ext cx="10789920" cy="693420"/>
-          </a:xfrm>
-          <a:prstGeom prst="roundRect">
-            <a:avLst>
-              <a:gd name="adj" fmla="val 8000"/>
-            </a:avLst>
-          </a:prstGeom>
-          <a:solidFill>
-            <a:srgbClr val="EFF4FF"/>
-          </a:solidFill>
-          <a:ln w="19050">
-            <a:solidFill>
-              <a:srgbClr val="1E40AF"/>
-            </a:solidFill>
-          </a:ln>
-          <a:effectLst/>
-        </p:spPr>
-        <p:style>
-          <a:lnRef idx="1">
-            <a:schemeClr val="accent1"/>
-          </a:lnRef>
-          <a:fillRef idx="3">
-            <a:schemeClr val="accent1"/>
-          </a:fillRef>
-          <a:effectRef idx="2">
-            <a:schemeClr val="accent1"/>
-          </a:effectRef>
-          <a:fontRef idx="minor">
-            <a:schemeClr val="lt1"/>
-          </a:fontRef>
-        </p:style>
-        <p:txBody>
-          <a:bodyPr rtlCol="0" anchor="ctr"/>
-          <a:lstStyle/>
-          <a:p>
-            <a:pPr algn="ctr"/>
-          </a:p>
-        </p:txBody>
-      </p:sp>
-      <p:sp>
-        <p:nvSpPr>
-          <p:cNvPr id="9" name="TextBox 8"/>
-          <p:cNvSpPr txBox="1"/>
-          <p:nvPr/>
-        </p:nvSpPr>
-        <p:spPr>
-          <a:xfrm>
-            <a:off x="914400" y="5120640"/>
-            <a:ext cx="10424160" cy="693420"/>
-          </a:xfrm>
-          <a:prstGeom prst="rect">
-            <a:avLst/>
-          </a:prstGeom>
-          <a:noFill/>
-        </p:spPr>
-        <p:txBody>
-          <a:bodyPr wrap="square" anchor="ctr" lIns="45720" rIns="45720">
-            <a:spAutoFit/>
-          </a:bodyPr>
-          <a:lstStyle/>
+              <a:t>🎬 Thanh Thảo nói về Đàn ghi-ta của Lorca</a:t>
+            </a:r>
+          </a:p>
           <a:p>
             <a:pPr algn="l">
               <a:spcAft>
-                <a:spcPts val="400"/>
+                <a:spcPts val="800"/>
               </a:spcAft>
             </a:pPr>
             <a:r>
-              <a:rPr sz="2200" b="1">
-                <a:solidFill>
-                  <a:srgbClr val="1E40AF"/>
+              <a:rPr sz="2000">
+                <a:solidFill>
+                  <a:srgbClr val="64748B"/>
                 </a:solidFill>
                 <a:latin typeface="Calibri"/>
               </a:rPr>
-              <a:t>💡 “Không mọc tóc”, “xanh màu lá” nói tới hiện thực nào?</a:t>
+              <a:t>Kênh: Trần Hà Nam</a:t>
+            </a:r>
+          </a:p>
+          <a:p>
+            <a:pPr algn="l" marL="365760" indent="-365760">
+              <a:spcAft>
+                <a:spcPts val="800"/>
+              </a:spcAft>
+              <a:buClr>
+                <a:srgbClr val="1E40AF"/>
+              </a:buClr>
+              <a:buFont typeface="Arial"/>
+              <a:buChar char="•"/>
+            </a:pPr>
+            <a:r>
+              <a:rPr sz="2000">
+                <a:solidFill>
+                  <a:srgbClr val="1E293B"/>
+                </a:solidFill>
+                <a:latin typeface="Calibri"/>
+              </a:rPr>
+              <a:t>Mở rộng – tác giả nói về hoàn cảnh sáng tác</a:t>
+            </a:r>
+          </a:p>
+          <a:p>
+            <a:pPr algn="l">
+              <a:spcAft>
+                <a:spcPts val="800"/>
+              </a:spcAft>
+            </a:pPr>
+            <a:r>
+              <a:rPr sz="1600">
+                <a:solidFill>
+                  <a:srgbClr val="64748B"/>
+                </a:solidFill>
+                <a:latin typeface="Calibri"/>
+                <a:hlinkClick r:id="rId3"/>
+              </a:rPr>
+              <a:t>https://www.youtube.com/watch?v=886dLSSIYnk</a:t>
             </a:r>
           </a:p>
         </p:txBody>
@@ -10928,14 +11417,14 @@
         </p:nvSpPr>
         <p:spPr>
           <a:xfrm>
-            <a:off x="9942271" y="457200"/>
-            <a:ext cx="1700784" cy="457200"/>
+            <a:off x="10253167" y="457200"/>
+            <a:ext cx="1389888" cy="457200"/>
           </a:xfrm>
           <a:prstGeom prst="roundRect">
             <a:avLst/>
           </a:prstGeom>
           <a:solidFill>
-            <a:srgbClr val="991B1B"/>
+            <a:srgbClr val="1E40AF"/>
           </a:solidFill>
           <a:ln>
             <a:noFill/>
@@ -10968,7 +11457,7 @@
                 </a:solidFill>
                 <a:latin typeface="Arial"/>
               </a:rPr>
-              <a:t>LỜI GIẢI</a:t>
+              <a:t>ĐỀ BÀI</a:t>
             </a:r>
           </a:p>
         </p:txBody>
@@ -10982,7 +11471,7 @@
         <p:spPr>
           <a:xfrm>
             <a:off x="731520" y="274320"/>
-            <a:ext cx="9272016" cy="868680"/>
+            <a:ext cx="9582912" cy="868680"/>
           </a:xfrm>
           <a:prstGeom prst="rect">
             <a:avLst/>
@@ -11002,7 +11491,7 @@
                 </a:solidFill>
                 <a:latin typeface="Arial"/>
               </a:rPr>
-              <a:t>ẨN DỤ TRONG TÂY TIẾN</a:t>
+              <a:t>TIẾNG ĐÀN – CÁI CHẾT VÀ SỰ BẤT TỬ</a:t>
             </a:r>
           </a:p>
         </p:txBody>
@@ -11095,7 +11584,7 @@
         <p:spPr>
           <a:xfrm>
             <a:off x="731520" y="1463040"/>
-            <a:ext cx="10789920" cy="3474720"/>
+            <a:ext cx="10789920" cy="3566160"/>
           </a:xfrm>
           <a:prstGeom prst="rect">
             <a:avLst/>
@@ -11108,66 +11597,19 @@
           </a:bodyPr>
           <a:lstStyle/>
           <a:p>
-            <a:pPr algn="l" marL="365760" indent="-365760">
+            <a:pPr algn="l">
               <a:spcAft>
                 <a:spcPts val="800"/>
               </a:spcAft>
-              <a:buClr>
-                <a:srgbClr val="1E40AF"/>
-              </a:buClr>
-              <a:buFont typeface="Arial"/>
-              <a:buChar char="•"/>
             </a:pPr>
             <a:r>
-              <a:rPr sz="2300">
+              <a:rPr sz="2600" b="1">
                 <a:solidFill>
                   <a:srgbClr val="1E293B"/>
                 </a:solidFill>
                 <a:latin typeface="Calibri"/>
               </a:rPr>
-              <a:t>“Không mọc tóc”, “xanh màu lá” – hậu quả sốt rét rừng.</a:t>
-            </a:r>
-          </a:p>
-          <a:p>
-            <a:pPr algn="l" marL="365760" indent="-365760">
-              <a:spcAft>
-                <a:spcPts val="800"/>
-              </a:spcAft>
-              <a:buClr>
-                <a:srgbClr val="1E40AF"/>
-              </a:buClr>
-              <a:buFont typeface="Arial"/>
-              <a:buChar char="•"/>
-            </a:pPr>
-            <a:r>
-              <a:rPr sz="2300">
-                <a:solidFill>
-                  <a:srgbClr val="1E293B"/>
-                </a:solidFill>
-                <a:latin typeface="Calibri"/>
-              </a:rPr>
-              <a:t>“dữ oai hùm” – khí thế oai phong.</a:t>
-            </a:r>
-          </a:p>
-          <a:p>
-            <a:pPr algn="l" marL="365760" indent="-365760">
-              <a:spcAft>
-                <a:spcPts val="800"/>
-              </a:spcAft>
-              <a:buClr>
-                <a:srgbClr val="1E40AF"/>
-              </a:buClr>
-              <a:buFont typeface="Arial"/>
-              <a:buChar char="•"/>
-            </a:pPr>
-            <a:r>
-              <a:rPr sz="2300">
-                <a:solidFill>
-                  <a:srgbClr val="1E293B"/>
-                </a:solidFill>
-                <a:latin typeface="Calibri"/>
-              </a:rPr>
-              <a:t>Hiện thực được nhìn bằng cảm hứng lãng mạn, tránh bi luỵ.</a:t>
+              <a:t>Chỉ ra biện pháp tu từ miêu tả tiếng đàn; ý nghĩa hình ảnh biểu tượng; hình ảnh thực – ảo về cái chết và sự bất tử của Lor-ca.</a:t>
             </a:r>
           </a:p>
         </p:txBody>
@@ -11180,8 +11622,8 @@
         </p:nvSpPr>
         <p:spPr>
           <a:xfrm>
-            <a:off x="731520" y="5074920"/>
-            <a:ext cx="10789920" cy="731520"/>
+            <a:off x="731520" y="5120640"/>
+            <a:ext cx="10789920" cy="693420"/>
           </a:xfrm>
           <a:prstGeom prst="roundRect">
             <a:avLst>
@@ -11189,11 +11631,11 @@
             </a:avLst>
           </a:prstGeom>
           <a:solidFill>
-            <a:srgbClr val="FEF2F2"/>
+            <a:srgbClr val="EFF4FF"/>
           </a:solidFill>
           <a:ln w="19050">
             <a:solidFill>
-              <a:srgbClr val="991B1B"/>
+              <a:srgbClr val="1E40AF"/>
             </a:solidFill>
           </a:ln>
           <a:effectLst/>
@@ -11228,8 +11670,8 @@
         </p:nvSpPr>
         <p:spPr>
           <a:xfrm>
-            <a:off x="914400" y="5074920"/>
-            <a:ext cx="10424160" cy="731520"/>
+            <a:off x="914400" y="5120640"/>
+            <a:ext cx="10424160" cy="693420"/>
           </a:xfrm>
           <a:prstGeom prst="rect">
             <a:avLst/>
@@ -11248,13 +11690,13 @@
               </a:spcAft>
             </a:pPr>
             <a:r>
-              <a:rPr sz="2400" b="1">
-                <a:solidFill>
-                  <a:srgbClr val="991B1B"/>
+              <a:rPr sz="2200" b="1">
+                <a:solidFill>
+                  <a:srgbClr val="1E40AF"/>
                 </a:solidFill>
                 <a:latin typeface="Calibri"/>
               </a:rPr>
-              <a:t>Ẩn dụ tạo vẻ đẹp vừa chân thực vừa hào hùng.</a:t>
+              <a:t>💡 Tiếng đàn được “nhìn” bằng màu sắc, hình khối nào?</a:t>
             </a:r>
           </a:p>
         </p:txBody>
@@ -11337,14 +11779,14 @@
         </p:nvSpPr>
         <p:spPr>
           <a:xfrm>
-            <a:off x="10253167" y="457200"/>
-            <a:ext cx="1389888" cy="457200"/>
+            <a:off x="9942271" y="457200"/>
+            <a:ext cx="1700784" cy="457200"/>
           </a:xfrm>
           <a:prstGeom prst="roundRect">
             <a:avLst/>
           </a:prstGeom>
           <a:solidFill>
-            <a:srgbClr val="1E40AF"/>
+            <a:srgbClr val="991B1B"/>
           </a:solidFill>
           <a:ln>
             <a:noFill/>
@@ -11377,7 +11819,7 @@
                 </a:solidFill>
                 <a:latin typeface="Arial"/>
               </a:rPr>
-              <a:t>ĐỀ BÀI</a:t>
+              <a:t>LỜI GIẢI</a:t>
             </a:r>
           </a:p>
         </p:txBody>
@@ -11391,7 +11833,7 @@
         <p:spPr>
           <a:xfrm>
             <a:off x="731520" y="274320"/>
-            <a:ext cx="9582912" cy="868680"/>
+            <a:ext cx="9272016" cy="868680"/>
           </a:xfrm>
           <a:prstGeom prst="rect">
             <a:avLst/>
@@ -11411,7 +11853,7 @@
                 </a:solidFill>
                 <a:latin typeface="Arial"/>
               </a:rPr>
-              <a:t>PHÉP ĐỐI</a:t>
+              <a:t>TIẾNG ĐÀN – CÁI CHẾT VÀ SỰ BẤT TỬ</a:t>
             </a:r>
           </a:p>
         </p:txBody>
@@ -11504,7 +11946,7 @@
         <p:spPr>
           <a:xfrm>
             <a:off x="731520" y="1463040"/>
-            <a:ext cx="10789920" cy="3566160"/>
+            <a:ext cx="10789920" cy="3474720"/>
           </a:xfrm>
           <a:prstGeom prst="rect">
             <a:avLst/>
@@ -11517,19 +11959,87 @@
           </a:bodyPr>
           <a:lstStyle/>
           <a:p>
-            <a:pPr algn="l">
+            <a:pPr algn="l" marL="365760" indent="-365760">
               <a:spcAft>
                 <a:spcPts val="800"/>
               </a:spcAft>
+              <a:buClr>
+                <a:srgbClr val="1E40AF"/>
+              </a:buClr>
+              <a:buFont typeface="Arial"/>
+              <a:buChar char="•"/>
             </a:pPr>
             <a:r>
-              <a:rPr sz="2600" b="1">
+              <a:rPr sz="2300">
                 <a:solidFill>
                   <a:srgbClr val="1E293B"/>
                 </a:solidFill>
                 <a:latin typeface="Calibri"/>
               </a:rPr>
-              <a:t>So sánh cách dùng phép đối trong Cảm hoài (“Gặp thời đồ điếu công thành dễ / Lỡ vận anh hùng hận xót xa”) và Tây Tiến (“Sài Khao sương lấp đoàn quân mỏi / Mường Lát hoa về trong đêm hơi”).</a:t>
+              <a:t>Điệp “tiếng ghi ta” + chuyển đổi cảm giác: nâu, lá xanh, tròn bọt nước, ròng ròng máu chảy.</a:t>
+            </a:r>
+          </a:p>
+          <a:p>
+            <a:pPr algn="l" marL="365760" indent="-365760">
+              <a:spcAft>
+                <a:spcPts val="800"/>
+              </a:spcAft>
+              <a:buClr>
+                <a:srgbClr val="1E40AF"/>
+              </a:buClr>
+              <a:buFont typeface="Arial"/>
+              <a:buChar char="•"/>
+            </a:pPr>
+            <a:r>
+              <a:rPr sz="2300">
+                <a:solidFill>
+                  <a:srgbClr val="1E293B"/>
+                </a:solidFill>
+                <a:latin typeface="Calibri"/>
+              </a:rPr>
+              <a:t>“không ai chôn cất tiếng đàn / tiếng đàn như cỏ mọc hoang” – bất tử.</a:t>
+            </a:r>
+          </a:p>
+          <a:p>
+            <a:pPr algn="l" marL="365760" indent="-365760">
+              <a:spcAft>
+                <a:spcPts val="800"/>
+              </a:spcAft>
+              <a:buClr>
+                <a:srgbClr val="1E40AF"/>
+              </a:buClr>
+              <a:buFont typeface="Arial"/>
+              <a:buChar char="•"/>
+            </a:pPr>
+            <a:r>
+              <a:rPr sz="2300">
+                <a:solidFill>
+                  <a:srgbClr val="1E293B"/>
+                </a:solidFill>
+                <a:latin typeface="Calibri"/>
+              </a:rPr>
+              <a:t>“Lor-ca bơi sang ngang trên chiếc ghi ta màu bạc” – cái chết hoá giải thoát.</a:t>
+            </a:r>
+          </a:p>
+          <a:p>
+            <a:pPr algn="l" marL="365760" indent="-365760">
+              <a:spcAft>
+                <a:spcPts val="800"/>
+              </a:spcAft>
+              <a:buClr>
+                <a:srgbClr val="1E40AF"/>
+              </a:buClr>
+              <a:buFont typeface="Arial"/>
+              <a:buChar char="•"/>
+            </a:pPr>
+            <a:r>
+              <a:rPr sz="2300">
+                <a:solidFill>
+                  <a:srgbClr val="1E293B"/>
+                </a:solidFill>
+                <a:latin typeface="Calibri"/>
+              </a:rPr>
+              <a:t>Dòng kết “li-la li-la li-la…” – tiếng đàn tiễn biệt.</a:t>
             </a:r>
           </a:p>
         </p:txBody>
@@ -11542,8 +12052,8 @@
         </p:nvSpPr>
         <p:spPr>
           <a:xfrm>
-            <a:off x="731520" y="5120640"/>
-            <a:ext cx="10789920" cy="693420"/>
+            <a:off x="731520" y="5074920"/>
+            <a:ext cx="10789920" cy="731520"/>
           </a:xfrm>
           <a:prstGeom prst="roundRect">
             <a:avLst>
@@ -11551,11 +12061,11 @@
             </a:avLst>
           </a:prstGeom>
           <a:solidFill>
-            <a:srgbClr val="EFF4FF"/>
+            <a:srgbClr val="FEF2F2"/>
           </a:solidFill>
           <a:ln w="19050">
             <a:solidFill>
-              <a:srgbClr val="1E40AF"/>
+              <a:srgbClr val="991B1B"/>
             </a:solidFill>
           </a:ln>
           <a:effectLst/>
@@ -11590,8 +12100,8 @@
         </p:nvSpPr>
         <p:spPr>
           <a:xfrm>
-            <a:off x="914400" y="5120640"/>
-            <a:ext cx="10424160" cy="693420"/>
+            <a:off x="914400" y="5074920"/>
+            <a:ext cx="10424160" cy="731520"/>
           </a:xfrm>
           <a:prstGeom prst="rect">
             <a:avLst/>
@@ -11610,13 +12120,13 @@
               </a:spcAft>
             </a:pPr>
             <a:r>
-              <a:rPr sz="2200" b="1">
-                <a:solidFill>
-                  <a:srgbClr val="1E40AF"/>
+              <a:rPr sz="2400" b="1">
+                <a:solidFill>
+                  <a:srgbClr val="991B1B"/>
                 </a:solidFill>
                 <a:latin typeface="Calibri"/>
               </a:rPr>
-              <a:t>💡 Đối chỉnh hay đối linh hoạt?</a:t>
+              <a:t>Nghệ thuật chân chính bất tử.</a:t>
             </a:r>
           </a:p>
         </p:txBody>
@@ -11630,6 +12140,115 @@
 </file>
 
 <file path=ppt/slides/slide28.xml><?xml version="1.0" encoding="utf-8"?>
+<p:sld xmlns:a="http://schemas.openxmlformats.org/drawingml/2006/main" xmlns:p="http://schemas.openxmlformats.org/presentationml/2006/main" xmlns:r="http://schemas.openxmlformats.org/officeDocument/2006/relationships">
+  <p:cSld>
+    <p:bg>
+      <p:bgPr>
+        <a:solidFill>
+          <a:srgbClr val="F8F9FA"/>
+        </a:solidFill>
+        <a:effectLst/>
+      </p:bgPr>
+    </p:bg>
+    <p:spTree>
+      <p:nvGrpSpPr>
+        <p:cNvPr id="1" name=""/>
+        <p:cNvGrpSpPr/>
+        <p:nvPr/>
+      </p:nvGrpSpPr>
+      <p:grpSpPr/>
+      <p:sp>
+        <p:nvSpPr>
+          <p:cNvPr id="2" name="Rectangle 1"/>
+          <p:cNvSpPr/>
+          <p:nvPr/>
+        </p:nvSpPr>
+        <p:spPr>
+          <a:xfrm>
+            <a:off x="548640" y="2926080"/>
+            <a:ext cx="164592" cy="1005840"/>
+          </a:xfrm>
+          <a:prstGeom prst="rect">
+            <a:avLst/>
+          </a:prstGeom>
+          <a:solidFill>
+            <a:srgbClr val="991B1B"/>
+          </a:solidFill>
+          <a:ln>
+            <a:noFill/>
+          </a:ln>
+          <a:effectLst/>
+        </p:spPr>
+        <p:style>
+          <a:lnRef idx="1">
+            <a:schemeClr val="accent1"/>
+          </a:lnRef>
+          <a:fillRef idx="3">
+            <a:schemeClr val="accent1"/>
+          </a:fillRef>
+          <a:effectRef idx="2">
+            <a:schemeClr val="accent1"/>
+          </a:effectRef>
+          <a:fontRef idx="minor">
+            <a:schemeClr val="lt1"/>
+          </a:fontRef>
+        </p:style>
+        <p:txBody>
+          <a:bodyPr rtlCol="0" anchor="ctr"/>
+          <a:lstStyle/>
+          <a:p>
+            <a:pPr algn="ctr"/>
+          </a:p>
+        </p:txBody>
+      </p:sp>
+      <p:sp>
+        <p:nvSpPr>
+          <p:cNvPr id="3" name="TextBox 2"/>
+          <p:cNvSpPr txBox="1"/>
+          <p:nvPr/>
+        </p:nvSpPr>
+        <p:spPr>
+          <a:xfrm>
+            <a:off x="914400" y="2743200"/>
+            <a:ext cx="10515600" cy="1371600"/>
+          </a:xfrm>
+          <a:prstGeom prst="rect">
+            <a:avLst/>
+          </a:prstGeom>
+          <a:noFill/>
+        </p:spPr>
+        <p:txBody>
+          <a:bodyPr wrap="square" anchor="ctr" lIns="45720" rIns="45720">
+            <a:spAutoFit/>
+          </a:bodyPr>
+          <a:lstStyle/>
+          <a:p>
+            <a:pPr algn="l">
+              <a:spcAft>
+                <a:spcPts val="800"/>
+              </a:spcAft>
+            </a:pPr>
+            <a:r>
+              <a:rPr sz="3600" b="1">
+                <a:solidFill>
+                  <a:srgbClr val="1E40AF"/>
+                </a:solidFill>
+                <a:latin typeface="Calibri"/>
+              </a:rPr>
+              <a:t>TIẾT 19: THỰC HÀNH TIẾNG VIỆT</a:t>
+            </a:r>
+          </a:p>
+        </p:txBody>
+      </p:sp>
+    </p:spTree>
+  </p:cSld>
+  <p:clrMapOvr>
+    <a:masterClrMapping/>
+  </p:clrMapOvr>
+</p:sld>
+</file>
+
+<file path=ppt/slides/slide29.xml><?xml version="1.0" encoding="utf-8"?>
 <p:sld xmlns:a="http://schemas.openxmlformats.org/drawingml/2006/main" xmlns:p="http://schemas.openxmlformats.org/presentationml/2006/main" xmlns:r="http://schemas.openxmlformats.org/officeDocument/2006/relationships">
   <p:cSld>
     <p:bg>
@@ -11699,14 +12318,14 @@
         </p:nvSpPr>
         <p:spPr>
           <a:xfrm>
-            <a:off x="9942271" y="457200"/>
-            <a:ext cx="1700784" cy="457200"/>
+            <a:off x="10253167" y="457200"/>
+            <a:ext cx="1389888" cy="457200"/>
           </a:xfrm>
           <a:prstGeom prst="roundRect">
             <a:avLst/>
           </a:prstGeom>
           <a:solidFill>
-            <a:srgbClr val="991B1B"/>
+            <a:srgbClr val="1E40AF"/>
           </a:solidFill>
           <a:ln>
             <a:noFill/>
@@ -11739,7 +12358,7 @@
                 </a:solidFill>
                 <a:latin typeface="Arial"/>
               </a:rPr>
-              <a:t>LỜI GIẢI</a:t>
+              <a:t>ĐỀ BÀI</a:t>
             </a:r>
           </a:p>
         </p:txBody>
@@ -11753,7 +12372,7 @@
         <p:spPr>
           <a:xfrm>
             <a:off x="731520" y="274320"/>
-            <a:ext cx="9272016" cy="868680"/>
+            <a:ext cx="9582912" cy="868680"/>
           </a:xfrm>
           <a:prstGeom prst="rect">
             <a:avLst/>
@@ -11773,7 +12392,7 @@
                 </a:solidFill>
                 <a:latin typeface="Arial"/>
               </a:rPr>
-              <a:t>PHÉP ĐỐI</a:t>
+              <a:t>ẨN DỤ TRONG TÂY TIẾN</a:t>
             </a:r>
           </a:p>
         </p:txBody>
@@ -11852,7 +12471,7 @@
                 </a:solidFill>
                 <a:latin typeface="Calibri"/>
               </a:rPr>
-              <a:t>Ngữ văn 12 · Bài 2: Những Thế Giới Thơ          28</a:t>
+              <a:t>Ngữ văn 12 · Bài 2: Những Thế Giới Thơ          29</a:t>
             </a:r>
           </a:p>
         </p:txBody>
@@ -11866,7 +12485,7 @@
         <p:spPr>
           <a:xfrm>
             <a:off x="731520" y="1463040"/>
-            <a:ext cx="10789920" cy="3474720"/>
+            <a:ext cx="10789920" cy="3566160"/>
           </a:xfrm>
           <a:prstGeom prst="rect">
             <a:avLst/>
@@ -11879,66 +12498,19 @@
           </a:bodyPr>
           <a:lstStyle/>
           <a:p>
-            <a:pPr algn="l" marL="365760" indent="-365760">
+            <a:pPr algn="l">
               <a:spcAft>
                 <a:spcPts val="800"/>
               </a:spcAft>
-              <a:buClr>
-                <a:srgbClr val="1E40AF"/>
-              </a:buClr>
-              <a:buFont typeface="Arial"/>
-              <a:buChar char="•"/>
             </a:pPr>
             <a:r>
-              <a:rPr sz="2300">
+              <a:rPr sz="2600" b="1">
                 <a:solidFill>
                   <a:srgbClr val="1E293B"/>
                 </a:solidFill>
                 <a:latin typeface="Calibri"/>
               </a:rPr>
-              <a:t>Cảm hoài: đối chỉnh theo luật Đường, ý đối lập rõ: gặp thời – lỡ vận.</a:t>
-            </a:r>
-          </a:p>
-          <a:p>
-            <a:pPr algn="l" marL="365760" indent="-365760">
-              <a:spcAft>
-                <a:spcPts val="800"/>
-              </a:spcAft>
-              <a:buClr>
-                <a:srgbClr val="1E40AF"/>
-              </a:buClr>
-              <a:buFont typeface="Arial"/>
-              <a:buChar char="•"/>
-            </a:pPr>
-            <a:r>
-              <a:rPr sz="2300">
-                <a:solidFill>
-                  <a:srgbClr val="1E293B"/>
-                </a:solidFill>
-                <a:latin typeface="Calibri"/>
-              </a:rPr>
-              <a:t>Tây Tiến: đối linh hoạt, tương phản gian khổ – thơ mộng.</a:t>
-            </a:r>
-          </a:p>
-          <a:p>
-            <a:pPr algn="l" marL="365760" indent="-365760">
-              <a:spcAft>
-                <a:spcPts val="800"/>
-              </a:spcAft>
-              <a:buClr>
-                <a:srgbClr val="1E40AF"/>
-              </a:buClr>
-              <a:buFont typeface="Arial"/>
-              <a:buChar char="•"/>
-            </a:pPr>
-            <a:r>
-              <a:rPr sz="2300">
-                <a:solidFill>
-                  <a:srgbClr val="1E293B"/>
-                </a:solidFill>
-                <a:latin typeface="Calibri"/>
-              </a:rPr>
-              <a:t>Cả hai: tạo cân xứng, nhấn mạnh cảm xúc.</a:t>
+              <a:t>Làm rõ mục đích và cách sử dụng ẩn dụ trong đoạn: “Tây Tiến đoàn binh không mọc tóc / Quân xanh màu lá dữ oai hùm / Mắt trừng gửi mộng qua biên giới / Đêm mơ Hà Nội dáng kiều thơm”.</a:t>
             </a:r>
           </a:p>
         </p:txBody>
@@ -11951,8 +12523,8 @@
         </p:nvSpPr>
         <p:spPr>
           <a:xfrm>
-            <a:off x="731520" y="5074920"/>
-            <a:ext cx="10789920" cy="731520"/>
+            <a:off x="731520" y="5120640"/>
+            <a:ext cx="10789920" cy="693420"/>
           </a:xfrm>
           <a:prstGeom prst="roundRect">
             <a:avLst>
@@ -11960,11 +12532,11 @@
             </a:avLst>
           </a:prstGeom>
           <a:solidFill>
-            <a:srgbClr val="FEF2F2"/>
+            <a:srgbClr val="EFF4FF"/>
           </a:solidFill>
           <a:ln w="19050">
             <a:solidFill>
-              <a:srgbClr val="991B1B"/>
+              <a:srgbClr val="1E40AF"/>
             </a:solidFill>
           </a:ln>
           <a:effectLst/>
@@ -11999,8 +12571,8 @@
         </p:nvSpPr>
         <p:spPr>
           <a:xfrm>
-            <a:off x="914400" y="5074920"/>
-            <a:ext cx="10424160" cy="731520"/>
+            <a:off x="914400" y="5120640"/>
+            <a:ext cx="10424160" cy="693420"/>
           </a:xfrm>
           <a:prstGeom prst="rect">
             <a:avLst/>
@@ -12019,122 +12591,13 @@
               </a:spcAft>
             </a:pPr>
             <a:r>
-              <a:rPr sz="2400" b="1">
-                <a:solidFill>
-                  <a:srgbClr val="991B1B"/>
+              <a:rPr sz="2200" b="1">
+                <a:solidFill>
+                  <a:srgbClr val="1E40AF"/>
                 </a:solidFill>
                 <a:latin typeface="Calibri"/>
               </a:rPr>
-              <a:t>Đối – cổ điển chuẩn mực và lãng mạn phóng khoáng.</a:t>
-            </a:r>
-          </a:p>
-        </p:txBody>
-      </p:sp>
-    </p:spTree>
-  </p:cSld>
-  <p:clrMapOvr>
-    <a:masterClrMapping/>
-  </p:clrMapOvr>
-</p:sld>
-</file>
-
-<file path=ppt/slides/slide29.xml><?xml version="1.0" encoding="utf-8"?>
-<p:sld xmlns:a="http://schemas.openxmlformats.org/drawingml/2006/main" xmlns:p="http://schemas.openxmlformats.org/presentationml/2006/main" xmlns:r="http://schemas.openxmlformats.org/officeDocument/2006/relationships">
-  <p:cSld>
-    <p:bg>
-      <p:bgPr>
-        <a:solidFill>
-          <a:srgbClr val="F8F9FA"/>
-        </a:solidFill>
-        <a:effectLst/>
-      </p:bgPr>
-    </p:bg>
-    <p:spTree>
-      <p:nvGrpSpPr>
-        <p:cNvPr id="1" name=""/>
-        <p:cNvGrpSpPr/>
-        <p:nvPr/>
-      </p:nvGrpSpPr>
-      <p:grpSpPr/>
-      <p:sp>
-        <p:nvSpPr>
-          <p:cNvPr id="2" name="Rectangle 1"/>
-          <p:cNvSpPr/>
-          <p:nvPr/>
-        </p:nvSpPr>
-        <p:spPr>
-          <a:xfrm>
-            <a:off x="548640" y="2926080"/>
-            <a:ext cx="164592" cy="1005840"/>
-          </a:xfrm>
-          <a:prstGeom prst="rect">
-            <a:avLst/>
-          </a:prstGeom>
-          <a:solidFill>
-            <a:srgbClr val="991B1B"/>
-          </a:solidFill>
-          <a:ln>
-            <a:noFill/>
-          </a:ln>
-          <a:effectLst/>
-        </p:spPr>
-        <p:style>
-          <a:lnRef idx="1">
-            <a:schemeClr val="accent1"/>
-          </a:lnRef>
-          <a:fillRef idx="3">
-            <a:schemeClr val="accent1"/>
-          </a:fillRef>
-          <a:effectRef idx="2">
-            <a:schemeClr val="accent1"/>
-          </a:effectRef>
-          <a:fontRef idx="minor">
-            <a:schemeClr val="lt1"/>
-          </a:fontRef>
-        </p:style>
-        <p:txBody>
-          <a:bodyPr rtlCol="0" anchor="ctr"/>
-          <a:lstStyle/>
-          <a:p>
-            <a:pPr algn="ctr"/>
-          </a:p>
-        </p:txBody>
-      </p:sp>
-      <p:sp>
-        <p:nvSpPr>
-          <p:cNvPr id="3" name="TextBox 2"/>
-          <p:cNvSpPr txBox="1"/>
-          <p:nvPr/>
-        </p:nvSpPr>
-        <p:spPr>
-          <a:xfrm>
-            <a:off x="914400" y="2743200"/>
-            <a:ext cx="10515600" cy="1371600"/>
-          </a:xfrm>
-          <a:prstGeom prst="rect">
-            <a:avLst/>
-          </a:prstGeom>
-          <a:noFill/>
-        </p:spPr>
-        <p:txBody>
-          <a:bodyPr wrap="square" anchor="ctr" lIns="45720" rIns="45720">
-            <a:spAutoFit/>
-          </a:bodyPr>
-          <a:lstStyle/>
-          <a:p>
-            <a:pPr algn="l">
-              <a:spcAft>
-                <a:spcPts val="800"/>
-              </a:spcAft>
-            </a:pPr>
-            <a:r>
-              <a:rPr sz="3600" b="1">
-                <a:solidFill>
-                  <a:srgbClr val="1E40AF"/>
-                </a:solidFill>
-                <a:latin typeface="Calibri"/>
-              </a:rPr>
-              <a:t>TIẾT 20 – 22: VIẾT – NÓI VÀ NGHE</a:t>
+              <a:t>💡 “Không mọc tóc”, “xanh màu lá” nói tới hiện thực nào?</a:t>
             </a:r>
           </a:p>
         </p:txBody>
@@ -12326,14 +12789,14 @@
         </p:nvSpPr>
         <p:spPr>
           <a:xfrm>
-            <a:off x="10097719" y="457200"/>
-            <a:ext cx="1545336" cy="457200"/>
+            <a:off x="9942271" y="457200"/>
+            <a:ext cx="1700784" cy="457200"/>
           </a:xfrm>
           <a:prstGeom prst="roundRect">
             <a:avLst/>
           </a:prstGeom>
           <a:solidFill>
-            <a:srgbClr val="166534"/>
+            <a:srgbClr val="991B1B"/>
           </a:solidFill>
           <a:ln>
             <a:noFill/>
@@ -12366,7 +12829,7 @@
                 </a:solidFill>
                 <a:latin typeface="Arial"/>
               </a:rPr>
-              <a:t>GHI NHỚ</a:t>
+              <a:t>LỜI GIẢI</a:t>
             </a:r>
           </a:p>
         </p:txBody>
@@ -12380,7 +12843,7 @@
         <p:spPr>
           <a:xfrm>
             <a:off x="731520" y="274320"/>
-            <a:ext cx="9427464" cy="868680"/>
+            <a:ext cx="9272016" cy="868680"/>
           </a:xfrm>
           <a:prstGeom prst="rect">
             <a:avLst/>
@@ -12400,7 +12863,7 @@
                 </a:solidFill>
                 <a:latin typeface="Arial"/>
               </a:rPr>
-              <a:t>YÊU CẦU BÀI SO SÁNH HAI BÀI THƠ</a:t>
+              <a:t>ẨN DỤ TRONG TÂY TIẾN</a:t>
             </a:r>
           </a:p>
         </p:txBody>
@@ -12493,7 +12956,7 @@
         <p:spPr>
           <a:xfrm>
             <a:off x="731520" y="1463040"/>
-            <a:ext cx="10789920" cy="4754880"/>
+            <a:ext cx="10789920" cy="3474720"/>
           </a:xfrm>
           <a:prstGeom prst="rect">
             <a:avLst/>
@@ -12517,13 +12980,13 @@
               <a:buChar char="•"/>
             </a:pPr>
             <a:r>
-              <a:rPr sz="2400">
+              <a:rPr sz="2300">
                 <a:solidFill>
                   <a:srgbClr val="1E293B"/>
                 </a:solidFill>
                 <a:latin typeface="Calibri"/>
               </a:rPr>
-              <a:t>Giới thiệu hai bài thơ, cơ sở lựa chọn.</a:t>
+              <a:t>“Không mọc tóc”, “xanh màu lá” – hậu quả sốt rét rừng.</a:t>
             </a:r>
           </a:p>
           <a:p>
@@ -12538,13 +13001,13 @@
               <a:buChar char="•"/>
             </a:pPr>
             <a:r>
-              <a:rPr sz="2400">
+              <a:rPr sz="2300">
                 <a:solidFill>
                   <a:srgbClr val="1E293B"/>
                 </a:solidFill>
                 <a:latin typeface="Calibri"/>
               </a:rPr>
-              <a:t>Tương đồng – khác biệt, có bằng chứng cụ thể.</a:t>
+              <a:t>“dữ oai hùm” – khí thế oai phong.</a:t>
             </a:r>
           </a:p>
           <a:p>
@@ -12559,34 +13022,100 @@
               <a:buChar char="•"/>
             </a:pPr>
             <a:r>
-              <a:rPr sz="2400">
+              <a:rPr sz="2300">
                 <a:solidFill>
                   <a:srgbClr val="1E293B"/>
                 </a:solidFill>
                 <a:latin typeface="Calibri"/>
               </a:rPr>
-              <a:t>Nhận xét đóng góp riêng của mỗi bài.</a:t>
-            </a:r>
-          </a:p>
-          <a:p>
-            <a:pPr algn="l" marL="365760" indent="-365760">
+              <a:t>Hiện thực được nhìn bằng cảm hứng lãng mạn, tránh bi luỵ.</a:t>
+            </a:r>
+          </a:p>
+        </p:txBody>
+      </p:sp>
+      <p:sp>
+        <p:nvSpPr>
+          <p:cNvPr id="8" name="Rounded Rectangle 7"/>
+          <p:cNvSpPr/>
+          <p:nvPr/>
+        </p:nvSpPr>
+        <p:spPr>
+          <a:xfrm>
+            <a:off x="731520" y="5074920"/>
+            <a:ext cx="10789920" cy="731520"/>
+          </a:xfrm>
+          <a:prstGeom prst="roundRect">
+            <a:avLst>
+              <a:gd name="adj" fmla="val 8000"/>
+            </a:avLst>
+          </a:prstGeom>
+          <a:solidFill>
+            <a:srgbClr val="FEF2F2"/>
+          </a:solidFill>
+          <a:ln w="19050">
+            <a:solidFill>
+              <a:srgbClr val="991B1B"/>
+            </a:solidFill>
+          </a:ln>
+          <a:effectLst/>
+        </p:spPr>
+        <p:style>
+          <a:lnRef idx="1">
+            <a:schemeClr val="accent1"/>
+          </a:lnRef>
+          <a:fillRef idx="3">
+            <a:schemeClr val="accent1"/>
+          </a:fillRef>
+          <a:effectRef idx="2">
+            <a:schemeClr val="accent1"/>
+          </a:effectRef>
+          <a:fontRef idx="minor">
+            <a:schemeClr val="lt1"/>
+          </a:fontRef>
+        </p:style>
+        <p:txBody>
+          <a:bodyPr rtlCol="0" anchor="ctr"/>
+          <a:lstStyle/>
+          <a:p>
+            <a:pPr algn="ctr"/>
+          </a:p>
+        </p:txBody>
+      </p:sp>
+      <p:sp>
+        <p:nvSpPr>
+          <p:cNvPr id="9" name="TextBox 8"/>
+          <p:cNvSpPr txBox="1"/>
+          <p:nvPr/>
+        </p:nvSpPr>
+        <p:spPr>
+          <a:xfrm>
+            <a:off x="914400" y="5074920"/>
+            <a:ext cx="10424160" cy="731520"/>
+          </a:xfrm>
+          <a:prstGeom prst="rect">
+            <a:avLst/>
+          </a:prstGeom>
+          <a:noFill/>
+        </p:spPr>
+        <p:txBody>
+          <a:bodyPr wrap="square" anchor="ctr" lIns="45720" rIns="45720">
+            <a:spAutoFit/>
+          </a:bodyPr>
+          <a:lstStyle/>
+          <a:p>
+            <a:pPr algn="l">
               <a:spcAft>
-                <a:spcPts val="800"/>
+                <a:spcPts val="400"/>
               </a:spcAft>
-              <a:buClr>
-                <a:srgbClr val="1E40AF"/>
-              </a:buClr>
-              <a:buFont typeface="Arial"/>
-              <a:buChar char="•"/>
             </a:pPr>
             <a:r>
-              <a:rPr sz="2400">
-                <a:solidFill>
-                  <a:srgbClr val="1E293B"/>
+              <a:rPr sz="2400" b="1">
+                <a:solidFill>
+                  <a:srgbClr val="991B1B"/>
                 </a:solidFill>
                 <a:latin typeface="Calibri"/>
               </a:rPr>
-              <a:t>Ba cách triển khai: từng bài – lồng ghép – từng phương diện.</a:t>
+              <a:t>Ẩn dụ tạo vẻ đẹp vừa chân thực vừa hào hùng.</a:t>
             </a:r>
           </a:p>
         </p:txBody>
@@ -12743,7 +13272,7 @@
                 </a:solidFill>
                 <a:latin typeface="Arial"/>
               </a:rPr>
-              <a:t>ĐỀ THỰC HÀNH VIẾT</a:t>
+              <a:t>PHÉP ĐỐI</a:t>
             </a:r>
           </a:p>
         </p:txBody>
@@ -12861,7 +13390,7 @@
                 </a:solidFill>
                 <a:latin typeface="Calibri"/>
               </a:rPr>
-              <a:t>So sánh, đánh giá hình tượng người anh hùng/người lính trong Cảm hoài (Đặng Dung) và Tây Tiến (Quang Dũng).</a:t>
+              <a:t>So sánh cách dùng phép đối trong Cảm hoài (“Gặp thời đồ điếu công thành dễ / Lỡ vận anh hùng hận xót xa”) và Tây Tiến (“Sài Khao sương lấp đoàn quân mỏi / Mường Lát hoa về trong đêm hơi”).</a:t>
             </a:r>
           </a:p>
         </p:txBody>
@@ -12948,7 +13477,7 @@
                 </a:solidFill>
                 <a:latin typeface="Calibri"/>
               </a:rPr>
-              <a:t>💡 Chọn cách triển khai theo từng phương diện.</a:t>
+              <a:t>💡 Đối chỉnh hay đối linh hoạt?</a:t>
             </a:r>
           </a:p>
         </p:txBody>
@@ -13105,7 +13634,7 @@
                 </a:solidFill>
                 <a:latin typeface="Arial"/>
               </a:rPr>
-              <a:t>ĐỀ THỰC HÀNH VIẾT</a:t>
+              <a:t>PHÉP ĐỐI</a:t>
             </a:r>
           </a:p>
         </p:txBody>
@@ -13228,7 +13757,7 @@
                 </a:solidFill>
                 <a:latin typeface="Calibri"/>
               </a:rPr>
-              <a:t>Hoàn cảnh: anh hùng thất thế – người lính giữa núi rừng gian khổ.</a:t>
+              <a:t>Cảm hoài: đối chỉnh theo luật Đường, ý đối lập rõ: gặp thời – lỡ vận.</a:t>
             </a:r>
           </a:p>
           <a:p>
@@ -13249,7 +13778,7 @@
                 </a:solidFill>
                 <a:latin typeface="Calibri"/>
               </a:rPr>
-              <a:t>Lí tưởng: xoay trục đất – “gửi mộng qua biên giới”.</a:t>
+              <a:t>Tây Tiến: đối linh hoạt, tương phản gian khổ – thơ mộng.</a:t>
             </a:r>
           </a:p>
           <a:p>
@@ -13270,28 +13799,7 @@
                 </a:solidFill>
                 <a:latin typeface="Calibri"/>
               </a:rPr>
-              <a:t>Vẻ đẹp bi tráng; phong cách cổ điển – lãng mạn.</a:t>
-            </a:r>
-          </a:p>
-          <a:p>
-            <a:pPr algn="l" marL="365760" indent="-365760">
-              <a:spcAft>
-                <a:spcPts val="800"/>
-              </a:spcAft>
-              <a:buClr>
-                <a:srgbClr val="1E40AF"/>
-              </a:buClr>
-              <a:buFont typeface="Arial"/>
-              <a:buChar char="•"/>
-            </a:pPr>
-            <a:r>
-              <a:rPr sz="2300">
-                <a:solidFill>
-                  <a:srgbClr val="1E293B"/>
-                </a:solidFill>
-                <a:latin typeface="Calibri"/>
-              </a:rPr>
-              <a:t>Nguyên nhân khác biệt: thời đại, quan điểm thẩm mĩ.</a:t>
+              <a:t>Cả hai: tạo cân xứng, nhấn mạnh cảm xúc.</a:t>
             </a:r>
           </a:p>
         </p:txBody>
@@ -13378,7 +13886,7 @@
                 </a:solidFill>
                 <a:latin typeface="Calibri"/>
               </a:rPr>
-              <a:t>Đan xen tương đồng và khác biệt.</a:t>
+              <a:t>Đối – cổ điển chuẩn mực và lãng mạn phóng khoáng.</a:t>
             </a:r>
           </a:p>
         </p:txBody>
@@ -13397,7 +13905,7 @@
     <p:bg>
       <p:bgPr>
         <a:solidFill>
-          <a:srgbClr val="FFFFFF"/>
+          <a:srgbClr val="F8F9FA"/>
         </a:solidFill>
         <a:effectLst/>
       </p:bgPr>
@@ -13417,14 +13925,14 @@
         </p:nvSpPr>
         <p:spPr>
           <a:xfrm>
-            <a:off x="457200" y="384048"/>
-            <a:ext cx="109728" cy="658368"/>
+            <a:off x="548640" y="2926080"/>
+            <a:ext cx="164592" cy="1005840"/>
           </a:xfrm>
           <a:prstGeom prst="rect">
             <a:avLst/>
           </a:prstGeom>
           <a:solidFill>
-            <a:srgbClr val="1E40AF"/>
+            <a:srgbClr val="991B1B"/>
           </a:solidFill>
           <a:ln>
             <a:noFill/>
@@ -13455,67 +13963,14 @@
       </p:sp>
       <p:sp>
         <p:nvSpPr>
-          <p:cNvPr id="3" name="Rounded Rectangle 2"/>
-          <p:cNvSpPr/>
-          <p:nvPr/>
-        </p:nvSpPr>
-        <p:spPr>
-          <a:xfrm>
-            <a:off x="10097719" y="457200"/>
-            <a:ext cx="1545336" cy="457200"/>
-          </a:xfrm>
-          <a:prstGeom prst="roundRect">
-            <a:avLst/>
-          </a:prstGeom>
-          <a:solidFill>
-            <a:srgbClr val="166534"/>
-          </a:solidFill>
-          <a:ln>
-            <a:noFill/>
-          </a:ln>
-          <a:effectLst/>
-        </p:spPr>
-        <p:style>
-          <a:lnRef idx="1">
-            <a:schemeClr val="accent1"/>
-          </a:lnRef>
-          <a:fillRef idx="3">
-            <a:schemeClr val="accent1"/>
-          </a:fillRef>
-          <a:effectRef idx="2">
-            <a:schemeClr val="accent1"/>
-          </a:effectRef>
-          <a:fontRef idx="minor">
-            <a:schemeClr val="lt1"/>
-          </a:fontRef>
-        </p:style>
-        <p:txBody>
-          <a:bodyPr rtlCol="0" anchor="ctr" wrap="none" tIns="0" bIns="0"/>
-          <a:lstStyle/>
-          <a:p>
-            <a:pPr algn="ctr"/>
-            <a:r>
-              <a:rPr sz="1400" b="1">
-                <a:solidFill>
-                  <a:srgbClr val="FFFFFF"/>
-                </a:solidFill>
-                <a:latin typeface="Arial"/>
-              </a:rPr>
-              <a:t>CỦNG CỐ</a:t>
-            </a:r>
-          </a:p>
-        </p:txBody>
-      </p:sp>
-      <p:sp>
-        <p:nvSpPr>
-          <p:cNvPr id="4" name="TextBox 3"/>
+          <p:cNvPr id="3" name="TextBox 2"/>
           <p:cNvSpPr txBox="1"/>
           <p:nvPr/>
         </p:nvSpPr>
         <p:spPr>
           <a:xfrm>
-            <a:off x="731520" y="274320"/>
-            <a:ext cx="9427464" cy="868680"/>
+            <a:off x="914400" y="2743200"/>
+            <a:ext cx="10515600" cy="1371600"/>
           </a:xfrm>
           <a:prstGeom prst="rect">
             <a:avLst/>
@@ -13523,126 +13978,28 @@
           <a:noFill/>
         </p:spPr>
         <p:txBody>
-          <a:bodyPr wrap="square" anchor="ctr">
+          <a:bodyPr wrap="square" anchor="ctr" lIns="45720" rIns="45720">
             <a:spAutoFit/>
           </a:bodyPr>
           <a:lstStyle/>
           <a:p>
+            <a:pPr algn="l">
+              <a:spcAft>
+                <a:spcPts val="800"/>
+              </a:spcAft>
+            </a:pPr>
             <a:r>
               <a:rPr sz="3600" b="1">
                 <a:solidFill>
                   <a:srgbClr val="1E40AF"/>
                 </a:solidFill>
-                <a:latin typeface="Arial"/>
-              </a:rPr>
-              <a:t>SƠ ĐỒ TƯ DUY</a:t>
-            </a:r>
-          </a:p>
-        </p:txBody>
-      </p:sp>
-      <p:sp>
-        <p:nvSpPr>
-          <p:cNvPr id="5" name="Rectangle 4"/>
-          <p:cNvSpPr/>
-          <p:nvPr/>
-        </p:nvSpPr>
-        <p:spPr>
-          <a:xfrm>
-            <a:off x="457200" y="1207008"/>
-            <a:ext cx="11274552" cy="22000"/>
-          </a:xfrm>
-          <a:prstGeom prst="rect">
-            <a:avLst/>
-          </a:prstGeom>
-          <a:solidFill>
-            <a:srgbClr val="E2E8F0"/>
-          </a:solidFill>
-          <a:ln>
-            <a:noFill/>
-          </a:ln>
-          <a:effectLst/>
-        </p:spPr>
-        <p:style>
-          <a:lnRef idx="1">
-            <a:schemeClr val="accent1"/>
-          </a:lnRef>
-          <a:fillRef idx="3">
-            <a:schemeClr val="accent1"/>
-          </a:fillRef>
-          <a:effectRef idx="2">
-            <a:schemeClr val="accent1"/>
-          </a:effectRef>
-          <a:fontRef idx="minor">
-            <a:schemeClr val="lt1"/>
-          </a:fontRef>
-        </p:style>
-        <p:txBody>
-          <a:bodyPr rtlCol="0" anchor="ctr"/>
-          <a:lstStyle/>
-          <a:p>
-            <a:pPr algn="ctr"/>
-          </a:p>
-        </p:txBody>
-      </p:sp>
-      <p:sp>
-        <p:nvSpPr>
-          <p:cNvPr id="6" name="TextBox 5"/>
-          <p:cNvSpPr txBox="1"/>
-          <p:nvPr/>
-        </p:nvSpPr>
-        <p:spPr>
-          <a:xfrm>
-            <a:off x="457200" y="6355080"/>
-            <a:ext cx="11274552" cy="365760"/>
-          </a:xfrm>
-          <a:prstGeom prst="rect">
-            <a:avLst/>
-          </a:prstGeom>
-          <a:noFill/>
-        </p:spPr>
-        <p:txBody>
-          <a:bodyPr wrap="none">
-            <a:spAutoFit/>
-          </a:bodyPr>
-          <a:lstStyle/>
-          <a:p>
-            <a:pPr algn="r"/>
-            <a:r>
-              <a:rPr sz="1200">
-                <a:solidFill>
-                  <a:srgbClr val="64748B"/>
-                </a:solidFill>
                 <a:latin typeface="Calibri"/>
               </a:rPr>
-              <a:t>Ngữ văn 12 · Bài 2: Những Thế Giới Thơ          33</a:t>
-            </a:r>
-          </a:p>
-        </p:txBody>
-      </p:sp>
-      <p:pic>
-        <p:nvPicPr>
-          <p:cNvPr id="7" name="Picture 6" descr="SoDoTuDuy_NGUVAN12_Bai2_NhungTheGioiTho_T12-22.png"/>
-          <p:cNvPicPr>
-            <a:picLocks noChangeAspect="1"/>
-          </p:cNvPicPr>
-          <p:nvPr/>
-        </p:nvPicPr>
-        <p:blipFill>
-          <a:blip r:embed="rId2"/>
-          <a:stretch>
-            <a:fillRect/>
-          </a:stretch>
-        </p:blipFill>
-        <p:spPr>
-          <a:xfrm>
-            <a:off x="1788855" y="1371600"/>
-            <a:ext cx="8675250" cy="4846320"/>
-          </a:xfrm>
-          <a:prstGeom prst="rect">
-            <a:avLst/>
-          </a:prstGeom>
-        </p:spPr>
-      </p:pic>
+              <a:t>TIẾT 20 – 22: VIẾT – NÓI VÀ NGHE</a:t>
+            </a:r>
+          </a:p>
+        </p:txBody>
+      </p:sp>
     </p:spTree>
   </p:cSld>
   <p:clrMapOvr>
@@ -13728,7 +14085,7 @@
             <a:avLst/>
           </a:prstGeom>
           <a:solidFill>
-            <a:srgbClr val="991B1B"/>
+            <a:srgbClr val="166534"/>
           </a:solidFill>
           <a:ln>
             <a:noFill/>
@@ -13761,7 +14118,7 @@
                 </a:solidFill>
                 <a:latin typeface="Arial"/>
               </a:rPr>
-              <a:t>CỦNG CỐ</a:t>
+              <a:t>GHI NHỚ</a:t>
             </a:r>
           </a:p>
         </p:txBody>
@@ -13795,7 +14152,7 @@
                 </a:solidFill>
                 <a:latin typeface="Arial"/>
               </a:rPr>
-              <a:t>BÀI TẬP CỦA BẠN</a:t>
+              <a:t>YÊU CẦU BÀI SO SÁNH HAI BÀI THƠ</a:t>
             </a:r>
           </a:p>
         </p:txBody>
@@ -13875,6 +14232,1401 @@
                 <a:latin typeface="Calibri"/>
               </a:rPr>
               <a:t>Ngữ văn 12 · Bài 2: Những Thế Giới Thơ          34</a:t>
+            </a:r>
+          </a:p>
+        </p:txBody>
+      </p:sp>
+      <p:sp>
+        <p:nvSpPr>
+          <p:cNvPr id="7" name="TextBox 6"/>
+          <p:cNvSpPr txBox="1"/>
+          <p:nvPr/>
+        </p:nvSpPr>
+        <p:spPr>
+          <a:xfrm>
+            <a:off x="731520" y="1463040"/>
+            <a:ext cx="10789920" cy="4754880"/>
+          </a:xfrm>
+          <a:prstGeom prst="rect">
+            <a:avLst/>
+          </a:prstGeom>
+          <a:noFill/>
+        </p:spPr>
+        <p:txBody>
+          <a:bodyPr wrap="square" anchor="t" lIns="45720" rIns="45720">
+            <a:spAutoFit/>
+          </a:bodyPr>
+          <a:lstStyle/>
+          <a:p>
+            <a:pPr algn="l" marL="365760" indent="-365760">
+              <a:spcAft>
+                <a:spcPts val="800"/>
+              </a:spcAft>
+              <a:buClr>
+                <a:srgbClr val="1E40AF"/>
+              </a:buClr>
+              <a:buFont typeface="Arial"/>
+              <a:buChar char="•"/>
+            </a:pPr>
+            <a:r>
+              <a:rPr sz="2400">
+                <a:solidFill>
+                  <a:srgbClr val="1E293B"/>
+                </a:solidFill>
+                <a:latin typeface="Calibri"/>
+              </a:rPr>
+              <a:t>Giới thiệu hai bài thơ, cơ sở lựa chọn.</a:t>
+            </a:r>
+          </a:p>
+          <a:p>
+            <a:pPr algn="l" marL="365760" indent="-365760">
+              <a:spcAft>
+                <a:spcPts val="800"/>
+              </a:spcAft>
+              <a:buClr>
+                <a:srgbClr val="1E40AF"/>
+              </a:buClr>
+              <a:buFont typeface="Arial"/>
+              <a:buChar char="•"/>
+            </a:pPr>
+            <a:r>
+              <a:rPr sz="2400">
+                <a:solidFill>
+                  <a:srgbClr val="1E293B"/>
+                </a:solidFill>
+                <a:latin typeface="Calibri"/>
+              </a:rPr>
+              <a:t>Tương đồng – khác biệt, có bằng chứng cụ thể.</a:t>
+            </a:r>
+          </a:p>
+          <a:p>
+            <a:pPr algn="l" marL="365760" indent="-365760">
+              <a:spcAft>
+                <a:spcPts val="800"/>
+              </a:spcAft>
+              <a:buClr>
+                <a:srgbClr val="1E40AF"/>
+              </a:buClr>
+              <a:buFont typeface="Arial"/>
+              <a:buChar char="•"/>
+            </a:pPr>
+            <a:r>
+              <a:rPr sz="2400">
+                <a:solidFill>
+                  <a:srgbClr val="1E293B"/>
+                </a:solidFill>
+                <a:latin typeface="Calibri"/>
+              </a:rPr>
+              <a:t>Nhận xét đóng góp riêng của mỗi bài.</a:t>
+            </a:r>
+          </a:p>
+          <a:p>
+            <a:pPr algn="l" marL="365760" indent="-365760">
+              <a:spcAft>
+                <a:spcPts val="800"/>
+              </a:spcAft>
+              <a:buClr>
+                <a:srgbClr val="1E40AF"/>
+              </a:buClr>
+              <a:buFont typeface="Arial"/>
+              <a:buChar char="•"/>
+            </a:pPr>
+            <a:r>
+              <a:rPr sz="2400">
+                <a:solidFill>
+                  <a:srgbClr val="1E293B"/>
+                </a:solidFill>
+                <a:latin typeface="Calibri"/>
+              </a:rPr>
+              <a:t>Ba cách triển khai: từng bài – lồng ghép – từng phương diện.</a:t>
+            </a:r>
+          </a:p>
+        </p:txBody>
+      </p:sp>
+    </p:spTree>
+  </p:cSld>
+  <p:clrMapOvr>
+    <a:masterClrMapping/>
+  </p:clrMapOvr>
+</p:sld>
+</file>
+
+<file path=ppt/slides/slide35.xml><?xml version="1.0" encoding="utf-8"?>
+<p:sld xmlns:a="http://schemas.openxmlformats.org/drawingml/2006/main" xmlns:p="http://schemas.openxmlformats.org/presentationml/2006/main" xmlns:r="http://schemas.openxmlformats.org/officeDocument/2006/relationships">
+  <p:cSld>
+    <p:bg>
+      <p:bgPr>
+        <a:solidFill>
+          <a:srgbClr val="FFFFFF"/>
+        </a:solidFill>
+        <a:effectLst/>
+      </p:bgPr>
+    </p:bg>
+    <p:spTree>
+      <p:nvGrpSpPr>
+        <p:cNvPr id="1" name=""/>
+        <p:cNvGrpSpPr/>
+        <p:nvPr/>
+      </p:nvGrpSpPr>
+      <p:grpSpPr/>
+      <p:sp>
+        <p:nvSpPr>
+          <p:cNvPr id="2" name="Rectangle 1"/>
+          <p:cNvSpPr/>
+          <p:nvPr/>
+        </p:nvSpPr>
+        <p:spPr>
+          <a:xfrm>
+            <a:off x="457200" y="384048"/>
+            <a:ext cx="109728" cy="658368"/>
+          </a:xfrm>
+          <a:prstGeom prst="rect">
+            <a:avLst/>
+          </a:prstGeom>
+          <a:solidFill>
+            <a:srgbClr val="1E40AF"/>
+          </a:solidFill>
+          <a:ln>
+            <a:noFill/>
+          </a:ln>
+          <a:effectLst/>
+        </p:spPr>
+        <p:style>
+          <a:lnRef idx="1">
+            <a:schemeClr val="accent1"/>
+          </a:lnRef>
+          <a:fillRef idx="3">
+            <a:schemeClr val="accent1"/>
+          </a:fillRef>
+          <a:effectRef idx="2">
+            <a:schemeClr val="accent1"/>
+          </a:effectRef>
+          <a:fontRef idx="minor">
+            <a:schemeClr val="lt1"/>
+          </a:fontRef>
+        </p:style>
+        <p:txBody>
+          <a:bodyPr rtlCol="0" anchor="ctr"/>
+          <a:lstStyle/>
+          <a:p>
+            <a:pPr algn="ctr"/>
+          </a:p>
+        </p:txBody>
+      </p:sp>
+      <p:sp>
+        <p:nvSpPr>
+          <p:cNvPr id="3" name="Rounded Rectangle 2"/>
+          <p:cNvSpPr/>
+          <p:nvPr/>
+        </p:nvSpPr>
+        <p:spPr>
+          <a:xfrm>
+            <a:off x="10253167" y="457200"/>
+            <a:ext cx="1389888" cy="457200"/>
+          </a:xfrm>
+          <a:prstGeom prst="roundRect">
+            <a:avLst/>
+          </a:prstGeom>
+          <a:solidFill>
+            <a:srgbClr val="1E40AF"/>
+          </a:solidFill>
+          <a:ln>
+            <a:noFill/>
+          </a:ln>
+          <a:effectLst/>
+        </p:spPr>
+        <p:style>
+          <a:lnRef idx="1">
+            <a:schemeClr val="accent1"/>
+          </a:lnRef>
+          <a:fillRef idx="3">
+            <a:schemeClr val="accent1"/>
+          </a:fillRef>
+          <a:effectRef idx="2">
+            <a:schemeClr val="accent1"/>
+          </a:effectRef>
+          <a:fontRef idx="minor">
+            <a:schemeClr val="lt1"/>
+          </a:fontRef>
+        </p:style>
+        <p:txBody>
+          <a:bodyPr rtlCol="0" anchor="ctr" wrap="none" tIns="0" bIns="0"/>
+          <a:lstStyle/>
+          <a:p>
+            <a:pPr algn="ctr"/>
+            <a:r>
+              <a:rPr sz="1400" b="1">
+                <a:solidFill>
+                  <a:srgbClr val="FFFFFF"/>
+                </a:solidFill>
+                <a:latin typeface="Arial"/>
+              </a:rPr>
+              <a:t>ĐỀ BÀI</a:t>
+            </a:r>
+          </a:p>
+        </p:txBody>
+      </p:sp>
+      <p:sp>
+        <p:nvSpPr>
+          <p:cNvPr id="4" name="TextBox 3"/>
+          <p:cNvSpPr txBox="1"/>
+          <p:nvPr/>
+        </p:nvSpPr>
+        <p:spPr>
+          <a:xfrm>
+            <a:off x="731520" y="274320"/>
+            <a:ext cx="9582912" cy="868680"/>
+          </a:xfrm>
+          <a:prstGeom prst="rect">
+            <a:avLst/>
+          </a:prstGeom>
+          <a:noFill/>
+        </p:spPr>
+        <p:txBody>
+          <a:bodyPr wrap="square" anchor="ctr">
+            <a:spAutoFit/>
+          </a:bodyPr>
+          <a:lstStyle/>
+          <a:p>
+            <a:r>
+              <a:rPr sz="3600" b="1">
+                <a:solidFill>
+                  <a:srgbClr val="1E40AF"/>
+                </a:solidFill>
+                <a:latin typeface="Arial"/>
+              </a:rPr>
+              <a:t>ĐỀ THỰC HÀNH VIẾT</a:t>
+            </a:r>
+          </a:p>
+        </p:txBody>
+      </p:sp>
+      <p:sp>
+        <p:nvSpPr>
+          <p:cNvPr id="5" name="Rectangle 4"/>
+          <p:cNvSpPr/>
+          <p:nvPr/>
+        </p:nvSpPr>
+        <p:spPr>
+          <a:xfrm>
+            <a:off x="457200" y="1207008"/>
+            <a:ext cx="11274552" cy="22000"/>
+          </a:xfrm>
+          <a:prstGeom prst="rect">
+            <a:avLst/>
+          </a:prstGeom>
+          <a:solidFill>
+            <a:srgbClr val="E2E8F0"/>
+          </a:solidFill>
+          <a:ln>
+            <a:noFill/>
+          </a:ln>
+          <a:effectLst/>
+        </p:spPr>
+        <p:style>
+          <a:lnRef idx="1">
+            <a:schemeClr val="accent1"/>
+          </a:lnRef>
+          <a:fillRef idx="3">
+            <a:schemeClr val="accent1"/>
+          </a:fillRef>
+          <a:effectRef idx="2">
+            <a:schemeClr val="accent1"/>
+          </a:effectRef>
+          <a:fontRef idx="minor">
+            <a:schemeClr val="lt1"/>
+          </a:fontRef>
+        </p:style>
+        <p:txBody>
+          <a:bodyPr rtlCol="0" anchor="ctr"/>
+          <a:lstStyle/>
+          <a:p>
+            <a:pPr algn="ctr"/>
+          </a:p>
+        </p:txBody>
+      </p:sp>
+      <p:sp>
+        <p:nvSpPr>
+          <p:cNvPr id="6" name="TextBox 5"/>
+          <p:cNvSpPr txBox="1"/>
+          <p:nvPr/>
+        </p:nvSpPr>
+        <p:spPr>
+          <a:xfrm>
+            <a:off x="457200" y="6355080"/>
+            <a:ext cx="11274552" cy="365760"/>
+          </a:xfrm>
+          <a:prstGeom prst="rect">
+            <a:avLst/>
+          </a:prstGeom>
+          <a:noFill/>
+        </p:spPr>
+        <p:txBody>
+          <a:bodyPr wrap="none">
+            <a:spAutoFit/>
+          </a:bodyPr>
+          <a:lstStyle/>
+          <a:p>
+            <a:pPr algn="r"/>
+            <a:r>
+              <a:rPr sz="1200">
+                <a:solidFill>
+                  <a:srgbClr val="64748B"/>
+                </a:solidFill>
+                <a:latin typeface="Calibri"/>
+              </a:rPr>
+              <a:t>Ngữ văn 12 · Bài 2: Những Thế Giới Thơ          35</a:t>
+            </a:r>
+          </a:p>
+        </p:txBody>
+      </p:sp>
+      <p:sp>
+        <p:nvSpPr>
+          <p:cNvPr id="7" name="TextBox 6"/>
+          <p:cNvSpPr txBox="1"/>
+          <p:nvPr/>
+        </p:nvSpPr>
+        <p:spPr>
+          <a:xfrm>
+            <a:off x="731520" y="1463040"/>
+            <a:ext cx="10789920" cy="3566160"/>
+          </a:xfrm>
+          <a:prstGeom prst="rect">
+            <a:avLst/>
+          </a:prstGeom>
+          <a:noFill/>
+        </p:spPr>
+        <p:txBody>
+          <a:bodyPr wrap="square" anchor="t" lIns="45720" rIns="45720">
+            <a:spAutoFit/>
+          </a:bodyPr>
+          <a:lstStyle/>
+          <a:p>
+            <a:pPr algn="l">
+              <a:spcAft>
+                <a:spcPts val="800"/>
+              </a:spcAft>
+            </a:pPr>
+            <a:r>
+              <a:rPr sz="2600" b="1">
+                <a:solidFill>
+                  <a:srgbClr val="1E293B"/>
+                </a:solidFill>
+                <a:latin typeface="Calibri"/>
+              </a:rPr>
+              <a:t>So sánh, đánh giá hình tượng người anh hùng/người lính trong Cảm hoài (Đặng Dung) và Tây Tiến (Quang Dũng).</a:t>
+            </a:r>
+          </a:p>
+        </p:txBody>
+      </p:sp>
+      <p:sp>
+        <p:nvSpPr>
+          <p:cNvPr id="8" name="Rounded Rectangle 7"/>
+          <p:cNvSpPr/>
+          <p:nvPr/>
+        </p:nvSpPr>
+        <p:spPr>
+          <a:xfrm>
+            <a:off x="731520" y="5120640"/>
+            <a:ext cx="10789920" cy="693420"/>
+          </a:xfrm>
+          <a:prstGeom prst="roundRect">
+            <a:avLst>
+              <a:gd name="adj" fmla="val 8000"/>
+            </a:avLst>
+          </a:prstGeom>
+          <a:solidFill>
+            <a:srgbClr val="EFF4FF"/>
+          </a:solidFill>
+          <a:ln w="19050">
+            <a:solidFill>
+              <a:srgbClr val="1E40AF"/>
+            </a:solidFill>
+          </a:ln>
+          <a:effectLst/>
+        </p:spPr>
+        <p:style>
+          <a:lnRef idx="1">
+            <a:schemeClr val="accent1"/>
+          </a:lnRef>
+          <a:fillRef idx="3">
+            <a:schemeClr val="accent1"/>
+          </a:fillRef>
+          <a:effectRef idx="2">
+            <a:schemeClr val="accent1"/>
+          </a:effectRef>
+          <a:fontRef idx="minor">
+            <a:schemeClr val="lt1"/>
+          </a:fontRef>
+        </p:style>
+        <p:txBody>
+          <a:bodyPr rtlCol="0" anchor="ctr"/>
+          <a:lstStyle/>
+          <a:p>
+            <a:pPr algn="ctr"/>
+          </a:p>
+        </p:txBody>
+      </p:sp>
+      <p:sp>
+        <p:nvSpPr>
+          <p:cNvPr id="9" name="TextBox 8"/>
+          <p:cNvSpPr txBox="1"/>
+          <p:nvPr/>
+        </p:nvSpPr>
+        <p:spPr>
+          <a:xfrm>
+            <a:off x="914400" y="5120640"/>
+            <a:ext cx="10424160" cy="693420"/>
+          </a:xfrm>
+          <a:prstGeom prst="rect">
+            <a:avLst/>
+          </a:prstGeom>
+          <a:noFill/>
+        </p:spPr>
+        <p:txBody>
+          <a:bodyPr wrap="square" anchor="ctr" lIns="45720" rIns="45720">
+            <a:spAutoFit/>
+          </a:bodyPr>
+          <a:lstStyle/>
+          <a:p>
+            <a:pPr algn="l">
+              <a:spcAft>
+                <a:spcPts val="400"/>
+              </a:spcAft>
+            </a:pPr>
+            <a:r>
+              <a:rPr sz="2200" b="1">
+                <a:solidFill>
+                  <a:srgbClr val="1E40AF"/>
+                </a:solidFill>
+                <a:latin typeface="Calibri"/>
+              </a:rPr>
+              <a:t>💡 Chọn cách triển khai theo từng phương diện.</a:t>
+            </a:r>
+          </a:p>
+        </p:txBody>
+      </p:sp>
+    </p:spTree>
+  </p:cSld>
+  <p:clrMapOvr>
+    <a:masterClrMapping/>
+  </p:clrMapOvr>
+</p:sld>
+</file>
+
+<file path=ppt/slides/slide36.xml><?xml version="1.0" encoding="utf-8"?>
+<p:sld xmlns:a="http://schemas.openxmlformats.org/drawingml/2006/main" xmlns:p="http://schemas.openxmlformats.org/presentationml/2006/main" xmlns:r="http://schemas.openxmlformats.org/officeDocument/2006/relationships">
+  <p:cSld>
+    <p:bg>
+      <p:bgPr>
+        <a:solidFill>
+          <a:srgbClr val="FFFFFF"/>
+        </a:solidFill>
+        <a:effectLst/>
+      </p:bgPr>
+    </p:bg>
+    <p:spTree>
+      <p:nvGrpSpPr>
+        <p:cNvPr id="1" name=""/>
+        <p:cNvGrpSpPr/>
+        <p:nvPr/>
+      </p:nvGrpSpPr>
+      <p:grpSpPr/>
+      <p:sp>
+        <p:nvSpPr>
+          <p:cNvPr id="2" name="Rectangle 1"/>
+          <p:cNvSpPr/>
+          <p:nvPr/>
+        </p:nvSpPr>
+        <p:spPr>
+          <a:xfrm>
+            <a:off x="457200" y="384048"/>
+            <a:ext cx="109728" cy="658368"/>
+          </a:xfrm>
+          <a:prstGeom prst="rect">
+            <a:avLst/>
+          </a:prstGeom>
+          <a:solidFill>
+            <a:srgbClr val="1E40AF"/>
+          </a:solidFill>
+          <a:ln>
+            <a:noFill/>
+          </a:ln>
+          <a:effectLst/>
+        </p:spPr>
+        <p:style>
+          <a:lnRef idx="1">
+            <a:schemeClr val="accent1"/>
+          </a:lnRef>
+          <a:fillRef idx="3">
+            <a:schemeClr val="accent1"/>
+          </a:fillRef>
+          <a:effectRef idx="2">
+            <a:schemeClr val="accent1"/>
+          </a:effectRef>
+          <a:fontRef idx="minor">
+            <a:schemeClr val="lt1"/>
+          </a:fontRef>
+        </p:style>
+        <p:txBody>
+          <a:bodyPr rtlCol="0" anchor="ctr"/>
+          <a:lstStyle/>
+          <a:p>
+            <a:pPr algn="ctr"/>
+          </a:p>
+        </p:txBody>
+      </p:sp>
+      <p:sp>
+        <p:nvSpPr>
+          <p:cNvPr id="3" name="Rounded Rectangle 2"/>
+          <p:cNvSpPr/>
+          <p:nvPr/>
+        </p:nvSpPr>
+        <p:spPr>
+          <a:xfrm>
+            <a:off x="9942271" y="457200"/>
+            <a:ext cx="1700784" cy="457200"/>
+          </a:xfrm>
+          <a:prstGeom prst="roundRect">
+            <a:avLst/>
+          </a:prstGeom>
+          <a:solidFill>
+            <a:srgbClr val="991B1B"/>
+          </a:solidFill>
+          <a:ln>
+            <a:noFill/>
+          </a:ln>
+          <a:effectLst/>
+        </p:spPr>
+        <p:style>
+          <a:lnRef idx="1">
+            <a:schemeClr val="accent1"/>
+          </a:lnRef>
+          <a:fillRef idx="3">
+            <a:schemeClr val="accent1"/>
+          </a:fillRef>
+          <a:effectRef idx="2">
+            <a:schemeClr val="accent1"/>
+          </a:effectRef>
+          <a:fontRef idx="minor">
+            <a:schemeClr val="lt1"/>
+          </a:fontRef>
+        </p:style>
+        <p:txBody>
+          <a:bodyPr rtlCol="0" anchor="ctr" wrap="none" tIns="0" bIns="0"/>
+          <a:lstStyle/>
+          <a:p>
+            <a:pPr algn="ctr"/>
+            <a:r>
+              <a:rPr sz="1400" b="1">
+                <a:solidFill>
+                  <a:srgbClr val="FFFFFF"/>
+                </a:solidFill>
+                <a:latin typeface="Arial"/>
+              </a:rPr>
+              <a:t>LỜI GIẢI</a:t>
+            </a:r>
+          </a:p>
+        </p:txBody>
+      </p:sp>
+      <p:sp>
+        <p:nvSpPr>
+          <p:cNvPr id="4" name="TextBox 3"/>
+          <p:cNvSpPr txBox="1"/>
+          <p:nvPr/>
+        </p:nvSpPr>
+        <p:spPr>
+          <a:xfrm>
+            <a:off x="731520" y="274320"/>
+            <a:ext cx="9272016" cy="868680"/>
+          </a:xfrm>
+          <a:prstGeom prst="rect">
+            <a:avLst/>
+          </a:prstGeom>
+          <a:noFill/>
+        </p:spPr>
+        <p:txBody>
+          <a:bodyPr wrap="square" anchor="ctr">
+            <a:spAutoFit/>
+          </a:bodyPr>
+          <a:lstStyle/>
+          <a:p>
+            <a:r>
+              <a:rPr sz="3600" b="1">
+                <a:solidFill>
+                  <a:srgbClr val="1E40AF"/>
+                </a:solidFill>
+                <a:latin typeface="Arial"/>
+              </a:rPr>
+              <a:t>ĐỀ THỰC HÀNH VIẾT</a:t>
+            </a:r>
+          </a:p>
+        </p:txBody>
+      </p:sp>
+      <p:sp>
+        <p:nvSpPr>
+          <p:cNvPr id="5" name="Rectangle 4"/>
+          <p:cNvSpPr/>
+          <p:nvPr/>
+        </p:nvSpPr>
+        <p:spPr>
+          <a:xfrm>
+            <a:off x="457200" y="1207008"/>
+            <a:ext cx="11274552" cy="22000"/>
+          </a:xfrm>
+          <a:prstGeom prst="rect">
+            <a:avLst/>
+          </a:prstGeom>
+          <a:solidFill>
+            <a:srgbClr val="E2E8F0"/>
+          </a:solidFill>
+          <a:ln>
+            <a:noFill/>
+          </a:ln>
+          <a:effectLst/>
+        </p:spPr>
+        <p:style>
+          <a:lnRef idx="1">
+            <a:schemeClr val="accent1"/>
+          </a:lnRef>
+          <a:fillRef idx="3">
+            <a:schemeClr val="accent1"/>
+          </a:fillRef>
+          <a:effectRef idx="2">
+            <a:schemeClr val="accent1"/>
+          </a:effectRef>
+          <a:fontRef idx="minor">
+            <a:schemeClr val="lt1"/>
+          </a:fontRef>
+        </p:style>
+        <p:txBody>
+          <a:bodyPr rtlCol="0" anchor="ctr"/>
+          <a:lstStyle/>
+          <a:p>
+            <a:pPr algn="ctr"/>
+          </a:p>
+        </p:txBody>
+      </p:sp>
+      <p:sp>
+        <p:nvSpPr>
+          <p:cNvPr id="6" name="TextBox 5"/>
+          <p:cNvSpPr txBox="1"/>
+          <p:nvPr/>
+        </p:nvSpPr>
+        <p:spPr>
+          <a:xfrm>
+            <a:off x="457200" y="6355080"/>
+            <a:ext cx="11274552" cy="365760"/>
+          </a:xfrm>
+          <a:prstGeom prst="rect">
+            <a:avLst/>
+          </a:prstGeom>
+          <a:noFill/>
+        </p:spPr>
+        <p:txBody>
+          <a:bodyPr wrap="none">
+            <a:spAutoFit/>
+          </a:bodyPr>
+          <a:lstStyle/>
+          <a:p>
+            <a:pPr algn="r"/>
+            <a:r>
+              <a:rPr sz="1200">
+                <a:solidFill>
+                  <a:srgbClr val="64748B"/>
+                </a:solidFill>
+                <a:latin typeface="Calibri"/>
+              </a:rPr>
+              <a:t>Ngữ văn 12 · Bài 2: Những Thế Giới Thơ          36</a:t>
+            </a:r>
+          </a:p>
+        </p:txBody>
+      </p:sp>
+      <p:sp>
+        <p:nvSpPr>
+          <p:cNvPr id="7" name="TextBox 6"/>
+          <p:cNvSpPr txBox="1"/>
+          <p:nvPr/>
+        </p:nvSpPr>
+        <p:spPr>
+          <a:xfrm>
+            <a:off x="731520" y="1463040"/>
+            <a:ext cx="10789920" cy="3474720"/>
+          </a:xfrm>
+          <a:prstGeom prst="rect">
+            <a:avLst/>
+          </a:prstGeom>
+          <a:noFill/>
+        </p:spPr>
+        <p:txBody>
+          <a:bodyPr wrap="square" anchor="t" lIns="45720" rIns="45720">
+            <a:spAutoFit/>
+          </a:bodyPr>
+          <a:lstStyle/>
+          <a:p>
+            <a:pPr algn="l" marL="365760" indent="-365760">
+              <a:spcAft>
+                <a:spcPts val="800"/>
+              </a:spcAft>
+              <a:buClr>
+                <a:srgbClr val="1E40AF"/>
+              </a:buClr>
+              <a:buFont typeface="Arial"/>
+              <a:buChar char="•"/>
+            </a:pPr>
+            <a:r>
+              <a:rPr sz="2300">
+                <a:solidFill>
+                  <a:srgbClr val="1E293B"/>
+                </a:solidFill>
+                <a:latin typeface="Calibri"/>
+              </a:rPr>
+              <a:t>Hoàn cảnh: anh hùng thất thế – người lính giữa núi rừng gian khổ.</a:t>
+            </a:r>
+          </a:p>
+          <a:p>
+            <a:pPr algn="l" marL="365760" indent="-365760">
+              <a:spcAft>
+                <a:spcPts val="800"/>
+              </a:spcAft>
+              <a:buClr>
+                <a:srgbClr val="1E40AF"/>
+              </a:buClr>
+              <a:buFont typeface="Arial"/>
+              <a:buChar char="•"/>
+            </a:pPr>
+            <a:r>
+              <a:rPr sz="2300">
+                <a:solidFill>
+                  <a:srgbClr val="1E293B"/>
+                </a:solidFill>
+                <a:latin typeface="Calibri"/>
+              </a:rPr>
+              <a:t>Lí tưởng: xoay trục đất – “gửi mộng qua biên giới”.</a:t>
+            </a:r>
+          </a:p>
+          <a:p>
+            <a:pPr algn="l" marL="365760" indent="-365760">
+              <a:spcAft>
+                <a:spcPts val="800"/>
+              </a:spcAft>
+              <a:buClr>
+                <a:srgbClr val="1E40AF"/>
+              </a:buClr>
+              <a:buFont typeface="Arial"/>
+              <a:buChar char="•"/>
+            </a:pPr>
+            <a:r>
+              <a:rPr sz="2300">
+                <a:solidFill>
+                  <a:srgbClr val="1E293B"/>
+                </a:solidFill>
+                <a:latin typeface="Calibri"/>
+              </a:rPr>
+              <a:t>Vẻ đẹp bi tráng; phong cách cổ điển – lãng mạn.</a:t>
+            </a:r>
+          </a:p>
+          <a:p>
+            <a:pPr algn="l" marL="365760" indent="-365760">
+              <a:spcAft>
+                <a:spcPts val="800"/>
+              </a:spcAft>
+              <a:buClr>
+                <a:srgbClr val="1E40AF"/>
+              </a:buClr>
+              <a:buFont typeface="Arial"/>
+              <a:buChar char="•"/>
+            </a:pPr>
+            <a:r>
+              <a:rPr sz="2300">
+                <a:solidFill>
+                  <a:srgbClr val="1E293B"/>
+                </a:solidFill>
+                <a:latin typeface="Calibri"/>
+              </a:rPr>
+              <a:t>Nguyên nhân khác biệt: thời đại, quan điểm thẩm mĩ.</a:t>
+            </a:r>
+          </a:p>
+        </p:txBody>
+      </p:sp>
+      <p:sp>
+        <p:nvSpPr>
+          <p:cNvPr id="8" name="Rounded Rectangle 7"/>
+          <p:cNvSpPr/>
+          <p:nvPr/>
+        </p:nvSpPr>
+        <p:spPr>
+          <a:xfrm>
+            <a:off x="731520" y="5074920"/>
+            <a:ext cx="10789920" cy="731520"/>
+          </a:xfrm>
+          <a:prstGeom prst="roundRect">
+            <a:avLst>
+              <a:gd name="adj" fmla="val 8000"/>
+            </a:avLst>
+          </a:prstGeom>
+          <a:solidFill>
+            <a:srgbClr val="FEF2F2"/>
+          </a:solidFill>
+          <a:ln w="19050">
+            <a:solidFill>
+              <a:srgbClr val="991B1B"/>
+            </a:solidFill>
+          </a:ln>
+          <a:effectLst/>
+        </p:spPr>
+        <p:style>
+          <a:lnRef idx="1">
+            <a:schemeClr val="accent1"/>
+          </a:lnRef>
+          <a:fillRef idx="3">
+            <a:schemeClr val="accent1"/>
+          </a:fillRef>
+          <a:effectRef idx="2">
+            <a:schemeClr val="accent1"/>
+          </a:effectRef>
+          <a:fontRef idx="minor">
+            <a:schemeClr val="lt1"/>
+          </a:fontRef>
+        </p:style>
+        <p:txBody>
+          <a:bodyPr rtlCol="0" anchor="ctr"/>
+          <a:lstStyle/>
+          <a:p>
+            <a:pPr algn="ctr"/>
+          </a:p>
+        </p:txBody>
+      </p:sp>
+      <p:sp>
+        <p:nvSpPr>
+          <p:cNvPr id="9" name="TextBox 8"/>
+          <p:cNvSpPr txBox="1"/>
+          <p:nvPr/>
+        </p:nvSpPr>
+        <p:spPr>
+          <a:xfrm>
+            <a:off x="914400" y="5074920"/>
+            <a:ext cx="10424160" cy="731520"/>
+          </a:xfrm>
+          <a:prstGeom prst="rect">
+            <a:avLst/>
+          </a:prstGeom>
+          <a:noFill/>
+        </p:spPr>
+        <p:txBody>
+          <a:bodyPr wrap="square" anchor="ctr" lIns="45720" rIns="45720">
+            <a:spAutoFit/>
+          </a:bodyPr>
+          <a:lstStyle/>
+          <a:p>
+            <a:pPr algn="l">
+              <a:spcAft>
+                <a:spcPts val="400"/>
+              </a:spcAft>
+            </a:pPr>
+            <a:r>
+              <a:rPr sz="2400" b="1">
+                <a:solidFill>
+                  <a:srgbClr val="991B1B"/>
+                </a:solidFill>
+                <a:latin typeface="Calibri"/>
+              </a:rPr>
+              <a:t>Đan xen tương đồng và khác biệt.</a:t>
+            </a:r>
+          </a:p>
+        </p:txBody>
+      </p:sp>
+    </p:spTree>
+  </p:cSld>
+  <p:clrMapOvr>
+    <a:masterClrMapping/>
+  </p:clrMapOvr>
+</p:sld>
+</file>
+
+<file path=ppt/slides/slide37.xml><?xml version="1.0" encoding="utf-8"?>
+<p:sld xmlns:a="http://schemas.openxmlformats.org/drawingml/2006/main" xmlns:p="http://schemas.openxmlformats.org/presentationml/2006/main" xmlns:r="http://schemas.openxmlformats.org/officeDocument/2006/relationships">
+  <p:cSld>
+    <p:bg>
+      <p:bgPr>
+        <a:solidFill>
+          <a:srgbClr val="FFFFFF"/>
+        </a:solidFill>
+        <a:effectLst/>
+      </p:bgPr>
+    </p:bg>
+    <p:spTree>
+      <p:nvGrpSpPr>
+        <p:cNvPr id="1" name=""/>
+        <p:cNvGrpSpPr/>
+        <p:nvPr/>
+      </p:nvGrpSpPr>
+      <p:grpSpPr/>
+      <p:sp>
+        <p:nvSpPr>
+          <p:cNvPr id="2" name="Rectangle 1"/>
+          <p:cNvSpPr/>
+          <p:nvPr/>
+        </p:nvSpPr>
+        <p:spPr>
+          <a:xfrm>
+            <a:off x="457200" y="384048"/>
+            <a:ext cx="109728" cy="658368"/>
+          </a:xfrm>
+          <a:prstGeom prst="rect">
+            <a:avLst/>
+          </a:prstGeom>
+          <a:solidFill>
+            <a:srgbClr val="1E40AF"/>
+          </a:solidFill>
+          <a:ln>
+            <a:noFill/>
+          </a:ln>
+          <a:effectLst/>
+        </p:spPr>
+        <p:style>
+          <a:lnRef idx="1">
+            <a:schemeClr val="accent1"/>
+          </a:lnRef>
+          <a:fillRef idx="3">
+            <a:schemeClr val="accent1"/>
+          </a:fillRef>
+          <a:effectRef idx="2">
+            <a:schemeClr val="accent1"/>
+          </a:effectRef>
+          <a:fontRef idx="minor">
+            <a:schemeClr val="lt1"/>
+          </a:fontRef>
+        </p:style>
+        <p:txBody>
+          <a:bodyPr rtlCol="0" anchor="ctr"/>
+          <a:lstStyle/>
+          <a:p>
+            <a:pPr algn="ctr"/>
+          </a:p>
+        </p:txBody>
+      </p:sp>
+      <p:sp>
+        <p:nvSpPr>
+          <p:cNvPr id="3" name="Rounded Rectangle 2"/>
+          <p:cNvSpPr/>
+          <p:nvPr/>
+        </p:nvSpPr>
+        <p:spPr>
+          <a:xfrm>
+            <a:off x="10097719" y="457200"/>
+            <a:ext cx="1545336" cy="457200"/>
+          </a:xfrm>
+          <a:prstGeom prst="roundRect">
+            <a:avLst/>
+          </a:prstGeom>
+          <a:solidFill>
+            <a:srgbClr val="166534"/>
+          </a:solidFill>
+          <a:ln>
+            <a:noFill/>
+          </a:ln>
+          <a:effectLst/>
+        </p:spPr>
+        <p:style>
+          <a:lnRef idx="1">
+            <a:schemeClr val="accent1"/>
+          </a:lnRef>
+          <a:fillRef idx="3">
+            <a:schemeClr val="accent1"/>
+          </a:fillRef>
+          <a:effectRef idx="2">
+            <a:schemeClr val="accent1"/>
+          </a:effectRef>
+          <a:fontRef idx="minor">
+            <a:schemeClr val="lt1"/>
+          </a:fontRef>
+        </p:style>
+        <p:txBody>
+          <a:bodyPr rtlCol="0" anchor="ctr" wrap="none" tIns="0" bIns="0"/>
+          <a:lstStyle/>
+          <a:p>
+            <a:pPr algn="ctr"/>
+            <a:r>
+              <a:rPr sz="1400" b="1">
+                <a:solidFill>
+                  <a:srgbClr val="FFFFFF"/>
+                </a:solidFill>
+                <a:latin typeface="Arial"/>
+              </a:rPr>
+              <a:t>CỦNG CỐ</a:t>
+            </a:r>
+          </a:p>
+        </p:txBody>
+      </p:sp>
+      <p:sp>
+        <p:nvSpPr>
+          <p:cNvPr id="4" name="TextBox 3"/>
+          <p:cNvSpPr txBox="1"/>
+          <p:nvPr/>
+        </p:nvSpPr>
+        <p:spPr>
+          <a:xfrm>
+            <a:off x="731520" y="274320"/>
+            <a:ext cx="9427464" cy="868680"/>
+          </a:xfrm>
+          <a:prstGeom prst="rect">
+            <a:avLst/>
+          </a:prstGeom>
+          <a:noFill/>
+        </p:spPr>
+        <p:txBody>
+          <a:bodyPr wrap="square" anchor="ctr">
+            <a:spAutoFit/>
+          </a:bodyPr>
+          <a:lstStyle/>
+          <a:p>
+            <a:r>
+              <a:rPr sz="3600" b="1">
+                <a:solidFill>
+                  <a:srgbClr val="1E40AF"/>
+                </a:solidFill>
+                <a:latin typeface="Arial"/>
+              </a:rPr>
+              <a:t>SƠ ĐỒ TƯ DUY</a:t>
+            </a:r>
+          </a:p>
+        </p:txBody>
+      </p:sp>
+      <p:sp>
+        <p:nvSpPr>
+          <p:cNvPr id="5" name="Rectangle 4"/>
+          <p:cNvSpPr/>
+          <p:nvPr/>
+        </p:nvSpPr>
+        <p:spPr>
+          <a:xfrm>
+            <a:off x="457200" y="1207008"/>
+            <a:ext cx="11274552" cy="22000"/>
+          </a:xfrm>
+          <a:prstGeom prst="rect">
+            <a:avLst/>
+          </a:prstGeom>
+          <a:solidFill>
+            <a:srgbClr val="E2E8F0"/>
+          </a:solidFill>
+          <a:ln>
+            <a:noFill/>
+          </a:ln>
+          <a:effectLst/>
+        </p:spPr>
+        <p:style>
+          <a:lnRef idx="1">
+            <a:schemeClr val="accent1"/>
+          </a:lnRef>
+          <a:fillRef idx="3">
+            <a:schemeClr val="accent1"/>
+          </a:fillRef>
+          <a:effectRef idx="2">
+            <a:schemeClr val="accent1"/>
+          </a:effectRef>
+          <a:fontRef idx="minor">
+            <a:schemeClr val="lt1"/>
+          </a:fontRef>
+        </p:style>
+        <p:txBody>
+          <a:bodyPr rtlCol="0" anchor="ctr"/>
+          <a:lstStyle/>
+          <a:p>
+            <a:pPr algn="ctr"/>
+          </a:p>
+        </p:txBody>
+      </p:sp>
+      <p:sp>
+        <p:nvSpPr>
+          <p:cNvPr id="6" name="TextBox 5"/>
+          <p:cNvSpPr txBox="1"/>
+          <p:nvPr/>
+        </p:nvSpPr>
+        <p:spPr>
+          <a:xfrm>
+            <a:off x="457200" y="6355080"/>
+            <a:ext cx="11274552" cy="365760"/>
+          </a:xfrm>
+          <a:prstGeom prst="rect">
+            <a:avLst/>
+          </a:prstGeom>
+          <a:noFill/>
+        </p:spPr>
+        <p:txBody>
+          <a:bodyPr wrap="none">
+            <a:spAutoFit/>
+          </a:bodyPr>
+          <a:lstStyle/>
+          <a:p>
+            <a:pPr algn="r"/>
+            <a:r>
+              <a:rPr sz="1200">
+                <a:solidFill>
+                  <a:srgbClr val="64748B"/>
+                </a:solidFill>
+                <a:latin typeface="Calibri"/>
+              </a:rPr>
+              <a:t>Ngữ văn 12 · Bài 2: Những Thế Giới Thơ          37</a:t>
+            </a:r>
+          </a:p>
+        </p:txBody>
+      </p:sp>
+      <p:pic>
+        <p:nvPicPr>
+          <p:cNvPr id="7" name="Picture 6" descr="SoDoTuDuy_NGUVAN12_Bai2_NhungTheGioiTho_T12-22.png"/>
+          <p:cNvPicPr>
+            <a:picLocks noChangeAspect="1"/>
+          </p:cNvPicPr>
+          <p:nvPr/>
+        </p:nvPicPr>
+        <p:blipFill>
+          <a:blip r:embed="rId2"/>
+          <a:stretch>
+            <a:fillRect/>
+          </a:stretch>
+        </p:blipFill>
+        <p:spPr>
+          <a:xfrm>
+            <a:off x="1788855" y="1371600"/>
+            <a:ext cx="8675250" cy="4846320"/>
+          </a:xfrm>
+          <a:prstGeom prst="rect">
+            <a:avLst/>
+          </a:prstGeom>
+        </p:spPr>
+      </p:pic>
+    </p:spTree>
+  </p:cSld>
+  <p:clrMapOvr>
+    <a:masterClrMapping/>
+  </p:clrMapOvr>
+</p:sld>
+</file>
+
+<file path=ppt/slides/slide38.xml><?xml version="1.0" encoding="utf-8"?>
+<p:sld xmlns:a="http://schemas.openxmlformats.org/drawingml/2006/main" xmlns:p="http://schemas.openxmlformats.org/presentationml/2006/main" xmlns:r="http://schemas.openxmlformats.org/officeDocument/2006/relationships">
+  <p:cSld>
+    <p:bg>
+      <p:bgPr>
+        <a:solidFill>
+          <a:srgbClr val="FFFFFF"/>
+        </a:solidFill>
+        <a:effectLst/>
+      </p:bgPr>
+    </p:bg>
+    <p:spTree>
+      <p:nvGrpSpPr>
+        <p:cNvPr id="1" name=""/>
+        <p:cNvGrpSpPr/>
+        <p:nvPr/>
+      </p:nvGrpSpPr>
+      <p:grpSpPr/>
+      <p:sp>
+        <p:nvSpPr>
+          <p:cNvPr id="2" name="Rectangle 1"/>
+          <p:cNvSpPr/>
+          <p:nvPr/>
+        </p:nvSpPr>
+        <p:spPr>
+          <a:xfrm>
+            <a:off x="457200" y="384048"/>
+            <a:ext cx="109728" cy="658368"/>
+          </a:xfrm>
+          <a:prstGeom prst="rect">
+            <a:avLst/>
+          </a:prstGeom>
+          <a:solidFill>
+            <a:srgbClr val="1E40AF"/>
+          </a:solidFill>
+          <a:ln>
+            <a:noFill/>
+          </a:ln>
+          <a:effectLst/>
+        </p:spPr>
+        <p:style>
+          <a:lnRef idx="1">
+            <a:schemeClr val="accent1"/>
+          </a:lnRef>
+          <a:fillRef idx="3">
+            <a:schemeClr val="accent1"/>
+          </a:fillRef>
+          <a:effectRef idx="2">
+            <a:schemeClr val="accent1"/>
+          </a:effectRef>
+          <a:fontRef idx="minor">
+            <a:schemeClr val="lt1"/>
+          </a:fontRef>
+        </p:style>
+        <p:txBody>
+          <a:bodyPr rtlCol="0" anchor="ctr"/>
+          <a:lstStyle/>
+          <a:p>
+            <a:pPr algn="ctr"/>
+          </a:p>
+        </p:txBody>
+      </p:sp>
+      <p:sp>
+        <p:nvSpPr>
+          <p:cNvPr id="3" name="Rounded Rectangle 2"/>
+          <p:cNvSpPr/>
+          <p:nvPr/>
+        </p:nvSpPr>
+        <p:spPr>
+          <a:xfrm>
+            <a:off x="10097719" y="457200"/>
+            <a:ext cx="1545336" cy="457200"/>
+          </a:xfrm>
+          <a:prstGeom prst="roundRect">
+            <a:avLst/>
+          </a:prstGeom>
+          <a:solidFill>
+            <a:srgbClr val="991B1B"/>
+          </a:solidFill>
+          <a:ln>
+            <a:noFill/>
+          </a:ln>
+          <a:effectLst/>
+        </p:spPr>
+        <p:style>
+          <a:lnRef idx="1">
+            <a:schemeClr val="accent1"/>
+          </a:lnRef>
+          <a:fillRef idx="3">
+            <a:schemeClr val="accent1"/>
+          </a:fillRef>
+          <a:effectRef idx="2">
+            <a:schemeClr val="accent1"/>
+          </a:effectRef>
+          <a:fontRef idx="minor">
+            <a:schemeClr val="lt1"/>
+          </a:fontRef>
+        </p:style>
+        <p:txBody>
+          <a:bodyPr rtlCol="0" anchor="ctr" wrap="none" tIns="0" bIns="0"/>
+          <a:lstStyle/>
+          <a:p>
+            <a:pPr algn="ctr"/>
+            <a:r>
+              <a:rPr sz="1400" b="1">
+                <a:solidFill>
+                  <a:srgbClr val="FFFFFF"/>
+                </a:solidFill>
+                <a:latin typeface="Arial"/>
+              </a:rPr>
+              <a:t>CỦNG CỐ</a:t>
+            </a:r>
+          </a:p>
+        </p:txBody>
+      </p:sp>
+      <p:sp>
+        <p:nvSpPr>
+          <p:cNvPr id="4" name="TextBox 3"/>
+          <p:cNvSpPr txBox="1"/>
+          <p:nvPr/>
+        </p:nvSpPr>
+        <p:spPr>
+          <a:xfrm>
+            <a:off x="731520" y="274320"/>
+            <a:ext cx="9427464" cy="868680"/>
+          </a:xfrm>
+          <a:prstGeom prst="rect">
+            <a:avLst/>
+          </a:prstGeom>
+          <a:noFill/>
+        </p:spPr>
+        <p:txBody>
+          <a:bodyPr wrap="square" anchor="ctr">
+            <a:spAutoFit/>
+          </a:bodyPr>
+          <a:lstStyle/>
+          <a:p>
+            <a:r>
+              <a:rPr sz="3600" b="1">
+                <a:solidFill>
+                  <a:srgbClr val="1E40AF"/>
+                </a:solidFill>
+                <a:latin typeface="Arial"/>
+              </a:rPr>
+              <a:t>BÀI TẬP CỦA BẠN</a:t>
+            </a:r>
+          </a:p>
+        </p:txBody>
+      </p:sp>
+      <p:sp>
+        <p:nvSpPr>
+          <p:cNvPr id="5" name="Rectangle 4"/>
+          <p:cNvSpPr/>
+          <p:nvPr/>
+        </p:nvSpPr>
+        <p:spPr>
+          <a:xfrm>
+            <a:off x="457200" y="1207008"/>
+            <a:ext cx="11274552" cy="22000"/>
+          </a:xfrm>
+          <a:prstGeom prst="rect">
+            <a:avLst/>
+          </a:prstGeom>
+          <a:solidFill>
+            <a:srgbClr val="E2E8F0"/>
+          </a:solidFill>
+          <a:ln>
+            <a:noFill/>
+          </a:ln>
+          <a:effectLst/>
+        </p:spPr>
+        <p:style>
+          <a:lnRef idx="1">
+            <a:schemeClr val="accent1"/>
+          </a:lnRef>
+          <a:fillRef idx="3">
+            <a:schemeClr val="accent1"/>
+          </a:fillRef>
+          <a:effectRef idx="2">
+            <a:schemeClr val="accent1"/>
+          </a:effectRef>
+          <a:fontRef idx="minor">
+            <a:schemeClr val="lt1"/>
+          </a:fontRef>
+        </p:style>
+        <p:txBody>
+          <a:bodyPr rtlCol="0" anchor="ctr"/>
+          <a:lstStyle/>
+          <a:p>
+            <a:pPr algn="ctr"/>
+          </a:p>
+        </p:txBody>
+      </p:sp>
+      <p:sp>
+        <p:nvSpPr>
+          <p:cNvPr id="6" name="TextBox 5"/>
+          <p:cNvSpPr txBox="1"/>
+          <p:nvPr/>
+        </p:nvSpPr>
+        <p:spPr>
+          <a:xfrm>
+            <a:off x="457200" y="6355080"/>
+            <a:ext cx="11274552" cy="365760"/>
+          </a:xfrm>
+          <a:prstGeom prst="rect">
+            <a:avLst/>
+          </a:prstGeom>
+          <a:noFill/>
+        </p:spPr>
+        <p:txBody>
+          <a:bodyPr wrap="none">
+            <a:spAutoFit/>
+          </a:bodyPr>
+          <a:lstStyle/>
+          <a:p>
+            <a:pPr algn="r"/>
+            <a:r>
+              <a:rPr sz="1200">
+                <a:solidFill>
+                  <a:srgbClr val="64748B"/>
+                </a:solidFill>
+                <a:latin typeface="Calibri"/>
+              </a:rPr>
+              <a:t>Ngữ văn 12 · Bài 2: Những Thế Giới Thơ          38</a:t>
             </a:r>
           </a:p>
         </p:txBody>
@@ -14785,14 +16537,14 @@
         </p:nvSpPr>
         <p:spPr>
           <a:xfrm>
-            <a:off x="10253167" y="457200"/>
-            <a:ext cx="1389888" cy="457200"/>
+            <a:off x="10408615" y="457200"/>
+            <a:ext cx="1234440" cy="457200"/>
           </a:xfrm>
           <a:prstGeom prst="roundRect">
             <a:avLst/>
           </a:prstGeom>
           <a:solidFill>
-            <a:srgbClr val="1E40AF"/>
+            <a:srgbClr val="991B1B"/>
           </a:solidFill>
           <a:ln>
             <a:noFill/>
@@ -14825,7 +16577,7 @@
                 </a:solidFill>
                 <a:latin typeface="Arial"/>
               </a:rPr>
-              <a:t>ĐỀ BÀI</a:t>
+              <a:t>VIDEO</a:t>
             </a:r>
           </a:p>
         </p:txBody>
@@ -14839,7 +16591,7 @@
         <p:spPr>
           <a:xfrm>
             <a:off x="731520" y="274320"/>
-            <a:ext cx="9582912" cy="868680"/>
+            <a:ext cx="9738360" cy="868680"/>
           </a:xfrm>
           <a:prstGeom prst="rect">
             <a:avLst/>
@@ -14859,7 +16611,7 @@
                 </a:solidFill>
                 <a:latin typeface="Arial"/>
               </a:rPr>
-              <a:t>HOÀN CẢNH – TÌNH THẾ</a:t>
+              <a:t>VIDEO THAM KHẢO</a:t>
             </a:r>
           </a:p>
         </p:txBody>
@@ -14943,16 +16695,40 @@
           </a:p>
         </p:txBody>
       </p:sp>
-      <p:sp>
-        <p:nvSpPr>
-          <p:cNvPr id="7" name="TextBox 6"/>
+      <p:pic>
+        <p:nvPicPr>
+          <p:cNvPr id="7" name="Picture 6" descr="QR_video_lSlcQiQWbUQ.png"/>
+          <p:cNvPicPr>
+            <a:picLocks noChangeAspect="1"/>
+          </p:cNvPicPr>
+          <p:nvPr/>
+        </p:nvPicPr>
+        <p:blipFill>
+          <a:blip r:embed="rId2"/>
+          <a:stretch>
+            <a:fillRect/>
+          </a:stretch>
+        </p:blipFill>
+        <p:spPr>
+          <a:xfrm>
+            <a:off x="8412480" y="1554480"/>
+            <a:ext cx="3108960" cy="3108960"/>
+          </a:xfrm>
+          <a:prstGeom prst="rect">
+            <a:avLst/>
+          </a:prstGeom>
+        </p:spPr>
+      </p:pic>
+      <p:sp>
+        <p:nvSpPr>
+          <p:cNvPr id="8" name="TextBox 7"/>
           <p:cNvSpPr txBox="1"/>
           <p:nvPr/>
         </p:nvSpPr>
         <p:spPr>
           <a:xfrm>
-            <a:off x="731520" y="1463040"/>
-            <a:ext cx="10789920" cy="3566160"/>
+            <a:off x="731520" y="1554480"/>
+            <a:ext cx="7498079" cy="4206240"/>
           </a:xfrm>
           <a:prstGeom prst="rect">
             <a:avLst/>
@@ -14977,94 +16753,61 @@
                 </a:solidFill>
                 <a:latin typeface="Calibri"/>
               </a:rPr>
-              <a:t>Hình ảnh nào trong bốn câu thơ đầu gợi ra hoàn cảnh – tình thế của nhân vật trữ tình? Hoàn cảnh đó có đặc điểm gì?</a:t>
-            </a:r>
-          </a:p>
-        </p:txBody>
-      </p:sp>
-      <p:sp>
-        <p:nvSpPr>
-          <p:cNvPr id="8" name="Rounded Rectangle 7"/>
-          <p:cNvSpPr/>
-          <p:nvPr/>
-        </p:nvSpPr>
-        <p:spPr>
-          <a:xfrm>
-            <a:off x="731520" y="5120640"/>
-            <a:ext cx="10789920" cy="693420"/>
-          </a:xfrm>
-          <a:prstGeom prst="roundRect">
-            <a:avLst>
-              <a:gd name="adj" fmla="val 8000"/>
-            </a:avLst>
-          </a:prstGeom>
-          <a:solidFill>
-            <a:srgbClr val="EFF4FF"/>
-          </a:solidFill>
-          <a:ln w="19050">
-            <a:solidFill>
-              <a:srgbClr val="1E40AF"/>
-            </a:solidFill>
-          </a:ln>
-          <a:effectLst/>
-        </p:spPr>
-        <p:style>
-          <a:lnRef idx="1">
-            <a:schemeClr val="accent1"/>
-          </a:lnRef>
-          <a:fillRef idx="3">
-            <a:schemeClr val="accent1"/>
-          </a:fillRef>
-          <a:effectRef idx="2">
-            <a:schemeClr val="accent1"/>
-          </a:effectRef>
-          <a:fontRef idx="minor">
-            <a:schemeClr val="lt1"/>
-          </a:fontRef>
-        </p:style>
-        <p:txBody>
-          <a:bodyPr rtlCol="0" anchor="ctr"/>
-          <a:lstStyle/>
-          <a:p>
-            <a:pPr algn="ctr"/>
-          </a:p>
-        </p:txBody>
-      </p:sp>
-      <p:sp>
-        <p:nvSpPr>
-          <p:cNvPr id="9" name="TextBox 8"/>
-          <p:cNvSpPr txBox="1"/>
-          <p:nvPr/>
-        </p:nvSpPr>
-        <p:spPr>
-          <a:xfrm>
-            <a:off x="914400" y="5120640"/>
-            <a:ext cx="10424160" cy="693420"/>
-          </a:xfrm>
-          <a:prstGeom prst="rect">
-            <a:avLst/>
-          </a:prstGeom>
-          <a:noFill/>
-        </p:spPr>
-        <p:txBody>
-          <a:bodyPr wrap="square" anchor="ctr" lIns="45720" rIns="45720">
-            <a:spAutoFit/>
-          </a:bodyPr>
-          <a:lstStyle/>
+              <a:t>🎬 Đặng Dung và bài thơ “Cảm hoài”</a:t>
+            </a:r>
+          </a:p>
           <a:p>
             <a:pPr algn="l">
               <a:spcAft>
-                <a:spcPts val="400"/>
+                <a:spcPts val="800"/>
               </a:spcAft>
             </a:pPr>
             <a:r>
-              <a:rPr sz="2200" b="1">
-                <a:solidFill>
-                  <a:srgbClr val="1E40AF"/>
+              <a:rPr sz="2000">
+                <a:solidFill>
+                  <a:srgbClr val="64748B"/>
                 </a:solidFill>
                 <a:latin typeface="Calibri"/>
               </a:rPr>
-              <a:t>💡 Đặt “thế sự” cạnh “đã vội già”.</a:t>
+              <a:t>Kênh: Cùng Bạn Đọc Sách</a:t>
+            </a:r>
+          </a:p>
+          <a:p>
+            <a:pPr algn="l" marL="365760" indent="-365760">
+              <a:spcAft>
+                <a:spcPts val="800"/>
+              </a:spcAft>
+              <a:buClr>
+                <a:srgbClr val="1E40AF"/>
+              </a:buClr>
+              <a:buFont typeface="Arial"/>
+              <a:buChar char="•"/>
+            </a:pPr>
+            <a:r>
+              <a:rPr sz="2000">
+                <a:solidFill>
+                  <a:srgbClr val="1E293B"/>
+                </a:solidFill>
+                <a:latin typeface="Calibri"/>
+              </a:rPr>
+              <a:t>Đọc bài thơ, tìm hiểu tác giả Đặng Dung</a:t>
+            </a:r>
+          </a:p>
+          <a:p>
+            <a:pPr algn="l">
+              <a:spcAft>
+                <a:spcPts val="800"/>
+              </a:spcAft>
+            </a:pPr>
+            <a:r>
+              <a:rPr sz="1600">
+                <a:solidFill>
+                  <a:srgbClr val="64748B"/>
+                </a:solidFill>
+                <a:latin typeface="Calibri"/>
+                <a:hlinkClick r:id="rId3"/>
+              </a:rPr>
+              <a:t>https://www.youtube.com/watch?v=lSlcQiQWbUQ</a:t>
             </a:r>
           </a:p>
         </p:txBody>
@@ -15147,14 +16890,14 @@
         </p:nvSpPr>
         <p:spPr>
           <a:xfrm>
-            <a:off x="9942271" y="457200"/>
-            <a:ext cx="1700784" cy="457200"/>
+            <a:off x="10253167" y="457200"/>
+            <a:ext cx="1389888" cy="457200"/>
           </a:xfrm>
           <a:prstGeom prst="roundRect">
             <a:avLst/>
           </a:prstGeom>
           <a:solidFill>
-            <a:srgbClr val="991B1B"/>
+            <a:srgbClr val="1E40AF"/>
           </a:solidFill>
           <a:ln>
             <a:noFill/>
@@ -15187,7 +16930,7 @@
                 </a:solidFill>
                 <a:latin typeface="Arial"/>
               </a:rPr>
-              <a:t>LỜI GIẢI</a:t>
+              <a:t>ĐỀ BÀI</a:t>
             </a:r>
           </a:p>
         </p:txBody>
@@ -15201,7 +16944,7 @@
         <p:spPr>
           <a:xfrm>
             <a:off x="731520" y="274320"/>
-            <a:ext cx="9272016" cy="868680"/>
+            <a:ext cx="9582912" cy="868680"/>
           </a:xfrm>
           <a:prstGeom prst="rect">
             <a:avLst/>
@@ -15314,7 +17057,7 @@
         <p:spPr>
           <a:xfrm>
             <a:off x="731520" y="1463040"/>
-            <a:ext cx="10789920" cy="3474720"/>
+            <a:ext cx="10789920" cy="3566160"/>
           </a:xfrm>
           <a:prstGeom prst="rect">
             <a:avLst/>
@@ -15327,66 +17070,19 @@
           </a:bodyPr>
           <a:lstStyle/>
           <a:p>
-            <a:pPr algn="l" marL="365760" indent="-365760">
+            <a:pPr algn="l">
               <a:spcAft>
                 <a:spcPts val="800"/>
               </a:spcAft>
-              <a:buClr>
-                <a:srgbClr val="1E40AF"/>
-              </a:buClr>
-              <a:buFont typeface="Arial"/>
-              <a:buChar char="•"/>
             </a:pPr>
             <a:r>
-              <a:rPr sz="2300">
+              <a:rPr sz="2600" b="1">
                 <a:solidFill>
                   <a:srgbClr val="1E293B"/>
                 </a:solidFill>
                 <a:latin typeface="Calibri"/>
               </a:rPr>
-              <a:t>Thế sự ngổn ngang – mà đã già.</a:t>
-            </a:r>
-          </a:p>
-          <a:p>
-            <a:pPr algn="l" marL="365760" indent="-365760">
-              <a:spcAft>
-                <a:spcPts val="800"/>
-              </a:spcAft>
-              <a:buClr>
-                <a:srgbClr val="1E40AF"/>
-              </a:buClr>
-              <a:buFont typeface="Arial"/>
-              <a:buChar char="•"/>
-            </a:pPr>
-            <a:r>
-              <a:rPr sz="2300">
-                <a:solidFill>
-                  <a:srgbClr val="1E293B"/>
-                </a:solidFill>
-                <a:latin typeface="Calibri"/>
-              </a:rPr>
-              <a:t>Gặp thời đồ điếu công thành dễ – lỡ vận anh hùng hận xót xa.</a:t>
-            </a:r>
-          </a:p>
-          <a:p>
-            <a:pPr algn="l" marL="365760" indent="-365760">
-              <a:spcAft>
-                <a:spcPts val="800"/>
-              </a:spcAft>
-              <a:buClr>
-                <a:srgbClr val="1E40AF"/>
-              </a:buClr>
-              <a:buFont typeface="Arial"/>
-              <a:buChar char="•"/>
-            </a:pPr>
-            <a:r>
-              <a:rPr sz="2300">
-                <a:solidFill>
-                  <a:srgbClr val="1E293B"/>
-                </a:solidFill>
-                <a:latin typeface="Calibri"/>
-              </a:rPr>
-              <a:t>Mâu thuẫn chí lớn – thời vận, tuổi tác.</a:t>
+              <a:t>Hình ảnh nào trong bốn câu thơ đầu gợi ra hoàn cảnh – tình thế của nhân vật trữ tình? Hoàn cảnh đó có đặc điểm gì?</a:t>
             </a:r>
           </a:p>
         </p:txBody>
@@ -15399,8 +17095,8 @@
         </p:nvSpPr>
         <p:spPr>
           <a:xfrm>
-            <a:off x="731520" y="5074920"/>
-            <a:ext cx="10789920" cy="731520"/>
+            <a:off x="731520" y="5120640"/>
+            <a:ext cx="10789920" cy="693420"/>
           </a:xfrm>
           <a:prstGeom prst="roundRect">
             <a:avLst>
@@ -15408,11 +17104,11 @@
             </a:avLst>
           </a:prstGeom>
           <a:solidFill>
-            <a:srgbClr val="FEF2F2"/>
+            <a:srgbClr val="EFF4FF"/>
           </a:solidFill>
           <a:ln w="19050">
             <a:solidFill>
-              <a:srgbClr val="991B1B"/>
+              <a:srgbClr val="1E40AF"/>
             </a:solidFill>
           </a:ln>
           <a:effectLst/>
@@ -15447,8 +17143,8 @@
         </p:nvSpPr>
         <p:spPr>
           <a:xfrm>
-            <a:off x="914400" y="5074920"/>
-            <a:ext cx="10424160" cy="731520"/>
+            <a:off x="914400" y="5120640"/>
+            <a:ext cx="10424160" cy="693420"/>
           </a:xfrm>
           <a:prstGeom prst="rect">
             <a:avLst/>
@@ -15467,13 +17163,13 @@
               </a:spcAft>
             </a:pPr>
             <a:r>
-              <a:rPr sz="2400" b="1">
-                <a:solidFill>
-                  <a:srgbClr val="991B1B"/>
+              <a:rPr sz="2200" b="1">
+                <a:solidFill>
+                  <a:srgbClr val="1E40AF"/>
                 </a:solidFill>
                 <a:latin typeface="Calibri"/>
               </a:rPr>
-              <a:t>Bi kịch của người anh hùng thất thế.</a:t>
+              <a:t>💡 Đặt “thế sự” cạnh “đã vội già”.</a:t>
             </a:r>
           </a:p>
         </p:txBody>
@@ -15556,14 +17252,14 @@
         </p:nvSpPr>
         <p:spPr>
           <a:xfrm>
-            <a:off x="10253167" y="457200"/>
-            <a:ext cx="1389888" cy="457200"/>
+            <a:off x="9942271" y="457200"/>
+            <a:ext cx="1700784" cy="457200"/>
           </a:xfrm>
           <a:prstGeom prst="roundRect">
             <a:avLst/>
           </a:prstGeom>
           <a:solidFill>
-            <a:srgbClr val="1E40AF"/>
+            <a:srgbClr val="991B1B"/>
           </a:solidFill>
           <a:ln>
             <a:noFill/>
@@ -15596,7 +17292,7 @@
                 </a:solidFill>
                 <a:latin typeface="Arial"/>
               </a:rPr>
-              <a:t>ĐỀ BÀI</a:t>
+              <a:t>LỜI GIẢI</a:t>
             </a:r>
           </a:p>
         </p:txBody>
@@ -15610,7 +17306,7 @@
         <p:spPr>
           <a:xfrm>
             <a:off x="731520" y="274320"/>
-            <a:ext cx="9582912" cy="868680"/>
+            <a:ext cx="9272016" cy="868680"/>
           </a:xfrm>
           <a:prstGeom prst="rect">
             <a:avLst/>
@@ -15630,7 +17326,7 @@
                 </a:solidFill>
                 <a:latin typeface="Arial"/>
               </a:rPr>
-              <a:t>BIỂU TƯỢNG TRONG HAI CÂU LUẬN</a:t>
+              <a:t>HOÀN CẢNH – TÌNH THẾ</a:t>
             </a:r>
           </a:p>
         </p:txBody>
@@ -15723,7 +17419,7 @@
         <p:spPr>
           <a:xfrm>
             <a:off x="731520" y="1463040"/>
-            <a:ext cx="10789920" cy="3566160"/>
+            <a:ext cx="10789920" cy="3474720"/>
           </a:xfrm>
           <a:prstGeom prst="rect">
             <a:avLst/>
@@ -15736,19 +17432,66 @@
           </a:bodyPr>
           <a:lstStyle/>
           <a:p>
-            <a:pPr algn="l">
+            <a:pPr algn="l" marL="365760" indent="-365760">
               <a:spcAft>
                 <a:spcPts val="800"/>
               </a:spcAft>
+              <a:buClr>
+                <a:srgbClr val="1E40AF"/>
+              </a:buClr>
+              <a:buFont typeface="Arial"/>
+              <a:buChar char="•"/>
             </a:pPr>
             <a:r>
-              <a:rPr sz="2600" b="1">
+              <a:rPr sz="2300">
                 <a:solidFill>
                   <a:srgbClr val="1E293B"/>
                 </a:solidFill>
                 <a:latin typeface="Calibri"/>
               </a:rPr>
-              <a:t>Giải thích ý nghĩa các biểu tượng “xoay trục đất”, “rửa binh khí”, “kéo sông Ngân” và nêu cảm nhận về nỗi lòng nhân vật trữ tình.</a:t>
+              <a:t>Thế sự ngổn ngang – mà đã già.</a:t>
+            </a:r>
+          </a:p>
+          <a:p>
+            <a:pPr algn="l" marL="365760" indent="-365760">
+              <a:spcAft>
+                <a:spcPts val="800"/>
+              </a:spcAft>
+              <a:buClr>
+                <a:srgbClr val="1E40AF"/>
+              </a:buClr>
+              <a:buFont typeface="Arial"/>
+              <a:buChar char="•"/>
+            </a:pPr>
+            <a:r>
+              <a:rPr sz="2300">
+                <a:solidFill>
+                  <a:srgbClr val="1E293B"/>
+                </a:solidFill>
+                <a:latin typeface="Calibri"/>
+              </a:rPr>
+              <a:t>Gặp thời đồ điếu công thành dễ – lỡ vận anh hùng hận xót xa.</a:t>
+            </a:r>
+          </a:p>
+          <a:p>
+            <a:pPr algn="l" marL="365760" indent="-365760">
+              <a:spcAft>
+                <a:spcPts val="800"/>
+              </a:spcAft>
+              <a:buClr>
+                <a:srgbClr val="1E40AF"/>
+              </a:buClr>
+              <a:buFont typeface="Arial"/>
+              <a:buChar char="•"/>
+            </a:pPr>
+            <a:r>
+              <a:rPr sz="2300">
+                <a:solidFill>
+                  <a:srgbClr val="1E293B"/>
+                </a:solidFill>
+                <a:latin typeface="Calibri"/>
+              </a:rPr>
+              <a:t>Mâu thuẫn chí lớn – thời vận, tuổi tác.</a:t>
             </a:r>
           </a:p>
         </p:txBody>
@@ -15761,8 +17504,8 @@
         </p:nvSpPr>
         <p:spPr>
           <a:xfrm>
-            <a:off x="731520" y="5120640"/>
-            <a:ext cx="10789920" cy="693420"/>
+            <a:off x="731520" y="5074920"/>
+            <a:ext cx="10789920" cy="731520"/>
           </a:xfrm>
           <a:prstGeom prst="roundRect">
             <a:avLst>
@@ -15770,11 +17513,11 @@
             </a:avLst>
           </a:prstGeom>
           <a:solidFill>
-            <a:srgbClr val="EFF4FF"/>
+            <a:srgbClr val="FEF2F2"/>
           </a:solidFill>
           <a:ln w="19050">
             <a:solidFill>
-              <a:srgbClr val="1E40AF"/>
+              <a:srgbClr val="991B1B"/>
             </a:solidFill>
           </a:ln>
           <a:effectLst/>
@@ -15809,8 +17552,8 @@
         </p:nvSpPr>
         <p:spPr>
           <a:xfrm>
-            <a:off x="914400" y="5120640"/>
-            <a:ext cx="10424160" cy="693420"/>
+            <a:off x="914400" y="5074920"/>
+            <a:ext cx="10424160" cy="731520"/>
           </a:xfrm>
           <a:prstGeom prst="rect">
             <a:avLst/>
@@ -15829,13 +17572,13 @@
               </a:spcAft>
             </a:pPr>
             <a:r>
-              <a:rPr sz="2200" b="1">
-                <a:solidFill>
-                  <a:srgbClr val="1E40AF"/>
+              <a:rPr sz="2400" b="1">
+                <a:solidFill>
+                  <a:srgbClr val="991B1B"/>
                 </a:solidFill>
                 <a:latin typeface="Calibri"/>
               </a:rPr>
-              <a:t>💡 Các biểu tượng gắn với khát vọng gì?</a:t>
+              <a:t>Bi kịch của người anh hùng thất thế.</a:t>
             </a:r>
           </a:p>
         </p:txBody>
@@ -15918,14 +17661,14 @@
         </p:nvSpPr>
         <p:spPr>
           <a:xfrm>
-            <a:off x="9942271" y="457200"/>
-            <a:ext cx="1700784" cy="457200"/>
+            <a:off x="10253167" y="457200"/>
+            <a:ext cx="1389888" cy="457200"/>
           </a:xfrm>
           <a:prstGeom prst="roundRect">
             <a:avLst/>
           </a:prstGeom>
           <a:solidFill>
-            <a:srgbClr val="991B1B"/>
+            <a:srgbClr val="1E40AF"/>
           </a:solidFill>
           <a:ln>
             <a:noFill/>
@@ -15958,7 +17701,7 @@
                 </a:solidFill>
                 <a:latin typeface="Arial"/>
               </a:rPr>
-              <a:t>LỜI GIẢI</a:t>
+              <a:t>ĐỀ BÀI</a:t>
             </a:r>
           </a:p>
         </p:txBody>
@@ -15972,7 +17715,7 @@
         <p:spPr>
           <a:xfrm>
             <a:off x="731520" y="274320"/>
-            <a:ext cx="9272016" cy="868680"/>
+            <a:ext cx="9582912" cy="868680"/>
           </a:xfrm>
           <a:prstGeom prst="rect">
             <a:avLst/>
@@ -16085,7 +17828,7 @@
         <p:spPr>
           <a:xfrm>
             <a:off x="731520" y="1463040"/>
-            <a:ext cx="10789920" cy="3474720"/>
+            <a:ext cx="10789920" cy="3566160"/>
           </a:xfrm>
           <a:prstGeom prst="rect">
             <a:avLst/>
@@ -16098,66 +17841,19 @@
           </a:bodyPr>
           <a:lstStyle/>
           <a:p>
-            <a:pPr algn="l" marL="365760" indent="-365760">
+            <a:pPr algn="l">
               <a:spcAft>
                 <a:spcPts val="800"/>
               </a:spcAft>
-              <a:buClr>
-                <a:srgbClr val="1E40AF"/>
-              </a:buClr>
-              <a:buFont typeface="Arial"/>
-              <a:buChar char="•"/>
             </a:pPr>
             <a:r>
-              <a:rPr sz="2300">
+              <a:rPr sz="2600" b="1">
                 <a:solidFill>
                   <a:srgbClr val="1E293B"/>
                 </a:solidFill>
                 <a:latin typeface="Calibri"/>
               </a:rPr>
-              <a:t>“Xoay trục đất”: xoay chuyển vận mệnh đất nước.</a:t>
-            </a:r>
-          </a:p>
-          <a:p>
-            <a:pPr algn="l" marL="365760" indent="-365760">
-              <a:spcAft>
-                <a:spcPts val="800"/>
-              </a:spcAft>
-              <a:buClr>
-                <a:srgbClr val="1E40AF"/>
-              </a:buClr>
-              <a:buFont typeface="Arial"/>
-              <a:buChar char="•"/>
-            </a:pPr>
-            <a:r>
-              <a:rPr sz="2300">
-                <a:solidFill>
-                  <a:srgbClr val="1E293B"/>
-                </a:solidFill>
-                <a:latin typeface="Calibri"/>
-              </a:rPr>
-              <a:t>“Rửa binh khí”, “kéo sông Ngân”: dẹp yên chiến tranh, lập lại thái bình.</a:t>
-            </a:r>
-          </a:p>
-          <a:p>
-            <a:pPr algn="l" marL="365760" indent="-365760">
-              <a:spcAft>
-                <a:spcPts val="800"/>
-              </a:spcAft>
-              <a:buClr>
-                <a:srgbClr val="1E40AF"/>
-              </a:buClr>
-              <a:buFont typeface="Arial"/>
-              <a:buChar char="•"/>
-            </a:pPr>
-            <a:r>
-              <a:rPr sz="2300">
-                <a:solidFill>
-                  <a:srgbClr val="1E293B"/>
-                </a:solidFill>
-                <a:latin typeface="Calibri"/>
-              </a:rPr>
-              <a:t>Chí lớn kinh bang tế thế mà “khôn lối” – nỗi đau bất lực.</a:t>
+              <a:t>Giải thích ý nghĩa các biểu tượng “xoay trục đất”, “rửa binh khí”, “kéo sông Ngân” và nêu cảm nhận về nỗi lòng nhân vật trữ tình.</a:t>
             </a:r>
           </a:p>
         </p:txBody>
@@ -16170,8 +17866,8 @@
         </p:nvSpPr>
         <p:spPr>
           <a:xfrm>
-            <a:off x="731520" y="5074920"/>
-            <a:ext cx="10789920" cy="731520"/>
+            <a:off x="731520" y="5120640"/>
+            <a:ext cx="10789920" cy="693420"/>
           </a:xfrm>
           <a:prstGeom prst="roundRect">
             <a:avLst>
@@ -16179,11 +17875,11 @@
             </a:avLst>
           </a:prstGeom>
           <a:solidFill>
-            <a:srgbClr val="FEF2F2"/>
+            <a:srgbClr val="EFF4FF"/>
           </a:solidFill>
           <a:ln w="19050">
             <a:solidFill>
-              <a:srgbClr val="991B1B"/>
+              <a:srgbClr val="1E40AF"/>
             </a:solidFill>
           </a:ln>
           <a:effectLst/>
@@ -16218,8 +17914,8 @@
         </p:nvSpPr>
         <p:spPr>
           <a:xfrm>
-            <a:off x="914400" y="5074920"/>
-            <a:ext cx="10424160" cy="731520"/>
+            <a:off x="914400" y="5120640"/>
+            <a:ext cx="10424160" cy="693420"/>
           </a:xfrm>
           <a:prstGeom prst="rect">
             <a:avLst/>
@@ -16238,13 +17934,13 @@
               </a:spcAft>
             </a:pPr>
             <a:r>
-              <a:rPr sz="2400" b="1">
-                <a:solidFill>
-                  <a:srgbClr val="991B1B"/>
+              <a:rPr sz="2200" b="1">
+                <a:solidFill>
+                  <a:srgbClr val="1E40AF"/>
                 </a:solidFill>
                 <a:latin typeface="Calibri"/>
               </a:rPr>
-              <a:t>Biểu tượng mang tầm vũ trụ – chí lớn của bậc anh hùng.</a:t>
+              <a:t>💡 Các biểu tượng gắn với khát vọng gì?</a:t>
             </a:r>
           </a:p>
         </p:txBody>

--- a/mon/ngu_van/slide/lop12/Slide_NGUVAN12_Bai2_NhungTheGioiTho_T12-22.pptx
+++ b/mon/ngu_van/slide/lop12/Slide_NGUVAN12_Bai2_NhungTheGioiTho_T12-22.pptx
@@ -41,8 +41,6 @@
     <p:sldId id="289" r:id="rId41"/>
     <p:sldId id="290" r:id="rId42"/>
     <p:sldId id="291" r:id="rId43"/>
-    <p:sldId id="292" r:id="rId44"/>
-    <p:sldId id="293" r:id="rId45"/>
   </p:sldIdLst>
   <p:sldSz cx="12191695" cy="6858000" type="screen4x3"/>
   <p:notesSz cx="6858000" cy="9144000"/>
@@ -609,7 +607,7 @@
           <a:lstStyle/>
           <a:p>
             <a:r>
-              <a:t>Câu hỏi Trước khi đọc SGK tr.44; chiếu bản đồ địa bàn Tây Tiến.</a:t>
+              <a:t>Bấm vào đường link hoặc quét mã QR để mở video (cần Internet). </a:t>
             </a:r>
           </a:p>
         </p:txBody>
@@ -679,7 +677,7 @@
           <a:lstStyle/>
           <a:p>
             <a:r>
-              <a:t>Bấm vào đường link hoặc quét mã QR để mở video (cần Internet). </a:t>
+              <a:t>Slide ĐỀ BÀI – cho HS suy nghĩ, thảo luận (không chiếu lời giải). </a:t>
             </a:r>
           </a:p>
         </p:txBody>
@@ -749,7 +747,7 @@
           <a:lstStyle/>
           <a:p>
             <a:r>
-              <a:t>Slide ĐỀ BÀI – cho HS suy nghĩ, thảo luận (không chiếu lời giải). </a:t>
+              <a:t>Slide LỜI GIẢI – GV chốt sau khi HS trình bày. </a:t>
             </a:r>
           </a:p>
         </p:txBody>
@@ -819,7 +817,7 @@
           <a:lstStyle/>
           <a:p>
             <a:r>
-              <a:t>Slide LỜI GIẢI – GV chốt sau khi HS trình bày. </a:t>
+              <a:t>Slide ĐỀ BÀI – cho HS suy nghĩ, thảo luận (không chiếu lời giải). </a:t>
             </a:r>
           </a:p>
         </p:txBody>
@@ -889,7 +887,7 @@
           <a:lstStyle/>
           <a:p>
             <a:r>
-              <a:t>Slide ĐỀ BÀI – cho HS suy nghĩ, thảo luận (không chiếu lời giải). </a:t>
+              <a:t>Slide LỜI GIẢI – GV chốt sau khi HS trình bày. </a:t>
             </a:r>
           </a:p>
         </p:txBody>
@@ -959,7 +957,7 @@
           <a:lstStyle/>
           <a:p>
             <a:r>
-              <a:t>Slide LỜI GIẢI – GV chốt sau khi HS trình bày. </a:t>
+              <a:t>Câu hỏi Trước khi đọc SGK tr.48; nghe nhạc ghi ta Tây Ban Nha.</a:t>
             </a:r>
           </a:p>
         </p:txBody>
@@ -1029,7 +1027,7 @@
           <a:lstStyle/>
           <a:p>
             <a:r>
-              <a:t>Câu hỏi Trước khi đọc SGK tr.48; nghe nhạc ghi ta Tây Ban Nha.</a:t>
+              <a:t>Slide ĐỀ BÀI – cho HS suy nghĩ, thảo luận (không chiếu lời giải). </a:t>
             </a:r>
           </a:p>
         </p:txBody>
@@ -1099,7 +1097,7 @@
           <a:lstStyle/>
           <a:p>
             <a:r>
-              <a:t>Bấm vào đường link hoặc quét mã QR để mở video (cần Internet). </a:t>
+              <a:t>Slide LỜI GIẢI – GV chốt sau khi HS trình bày. </a:t>
             </a:r>
           </a:p>
         </p:txBody>
@@ -1379,7 +1377,7 @@
           <a:lstStyle/>
           <a:p>
             <a:r>
-              <a:t>Bấm vào đường link hoặc quét mã QR để mở video (cần Internet). </a:t>
+              <a:t>Slide ĐỀ BÀI – cho HS suy nghĩ, thảo luận (không chiếu lời giải). </a:t>
             </a:r>
           </a:p>
         </p:txBody>
@@ -1449,7 +1447,7 @@
           <a:lstStyle/>
           <a:p>
             <a:r>
-              <a:t>Slide ĐỀ BÀI – cho HS suy nghĩ, thảo luận (không chiếu lời giải). </a:t>
+              <a:t>Slide LỜI GIẢI – GV chốt sau khi HS trình bày. </a:t>
             </a:r>
           </a:p>
         </p:txBody>
@@ -1519,7 +1517,7 @@
           <a:lstStyle/>
           <a:p>
             <a:r>
-              <a:t>Slide LỜI GIẢI – GV chốt sau khi HS trình bày. </a:t>
+              <a:t>Slide ĐỀ BÀI – cho HS suy nghĩ, thảo luận (không chiếu lời giải). </a:t>
             </a:r>
           </a:p>
         </p:txBody>
@@ -1589,7 +1587,7 @@
           <a:lstStyle/>
           <a:p>
             <a:r>
-              <a:t>Slide ĐỀ BÀI – cho HS suy nghĩ, thảo luận (không chiếu lời giải). </a:t>
+              <a:t>Slide LỜI GIẢI – GV chốt sau khi HS trình bày. </a:t>
             </a:r>
           </a:p>
         </p:txBody>
@@ -1659,7 +1657,7 @@
           <a:lstStyle/>
           <a:p>
             <a:r>
-              <a:t>Slide LỜI GIẢI – GV chốt sau khi HS trình bày. </a:t>
+              <a:t>Bấm vào đường link hoặc quét mã QR để mở video (cần Internet). </a:t>
             </a:r>
           </a:p>
         </p:txBody>
@@ -1824,146 +1822,6 @@
 </p:notes>
 </file>
 
-<file path=ppt/notesSlides/notesSlide27.xml><?xml version="1.0" encoding="utf-8"?>
-<p:notes xmlns:a="http://schemas.openxmlformats.org/drawingml/2006/main" xmlns:p="http://schemas.openxmlformats.org/presentationml/2006/main" xmlns:r="http://schemas.openxmlformats.org/officeDocument/2006/relationships">
-  <p:cSld>
-    <p:spTree>
-      <p:nvGrpSpPr>
-        <p:cNvPr id="1" name=""/>
-        <p:cNvGrpSpPr/>
-        <p:nvPr/>
-      </p:nvGrpSpPr>
-      <p:grpSpPr>
-        <a:xfrm>
-          <a:off x="0" y="0"/>
-          <a:ext cx="0" cy="0"/>
-          <a:chOff x="0" y="0"/>
-          <a:chExt cx="0" cy="0"/>
-        </a:xfrm>
-      </p:grpSpPr>
-      <p:sp>
-        <p:nvSpPr>
-          <p:cNvPr id="2" name="Slide Image Placeholder 1"/>
-          <p:cNvSpPr>
-            <a:spLocks noGrp="1"/>
-          </p:cNvSpPr>
-          <p:nvPr>
-            <p:ph type="sldImg" idx="2"/>
-          </p:nvPr>
-        </p:nvSpPr>
-        <p:spPr/>
-      </p:sp>
-      <p:sp>
-        <p:nvSpPr>
-          <p:cNvPr id="3" name="Notes Placeholder 2"/>
-          <p:cNvSpPr>
-            <a:spLocks noGrp="1"/>
-          </p:cNvSpPr>
-          <p:nvPr>
-            <p:ph type="body" idx="3" sz="quarter"/>
-          </p:nvPr>
-        </p:nvSpPr>
-        <p:spPr/>
-        <p:txBody>
-          <a:bodyPr/>
-          <a:lstStyle/>
-          <a:p>
-            <a:r>
-              <a:t>Slide ĐỀ BÀI – cho HS suy nghĩ, thảo luận (không chiếu lời giải). </a:t>
-            </a:r>
-          </a:p>
-        </p:txBody>
-      </p:sp>
-      <p:sp>
-        <p:nvSpPr>
-          <p:cNvPr id="4" name="Slide Number Placeholder 3"/>
-          <p:cNvSpPr>
-            <a:spLocks noGrp="1"/>
-          </p:cNvSpPr>
-          <p:nvPr>
-            <p:ph type="sldNum" idx="5" sz="quarter"/>
-          </p:nvPr>
-        </p:nvSpPr>
-        <p:spPr/>
-      </p:sp>
-    </p:spTree>
-  </p:cSld>
-  <p:clrMapOvr>
-    <a:masterClrMapping/>
-  </p:clrMapOvr>
-</p:notes>
-</file>
-
-<file path=ppt/notesSlides/notesSlide28.xml><?xml version="1.0" encoding="utf-8"?>
-<p:notes xmlns:a="http://schemas.openxmlformats.org/drawingml/2006/main" xmlns:p="http://schemas.openxmlformats.org/presentationml/2006/main" xmlns:r="http://schemas.openxmlformats.org/officeDocument/2006/relationships">
-  <p:cSld>
-    <p:spTree>
-      <p:nvGrpSpPr>
-        <p:cNvPr id="1" name=""/>
-        <p:cNvGrpSpPr/>
-        <p:nvPr/>
-      </p:nvGrpSpPr>
-      <p:grpSpPr>
-        <a:xfrm>
-          <a:off x="0" y="0"/>
-          <a:ext cx="0" cy="0"/>
-          <a:chOff x="0" y="0"/>
-          <a:chExt cx="0" cy="0"/>
-        </a:xfrm>
-      </p:grpSpPr>
-      <p:sp>
-        <p:nvSpPr>
-          <p:cNvPr id="2" name="Slide Image Placeholder 1"/>
-          <p:cNvSpPr>
-            <a:spLocks noGrp="1"/>
-          </p:cNvSpPr>
-          <p:nvPr>
-            <p:ph type="sldImg" idx="2"/>
-          </p:nvPr>
-        </p:nvSpPr>
-        <p:spPr/>
-      </p:sp>
-      <p:sp>
-        <p:nvSpPr>
-          <p:cNvPr id="3" name="Notes Placeholder 2"/>
-          <p:cNvSpPr>
-            <a:spLocks noGrp="1"/>
-          </p:cNvSpPr>
-          <p:nvPr>
-            <p:ph type="body" idx="3" sz="quarter"/>
-          </p:nvPr>
-        </p:nvSpPr>
-        <p:spPr/>
-        <p:txBody>
-          <a:bodyPr/>
-          <a:lstStyle/>
-          <a:p>
-            <a:r>
-              <a:t>Slide LỜI GIẢI – GV chốt sau khi HS trình bày. </a:t>
-            </a:r>
-          </a:p>
-        </p:txBody>
-      </p:sp>
-      <p:sp>
-        <p:nvSpPr>
-          <p:cNvPr id="4" name="Slide Number Placeholder 3"/>
-          <p:cNvSpPr>
-            <a:spLocks noGrp="1"/>
-          </p:cNvSpPr>
-          <p:nvPr>
-            <p:ph type="sldNum" idx="5" sz="quarter"/>
-          </p:nvPr>
-        </p:nvSpPr>
-        <p:spPr/>
-      </p:sp>
-    </p:spTree>
-  </p:cSld>
-  <p:clrMapOvr>
-    <a:masterClrMapping/>
-  </p:clrMapOvr>
-</p:notes>
-</file>
-
 <file path=ppt/notesSlides/notesSlide3.xml><?xml version="1.0" encoding="utf-8"?>
 <p:notes xmlns:a="http://schemas.openxmlformats.org/drawingml/2006/main" xmlns:p="http://schemas.openxmlformats.org/presentationml/2006/main" xmlns:r="http://schemas.openxmlformats.org/officeDocument/2006/relationships">
   <p:cSld>
@@ -2009,7 +1867,7 @@
           <a:lstStyle/>
           <a:p>
             <a:r>
-              <a:t>Bấm vào đường link hoặc quét mã QR để mở video (cần Internet). </a:t>
+              <a:t>Slide ĐỀ BÀI – cho HS suy nghĩ, thảo luận (không chiếu lời giải). </a:t>
             </a:r>
           </a:p>
         </p:txBody>
@@ -2079,7 +1937,7 @@
           <a:lstStyle/>
           <a:p>
             <a:r>
-              <a:t>Slide ĐỀ BÀI – cho HS suy nghĩ, thảo luận (không chiếu lời giải). </a:t>
+              <a:t>Slide LỜI GIẢI – GV chốt sau khi HS trình bày. </a:t>
             </a:r>
           </a:p>
         </p:txBody>
@@ -2149,7 +2007,7 @@
           <a:lstStyle/>
           <a:p>
             <a:r>
-              <a:t>Slide LỜI GIẢI – GV chốt sau khi HS trình bày. </a:t>
+              <a:t>Slide ĐỀ BÀI – cho HS suy nghĩ, thảo luận (không chiếu lời giải). </a:t>
             </a:r>
           </a:p>
         </p:txBody>
@@ -2219,7 +2077,7 @@
           <a:lstStyle/>
           <a:p>
             <a:r>
-              <a:t>Slide ĐỀ BÀI – cho HS suy nghĩ, thảo luận (không chiếu lời giải). </a:t>
+              <a:t>Slide LỜI GIẢI – GV chốt sau khi HS trình bày. </a:t>
             </a:r>
           </a:p>
         </p:txBody>
@@ -2289,7 +2147,7 @@
           <a:lstStyle/>
           <a:p>
             <a:r>
-              <a:t>Slide LỜI GIẢI – GV chốt sau khi HS trình bày. </a:t>
+              <a:t>Slide ĐỀ BÀI – cho HS suy nghĩ, thảo luận (không chiếu lời giải). </a:t>
             </a:r>
           </a:p>
         </p:txBody>
@@ -2359,7 +2217,7 @@
           <a:lstStyle/>
           <a:p>
             <a:r>
-              <a:t>Slide ĐỀ BÀI – cho HS suy nghĩ, thảo luận (không chiếu lời giải). </a:t>
+              <a:t>Slide LỜI GIẢI – GV chốt sau khi HS trình bày. </a:t>
             </a:r>
           </a:p>
         </p:txBody>
@@ -2429,7 +2287,7 @@
           <a:lstStyle/>
           <a:p>
             <a:r>
-              <a:t>Slide LỜI GIẢI – GV chốt sau khi HS trình bày. </a:t>
+              <a:t>Câu hỏi Trước khi đọc SGK tr.44; chiếu bản đồ địa bàn Tây Tiến.</a:t>
             </a:r>
           </a:p>
         </p:txBody>
@@ -5659,14 +5517,14 @@
         </p:nvSpPr>
         <p:spPr>
           <a:xfrm>
-            <a:off x="9942271" y="457200"/>
-            <a:ext cx="1700784" cy="457200"/>
+            <a:off x="10253167" y="457200"/>
+            <a:ext cx="1389888" cy="457200"/>
           </a:xfrm>
           <a:prstGeom prst="roundRect">
             <a:avLst/>
           </a:prstGeom>
           <a:solidFill>
-            <a:srgbClr val="991B1B"/>
+            <a:srgbClr val="1E40AF"/>
           </a:solidFill>
           <a:ln>
             <a:noFill/>
@@ -5699,7 +5557,7 @@
                 </a:solidFill>
                 <a:latin typeface="Arial"/>
               </a:rPr>
-              <a:t>LỜI GIẢI</a:t>
+              <a:t>ĐỀ BÀI</a:t>
             </a:r>
           </a:p>
         </p:txBody>
@@ -5713,7 +5571,7 @@
         <p:spPr>
           <a:xfrm>
             <a:off x="731520" y="274320"/>
-            <a:ext cx="9272016" cy="868680"/>
+            <a:ext cx="9582912" cy="868680"/>
           </a:xfrm>
           <a:prstGeom prst="rect">
             <a:avLst/>
@@ -5733,7 +5591,7 @@
                 </a:solidFill>
                 <a:latin typeface="Arial"/>
               </a:rPr>
-              <a:t>BIỂU TƯỢNG TRONG HAI CÂU LUẬN</a:t>
+              <a:t>HÌNH ẢNH MÀI GƯƠM DƯỚI TRĂNG</a:t>
             </a:r>
           </a:p>
         </p:txBody>
@@ -5826,7 +5684,7 @@
         <p:spPr>
           <a:xfrm>
             <a:off x="731520" y="1463040"/>
-            <a:ext cx="10789920" cy="3474720"/>
+            <a:ext cx="10789920" cy="3566160"/>
           </a:xfrm>
           <a:prstGeom prst="rect">
             <a:avLst/>
@@ -5839,66 +5697,19 @@
           </a:bodyPr>
           <a:lstStyle/>
           <a:p>
-            <a:pPr algn="l" marL="365760" indent="-365760">
+            <a:pPr algn="l">
               <a:spcAft>
                 <a:spcPts val="800"/>
               </a:spcAft>
-              <a:buClr>
-                <a:srgbClr val="1E40AF"/>
-              </a:buClr>
-              <a:buFont typeface="Arial"/>
-              <a:buChar char="•"/>
             </a:pPr>
             <a:r>
-              <a:rPr sz="2300">
+              <a:rPr sz="2600" b="1">
                 <a:solidFill>
                   <a:srgbClr val="1E293B"/>
                 </a:solidFill>
                 <a:latin typeface="Calibri"/>
               </a:rPr>
-              <a:t>“Xoay trục đất”: xoay chuyển vận mệnh đất nước.</a:t>
-            </a:r>
-          </a:p>
-          <a:p>
-            <a:pPr algn="l" marL="365760" indent="-365760">
-              <a:spcAft>
-                <a:spcPts val="800"/>
-              </a:spcAft>
-              <a:buClr>
-                <a:srgbClr val="1E40AF"/>
-              </a:buClr>
-              <a:buFont typeface="Arial"/>
-              <a:buChar char="•"/>
-            </a:pPr>
-            <a:r>
-              <a:rPr sz="2300">
-                <a:solidFill>
-                  <a:srgbClr val="1E293B"/>
-                </a:solidFill>
-                <a:latin typeface="Calibri"/>
-              </a:rPr>
-              <a:t>“Rửa binh khí”, “kéo sông Ngân”: dẹp yên chiến tranh, lập lại thái bình.</a:t>
-            </a:r>
-          </a:p>
-          <a:p>
-            <a:pPr algn="l" marL="365760" indent="-365760">
-              <a:spcAft>
-                <a:spcPts val="800"/>
-              </a:spcAft>
-              <a:buClr>
-                <a:srgbClr val="1E40AF"/>
-              </a:buClr>
-              <a:buFont typeface="Arial"/>
-              <a:buChar char="•"/>
-            </a:pPr>
-            <a:r>
-              <a:rPr sz="2300">
-                <a:solidFill>
-                  <a:srgbClr val="1E293B"/>
-                </a:solidFill>
-                <a:latin typeface="Calibri"/>
-              </a:rPr>
-              <a:t>Chí lớn kinh bang tế thế mà “khôn lối” – nỗi đau bất lực.</a:t>
+              <a:t>Phân tích ý nghĩa hình ảnh người tráng sĩ mài gươm trong hai câu kết. Nêu biểu hiện của phong cách cổ điển.</a:t>
             </a:r>
           </a:p>
         </p:txBody>
@@ -5911,8 +5722,8 @@
         </p:nvSpPr>
         <p:spPr>
           <a:xfrm>
-            <a:off x="731520" y="5074920"/>
-            <a:ext cx="10789920" cy="731520"/>
+            <a:off x="731520" y="5120640"/>
+            <a:ext cx="10789920" cy="693420"/>
           </a:xfrm>
           <a:prstGeom prst="roundRect">
             <a:avLst>
@@ -5920,11 +5731,11 @@
             </a:avLst>
           </a:prstGeom>
           <a:solidFill>
-            <a:srgbClr val="FEF2F2"/>
+            <a:srgbClr val="EFF4FF"/>
           </a:solidFill>
           <a:ln w="19050">
             <a:solidFill>
-              <a:srgbClr val="991B1B"/>
+              <a:srgbClr val="1E40AF"/>
             </a:solidFill>
           </a:ln>
           <a:effectLst/>
@@ -5959,8 +5770,8 @@
         </p:nvSpPr>
         <p:spPr>
           <a:xfrm>
-            <a:off x="914400" y="5074920"/>
-            <a:ext cx="10424160" cy="731520"/>
+            <a:off x="914400" y="5120640"/>
+            <a:ext cx="10424160" cy="693420"/>
           </a:xfrm>
           <a:prstGeom prst="rect">
             <a:avLst/>
@@ -5979,13 +5790,13 @@
               </a:spcAft>
             </a:pPr>
             <a:r>
-              <a:rPr sz="2400" b="1">
-                <a:solidFill>
-                  <a:srgbClr val="991B1B"/>
+              <a:rPr sz="2200" b="1">
+                <a:solidFill>
+                  <a:srgbClr val="1E40AF"/>
                 </a:solidFill>
                 <a:latin typeface="Calibri"/>
               </a:rPr>
-              <a:t>Biểu tượng mang tầm vũ trụ – chí lớn của bậc anh hùng.</a:t>
+              <a:t>💡 “Bao phen” gợi điều gì?</a:t>
             </a:r>
           </a:p>
         </p:txBody>
@@ -6068,14 +5879,14 @@
         </p:nvSpPr>
         <p:spPr>
           <a:xfrm>
-            <a:off x="10253167" y="457200"/>
-            <a:ext cx="1389888" cy="457200"/>
+            <a:off x="9942271" y="457200"/>
+            <a:ext cx="1700784" cy="457200"/>
           </a:xfrm>
           <a:prstGeom prst="roundRect">
             <a:avLst/>
           </a:prstGeom>
           <a:solidFill>
-            <a:srgbClr val="1E40AF"/>
+            <a:srgbClr val="991B1B"/>
           </a:solidFill>
           <a:ln>
             <a:noFill/>
@@ -6108,7 +5919,7 @@
                 </a:solidFill>
                 <a:latin typeface="Arial"/>
               </a:rPr>
-              <a:t>ĐỀ BÀI</a:t>
+              <a:t>LỜI GIẢI</a:t>
             </a:r>
           </a:p>
         </p:txBody>
@@ -6122,7 +5933,7 @@
         <p:spPr>
           <a:xfrm>
             <a:off x="731520" y="274320"/>
-            <a:ext cx="9582912" cy="868680"/>
+            <a:ext cx="9272016" cy="868680"/>
           </a:xfrm>
           <a:prstGeom prst="rect">
             <a:avLst/>
@@ -6235,7 +6046,7 @@
         <p:spPr>
           <a:xfrm>
             <a:off x="731520" y="1463040"/>
-            <a:ext cx="10789920" cy="3566160"/>
+            <a:ext cx="10789920" cy="3474720"/>
           </a:xfrm>
           <a:prstGeom prst="rect">
             <a:avLst/>
@@ -6248,19 +6059,66 @@
           </a:bodyPr>
           <a:lstStyle/>
           <a:p>
-            <a:pPr algn="l">
+            <a:pPr algn="l" marL="365760" indent="-365760">
               <a:spcAft>
                 <a:spcPts val="800"/>
               </a:spcAft>
+              <a:buClr>
+                <a:srgbClr val="1E40AF"/>
+              </a:buClr>
+              <a:buFont typeface="Arial"/>
+              <a:buChar char="•"/>
             </a:pPr>
             <a:r>
-              <a:rPr sz="2600" b="1">
+              <a:rPr sz="2300">
                 <a:solidFill>
                   <a:srgbClr val="1E293B"/>
                 </a:solidFill>
                 <a:latin typeface="Calibri"/>
               </a:rPr>
-              <a:t>Phân tích ý nghĩa hình ảnh người tráng sĩ mài gươm trong hai câu kết. Nêu biểu hiện của phong cách cổ điển.</a:t>
+              <a:t>“Thù nước chưa trả mà đầu đã bạc” – bi kịch.</a:t>
+            </a:r>
+          </a:p>
+          <a:p>
+            <a:pPr algn="l" marL="365760" indent="-365760">
+              <a:spcAft>
+                <a:spcPts val="800"/>
+              </a:spcAft>
+              <a:buClr>
+                <a:srgbClr val="1E40AF"/>
+              </a:buClr>
+              <a:buFont typeface="Arial"/>
+              <a:buChar char="•"/>
+            </a:pPr>
+            <a:r>
+              <a:rPr sz="2300">
+                <a:solidFill>
+                  <a:srgbClr val="1E293B"/>
+                </a:solidFill>
+                <a:latin typeface="Calibri"/>
+              </a:rPr>
+              <a:t>“Bao phen mài gươm dưới trăng” – ý chí bền bỉ, khát vọng không nguôi.</a:t>
+            </a:r>
+          </a:p>
+          <a:p>
+            <a:pPr algn="l" marL="365760" indent="-365760">
+              <a:spcAft>
+                <a:spcPts val="800"/>
+              </a:spcAft>
+              <a:buClr>
+                <a:srgbClr val="1E40AF"/>
+              </a:buClr>
+              <a:buFont typeface="Arial"/>
+              <a:buChar char="•"/>
+            </a:pPr>
+            <a:r>
+              <a:rPr sz="2300">
+                <a:solidFill>
+                  <a:srgbClr val="1E293B"/>
+                </a:solidFill>
+                <a:latin typeface="Calibri"/>
+              </a:rPr>
+              <a:t>Cổ điển: Đường luật, điển cố, đề tài cao nhã, hình tượng tầm vũ trụ.</a:t>
             </a:r>
           </a:p>
         </p:txBody>
@@ -6273,8 +6131,8 @@
         </p:nvSpPr>
         <p:spPr>
           <a:xfrm>
-            <a:off x="731520" y="5120640"/>
-            <a:ext cx="10789920" cy="693420"/>
+            <a:off x="731520" y="5074920"/>
+            <a:ext cx="10789920" cy="731520"/>
           </a:xfrm>
           <a:prstGeom prst="roundRect">
             <a:avLst>
@@ -6282,11 +6140,11 @@
             </a:avLst>
           </a:prstGeom>
           <a:solidFill>
-            <a:srgbClr val="EFF4FF"/>
+            <a:srgbClr val="FEF2F2"/>
           </a:solidFill>
           <a:ln w="19050">
             <a:solidFill>
-              <a:srgbClr val="1E40AF"/>
+              <a:srgbClr val="991B1B"/>
             </a:solidFill>
           </a:ln>
           <a:effectLst/>
@@ -6321,8 +6179,8 @@
         </p:nvSpPr>
         <p:spPr>
           <a:xfrm>
-            <a:off x="914400" y="5120640"/>
-            <a:ext cx="10424160" cy="693420"/>
+            <a:off x="914400" y="5074920"/>
+            <a:ext cx="10424160" cy="731520"/>
           </a:xfrm>
           <a:prstGeom prst="rect">
             <a:avLst/>
@@ -6341,13 +6199,13 @@
               </a:spcAft>
             </a:pPr>
             <a:r>
-              <a:rPr sz="2200" b="1">
-                <a:solidFill>
-                  <a:srgbClr val="1E40AF"/>
+              <a:rPr sz="2400" b="1">
+                <a:solidFill>
+                  <a:srgbClr val="991B1B"/>
                 </a:solidFill>
                 <a:latin typeface="Calibri"/>
               </a:rPr>
-              <a:t>💡 “Bao phen” gợi điều gì?</a:t>
+              <a:t>Vẻ đẹp bi tráng của khí tiết trung nghĩa.</a:t>
             </a:r>
           </a:p>
         </p:txBody>
@@ -6361,6 +6219,115 @@
 </file>
 
 <file path=ppt/slides/slide12.xml><?xml version="1.0" encoding="utf-8"?>
+<p:sld xmlns:a="http://schemas.openxmlformats.org/drawingml/2006/main" xmlns:p="http://schemas.openxmlformats.org/presentationml/2006/main" xmlns:r="http://schemas.openxmlformats.org/officeDocument/2006/relationships">
+  <p:cSld>
+    <p:bg>
+      <p:bgPr>
+        <a:solidFill>
+          <a:srgbClr val="F8F9FA"/>
+        </a:solidFill>
+        <a:effectLst/>
+      </p:bgPr>
+    </p:bg>
+    <p:spTree>
+      <p:nvGrpSpPr>
+        <p:cNvPr id="1" name=""/>
+        <p:cNvGrpSpPr/>
+        <p:nvPr/>
+      </p:nvGrpSpPr>
+      <p:grpSpPr/>
+      <p:sp>
+        <p:nvSpPr>
+          <p:cNvPr id="2" name="Rectangle 1"/>
+          <p:cNvSpPr/>
+          <p:nvPr/>
+        </p:nvSpPr>
+        <p:spPr>
+          <a:xfrm>
+            <a:off x="548640" y="2926080"/>
+            <a:ext cx="164592" cy="1005840"/>
+          </a:xfrm>
+          <a:prstGeom prst="rect">
+            <a:avLst/>
+          </a:prstGeom>
+          <a:solidFill>
+            <a:srgbClr val="991B1B"/>
+          </a:solidFill>
+          <a:ln>
+            <a:noFill/>
+          </a:ln>
+          <a:effectLst/>
+        </p:spPr>
+        <p:style>
+          <a:lnRef idx="1">
+            <a:schemeClr val="accent1"/>
+          </a:lnRef>
+          <a:fillRef idx="3">
+            <a:schemeClr val="accent1"/>
+          </a:fillRef>
+          <a:effectRef idx="2">
+            <a:schemeClr val="accent1"/>
+          </a:effectRef>
+          <a:fontRef idx="minor">
+            <a:schemeClr val="lt1"/>
+          </a:fontRef>
+        </p:style>
+        <p:txBody>
+          <a:bodyPr rtlCol="0" anchor="ctr"/>
+          <a:lstStyle/>
+          <a:p>
+            <a:pPr algn="ctr"/>
+          </a:p>
+        </p:txBody>
+      </p:sp>
+      <p:sp>
+        <p:nvSpPr>
+          <p:cNvPr id="3" name="TextBox 2"/>
+          <p:cNvSpPr txBox="1"/>
+          <p:nvPr/>
+        </p:nvSpPr>
+        <p:spPr>
+          <a:xfrm>
+            <a:off x="914400" y="2743200"/>
+            <a:ext cx="10515600" cy="1371600"/>
+          </a:xfrm>
+          <a:prstGeom prst="rect">
+            <a:avLst/>
+          </a:prstGeom>
+          <a:noFill/>
+        </p:spPr>
+        <p:txBody>
+          <a:bodyPr wrap="square" anchor="ctr" lIns="45720" rIns="45720">
+            <a:spAutoFit/>
+          </a:bodyPr>
+          <a:lstStyle/>
+          <a:p>
+            <a:pPr algn="l">
+              <a:spcAft>
+                <a:spcPts val="800"/>
+              </a:spcAft>
+            </a:pPr>
+            <a:r>
+              <a:rPr sz="3600" b="1">
+                <a:solidFill>
+                  <a:srgbClr val="1E40AF"/>
+                </a:solidFill>
+                <a:latin typeface="Calibri"/>
+              </a:rPr>
+              <a:t>TIẾT 14 – 16: TÂY TIẾN (Quang Dũng)</a:t>
+            </a:r>
+          </a:p>
+        </p:txBody>
+      </p:sp>
+    </p:spTree>
+  </p:cSld>
+  <p:clrMapOvr>
+    <a:masterClrMapping/>
+  </p:clrMapOvr>
+</p:sld>
+</file>
+
+<file path=ppt/slides/slide13.xml><?xml version="1.0" encoding="utf-8"?>
 <p:sld xmlns:a="http://schemas.openxmlformats.org/drawingml/2006/main" xmlns:p="http://schemas.openxmlformats.org/presentationml/2006/main" xmlns:r="http://schemas.openxmlformats.org/officeDocument/2006/relationships">
   <p:cSld>
     <p:bg>
@@ -6430,14 +6397,14 @@
         </p:nvSpPr>
         <p:spPr>
           <a:xfrm>
-            <a:off x="9942271" y="457200"/>
-            <a:ext cx="1700784" cy="457200"/>
+            <a:off x="9786823" y="457200"/>
+            <a:ext cx="1856232" cy="457200"/>
           </a:xfrm>
           <a:prstGeom prst="roundRect">
             <a:avLst/>
           </a:prstGeom>
           <a:solidFill>
-            <a:srgbClr val="991B1B"/>
+            <a:srgbClr val="1E40AF"/>
           </a:solidFill>
           <a:ln>
             <a:noFill/>
@@ -6470,7 +6437,7 @@
                 </a:solidFill>
                 <a:latin typeface="Arial"/>
               </a:rPr>
-              <a:t>LỜI GIẢI</a:t>
+              <a:t>KHỞI ĐỘNG</a:t>
             </a:r>
           </a:p>
         </p:txBody>
@@ -6484,7 +6451,7 @@
         <p:spPr>
           <a:xfrm>
             <a:off x="731520" y="274320"/>
-            <a:ext cx="9272016" cy="868680"/>
+            <a:ext cx="9116568" cy="868680"/>
           </a:xfrm>
           <a:prstGeom prst="rect">
             <a:avLst/>
@@ -6504,7 +6471,7 @@
                 </a:solidFill>
                 <a:latin typeface="Arial"/>
               </a:rPr>
-              <a:t>HÌNH ẢNH MÀI GƯƠM DƯỚI TRĂNG</a:t>
+              <a:t>TRƯỚC KHI ĐỌC</a:t>
             </a:r>
           </a:p>
         </p:txBody>
@@ -6583,7 +6550,7 @@
                 </a:solidFill>
                 <a:latin typeface="Calibri"/>
               </a:rPr>
-              <a:t>Ngữ văn 12 · Bài 2: Những Thế Giới Thơ          12</a:t>
+              <a:t>Ngữ văn 12 · Bài 2: Những Thế Giới Thơ          13</a:t>
             </a:r>
           </a:p>
         </p:txBody>
@@ -6597,7 +6564,7 @@
         <p:spPr>
           <a:xfrm>
             <a:off x="731520" y="1463040"/>
-            <a:ext cx="10789920" cy="3474720"/>
+            <a:ext cx="10789920" cy="4572000"/>
           </a:xfrm>
           <a:prstGeom prst="rect">
             <a:avLst/>
@@ -6606,249 +6573,6 @@
         </p:spPr>
         <p:txBody>
           <a:bodyPr wrap="square" anchor="t" lIns="45720" rIns="45720">
-            <a:spAutoFit/>
-          </a:bodyPr>
-          <a:lstStyle/>
-          <a:p>
-            <a:pPr algn="l" marL="365760" indent="-365760">
-              <a:spcAft>
-                <a:spcPts val="800"/>
-              </a:spcAft>
-              <a:buClr>
-                <a:srgbClr val="1E40AF"/>
-              </a:buClr>
-              <a:buFont typeface="Arial"/>
-              <a:buChar char="•"/>
-            </a:pPr>
-            <a:r>
-              <a:rPr sz="2300">
-                <a:solidFill>
-                  <a:srgbClr val="1E293B"/>
-                </a:solidFill>
-                <a:latin typeface="Calibri"/>
-              </a:rPr>
-              <a:t>“Thù nước chưa trả mà đầu đã bạc” – bi kịch.</a:t>
-            </a:r>
-          </a:p>
-          <a:p>
-            <a:pPr algn="l" marL="365760" indent="-365760">
-              <a:spcAft>
-                <a:spcPts val="800"/>
-              </a:spcAft>
-              <a:buClr>
-                <a:srgbClr val="1E40AF"/>
-              </a:buClr>
-              <a:buFont typeface="Arial"/>
-              <a:buChar char="•"/>
-            </a:pPr>
-            <a:r>
-              <a:rPr sz="2300">
-                <a:solidFill>
-                  <a:srgbClr val="1E293B"/>
-                </a:solidFill>
-                <a:latin typeface="Calibri"/>
-              </a:rPr>
-              <a:t>“Bao phen mài gươm dưới trăng” – ý chí bền bỉ, khát vọng không nguôi.</a:t>
-            </a:r>
-          </a:p>
-          <a:p>
-            <a:pPr algn="l" marL="365760" indent="-365760">
-              <a:spcAft>
-                <a:spcPts val="800"/>
-              </a:spcAft>
-              <a:buClr>
-                <a:srgbClr val="1E40AF"/>
-              </a:buClr>
-              <a:buFont typeface="Arial"/>
-              <a:buChar char="•"/>
-            </a:pPr>
-            <a:r>
-              <a:rPr sz="2300">
-                <a:solidFill>
-                  <a:srgbClr val="1E293B"/>
-                </a:solidFill>
-                <a:latin typeface="Calibri"/>
-              </a:rPr>
-              <a:t>Cổ điển: Đường luật, điển cố, đề tài cao nhã, hình tượng tầm vũ trụ.</a:t>
-            </a:r>
-          </a:p>
-        </p:txBody>
-      </p:sp>
-      <p:sp>
-        <p:nvSpPr>
-          <p:cNvPr id="8" name="Rounded Rectangle 7"/>
-          <p:cNvSpPr/>
-          <p:nvPr/>
-        </p:nvSpPr>
-        <p:spPr>
-          <a:xfrm>
-            <a:off x="731520" y="5074920"/>
-            <a:ext cx="10789920" cy="731520"/>
-          </a:xfrm>
-          <a:prstGeom prst="roundRect">
-            <a:avLst>
-              <a:gd name="adj" fmla="val 8000"/>
-            </a:avLst>
-          </a:prstGeom>
-          <a:solidFill>
-            <a:srgbClr val="FEF2F2"/>
-          </a:solidFill>
-          <a:ln w="19050">
-            <a:solidFill>
-              <a:srgbClr val="991B1B"/>
-            </a:solidFill>
-          </a:ln>
-          <a:effectLst/>
-        </p:spPr>
-        <p:style>
-          <a:lnRef idx="1">
-            <a:schemeClr val="accent1"/>
-          </a:lnRef>
-          <a:fillRef idx="3">
-            <a:schemeClr val="accent1"/>
-          </a:fillRef>
-          <a:effectRef idx="2">
-            <a:schemeClr val="accent1"/>
-          </a:effectRef>
-          <a:fontRef idx="minor">
-            <a:schemeClr val="lt1"/>
-          </a:fontRef>
-        </p:style>
-        <p:txBody>
-          <a:bodyPr rtlCol="0" anchor="ctr"/>
-          <a:lstStyle/>
-          <a:p>
-            <a:pPr algn="ctr"/>
-          </a:p>
-        </p:txBody>
-      </p:sp>
-      <p:sp>
-        <p:nvSpPr>
-          <p:cNvPr id="9" name="TextBox 8"/>
-          <p:cNvSpPr txBox="1"/>
-          <p:nvPr/>
-        </p:nvSpPr>
-        <p:spPr>
-          <a:xfrm>
-            <a:off x="914400" y="5074920"/>
-            <a:ext cx="10424160" cy="731520"/>
-          </a:xfrm>
-          <a:prstGeom prst="rect">
-            <a:avLst/>
-          </a:prstGeom>
-          <a:noFill/>
-        </p:spPr>
-        <p:txBody>
-          <a:bodyPr wrap="square" anchor="ctr" lIns="45720" rIns="45720">
-            <a:spAutoFit/>
-          </a:bodyPr>
-          <a:lstStyle/>
-          <a:p>
-            <a:pPr algn="l">
-              <a:spcAft>
-                <a:spcPts val="400"/>
-              </a:spcAft>
-            </a:pPr>
-            <a:r>
-              <a:rPr sz="2400" b="1">
-                <a:solidFill>
-                  <a:srgbClr val="991B1B"/>
-                </a:solidFill>
-                <a:latin typeface="Calibri"/>
-              </a:rPr>
-              <a:t>Vẻ đẹp bi tráng của khí tiết trung nghĩa.</a:t>
-            </a:r>
-          </a:p>
-        </p:txBody>
-      </p:sp>
-    </p:spTree>
-  </p:cSld>
-  <p:clrMapOvr>
-    <a:masterClrMapping/>
-  </p:clrMapOvr>
-</p:sld>
-</file>
-
-<file path=ppt/slides/slide13.xml><?xml version="1.0" encoding="utf-8"?>
-<p:sld xmlns:a="http://schemas.openxmlformats.org/drawingml/2006/main" xmlns:p="http://schemas.openxmlformats.org/presentationml/2006/main" xmlns:r="http://schemas.openxmlformats.org/officeDocument/2006/relationships">
-  <p:cSld>
-    <p:bg>
-      <p:bgPr>
-        <a:solidFill>
-          <a:srgbClr val="F8F9FA"/>
-        </a:solidFill>
-        <a:effectLst/>
-      </p:bgPr>
-    </p:bg>
-    <p:spTree>
-      <p:nvGrpSpPr>
-        <p:cNvPr id="1" name=""/>
-        <p:cNvGrpSpPr/>
-        <p:nvPr/>
-      </p:nvGrpSpPr>
-      <p:grpSpPr/>
-      <p:sp>
-        <p:nvSpPr>
-          <p:cNvPr id="2" name="Rectangle 1"/>
-          <p:cNvSpPr/>
-          <p:nvPr/>
-        </p:nvSpPr>
-        <p:spPr>
-          <a:xfrm>
-            <a:off x="548640" y="2926080"/>
-            <a:ext cx="164592" cy="1005840"/>
-          </a:xfrm>
-          <a:prstGeom prst="rect">
-            <a:avLst/>
-          </a:prstGeom>
-          <a:solidFill>
-            <a:srgbClr val="991B1B"/>
-          </a:solidFill>
-          <a:ln>
-            <a:noFill/>
-          </a:ln>
-          <a:effectLst/>
-        </p:spPr>
-        <p:style>
-          <a:lnRef idx="1">
-            <a:schemeClr val="accent1"/>
-          </a:lnRef>
-          <a:fillRef idx="3">
-            <a:schemeClr val="accent1"/>
-          </a:fillRef>
-          <a:effectRef idx="2">
-            <a:schemeClr val="accent1"/>
-          </a:effectRef>
-          <a:fontRef idx="minor">
-            <a:schemeClr val="lt1"/>
-          </a:fontRef>
-        </p:style>
-        <p:txBody>
-          <a:bodyPr rtlCol="0" anchor="ctr"/>
-          <a:lstStyle/>
-          <a:p>
-            <a:pPr algn="ctr"/>
-          </a:p>
-        </p:txBody>
-      </p:sp>
-      <p:sp>
-        <p:nvSpPr>
-          <p:cNvPr id="3" name="TextBox 2"/>
-          <p:cNvSpPr txBox="1"/>
-          <p:nvPr/>
-        </p:nvSpPr>
-        <p:spPr>
-          <a:xfrm>
-            <a:off x="914400" y="2743200"/>
-            <a:ext cx="10515600" cy="1371600"/>
-          </a:xfrm>
-          <a:prstGeom prst="rect">
-            <a:avLst/>
-          </a:prstGeom>
-          <a:noFill/>
-        </p:spPr>
-        <p:txBody>
-          <a:bodyPr wrap="square" anchor="ctr" lIns="45720" rIns="45720">
             <a:spAutoFit/>
           </a:bodyPr>
           <a:lstStyle/>
@@ -6859,13 +6583,29 @@
               </a:spcAft>
             </a:pPr>
             <a:r>
-              <a:rPr sz="3600" b="1">
-                <a:solidFill>
-                  <a:srgbClr val="1E40AF"/>
+              <a:rPr sz="2600" b="1">
+                <a:solidFill>
+                  <a:srgbClr val="1E293B"/>
                 </a:solidFill>
                 <a:latin typeface="Calibri"/>
               </a:rPr>
-              <a:t>TIẾT 14 – 16: TÂY TIẾN (Quang Dũng)</a:t>
+              <a:t>Bạn đã học, đã đọc những bài thơ nào viết về người lính cách mạng Việt Nam?</a:t>
+            </a:r>
+          </a:p>
+          <a:p>
+            <a:pPr algn="l">
+              <a:spcAft>
+                <a:spcPts val="800"/>
+              </a:spcAft>
+            </a:pPr>
+            <a:r>
+              <a:rPr sz="2600" b="1">
+                <a:solidFill>
+                  <a:srgbClr val="1E293B"/>
+                </a:solidFill>
+                <a:latin typeface="Calibri"/>
+              </a:rPr>
+              <a:t>Đọc diễn cảm một đoạn thơ bạn yêu thích.</a:t>
             </a:r>
           </a:p>
         </p:txBody>
@@ -6948,14 +6688,14 @@
         </p:nvSpPr>
         <p:spPr>
           <a:xfrm>
-            <a:off x="9786823" y="457200"/>
-            <a:ext cx="1856232" cy="457200"/>
+            <a:off x="10408615" y="457200"/>
+            <a:ext cx="1234440" cy="457200"/>
           </a:xfrm>
           <a:prstGeom prst="roundRect">
             <a:avLst/>
           </a:prstGeom>
           <a:solidFill>
-            <a:srgbClr val="1E40AF"/>
+            <a:srgbClr val="991B1B"/>
           </a:solidFill>
           <a:ln>
             <a:noFill/>
@@ -6988,7 +6728,7 @@
                 </a:solidFill>
                 <a:latin typeface="Arial"/>
               </a:rPr>
-              <a:t>KHỞI ĐỘNG</a:t>
+              <a:t>VIDEO</a:t>
             </a:r>
           </a:p>
         </p:txBody>
@@ -7002,7 +6742,7 @@
         <p:spPr>
           <a:xfrm>
             <a:off x="731520" y="274320"/>
-            <a:ext cx="9116568" cy="868680"/>
+            <a:ext cx="9738360" cy="868680"/>
           </a:xfrm>
           <a:prstGeom prst="rect">
             <a:avLst/>
@@ -7022,7 +6762,7 @@
                 </a:solidFill>
                 <a:latin typeface="Arial"/>
               </a:rPr>
-              <a:t>TRƯỚC KHI ĐỌC</a:t>
+              <a:t>VIDEO THAM KHẢO</a:t>
             </a:r>
           </a:p>
         </p:txBody>
@@ -7106,16 +6846,40 @@
           </a:p>
         </p:txBody>
       </p:sp>
-      <p:sp>
-        <p:nvSpPr>
-          <p:cNvPr id="7" name="TextBox 6"/>
+      <p:pic>
+        <p:nvPicPr>
+          <p:cNvPr id="7" name="Picture 6" descr="QR_video_KEmXIneA0fs.png"/>
+          <p:cNvPicPr>
+            <a:picLocks noChangeAspect="1"/>
+          </p:cNvPicPr>
+          <p:nvPr/>
+        </p:nvPicPr>
+        <p:blipFill>
+          <a:blip r:embed="rId2"/>
+          <a:stretch>
+            <a:fillRect/>
+          </a:stretch>
+        </p:blipFill>
+        <p:spPr>
+          <a:xfrm>
+            <a:off x="8412480" y="1554480"/>
+            <a:ext cx="3108960" cy="3108960"/>
+          </a:xfrm>
+          <a:prstGeom prst="rect">
+            <a:avLst/>
+          </a:prstGeom>
+        </p:spPr>
+      </p:pic>
+      <p:sp>
+        <p:nvSpPr>
+          <p:cNvPr id="8" name="TextBox 7"/>
           <p:cNvSpPr txBox="1"/>
           <p:nvPr/>
         </p:nvSpPr>
         <p:spPr>
           <a:xfrm>
-            <a:off x="731520" y="1463040"/>
-            <a:ext cx="10789920" cy="4572000"/>
+            <a:off x="731520" y="1554480"/>
+            <a:ext cx="7498079" cy="4206240"/>
           </a:xfrm>
           <a:prstGeom prst="rect">
             <a:avLst/>
@@ -7140,7 +6904,7 @@
                 </a:solidFill>
                 <a:latin typeface="Calibri"/>
               </a:rPr>
-              <a:t>Bạn đã học, đã đọc những bài thơ nào viết về người lính cách mạng Việt Nam?</a:t>
+              <a:t>🎬 Quang Dũng: Một tâm hồn thơ lớn, một chiến sĩ cách mạng (Danh nhân Thăng Long – Hà Nội)</a:t>
             </a:r>
           </a:p>
           <a:p>
@@ -7150,13 +6914,51 @@
               </a:spcAft>
             </a:pPr>
             <a:r>
-              <a:rPr sz="2600" b="1">
+              <a:rPr sz="2000">
+                <a:solidFill>
+                  <a:srgbClr val="64748B"/>
+                </a:solidFill>
+                <a:latin typeface="Calibri"/>
+              </a:rPr>
+              <a:t>Kênh: HTV – Đài Hà Nội</a:t>
+            </a:r>
+          </a:p>
+          <a:p>
+            <a:pPr algn="l" marL="365760" indent="-365760">
+              <a:spcAft>
+                <a:spcPts val="800"/>
+              </a:spcAft>
+              <a:buClr>
+                <a:srgbClr val="1E40AF"/>
+              </a:buClr>
+              <a:buFont typeface="Arial"/>
+              <a:buChar char="•"/>
+            </a:pPr>
+            <a:r>
+              <a:rPr sz="2000">
                 <a:solidFill>
                   <a:srgbClr val="1E293B"/>
                 </a:solidFill>
                 <a:latin typeface="Calibri"/>
               </a:rPr>
-              <a:t>Đọc diễn cảm một đoạn thơ bạn yêu thích.</a:t>
+              <a:t>Tìm hiểu tác giả Quang Dũng (Tây Tiến)</a:t>
+            </a:r>
+          </a:p>
+          <a:p>
+            <a:pPr algn="l">
+              <a:spcAft>
+                <a:spcPts val="800"/>
+              </a:spcAft>
+            </a:pPr>
+            <a:r>
+              <a:rPr sz="1600">
+                <a:solidFill>
+                  <a:srgbClr val="64748B"/>
+                </a:solidFill>
+                <a:latin typeface="Calibri"/>
+                <a:hlinkClick r:id="rId3"/>
+              </a:rPr>
+              <a:t>https://www.youtube.com/watch?v=KEmXIneA0fs</a:t>
             </a:r>
           </a:p>
         </p:txBody>
@@ -7239,14 +7041,14 @@
         </p:nvSpPr>
         <p:spPr>
           <a:xfrm>
-            <a:off x="10408615" y="457200"/>
-            <a:ext cx="1234440" cy="457200"/>
+            <a:off x="10253167" y="457200"/>
+            <a:ext cx="1389888" cy="457200"/>
           </a:xfrm>
           <a:prstGeom prst="roundRect">
             <a:avLst/>
           </a:prstGeom>
           <a:solidFill>
-            <a:srgbClr val="991B1B"/>
+            <a:srgbClr val="1E40AF"/>
           </a:solidFill>
           <a:ln>
             <a:noFill/>
@@ -7279,7 +7081,7 @@
                 </a:solidFill>
                 <a:latin typeface="Arial"/>
               </a:rPr>
-              <a:t>VIDEO</a:t>
+              <a:t>ĐỀ BÀI</a:t>
             </a:r>
           </a:p>
         </p:txBody>
@@ -7293,7 +7095,7 @@
         <p:spPr>
           <a:xfrm>
             <a:off x="731520" y="274320"/>
-            <a:ext cx="9738360" cy="868680"/>
+            <a:ext cx="9582912" cy="868680"/>
           </a:xfrm>
           <a:prstGeom prst="rect">
             <a:avLst/>
@@ -7313,7 +7115,7 @@
                 </a:solidFill>
                 <a:latin typeface="Arial"/>
               </a:rPr>
-              <a:t>VIDEO THAM KHẢO</a:t>
+              <a:t>THIÊN NHIÊN VÀ CON ĐƯỜNG HÀNH QUÂN</a:t>
             </a:r>
           </a:p>
         </p:txBody>
@@ -7397,40 +7199,16 @@
           </a:p>
         </p:txBody>
       </p:sp>
-      <p:pic>
-        <p:nvPicPr>
-          <p:cNvPr id="7" name="Picture 6" descr="QR_video_K3n2fB2UV44.png"/>
-          <p:cNvPicPr>
-            <a:picLocks noChangeAspect="1"/>
-          </p:cNvPicPr>
-          <p:nvPr/>
-        </p:nvPicPr>
-        <p:blipFill>
-          <a:blip r:embed="rId2"/>
-          <a:stretch>
-            <a:fillRect/>
-          </a:stretch>
-        </p:blipFill>
-        <p:spPr>
-          <a:xfrm>
-            <a:off x="8412480" y="1554480"/>
-            <a:ext cx="3108960" cy="3108960"/>
-          </a:xfrm>
-          <a:prstGeom prst="rect">
-            <a:avLst/>
-          </a:prstGeom>
-        </p:spPr>
-      </p:pic>
-      <p:sp>
-        <p:nvSpPr>
-          <p:cNvPr id="8" name="TextBox 7"/>
+      <p:sp>
+        <p:nvSpPr>
+          <p:cNvPr id="7" name="TextBox 6"/>
           <p:cNvSpPr txBox="1"/>
           <p:nvPr/>
         </p:nvSpPr>
         <p:spPr>
           <a:xfrm>
-            <a:off x="731520" y="1554480"/>
-            <a:ext cx="7498079" cy="4206240"/>
+            <a:off x="731520" y="1463040"/>
+            <a:ext cx="10789920" cy="3566160"/>
           </a:xfrm>
           <a:prstGeom prst="rect">
             <a:avLst/>
@@ -7455,61 +7233,94 @@
                 </a:solidFill>
                 <a:latin typeface="Calibri"/>
               </a:rPr>
-              <a:t>🎬 Ngâm thơ: Tây Tiến, sáng tác Quang Dũng</a:t>
-            </a:r>
-          </a:p>
+              <a:t>Đọc đoạn thơ 1: Nêu ấn tượng về cảm xúc ở hai câu mở đầu; hình dung bức tranh thiên nhiên, con đường hành quân; cảm nhận chất nhạc, chất hoạ trong bốn câu “Dốc lên khúc khuỷu…”.</a:t>
+            </a:r>
+          </a:p>
+        </p:txBody>
+      </p:sp>
+      <p:sp>
+        <p:nvSpPr>
+          <p:cNvPr id="8" name="Rounded Rectangle 7"/>
+          <p:cNvSpPr/>
+          <p:nvPr/>
+        </p:nvSpPr>
+        <p:spPr>
+          <a:xfrm>
+            <a:off x="731520" y="5120640"/>
+            <a:ext cx="10789920" cy="693420"/>
+          </a:xfrm>
+          <a:prstGeom prst="roundRect">
+            <a:avLst>
+              <a:gd name="adj" fmla="val 8000"/>
+            </a:avLst>
+          </a:prstGeom>
+          <a:solidFill>
+            <a:srgbClr val="EFF4FF"/>
+          </a:solidFill>
+          <a:ln w="19050">
+            <a:solidFill>
+              <a:srgbClr val="1E40AF"/>
+            </a:solidFill>
+          </a:ln>
+          <a:effectLst/>
+        </p:spPr>
+        <p:style>
+          <a:lnRef idx="1">
+            <a:schemeClr val="accent1"/>
+          </a:lnRef>
+          <a:fillRef idx="3">
+            <a:schemeClr val="accent1"/>
+          </a:fillRef>
+          <a:effectRef idx="2">
+            <a:schemeClr val="accent1"/>
+          </a:effectRef>
+          <a:fontRef idx="minor">
+            <a:schemeClr val="lt1"/>
+          </a:fontRef>
+        </p:style>
+        <p:txBody>
+          <a:bodyPr rtlCol="0" anchor="ctr"/>
+          <a:lstStyle/>
+          <a:p>
+            <a:pPr algn="ctr"/>
+          </a:p>
+        </p:txBody>
+      </p:sp>
+      <p:sp>
+        <p:nvSpPr>
+          <p:cNvPr id="9" name="TextBox 8"/>
+          <p:cNvSpPr txBox="1"/>
+          <p:nvPr/>
+        </p:nvSpPr>
+        <p:spPr>
+          <a:xfrm>
+            <a:off x="914400" y="5120640"/>
+            <a:ext cx="10424160" cy="693420"/>
+          </a:xfrm>
+          <a:prstGeom prst="rect">
+            <a:avLst/>
+          </a:prstGeom>
+          <a:noFill/>
+        </p:spPr>
+        <p:txBody>
+          <a:bodyPr wrap="square" anchor="ctr" lIns="45720" rIns="45720">
+            <a:spAutoFit/>
+          </a:bodyPr>
+          <a:lstStyle/>
           <a:p>
             <a:pPr algn="l">
               <a:spcAft>
-                <a:spcPts val="800"/>
+                <a:spcPts val="400"/>
               </a:spcAft>
             </a:pPr>
             <a:r>
-              <a:rPr sz="2000">
-                <a:solidFill>
-                  <a:srgbClr val="64748B"/>
+              <a:rPr sz="2200" b="1">
+                <a:solidFill>
+                  <a:srgbClr val="1E40AF"/>
                 </a:solidFill>
                 <a:latin typeface="Calibri"/>
               </a:rPr>
-              <a:t>Kênh: Hồng Đinh</a:t>
-            </a:r>
-          </a:p>
-          <a:p>
-            <a:pPr algn="l" marL="365760" indent="-365760">
-              <a:spcAft>
-                <a:spcPts val="800"/>
-              </a:spcAft>
-              <a:buClr>
-                <a:srgbClr val="1E40AF"/>
-              </a:buClr>
-              <a:buFont typeface="Arial"/>
-              <a:buChar char="•"/>
-            </a:pPr>
-            <a:r>
-              <a:rPr sz="2000">
-                <a:solidFill>
-                  <a:srgbClr val="1E293B"/>
-                </a:solidFill>
-                <a:latin typeface="Calibri"/>
-              </a:rPr>
-              <a:t>Đọc diễn cảm Tây Tiến</a:t>
-            </a:r>
-          </a:p>
-          <a:p>
-            <a:pPr algn="l">
-              <a:spcAft>
-                <a:spcPts val="800"/>
-              </a:spcAft>
-            </a:pPr>
-            <a:r>
-              <a:rPr sz="1600">
-                <a:solidFill>
-                  <a:srgbClr val="64748B"/>
-                </a:solidFill>
-                <a:latin typeface="Calibri"/>
-                <a:hlinkClick r:id="rId3"/>
-              </a:rPr>
-              <a:t>https://www.youtube.com/watch?v=K3n2fB2UV44</a:t>
+              <a:t>💡 Đếm thanh bằng, thanh trắc trong bốn câu thơ.</a:t>
             </a:r>
           </a:p>
         </p:txBody>
@@ -7592,14 +7403,14 @@
         </p:nvSpPr>
         <p:spPr>
           <a:xfrm>
-            <a:off x="10253167" y="457200"/>
-            <a:ext cx="1389888" cy="457200"/>
+            <a:off x="9942271" y="457200"/>
+            <a:ext cx="1700784" cy="457200"/>
           </a:xfrm>
           <a:prstGeom prst="roundRect">
             <a:avLst/>
           </a:prstGeom>
           <a:solidFill>
-            <a:srgbClr val="1E40AF"/>
+            <a:srgbClr val="991B1B"/>
           </a:solidFill>
           <a:ln>
             <a:noFill/>
@@ -7632,7 +7443,7 @@
                 </a:solidFill>
                 <a:latin typeface="Arial"/>
               </a:rPr>
-              <a:t>ĐỀ BÀI</a:t>
+              <a:t>LỜI GIẢI</a:t>
             </a:r>
           </a:p>
         </p:txBody>
@@ -7646,7 +7457,7 @@
         <p:spPr>
           <a:xfrm>
             <a:off x="731520" y="274320"/>
-            <a:ext cx="9582912" cy="868680"/>
+            <a:ext cx="9272016" cy="868680"/>
           </a:xfrm>
           <a:prstGeom prst="rect">
             <a:avLst/>
@@ -7759,7 +7570,7 @@
         <p:spPr>
           <a:xfrm>
             <a:off x="731520" y="1463040"/>
-            <a:ext cx="10789920" cy="3566160"/>
+            <a:ext cx="10789920" cy="3474720"/>
           </a:xfrm>
           <a:prstGeom prst="rect">
             <a:avLst/>
@@ -7772,19 +7583,87 @@
           </a:bodyPr>
           <a:lstStyle/>
           <a:p>
-            <a:pPr algn="l">
+            <a:pPr algn="l" marL="365760" indent="-365760">
               <a:spcAft>
                 <a:spcPts val="800"/>
               </a:spcAft>
+              <a:buClr>
+                <a:srgbClr val="1E40AF"/>
+              </a:buClr>
+              <a:buFont typeface="Arial"/>
+              <a:buChar char="•"/>
             </a:pPr>
             <a:r>
-              <a:rPr sz="2600" b="1">
+              <a:rPr sz="2300">
                 <a:solidFill>
                   <a:srgbClr val="1E293B"/>
                 </a:solidFill>
                 <a:latin typeface="Calibri"/>
               </a:rPr>
-              <a:t>Đọc đoạn thơ 1: Nêu ấn tượng về cảm xúc ở hai câu mở đầu; hình dung bức tranh thiên nhiên, con đường hành quân; cảm nhận chất nhạc, chất hoạ trong bốn câu “Dốc lên khúc khuỷu…”.</a:t>
+              <a:t>“Nhớ về rừng núi nhớ chơi vơi” – nỗi nhớ trào dâng, chơi vơi.</a:t>
+            </a:r>
+          </a:p>
+          <a:p>
+            <a:pPr algn="l" marL="365760" indent="-365760">
+              <a:spcAft>
+                <a:spcPts val="800"/>
+              </a:spcAft>
+              <a:buClr>
+                <a:srgbClr val="1E40AF"/>
+              </a:buClr>
+              <a:buFont typeface="Arial"/>
+              <a:buChar char="•"/>
+            </a:pPr>
+            <a:r>
+              <a:rPr sz="2300">
+                <a:solidFill>
+                  <a:srgbClr val="1E293B"/>
+                </a:solidFill>
+                <a:latin typeface="Calibri"/>
+              </a:rPr>
+              <a:t>Thiên nhiên hiểm trở, hùng vĩ, dữ dội: dốc thăm thẳm, cồn mây, thác gầm, cọp trêu.</a:t>
+            </a:r>
+          </a:p>
+          <a:p>
+            <a:pPr algn="l" marL="365760" indent="-365760">
+              <a:spcAft>
+                <a:spcPts val="800"/>
+              </a:spcAft>
+              <a:buClr>
+                <a:srgbClr val="1E40AF"/>
+              </a:buClr>
+              <a:buFont typeface="Arial"/>
+              <a:buChar char="•"/>
+            </a:pPr>
+            <a:r>
+              <a:rPr sz="2300">
+                <a:solidFill>
+                  <a:srgbClr val="1E293B"/>
+                </a:solidFill>
+                <a:latin typeface="Calibri"/>
+              </a:rPr>
+              <a:t>Ba câu nhiều thanh trắc – gian nan; câu “Nhà ai Pha Luông mưa xa khơi” toàn thanh bằng – thư thái.</a:t>
+            </a:r>
+          </a:p>
+          <a:p>
+            <a:pPr algn="l" marL="365760" indent="-365760">
+              <a:spcAft>
+                <a:spcPts val="800"/>
+              </a:spcAft>
+              <a:buClr>
+                <a:srgbClr val="1E40AF"/>
+              </a:buClr>
+              <a:buFont typeface="Arial"/>
+              <a:buChar char="•"/>
+            </a:pPr>
+            <a:r>
+              <a:rPr sz="2300">
+                <a:solidFill>
+                  <a:srgbClr val="1E293B"/>
+                </a:solidFill>
+                <a:latin typeface="Calibri"/>
+              </a:rPr>
+              <a:t>Điệp từ, phép đối lên – xuống: bức tranh núi rừng sống động.</a:t>
             </a:r>
           </a:p>
         </p:txBody>
@@ -7797,8 +7676,8 @@
         </p:nvSpPr>
         <p:spPr>
           <a:xfrm>
-            <a:off x="731520" y="5120640"/>
-            <a:ext cx="10789920" cy="693420"/>
+            <a:off x="731520" y="5074920"/>
+            <a:ext cx="10789920" cy="731520"/>
           </a:xfrm>
           <a:prstGeom prst="roundRect">
             <a:avLst>
@@ -7806,11 +7685,11 @@
             </a:avLst>
           </a:prstGeom>
           <a:solidFill>
-            <a:srgbClr val="EFF4FF"/>
+            <a:srgbClr val="FEF2F2"/>
           </a:solidFill>
           <a:ln w="19050">
             <a:solidFill>
-              <a:srgbClr val="1E40AF"/>
+              <a:srgbClr val="991B1B"/>
             </a:solidFill>
           </a:ln>
           <a:effectLst/>
@@ -7845,8 +7724,8 @@
         </p:nvSpPr>
         <p:spPr>
           <a:xfrm>
-            <a:off x="914400" y="5120640"/>
-            <a:ext cx="10424160" cy="693420"/>
+            <a:off x="914400" y="5074920"/>
+            <a:ext cx="10424160" cy="731520"/>
           </a:xfrm>
           <a:prstGeom prst="rect">
             <a:avLst/>
@@ -7865,13 +7744,13 @@
               </a:spcAft>
             </a:pPr>
             <a:r>
-              <a:rPr sz="2200" b="1">
-                <a:solidFill>
-                  <a:srgbClr val="1E40AF"/>
+              <a:rPr sz="2400" b="1">
+                <a:solidFill>
+                  <a:srgbClr val="991B1B"/>
                 </a:solidFill>
                 <a:latin typeface="Calibri"/>
               </a:rPr>
-              <a:t>💡 Đếm thanh bằng, thanh trắc trong bốn câu thơ.</a:t>
+              <a:t>Chất nhạc, chất hoạ – bút pháp lãng mạn.</a:t>
             </a:r>
           </a:p>
         </p:txBody>
@@ -7954,14 +7833,14 @@
         </p:nvSpPr>
         <p:spPr>
           <a:xfrm>
-            <a:off x="9942271" y="457200"/>
-            <a:ext cx="1700784" cy="457200"/>
+            <a:off x="10253167" y="457200"/>
+            <a:ext cx="1389888" cy="457200"/>
           </a:xfrm>
           <a:prstGeom prst="roundRect">
             <a:avLst/>
           </a:prstGeom>
           <a:solidFill>
-            <a:srgbClr val="991B1B"/>
+            <a:srgbClr val="1E40AF"/>
           </a:solidFill>
           <a:ln>
             <a:noFill/>
@@ -7994,7 +7873,7 @@
                 </a:solidFill>
                 <a:latin typeface="Arial"/>
               </a:rPr>
-              <a:t>LỜI GIẢI</a:t>
+              <a:t>ĐỀ BÀI</a:t>
             </a:r>
           </a:p>
         </p:txBody>
@@ -8008,7 +7887,7 @@
         <p:spPr>
           <a:xfrm>
             <a:off x="731520" y="274320"/>
-            <a:ext cx="9272016" cy="868680"/>
+            <a:ext cx="9582912" cy="868680"/>
           </a:xfrm>
           <a:prstGeom prst="rect">
             <a:avLst/>
@@ -8028,7 +7907,7 @@
                 </a:solidFill>
                 <a:latin typeface="Arial"/>
               </a:rPr>
-              <a:t>THIÊN NHIÊN VÀ CON ĐƯỜNG HÀNH QUÂN</a:t>
+              <a:t>HÌNH TƯỢNG NGƯỜI LÍNH TÂY TIẾN</a:t>
             </a:r>
           </a:p>
         </p:txBody>
@@ -8121,7 +8000,7 @@
         <p:spPr>
           <a:xfrm>
             <a:off x="731520" y="1463040"/>
-            <a:ext cx="10789920" cy="3474720"/>
+            <a:ext cx="10789920" cy="3566160"/>
           </a:xfrm>
           <a:prstGeom prst="rect">
             <a:avLst/>
@@ -8134,87 +8013,19 @@
           </a:bodyPr>
           <a:lstStyle/>
           <a:p>
-            <a:pPr algn="l" marL="365760" indent="-365760">
+            <a:pPr algn="l">
               <a:spcAft>
                 <a:spcPts val="800"/>
               </a:spcAft>
-              <a:buClr>
-                <a:srgbClr val="1E40AF"/>
-              </a:buClr>
-              <a:buFont typeface="Arial"/>
-              <a:buChar char="•"/>
             </a:pPr>
             <a:r>
-              <a:rPr sz="2300">
+              <a:rPr sz="2600" b="1">
                 <a:solidFill>
                   <a:srgbClr val="1E293B"/>
                 </a:solidFill>
                 <a:latin typeface="Calibri"/>
               </a:rPr>
-              <a:t>“Nhớ về rừng núi nhớ chơi vơi” – nỗi nhớ trào dâng, chơi vơi.</a:t>
-            </a:r>
-          </a:p>
-          <a:p>
-            <a:pPr algn="l" marL="365760" indent="-365760">
-              <a:spcAft>
-                <a:spcPts val="800"/>
-              </a:spcAft>
-              <a:buClr>
-                <a:srgbClr val="1E40AF"/>
-              </a:buClr>
-              <a:buFont typeface="Arial"/>
-              <a:buChar char="•"/>
-            </a:pPr>
-            <a:r>
-              <a:rPr sz="2300">
-                <a:solidFill>
-                  <a:srgbClr val="1E293B"/>
-                </a:solidFill>
-                <a:latin typeface="Calibri"/>
-              </a:rPr>
-              <a:t>Thiên nhiên hiểm trở, hùng vĩ, dữ dội: dốc thăm thẳm, cồn mây, thác gầm, cọp trêu.</a:t>
-            </a:r>
-          </a:p>
-          <a:p>
-            <a:pPr algn="l" marL="365760" indent="-365760">
-              <a:spcAft>
-                <a:spcPts val="800"/>
-              </a:spcAft>
-              <a:buClr>
-                <a:srgbClr val="1E40AF"/>
-              </a:buClr>
-              <a:buFont typeface="Arial"/>
-              <a:buChar char="•"/>
-            </a:pPr>
-            <a:r>
-              <a:rPr sz="2300">
-                <a:solidFill>
-                  <a:srgbClr val="1E293B"/>
-                </a:solidFill>
-                <a:latin typeface="Calibri"/>
-              </a:rPr>
-              <a:t>Ba câu nhiều thanh trắc – gian nan; câu “Nhà ai Pha Luông mưa xa khơi” toàn thanh bằng – thư thái.</a:t>
-            </a:r>
-          </a:p>
-          <a:p>
-            <a:pPr algn="l" marL="365760" indent="-365760">
-              <a:spcAft>
-                <a:spcPts val="800"/>
-              </a:spcAft>
-              <a:buClr>
-                <a:srgbClr val="1E40AF"/>
-              </a:buClr>
-              <a:buFont typeface="Arial"/>
-              <a:buChar char="•"/>
-            </a:pPr>
-            <a:r>
-              <a:rPr sz="2300">
-                <a:solidFill>
-                  <a:srgbClr val="1E293B"/>
-                </a:solidFill>
-                <a:latin typeface="Calibri"/>
-              </a:rPr>
-              <a:t>Điệp từ, phép đối lên – xuống: bức tranh núi rừng sống động.</a:t>
+              <a:t>Trong đoạn thơ 3, 4, hình tượng người lính được gợi ra qua những từ ngữ, hình ảnh nào? Khái quát đặc điểm hình tượng này.</a:t>
             </a:r>
           </a:p>
         </p:txBody>
@@ -8227,8 +8038,8 @@
         </p:nvSpPr>
         <p:spPr>
           <a:xfrm>
-            <a:off x="731520" y="5074920"/>
-            <a:ext cx="10789920" cy="731520"/>
+            <a:off x="731520" y="5120640"/>
+            <a:ext cx="10789920" cy="693420"/>
           </a:xfrm>
           <a:prstGeom prst="roundRect">
             <a:avLst>
@@ -8236,11 +8047,11 @@
             </a:avLst>
           </a:prstGeom>
           <a:solidFill>
-            <a:srgbClr val="FEF2F2"/>
+            <a:srgbClr val="EFF4FF"/>
           </a:solidFill>
           <a:ln w="19050">
             <a:solidFill>
-              <a:srgbClr val="991B1B"/>
+              <a:srgbClr val="1E40AF"/>
             </a:solidFill>
           </a:ln>
           <a:effectLst/>
@@ -8275,8 +8086,8 @@
         </p:nvSpPr>
         <p:spPr>
           <a:xfrm>
-            <a:off x="914400" y="5074920"/>
-            <a:ext cx="10424160" cy="731520"/>
+            <a:off x="914400" y="5120640"/>
+            <a:ext cx="10424160" cy="693420"/>
           </a:xfrm>
           <a:prstGeom prst="rect">
             <a:avLst/>
@@ -8295,13 +8106,13 @@
               </a:spcAft>
             </a:pPr>
             <a:r>
-              <a:rPr sz="2400" b="1">
-                <a:solidFill>
-                  <a:srgbClr val="991B1B"/>
+              <a:rPr sz="2200" b="1">
+                <a:solidFill>
+                  <a:srgbClr val="1E40AF"/>
                 </a:solidFill>
                 <a:latin typeface="Calibri"/>
               </a:rPr>
-              <a:t>Chất nhạc, chất hoạ – bút pháp lãng mạn.</a:t>
+              <a:t>💡 Chú ý các từ Hán Việt trang trọng.</a:t>
             </a:r>
           </a:p>
         </p:txBody>
@@ -8384,14 +8195,14 @@
         </p:nvSpPr>
         <p:spPr>
           <a:xfrm>
-            <a:off x="10253167" y="457200"/>
-            <a:ext cx="1389888" cy="457200"/>
+            <a:off x="9942271" y="457200"/>
+            <a:ext cx="1700784" cy="457200"/>
           </a:xfrm>
           <a:prstGeom prst="roundRect">
             <a:avLst/>
           </a:prstGeom>
           <a:solidFill>
-            <a:srgbClr val="1E40AF"/>
+            <a:srgbClr val="991B1B"/>
           </a:solidFill>
           <a:ln>
             <a:noFill/>
@@ -8424,7 +8235,7 @@
                 </a:solidFill>
                 <a:latin typeface="Arial"/>
               </a:rPr>
-              <a:t>ĐỀ BÀI</a:t>
+              <a:t>LỜI GIẢI</a:t>
             </a:r>
           </a:p>
         </p:txBody>
@@ -8438,7 +8249,7 @@
         <p:spPr>
           <a:xfrm>
             <a:off x="731520" y="274320"/>
-            <a:ext cx="9582912" cy="868680"/>
+            <a:ext cx="9272016" cy="868680"/>
           </a:xfrm>
           <a:prstGeom prst="rect">
             <a:avLst/>
@@ -8551,7 +8362,7 @@
         <p:spPr>
           <a:xfrm>
             <a:off x="731520" y="1463040"/>
-            <a:ext cx="10789920" cy="3566160"/>
+            <a:ext cx="10789920" cy="3474720"/>
           </a:xfrm>
           <a:prstGeom prst="rect">
             <a:avLst/>
@@ -8564,19 +8375,66 @@
           </a:bodyPr>
           <a:lstStyle/>
           <a:p>
-            <a:pPr algn="l">
+            <a:pPr algn="l" marL="365760" indent="-365760">
               <a:spcAft>
                 <a:spcPts val="800"/>
               </a:spcAft>
+              <a:buClr>
+                <a:srgbClr val="1E40AF"/>
+              </a:buClr>
+              <a:buFont typeface="Arial"/>
+              <a:buChar char="•"/>
             </a:pPr>
             <a:r>
-              <a:rPr sz="2600" b="1">
+              <a:rPr sz="2300">
                 <a:solidFill>
                   <a:srgbClr val="1E293B"/>
                 </a:solidFill>
                 <a:latin typeface="Calibri"/>
               </a:rPr>
-              <a:t>Trong đoạn thơ 3, 4, hình tượng người lính được gợi ra qua những từ ngữ, hình ảnh nào? Khái quát đặc điểm hình tượng này.</a:t>
+              <a:t>“không mọc tóc”, “quân xanh màu lá dữ oai hùm” – gian khổ mà oai phong.</a:t>
+            </a:r>
+          </a:p>
+          <a:p>
+            <a:pPr algn="l" marL="365760" indent="-365760">
+              <a:spcAft>
+                <a:spcPts val="800"/>
+              </a:spcAft>
+              <a:buClr>
+                <a:srgbClr val="1E40AF"/>
+              </a:buClr>
+              <a:buFont typeface="Arial"/>
+              <a:buChar char="•"/>
+            </a:pPr>
+            <a:r>
+              <a:rPr sz="2300">
+                <a:solidFill>
+                  <a:srgbClr val="1E293B"/>
+                </a:solidFill>
+                <a:latin typeface="Calibri"/>
+              </a:rPr>
+              <a:t>“mắt trừng gửi mộng”, “đêm mơ Hà Nội dáng kiều thơm” – hào hoa, lãng mạn.</a:t>
+            </a:r>
+          </a:p>
+          <a:p>
+            <a:pPr algn="l" marL="365760" indent="-365760">
+              <a:spcAft>
+                <a:spcPts val="800"/>
+              </a:spcAft>
+              <a:buClr>
+                <a:srgbClr val="1E40AF"/>
+              </a:buClr>
+              <a:buFont typeface="Arial"/>
+              <a:buChar char="•"/>
+            </a:pPr>
+            <a:r>
+              <a:rPr sz="2300">
+                <a:solidFill>
+                  <a:srgbClr val="1E293B"/>
+                </a:solidFill>
+                <a:latin typeface="Calibri"/>
+              </a:rPr>
+              <a:t>“áo bào thay chiếu, anh về đất”, “sông Mã gầm lên khúc độc hành” – bi tráng.</a:t>
             </a:r>
           </a:p>
         </p:txBody>
@@ -8589,8 +8447,8 @@
         </p:nvSpPr>
         <p:spPr>
           <a:xfrm>
-            <a:off x="731520" y="5120640"/>
-            <a:ext cx="10789920" cy="693420"/>
+            <a:off x="731520" y="5074920"/>
+            <a:ext cx="10789920" cy="731520"/>
           </a:xfrm>
           <a:prstGeom prst="roundRect">
             <a:avLst>
@@ -8598,11 +8456,11 @@
             </a:avLst>
           </a:prstGeom>
           <a:solidFill>
-            <a:srgbClr val="EFF4FF"/>
+            <a:srgbClr val="FEF2F2"/>
           </a:solidFill>
           <a:ln w="19050">
             <a:solidFill>
-              <a:srgbClr val="1E40AF"/>
+              <a:srgbClr val="991B1B"/>
             </a:solidFill>
           </a:ln>
           <a:effectLst/>
@@ -8637,8 +8495,8 @@
         </p:nvSpPr>
         <p:spPr>
           <a:xfrm>
-            <a:off x="914400" y="5120640"/>
-            <a:ext cx="10424160" cy="693420"/>
+            <a:off x="914400" y="5074920"/>
+            <a:ext cx="10424160" cy="731520"/>
           </a:xfrm>
           <a:prstGeom prst="rect">
             <a:avLst/>
@@ -8657,13 +8515,13 @@
               </a:spcAft>
             </a:pPr>
             <a:r>
-              <a:rPr sz="2200" b="1">
-                <a:solidFill>
-                  <a:srgbClr val="1E40AF"/>
+              <a:rPr sz="2400" b="1">
+                <a:solidFill>
+                  <a:srgbClr val="991B1B"/>
                 </a:solidFill>
                 <a:latin typeface="Calibri"/>
               </a:rPr>
-              <a:t>💡 Chú ý các từ Hán Việt trang trọng.</a:t>
+              <a:t>Người lính hào hùng, hào hoa, bi tráng.</a:t>
             </a:r>
           </a:p>
         </p:txBody>
@@ -8682,7 +8540,7 @@
     <p:bg>
       <p:bgPr>
         <a:solidFill>
-          <a:srgbClr val="FFFFFF"/>
+          <a:srgbClr val="F8F9FA"/>
         </a:solidFill>
         <a:effectLst/>
       </p:bgPr>
@@ -8702,54 +8560,10 @@
         </p:nvSpPr>
         <p:spPr>
           <a:xfrm>
-            <a:off x="457200" y="384048"/>
-            <a:ext cx="109728" cy="658368"/>
-          </a:xfrm>
-          <a:prstGeom prst="rect">
-            <a:avLst/>
-          </a:prstGeom>
-          <a:solidFill>
-            <a:srgbClr val="1E40AF"/>
-          </a:solidFill>
-          <a:ln>
-            <a:noFill/>
-          </a:ln>
-          <a:effectLst/>
-        </p:spPr>
-        <p:style>
-          <a:lnRef idx="1">
-            <a:schemeClr val="accent1"/>
-          </a:lnRef>
-          <a:fillRef idx="3">
-            <a:schemeClr val="accent1"/>
-          </a:fillRef>
-          <a:effectRef idx="2">
-            <a:schemeClr val="accent1"/>
-          </a:effectRef>
-          <a:fontRef idx="minor">
-            <a:schemeClr val="lt1"/>
-          </a:fontRef>
-        </p:style>
-        <p:txBody>
-          <a:bodyPr rtlCol="0" anchor="ctr"/>
-          <a:lstStyle/>
-          <a:p>
-            <a:pPr algn="ctr"/>
-          </a:p>
-        </p:txBody>
-      </p:sp>
-      <p:sp>
-        <p:nvSpPr>
-          <p:cNvPr id="3" name="Rounded Rectangle 2"/>
-          <p:cNvSpPr/>
-          <p:nvPr/>
-        </p:nvSpPr>
-        <p:spPr>
-          <a:xfrm>
-            <a:off x="9942271" y="457200"/>
-            <a:ext cx="1700784" cy="457200"/>
-          </a:xfrm>
-          <a:prstGeom prst="roundRect">
+            <a:off x="548640" y="2926080"/>
+            <a:ext cx="164592" cy="1005840"/>
+          </a:xfrm>
+          <a:prstGeom prst="rect">
             <a:avLst/>
           </a:prstGeom>
           <a:solidFill>
@@ -8775,32 +8589,23 @@
           </a:fontRef>
         </p:style>
         <p:txBody>
-          <a:bodyPr rtlCol="0" anchor="ctr" wrap="none" tIns="0" bIns="0"/>
+          <a:bodyPr rtlCol="0" anchor="ctr"/>
           <a:lstStyle/>
           <a:p>
             <a:pPr algn="ctr"/>
-            <a:r>
-              <a:rPr sz="1400" b="1">
-                <a:solidFill>
-                  <a:srgbClr val="FFFFFF"/>
-                </a:solidFill>
-                <a:latin typeface="Arial"/>
-              </a:rPr>
-              <a:t>LỜI GIẢI</a:t>
-            </a:r>
-          </a:p>
-        </p:txBody>
-      </p:sp>
-      <p:sp>
-        <p:nvSpPr>
-          <p:cNvPr id="4" name="TextBox 3"/>
+          </a:p>
+        </p:txBody>
+      </p:sp>
+      <p:sp>
+        <p:nvSpPr>
+          <p:cNvPr id="3" name="TextBox 2"/>
           <p:cNvSpPr txBox="1"/>
           <p:nvPr/>
         </p:nvSpPr>
         <p:spPr>
           <a:xfrm>
-            <a:off x="731520" y="274320"/>
-            <a:ext cx="9272016" cy="868680"/>
+            <a:off x="914400" y="2743200"/>
+            <a:ext cx="10515600" cy="1371600"/>
           </a:xfrm>
           <a:prstGeom prst="rect">
             <a:avLst/>
@@ -8808,271 +8613,24 @@
           <a:noFill/>
         </p:spPr>
         <p:txBody>
-          <a:bodyPr wrap="square" anchor="ctr">
+          <a:bodyPr wrap="square" anchor="ctr" lIns="45720" rIns="45720">
             <a:spAutoFit/>
           </a:bodyPr>
           <a:lstStyle/>
           <a:p>
-            <a:r>
-              <a:rPr sz="3600" b="1">
-                <a:solidFill>
-                  <a:srgbClr val="1E40AF"/>
-                </a:solidFill>
-                <a:latin typeface="Arial"/>
-              </a:rPr>
-              <a:t>HÌNH TƯỢNG NGƯỜI LÍNH TÂY TIẾN</a:t>
-            </a:r>
-          </a:p>
-        </p:txBody>
-      </p:sp>
-      <p:sp>
-        <p:nvSpPr>
-          <p:cNvPr id="5" name="Rectangle 4"/>
-          <p:cNvSpPr/>
-          <p:nvPr/>
-        </p:nvSpPr>
-        <p:spPr>
-          <a:xfrm>
-            <a:off x="457200" y="1207008"/>
-            <a:ext cx="11274552" cy="22000"/>
-          </a:xfrm>
-          <a:prstGeom prst="rect">
-            <a:avLst/>
-          </a:prstGeom>
-          <a:solidFill>
-            <a:srgbClr val="E2E8F0"/>
-          </a:solidFill>
-          <a:ln>
-            <a:noFill/>
-          </a:ln>
-          <a:effectLst/>
-        </p:spPr>
-        <p:style>
-          <a:lnRef idx="1">
-            <a:schemeClr val="accent1"/>
-          </a:lnRef>
-          <a:fillRef idx="3">
-            <a:schemeClr val="accent1"/>
-          </a:fillRef>
-          <a:effectRef idx="2">
-            <a:schemeClr val="accent1"/>
-          </a:effectRef>
-          <a:fontRef idx="minor">
-            <a:schemeClr val="lt1"/>
-          </a:fontRef>
-        </p:style>
-        <p:txBody>
-          <a:bodyPr rtlCol="0" anchor="ctr"/>
-          <a:lstStyle/>
-          <a:p>
-            <a:pPr algn="ctr"/>
-          </a:p>
-        </p:txBody>
-      </p:sp>
-      <p:sp>
-        <p:nvSpPr>
-          <p:cNvPr id="6" name="TextBox 5"/>
-          <p:cNvSpPr txBox="1"/>
-          <p:nvPr/>
-        </p:nvSpPr>
-        <p:spPr>
-          <a:xfrm>
-            <a:off x="457200" y="6355080"/>
-            <a:ext cx="11274552" cy="365760"/>
-          </a:xfrm>
-          <a:prstGeom prst="rect">
-            <a:avLst/>
-          </a:prstGeom>
-          <a:noFill/>
-        </p:spPr>
-        <p:txBody>
-          <a:bodyPr wrap="none">
-            <a:spAutoFit/>
-          </a:bodyPr>
-          <a:lstStyle/>
-          <a:p>
-            <a:pPr algn="r"/>
-            <a:r>
-              <a:rPr sz="1200">
-                <a:solidFill>
-                  <a:srgbClr val="64748B"/>
-                </a:solidFill>
-                <a:latin typeface="Calibri"/>
-              </a:rPr>
-              <a:t>Ngữ văn 12 · Bài 2: Những Thế Giới Thơ          19</a:t>
-            </a:r>
-          </a:p>
-        </p:txBody>
-      </p:sp>
-      <p:sp>
-        <p:nvSpPr>
-          <p:cNvPr id="7" name="TextBox 6"/>
-          <p:cNvSpPr txBox="1"/>
-          <p:nvPr/>
-        </p:nvSpPr>
-        <p:spPr>
-          <a:xfrm>
-            <a:off x="731520" y="1463040"/>
-            <a:ext cx="10789920" cy="3474720"/>
-          </a:xfrm>
-          <a:prstGeom prst="rect">
-            <a:avLst/>
-          </a:prstGeom>
-          <a:noFill/>
-        </p:spPr>
-        <p:txBody>
-          <a:bodyPr wrap="square" anchor="t" lIns="45720" rIns="45720">
-            <a:spAutoFit/>
-          </a:bodyPr>
-          <a:lstStyle/>
-          <a:p>
-            <a:pPr algn="l" marL="365760" indent="-365760">
+            <a:pPr algn="l">
               <a:spcAft>
                 <a:spcPts val="800"/>
               </a:spcAft>
-              <a:buClr>
-                <a:srgbClr val="1E40AF"/>
-              </a:buClr>
-              <a:buFont typeface="Arial"/>
-              <a:buChar char="•"/>
             </a:pPr>
             <a:r>
-              <a:rPr sz="2300">
-                <a:solidFill>
-                  <a:srgbClr val="1E293B"/>
+              <a:rPr sz="3600" b="1">
+                <a:solidFill>
+                  <a:srgbClr val="1E40AF"/>
                 </a:solidFill>
                 <a:latin typeface="Calibri"/>
               </a:rPr>
-              <a:t>“không mọc tóc”, “quân xanh màu lá dữ oai hùm” – gian khổ mà oai phong.</a:t>
-            </a:r>
-          </a:p>
-          <a:p>
-            <a:pPr algn="l" marL="365760" indent="-365760">
-              <a:spcAft>
-                <a:spcPts val="800"/>
-              </a:spcAft>
-              <a:buClr>
-                <a:srgbClr val="1E40AF"/>
-              </a:buClr>
-              <a:buFont typeface="Arial"/>
-              <a:buChar char="•"/>
-            </a:pPr>
-            <a:r>
-              <a:rPr sz="2300">
-                <a:solidFill>
-                  <a:srgbClr val="1E293B"/>
-                </a:solidFill>
-                <a:latin typeface="Calibri"/>
-              </a:rPr>
-              <a:t>“mắt trừng gửi mộng”, “đêm mơ Hà Nội dáng kiều thơm” – hào hoa, lãng mạn.</a:t>
-            </a:r>
-          </a:p>
-          <a:p>
-            <a:pPr algn="l" marL="365760" indent="-365760">
-              <a:spcAft>
-                <a:spcPts val="800"/>
-              </a:spcAft>
-              <a:buClr>
-                <a:srgbClr val="1E40AF"/>
-              </a:buClr>
-              <a:buFont typeface="Arial"/>
-              <a:buChar char="•"/>
-            </a:pPr>
-            <a:r>
-              <a:rPr sz="2300">
-                <a:solidFill>
-                  <a:srgbClr val="1E293B"/>
-                </a:solidFill>
-                <a:latin typeface="Calibri"/>
-              </a:rPr>
-              <a:t>“áo bào thay chiếu, anh về đất”, “sông Mã gầm lên khúc độc hành” – bi tráng.</a:t>
-            </a:r>
-          </a:p>
-        </p:txBody>
-      </p:sp>
-      <p:sp>
-        <p:nvSpPr>
-          <p:cNvPr id="8" name="Rounded Rectangle 7"/>
-          <p:cNvSpPr/>
-          <p:nvPr/>
-        </p:nvSpPr>
-        <p:spPr>
-          <a:xfrm>
-            <a:off x="731520" y="5074920"/>
-            <a:ext cx="10789920" cy="731520"/>
-          </a:xfrm>
-          <a:prstGeom prst="roundRect">
-            <a:avLst>
-              <a:gd name="adj" fmla="val 8000"/>
-            </a:avLst>
-          </a:prstGeom>
-          <a:solidFill>
-            <a:srgbClr val="FEF2F2"/>
-          </a:solidFill>
-          <a:ln w="19050">
-            <a:solidFill>
-              <a:srgbClr val="991B1B"/>
-            </a:solidFill>
-          </a:ln>
-          <a:effectLst/>
-        </p:spPr>
-        <p:style>
-          <a:lnRef idx="1">
-            <a:schemeClr val="accent1"/>
-          </a:lnRef>
-          <a:fillRef idx="3">
-            <a:schemeClr val="accent1"/>
-          </a:fillRef>
-          <a:effectRef idx="2">
-            <a:schemeClr val="accent1"/>
-          </a:effectRef>
-          <a:fontRef idx="minor">
-            <a:schemeClr val="lt1"/>
-          </a:fontRef>
-        </p:style>
-        <p:txBody>
-          <a:bodyPr rtlCol="0" anchor="ctr"/>
-          <a:lstStyle/>
-          <a:p>
-            <a:pPr algn="ctr"/>
-          </a:p>
-        </p:txBody>
-      </p:sp>
-      <p:sp>
-        <p:nvSpPr>
-          <p:cNvPr id="9" name="TextBox 8"/>
-          <p:cNvSpPr txBox="1"/>
-          <p:nvPr/>
-        </p:nvSpPr>
-        <p:spPr>
-          <a:xfrm>
-            <a:off x="914400" y="5074920"/>
-            <a:ext cx="10424160" cy="731520"/>
-          </a:xfrm>
-          <a:prstGeom prst="rect">
-            <a:avLst/>
-          </a:prstGeom>
-          <a:noFill/>
-        </p:spPr>
-        <p:txBody>
-          <a:bodyPr wrap="square" anchor="ctr" lIns="45720" rIns="45720">
-            <a:spAutoFit/>
-          </a:bodyPr>
-          <a:lstStyle/>
-          <a:p>
-            <a:pPr algn="l">
-              <a:spcAft>
-                <a:spcPts val="400"/>
-              </a:spcAft>
-            </a:pPr>
-            <a:r>
-              <a:rPr sz="2400" b="1">
-                <a:solidFill>
-                  <a:srgbClr val="991B1B"/>
-                </a:solidFill>
-                <a:latin typeface="Calibri"/>
-              </a:rPr>
-              <a:t>Người lính hào hùng, hào hoa, bi tráng.</a:t>
+              <a:t>TIẾT 17 – 18: ĐÀN GHI TA CỦA LOR-CA (Thanh Thảo)</a:t>
             </a:r>
           </a:p>
         </p:txBody>
@@ -9476,7 +9034,7 @@
     <p:bg>
       <p:bgPr>
         <a:solidFill>
-          <a:srgbClr val="F8F9FA"/>
+          <a:srgbClr val="FFFFFF"/>
         </a:solidFill>
         <a:effectLst/>
       </p:bgPr>
@@ -9496,14 +9054,14 @@
         </p:nvSpPr>
         <p:spPr>
           <a:xfrm>
-            <a:off x="548640" y="2926080"/>
-            <a:ext cx="164592" cy="1005840"/>
+            <a:off x="457200" y="384048"/>
+            <a:ext cx="109728" cy="658368"/>
           </a:xfrm>
           <a:prstGeom prst="rect">
             <a:avLst/>
           </a:prstGeom>
           <a:solidFill>
-            <a:srgbClr val="991B1B"/>
+            <a:srgbClr val="1E40AF"/>
           </a:solidFill>
           <a:ln>
             <a:noFill/>
@@ -9534,14 +9092,67 @@
       </p:sp>
       <p:sp>
         <p:nvSpPr>
-          <p:cNvPr id="3" name="TextBox 2"/>
+          <p:cNvPr id="3" name="Rounded Rectangle 2"/>
+          <p:cNvSpPr/>
+          <p:nvPr/>
+        </p:nvSpPr>
+        <p:spPr>
+          <a:xfrm>
+            <a:off x="9786823" y="457200"/>
+            <a:ext cx="1856232" cy="457200"/>
+          </a:xfrm>
+          <a:prstGeom prst="roundRect">
+            <a:avLst/>
+          </a:prstGeom>
+          <a:solidFill>
+            <a:srgbClr val="1E40AF"/>
+          </a:solidFill>
+          <a:ln>
+            <a:noFill/>
+          </a:ln>
+          <a:effectLst/>
+        </p:spPr>
+        <p:style>
+          <a:lnRef idx="1">
+            <a:schemeClr val="accent1"/>
+          </a:lnRef>
+          <a:fillRef idx="3">
+            <a:schemeClr val="accent1"/>
+          </a:fillRef>
+          <a:effectRef idx="2">
+            <a:schemeClr val="accent1"/>
+          </a:effectRef>
+          <a:fontRef idx="minor">
+            <a:schemeClr val="lt1"/>
+          </a:fontRef>
+        </p:style>
+        <p:txBody>
+          <a:bodyPr rtlCol="0" anchor="ctr" wrap="none" tIns="0" bIns="0"/>
+          <a:lstStyle/>
+          <a:p>
+            <a:pPr algn="ctr"/>
+            <a:r>
+              <a:rPr sz="1400" b="1">
+                <a:solidFill>
+                  <a:srgbClr val="FFFFFF"/>
+                </a:solidFill>
+                <a:latin typeface="Arial"/>
+              </a:rPr>
+              <a:t>KHỞI ĐỘNG</a:t>
+            </a:r>
+          </a:p>
+        </p:txBody>
+      </p:sp>
+      <p:sp>
+        <p:nvSpPr>
+          <p:cNvPr id="4" name="TextBox 3"/>
           <p:cNvSpPr txBox="1"/>
           <p:nvPr/>
         </p:nvSpPr>
         <p:spPr>
           <a:xfrm>
-            <a:off x="914400" y="2743200"/>
-            <a:ext cx="10515600" cy="1371600"/>
+            <a:off x="731520" y="274320"/>
+            <a:ext cx="9116568" cy="868680"/>
           </a:xfrm>
           <a:prstGeom prst="rect">
             <a:avLst/>
@@ -9549,7 +9160,120 @@
           <a:noFill/>
         </p:spPr>
         <p:txBody>
-          <a:bodyPr wrap="square" anchor="ctr" lIns="45720" rIns="45720">
+          <a:bodyPr wrap="square" anchor="ctr">
+            <a:spAutoFit/>
+          </a:bodyPr>
+          <a:lstStyle/>
+          <a:p>
+            <a:r>
+              <a:rPr sz="3600" b="1">
+                <a:solidFill>
+                  <a:srgbClr val="1E40AF"/>
+                </a:solidFill>
+                <a:latin typeface="Arial"/>
+              </a:rPr>
+              <a:t>TRƯỚC KHI ĐỌC</a:t>
+            </a:r>
+          </a:p>
+        </p:txBody>
+      </p:sp>
+      <p:sp>
+        <p:nvSpPr>
+          <p:cNvPr id="5" name="Rectangle 4"/>
+          <p:cNvSpPr/>
+          <p:nvPr/>
+        </p:nvSpPr>
+        <p:spPr>
+          <a:xfrm>
+            <a:off x="457200" y="1207008"/>
+            <a:ext cx="11274552" cy="22000"/>
+          </a:xfrm>
+          <a:prstGeom prst="rect">
+            <a:avLst/>
+          </a:prstGeom>
+          <a:solidFill>
+            <a:srgbClr val="E2E8F0"/>
+          </a:solidFill>
+          <a:ln>
+            <a:noFill/>
+          </a:ln>
+          <a:effectLst/>
+        </p:spPr>
+        <p:style>
+          <a:lnRef idx="1">
+            <a:schemeClr val="accent1"/>
+          </a:lnRef>
+          <a:fillRef idx="3">
+            <a:schemeClr val="accent1"/>
+          </a:fillRef>
+          <a:effectRef idx="2">
+            <a:schemeClr val="accent1"/>
+          </a:effectRef>
+          <a:fontRef idx="minor">
+            <a:schemeClr val="lt1"/>
+          </a:fontRef>
+        </p:style>
+        <p:txBody>
+          <a:bodyPr rtlCol="0" anchor="ctr"/>
+          <a:lstStyle/>
+          <a:p>
+            <a:pPr algn="ctr"/>
+          </a:p>
+        </p:txBody>
+      </p:sp>
+      <p:sp>
+        <p:nvSpPr>
+          <p:cNvPr id="6" name="TextBox 5"/>
+          <p:cNvSpPr txBox="1"/>
+          <p:nvPr/>
+        </p:nvSpPr>
+        <p:spPr>
+          <a:xfrm>
+            <a:off x="457200" y="6355080"/>
+            <a:ext cx="11274552" cy="365760"/>
+          </a:xfrm>
+          <a:prstGeom prst="rect">
+            <a:avLst/>
+          </a:prstGeom>
+          <a:noFill/>
+        </p:spPr>
+        <p:txBody>
+          <a:bodyPr wrap="none">
+            <a:spAutoFit/>
+          </a:bodyPr>
+          <a:lstStyle/>
+          <a:p>
+            <a:pPr algn="r"/>
+            <a:r>
+              <a:rPr sz="1200">
+                <a:solidFill>
+                  <a:srgbClr val="64748B"/>
+                </a:solidFill>
+                <a:latin typeface="Calibri"/>
+              </a:rPr>
+              <a:t>Ngữ văn 12 · Bài 2: Những Thế Giới Thơ          20</a:t>
+            </a:r>
+          </a:p>
+        </p:txBody>
+      </p:sp>
+      <p:sp>
+        <p:nvSpPr>
+          <p:cNvPr id="7" name="TextBox 6"/>
+          <p:cNvSpPr txBox="1"/>
+          <p:nvPr/>
+        </p:nvSpPr>
+        <p:spPr>
+          <a:xfrm>
+            <a:off x="731520" y="1463040"/>
+            <a:ext cx="10789920" cy="4572000"/>
+          </a:xfrm>
+          <a:prstGeom prst="rect">
+            <a:avLst/>
+          </a:prstGeom>
+          <a:noFill/>
+        </p:spPr>
+        <p:txBody>
+          <a:bodyPr wrap="square" anchor="t" lIns="45720" rIns="45720">
             <a:spAutoFit/>
           </a:bodyPr>
           <a:lstStyle/>
@@ -9560,13 +9284,29 @@
               </a:spcAft>
             </a:pPr>
             <a:r>
-              <a:rPr sz="3600" b="1">
-                <a:solidFill>
-                  <a:srgbClr val="1E40AF"/>
+              <a:rPr sz="2600" b="1">
+                <a:solidFill>
+                  <a:srgbClr val="1E293B"/>
                 </a:solidFill>
                 <a:latin typeface="Calibri"/>
               </a:rPr>
-              <a:t>TIẾT 17 – 18: ĐÀN GHI TA CỦA LOR-CA (Thanh Thảo)</a:t>
+              <a:t>Theo bạn, sứ mệnh cao cả của người nghệ sĩ là gì?</a:t>
+            </a:r>
+          </a:p>
+          <a:p>
+            <a:pPr algn="l">
+              <a:spcAft>
+                <a:spcPts val="800"/>
+              </a:spcAft>
+            </a:pPr>
+            <a:r>
+              <a:rPr sz="2600" b="1">
+                <a:solidFill>
+                  <a:srgbClr val="1E293B"/>
+                </a:solidFill>
+                <a:latin typeface="Calibri"/>
+              </a:rPr>
+              <a:t>Bạn biết gì về đất nước Tây Ban Nha?</a:t>
             </a:r>
           </a:p>
         </p:txBody>
@@ -9649,8 +9389,8 @@
         </p:nvSpPr>
         <p:spPr>
           <a:xfrm>
-            <a:off x="9786823" y="457200"/>
-            <a:ext cx="1856232" cy="457200"/>
+            <a:off x="10253167" y="457200"/>
+            <a:ext cx="1389888" cy="457200"/>
           </a:xfrm>
           <a:prstGeom prst="roundRect">
             <a:avLst/>
@@ -9689,7 +9429,7 @@
                 </a:solidFill>
                 <a:latin typeface="Arial"/>
               </a:rPr>
-              <a:t>KHỞI ĐỘNG</a:t>
+              <a:t>ĐỀ BÀI</a:t>
             </a:r>
           </a:p>
         </p:txBody>
@@ -9703,7 +9443,7 @@
         <p:spPr>
           <a:xfrm>
             <a:off x="731520" y="274320"/>
-            <a:ext cx="9116568" cy="868680"/>
+            <a:ext cx="9582912" cy="868680"/>
           </a:xfrm>
           <a:prstGeom prst="rect">
             <a:avLst/>
@@ -9723,7 +9463,7 @@
                 </a:solidFill>
                 <a:latin typeface="Arial"/>
               </a:rPr>
-              <a:t>TRƯỚC KHI ĐỌC</a:t>
+              <a:t>HÌNH TƯỢNG LOR-CA</a:t>
             </a:r>
           </a:p>
         </p:txBody>
@@ -9816,7 +9556,7 @@
         <p:spPr>
           <a:xfrm>
             <a:off x="731520" y="1463040"/>
-            <a:ext cx="10789920" cy="4572000"/>
+            <a:ext cx="10789920" cy="3566160"/>
           </a:xfrm>
           <a:prstGeom prst="rect">
             <a:avLst/>
@@ -9841,23 +9581,94 @@
                 </a:solidFill>
                 <a:latin typeface="Calibri"/>
               </a:rPr>
-              <a:t>Theo bạn, sứ mệnh cao cả của người nghệ sĩ là gì?</a:t>
-            </a:r>
-          </a:p>
+              <a:t>Hình tượng Lor-ca được thể hiện thế nào trong hai đoạn thơ đầu? Chi tiết nào cho thấy mối quan hệ giữa nghệ sĩ với đất nước Tây Ban Nha?</a:t>
+            </a:r>
+          </a:p>
+        </p:txBody>
+      </p:sp>
+      <p:sp>
+        <p:nvSpPr>
+          <p:cNvPr id="8" name="Rounded Rectangle 7"/>
+          <p:cNvSpPr/>
+          <p:nvPr/>
+        </p:nvSpPr>
+        <p:spPr>
+          <a:xfrm>
+            <a:off x="731520" y="5120640"/>
+            <a:ext cx="10789920" cy="693420"/>
+          </a:xfrm>
+          <a:prstGeom prst="roundRect">
+            <a:avLst>
+              <a:gd name="adj" fmla="val 8000"/>
+            </a:avLst>
+          </a:prstGeom>
+          <a:solidFill>
+            <a:srgbClr val="EFF4FF"/>
+          </a:solidFill>
+          <a:ln w="19050">
+            <a:solidFill>
+              <a:srgbClr val="1E40AF"/>
+            </a:solidFill>
+          </a:ln>
+          <a:effectLst/>
+        </p:spPr>
+        <p:style>
+          <a:lnRef idx="1">
+            <a:schemeClr val="accent1"/>
+          </a:lnRef>
+          <a:fillRef idx="3">
+            <a:schemeClr val="accent1"/>
+          </a:fillRef>
+          <a:effectRef idx="2">
+            <a:schemeClr val="accent1"/>
+          </a:effectRef>
+          <a:fontRef idx="minor">
+            <a:schemeClr val="lt1"/>
+          </a:fontRef>
+        </p:style>
+        <p:txBody>
+          <a:bodyPr rtlCol="0" anchor="ctr"/>
+          <a:lstStyle/>
+          <a:p>
+            <a:pPr algn="ctr"/>
+          </a:p>
+        </p:txBody>
+      </p:sp>
+      <p:sp>
+        <p:nvSpPr>
+          <p:cNvPr id="9" name="TextBox 8"/>
+          <p:cNvSpPr txBox="1"/>
+          <p:nvPr/>
+        </p:nvSpPr>
+        <p:spPr>
+          <a:xfrm>
+            <a:off x="914400" y="5120640"/>
+            <a:ext cx="10424160" cy="693420"/>
+          </a:xfrm>
+          <a:prstGeom prst="rect">
+            <a:avLst/>
+          </a:prstGeom>
+          <a:noFill/>
+        </p:spPr>
+        <p:txBody>
+          <a:bodyPr wrap="square" anchor="ctr" lIns="45720" rIns="45720">
+            <a:spAutoFit/>
+          </a:bodyPr>
+          <a:lstStyle/>
           <a:p>
             <a:pPr algn="l">
               <a:spcAft>
-                <a:spcPts val="800"/>
+                <a:spcPts val="400"/>
               </a:spcAft>
             </a:pPr>
             <a:r>
-              <a:rPr sz="2600" b="1">
-                <a:solidFill>
-                  <a:srgbClr val="1E293B"/>
+              <a:rPr sz="2200" b="1">
+                <a:solidFill>
+                  <a:srgbClr val="1E40AF"/>
                 </a:solidFill>
                 <a:latin typeface="Calibri"/>
               </a:rPr>
-              <a:t>Bạn biết gì về đất nước Tây Ban Nha?</a:t>
+              <a:t>💡 So sánh “áo choàng đỏ gắt” với “áo choàng bê bết đỏ”.</a:t>
             </a:r>
           </a:p>
         </p:txBody>
@@ -9940,8 +9751,8 @@
         </p:nvSpPr>
         <p:spPr>
           <a:xfrm>
-            <a:off x="10408615" y="457200"/>
-            <a:ext cx="1234440" cy="457200"/>
+            <a:off x="9942271" y="457200"/>
+            <a:ext cx="1700784" cy="457200"/>
           </a:xfrm>
           <a:prstGeom prst="roundRect">
             <a:avLst/>
@@ -9980,7 +9791,7 @@
                 </a:solidFill>
                 <a:latin typeface="Arial"/>
               </a:rPr>
-              <a:t>VIDEO</a:t>
+              <a:t>LỜI GIẢI</a:t>
             </a:r>
           </a:p>
         </p:txBody>
@@ -9994,7 +9805,7 @@
         <p:spPr>
           <a:xfrm>
             <a:off x="731520" y="274320"/>
-            <a:ext cx="9738360" cy="868680"/>
+            <a:ext cx="9272016" cy="868680"/>
           </a:xfrm>
           <a:prstGeom prst="rect">
             <a:avLst/>
@@ -10014,7 +9825,7 @@
                 </a:solidFill>
                 <a:latin typeface="Arial"/>
               </a:rPr>
-              <a:t>VIDEO THAM KHẢO</a:t>
+              <a:t>HÌNH TƯỢNG LOR-CA</a:t>
             </a:r>
           </a:p>
         </p:txBody>
@@ -10098,40 +9909,16 @@
           </a:p>
         </p:txBody>
       </p:sp>
-      <p:pic>
-        <p:nvPicPr>
-          <p:cNvPr id="7" name="Picture 6" descr="QR_video_S8Ny3x08s3g.png"/>
-          <p:cNvPicPr>
-            <a:picLocks noChangeAspect="1"/>
-          </p:cNvPicPr>
-          <p:nvPr/>
-        </p:nvPicPr>
-        <p:blipFill>
-          <a:blip r:embed="rId2"/>
-          <a:stretch>
-            <a:fillRect/>
-          </a:stretch>
-        </p:blipFill>
-        <p:spPr>
-          <a:xfrm>
-            <a:off x="8412480" y="1554480"/>
-            <a:ext cx="3108960" cy="3108960"/>
-          </a:xfrm>
-          <a:prstGeom prst="rect">
-            <a:avLst/>
-          </a:prstGeom>
-        </p:spPr>
-      </p:pic>
-      <p:sp>
-        <p:nvSpPr>
-          <p:cNvPr id="8" name="TextBox 7"/>
+      <p:sp>
+        <p:nvSpPr>
+          <p:cNvPr id="7" name="TextBox 6"/>
           <p:cNvSpPr txBox="1"/>
           <p:nvPr/>
         </p:nvSpPr>
         <p:spPr>
           <a:xfrm>
-            <a:off x="731520" y="1554480"/>
-            <a:ext cx="7498079" cy="4206240"/>
+            <a:off x="731520" y="1463040"/>
+            <a:ext cx="10789920" cy="3474720"/>
           </a:xfrm>
           <a:prstGeom prst="rect">
             <a:avLst/>
@@ -10143,38 +9930,6 @@
             <a:spAutoFit/>
           </a:bodyPr>
           <a:lstStyle/>
-          <a:p>
-            <a:pPr algn="l">
-              <a:spcAft>
-                <a:spcPts val="800"/>
-              </a:spcAft>
-            </a:pPr>
-            <a:r>
-              <a:rPr sz="2600" b="1">
-                <a:solidFill>
-                  <a:srgbClr val="1E293B"/>
-                </a:solidFill>
-                <a:latin typeface="Calibri"/>
-              </a:rPr>
-              <a:t>🎬 Đàn ghita của Lorca – thơ Thanh Thảo – Thụy Anh đọc</a:t>
-            </a:r>
-          </a:p>
-          <a:p>
-            <a:pPr algn="l">
-              <a:spcAft>
-                <a:spcPts val="800"/>
-              </a:spcAft>
-            </a:pPr>
-            <a:r>
-              <a:rPr sz="2000">
-                <a:solidFill>
-                  <a:srgbClr val="64748B"/>
-                </a:solidFill>
-                <a:latin typeface="Calibri"/>
-              </a:rPr>
-              <a:t>Kênh: Nguyen</a:t>
-            </a:r>
-          </a:p>
           <a:p>
             <a:pPr algn="l" marL="365760" indent="-365760">
               <a:spcAft>
@@ -10187,30 +9942,142 @@
               <a:buChar char="•"/>
             </a:pPr>
             <a:r>
-              <a:rPr sz="2000">
+              <a:rPr sz="2300">
                 <a:solidFill>
                   <a:srgbClr val="1E293B"/>
                 </a:solidFill>
                 <a:latin typeface="Calibri"/>
               </a:rPr>
-              <a:t>Đọc diễn cảm Đàn ghi ta của Lor-ca</a:t>
-            </a:r>
-          </a:p>
-          <a:p>
-            <a:pPr algn="l">
+              <a:t>Nghệ sĩ lãng du, tự do: “đi lang thang về miền đơn độc / với vầng trăng chếnh choáng”.</a:t>
+            </a:r>
+          </a:p>
+          <a:p>
+            <a:pPr algn="l" marL="365760" indent="-365760">
               <a:spcAft>
                 <a:spcPts val="800"/>
               </a:spcAft>
+              <a:buClr>
+                <a:srgbClr val="1E40AF"/>
+              </a:buClr>
+              <a:buFont typeface="Arial"/>
+              <a:buChar char="•"/>
             </a:pPr>
             <a:r>
-              <a:rPr sz="1600">
-                <a:solidFill>
-                  <a:srgbClr val="64748B"/>
+              <a:rPr sz="2300">
+                <a:solidFill>
+                  <a:srgbClr val="1E293B"/>
                 </a:solidFill>
                 <a:latin typeface="Calibri"/>
-                <a:hlinkClick r:id="rId3"/>
-              </a:rPr>
-              <a:t>https://www.youtube.com/watch?v=S8Ny3x08s3g</a:t>
+              </a:rPr>
+              <a:t>“Tây Ban Nha / hát nghêu ngao / bỗng kinh hoàng” – gắn với số phận đất nước.</a:t>
+            </a:r>
+          </a:p>
+          <a:p>
+            <a:pPr algn="l" marL="365760" indent="-365760">
+              <a:spcAft>
+                <a:spcPts val="800"/>
+              </a:spcAft>
+              <a:buClr>
+                <a:srgbClr val="1E40AF"/>
+              </a:buClr>
+              <a:buFont typeface="Arial"/>
+              <a:buChar char="•"/>
+            </a:pPr>
+            <a:r>
+              <a:rPr sz="2300">
+                <a:solidFill>
+                  <a:srgbClr val="1E293B"/>
+                </a:solidFill>
+                <a:latin typeface="Calibri"/>
+              </a:rPr>
+              <a:t>“áo choàng bê bết đỏ / Lor-ca bị điệu về bãi bắn” – cái chết oan khuất.</a:t>
+            </a:r>
+          </a:p>
+        </p:txBody>
+      </p:sp>
+      <p:sp>
+        <p:nvSpPr>
+          <p:cNvPr id="8" name="Rounded Rectangle 7"/>
+          <p:cNvSpPr/>
+          <p:nvPr/>
+        </p:nvSpPr>
+        <p:spPr>
+          <a:xfrm>
+            <a:off x="731520" y="5074920"/>
+            <a:ext cx="10789920" cy="731520"/>
+          </a:xfrm>
+          <a:prstGeom prst="roundRect">
+            <a:avLst>
+              <a:gd name="adj" fmla="val 8000"/>
+            </a:avLst>
+          </a:prstGeom>
+          <a:solidFill>
+            <a:srgbClr val="FEF2F2"/>
+          </a:solidFill>
+          <a:ln w="19050">
+            <a:solidFill>
+              <a:srgbClr val="991B1B"/>
+            </a:solidFill>
+          </a:ln>
+          <a:effectLst/>
+        </p:spPr>
+        <p:style>
+          <a:lnRef idx="1">
+            <a:schemeClr val="accent1"/>
+          </a:lnRef>
+          <a:fillRef idx="3">
+            <a:schemeClr val="accent1"/>
+          </a:fillRef>
+          <a:effectRef idx="2">
+            <a:schemeClr val="accent1"/>
+          </a:effectRef>
+          <a:fontRef idx="minor">
+            <a:schemeClr val="lt1"/>
+          </a:fontRef>
+        </p:style>
+        <p:txBody>
+          <a:bodyPr rtlCol="0" anchor="ctr"/>
+          <a:lstStyle/>
+          <a:p>
+            <a:pPr algn="ctr"/>
+          </a:p>
+        </p:txBody>
+      </p:sp>
+      <p:sp>
+        <p:nvSpPr>
+          <p:cNvPr id="9" name="TextBox 8"/>
+          <p:cNvSpPr txBox="1"/>
+          <p:nvPr/>
+        </p:nvSpPr>
+        <p:spPr>
+          <a:xfrm>
+            <a:off x="914400" y="5074920"/>
+            <a:ext cx="10424160" cy="731520"/>
+          </a:xfrm>
+          <a:prstGeom prst="rect">
+            <a:avLst/>
+          </a:prstGeom>
+          <a:noFill/>
+        </p:spPr>
+        <p:txBody>
+          <a:bodyPr wrap="square" anchor="ctr" lIns="45720" rIns="45720">
+            <a:spAutoFit/>
+          </a:bodyPr>
+          <a:lstStyle/>
+          <a:p>
+            <a:pPr algn="l">
+              <a:spcAft>
+                <a:spcPts val="400"/>
+              </a:spcAft>
+            </a:pPr>
+            <a:r>
+              <a:rPr sz="2400" b="1">
+                <a:solidFill>
+                  <a:srgbClr val="991B1B"/>
+                </a:solidFill>
+                <a:latin typeface="Calibri"/>
+              </a:rPr>
+              <a:t>Người nghệ sĩ tự do, cô đơn, bị bạo lực vùi dập.</a:t>
             </a:r>
           </a:p>
         </p:txBody>
@@ -10367,7 +10234,7 @@
                 </a:solidFill>
                 <a:latin typeface="Arial"/>
               </a:rPr>
-              <a:t>HÌNH TƯỢNG LOR-CA</a:t>
+              <a:t>TIẾNG ĐÀN – CÁI CHẾT VÀ SỰ BẤT TỬ</a:t>
             </a:r>
           </a:p>
         </p:txBody>
@@ -10485,7 +10352,7 @@
                 </a:solidFill>
                 <a:latin typeface="Calibri"/>
               </a:rPr>
-              <a:t>Hình tượng Lor-ca được thể hiện thế nào trong hai đoạn thơ đầu? Chi tiết nào cho thấy mối quan hệ giữa nghệ sĩ với đất nước Tây Ban Nha?</a:t>
+              <a:t>Chỉ ra biện pháp tu từ miêu tả tiếng đàn; ý nghĩa hình ảnh biểu tượng; hình ảnh thực – ảo về cái chết và sự bất tử của Lor-ca.</a:t>
             </a:r>
           </a:p>
         </p:txBody>
@@ -10572,7 +10439,7 @@
                 </a:solidFill>
                 <a:latin typeface="Calibri"/>
               </a:rPr>
-              <a:t>💡 So sánh “áo choàng đỏ gắt” với “áo choàng bê bết đỏ”.</a:t>
+              <a:t>💡 Tiếng đàn được “nhìn” bằng màu sắc, hình khối nào?</a:t>
             </a:r>
           </a:p>
         </p:txBody>
@@ -10729,7 +10596,7 @@
                 </a:solidFill>
                 <a:latin typeface="Arial"/>
               </a:rPr>
-              <a:t>HÌNH TƯỢNG LOR-CA</a:t>
+              <a:t>TIẾNG ĐÀN – CÁI CHẾT VÀ SỰ BẤT TỬ</a:t>
             </a:r>
           </a:p>
         </p:txBody>
@@ -10852,7 +10719,7 @@
                 </a:solidFill>
                 <a:latin typeface="Calibri"/>
               </a:rPr>
-              <a:t>Nghệ sĩ lãng du, tự do: “đi lang thang về miền đơn độc / với vầng trăng chếnh choáng”.</a:t>
+              <a:t>Điệp “tiếng ghi ta” + chuyển đổi cảm giác: nâu, lá xanh, tròn bọt nước, ròng ròng máu chảy.</a:t>
             </a:r>
           </a:p>
           <a:p>
@@ -10873,7 +10740,7 @@
                 </a:solidFill>
                 <a:latin typeface="Calibri"/>
               </a:rPr>
-              <a:t>“Tây Ban Nha / hát nghêu ngao / bỗng kinh hoàng” – gắn với số phận đất nước.</a:t>
+              <a:t>“không ai chôn cất tiếng đàn / tiếng đàn như cỏ mọc hoang” – bất tử.</a:t>
             </a:r>
           </a:p>
           <a:p>
@@ -10894,7 +10761,28 @@
                 </a:solidFill>
                 <a:latin typeface="Calibri"/>
               </a:rPr>
-              <a:t>“áo choàng bê bết đỏ / Lor-ca bị điệu về bãi bắn” – cái chết oan khuất.</a:t>
+              <a:t>“Lor-ca bơi sang ngang trên chiếc ghi ta màu bạc” – cái chết hoá giải thoát.</a:t>
+            </a:r>
+          </a:p>
+          <a:p>
+            <a:pPr algn="l" marL="365760" indent="-365760">
+              <a:spcAft>
+                <a:spcPts val="800"/>
+              </a:spcAft>
+              <a:buClr>
+                <a:srgbClr val="1E40AF"/>
+              </a:buClr>
+              <a:buFont typeface="Arial"/>
+              <a:buChar char="•"/>
+            </a:pPr>
+            <a:r>
+              <a:rPr sz="2300">
+                <a:solidFill>
+                  <a:srgbClr val="1E293B"/>
+                </a:solidFill>
+                <a:latin typeface="Calibri"/>
+              </a:rPr>
+              <a:t>Dòng kết “li-la li-la li-la…” – tiếng đàn tiễn biệt.</a:t>
             </a:r>
           </a:p>
         </p:txBody>
@@ -10981,7 +10869,7 @@
                 </a:solidFill>
                 <a:latin typeface="Calibri"/>
               </a:rPr>
-              <a:t>Người nghệ sĩ tự do, cô đơn, bị bạo lực vùi dập.</a:t>
+              <a:t>Nghệ thuật chân chính bất tử.</a:t>
             </a:r>
           </a:p>
         </p:txBody>
@@ -11000,7 +10888,7 @@
     <p:bg>
       <p:bgPr>
         <a:solidFill>
-          <a:srgbClr val="FFFFFF"/>
+          <a:srgbClr val="F8F9FA"/>
         </a:solidFill>
         <a:effectLst/>
       </p:bgPr>
@@ -11020,54 +10908,10 @@
         </p:nvSpPr>
         <p:spPr>
           <a:xfrm>
-            <a:off x="457200" y="384048"/>
-            <a:ext cx="109728" cy="658368"/>
-          </a:xfrm>
-          <a:prstGeom prst="rect">
-            <a:avLst/>
-          </a:prstGeom>
-          <a:solidFill>
-            <a:srgbClr val="1E40AF"/>
-          </a:solidFill>
-          <a:ln>
-            <a:noFill/>
-          </a:ln>
-          <a:effectLst/>
-        </p:spPr>
-        <p:style>
-          <a:lnRef idx="1">
-            <a:schemeClr val="accent1"/>
-          </a:lnRef>
-          <a:fillRef idx="3">
-            <a:schemeClr val="accent1"/>
-          </a:fillRef>
-          <a:effectRef idx="2">
-            <a:schemeClr val="accent1"/>
-          </a:effectRef>
-          <a:fontRef idx="minor">
-            <a:schemeClr val="lt1"/>
-          </a:fontRef>
-        </p:style>
-        <p:txBody>
-          <a:bodyPr rtlCol="0" anchor="ctr"/>
-          <a:lstStyle/>
-          <a:p>
-            <a:pPr algn="ctr"/>
-          </a:p>
-        </p:txBody>
-      </p:sp>
-      <p:sp>
-        <p:nvSpPr>
-          <p:cNvPr id="3" name="Rounded Rectangle 2"/>
-          <p:cNvSpPr/>
-          <p:nvPr/>
-        </p:nvSpPr>
-        <p:spPr>
-          <a:xfrm>
-            <a:off x="10408615" y="457200"/>
-            <a:ext cx="1234440" cy="457200"/>
-          </a:xfrm>
-          <a:prstGeom prst="roundRect">
+            <a:off x="548640" y="2926080"/>
+            <a:ext cx="164592" cy="1005840"/>
+          </a:xfrm>
+          <a:prstGeom prst="rect">
             <a:avLst/>
           </a:prstGeom>
           <a:solidFill>
@@ -11093,32 +10937,23 @@
           </a:fontRef>
         </p:style>
         <p:txBody>
-          <a:bodyPr rtlCol="0" anchor="ctr" wrap="none" tIns="0" bIns="0"/>
+          <a:bodyPr rtlCol="0" anchor="ctr"/>
           <a:lstStyle/>
           <a:p>
             <a:pPr algn="ctr"/>
-            <a:r>
-              <a:rPr sz="1400" b="1">
-                <a:solidFill>
-                  <a:srgbClr val="FFFFFF"/>
-                </a:solidFill>
-                <a:latin typeface="Arial"/>
-              </a:rPr>
-              <a:t>VIDEO</a:t>
-            </a:r>
-          </a:p>
-        </p:txBody>
-      </p:sp>
-      <p:sp>
-        <p:nvSpPr>
-          <p:cNvPr id="4" name="TextBox 3"/>
+          </a:p>
+        </p:txBody>
+      </p:sp>
+      <p:sp>
+        <p:nvSpPr>
+          <p:cNvPr id="3" name="TextBox 2"/>
           <p:cNvSpPr txBox="1"/>
           <p:nvPr/>
         </p:nvSpPr>
         <p:spPr>
           <a:xfrm>
-            <a:off x="731520" y="274320"/>
-            <a:ext cx="9738360" cy="868680"/>
+            <a:off x="914400" y="2743200"/>
+            <a:ext cx="10515600" cy="1371600"/>
           </a:xfrm>
           <a:prstGeom prst="rect">
             <a:avLst/>
@@ -11126,144 +10961,7 @@
           <a:noFill/>
         </p:spPr>
         <p:txBody>
-          <a:bodyPr wrap="square" anchor="ctr">
-            <a:spAutoFit/>
-          </a:bodyPr>
-          <a:lstStyle/>
-          <a:p>
-            <a:r>
-              <a:rPr sz="3600" b="1">
-                <a:solidFill>
-                  <a:srgbClr val="1E40AF"/>
-                </a:solidFill>
-                <a:latin typeface="Arial"/>
-              </a:rPr>
-              <a:t>VIDEO THAM KHẢO</a:t>
-            </a:r>
-          </a:p>
-        </p:txBody>
-      </p:sp>
-      <p:sp>
-        <p:nvSpPr>
-          <p:cNvPr id="5" name="Rectangle 4"/>
-          <p:cNvSpPr/>
-          <p:nvPr/>
-        </p:nvSpPr>
-        <p:spPr>
-          <a:xfrm>
-            <a:off x="457200" y="1207008"/>
-            <a:ext cx="11274552" cy="22000"/>
-          </a:xfrm>
-          <a:prstGeom prst="rect">
-            <a:avLst/>
-          </a:prstGeom>
-          <a:solidFill>
-            <a:srgbClr val="E2E8F0"/>
-          </a:solidFill>
-          <a:ln>
-            <a:noFill/>
-          </a:ln>
-          <a:effectLst/>
-        </p:spPr>
-        <p:style>
-          <a:lnRef idx="1">
-            <a:schemeClr val="accent1"/>
-          </a:lnRef>
-          <a:fillRef idx="3">
-            <a:schemeClr val="accent1"/>
-          </a:fillRef>
-          <a:effectRef idx="2">
-            <a:schemeClr val="accent1"/>
-          </a:effectRef>
-          <a:fontRef idx="minor">
-            <a:schemeClr val="lt1"/>
-          </a:fontRef>
-        </p:style>
-        <p:txBody>
-          <a:bodyPr rtlCol="0" anchor="ctr"/>
-          <a:lstStyle/>
-          <a:p>
-            <a:pPr algn="ctr"/>
-          </a:p>
-        </p:txBody>
-      </p:sp>
-      <p:sp>
-        <p:nvSpPr>
-          <p:cNvPr id="6" name="TextBox 5"/>
-          <p:cNvSpPr txBox="1"/>
-          <p:nvPr/>
-        </p:nvSpPr>
-        <p:spPr>
-          <a:xfrm>
-            <a:off x="457200" y="6355080"/>
-            <a:ext cx="11274552" cy="365760"/>
-          </a:xfrm>
-          <a:prstGeom prst="rect">
-            <a:avLst/>
-          </a:prstGeom>
-          <a:noFill/>
-        </p:spPr>
-        <p:txBody>
-          <a:bodyPr wrap="none">
-            <a:spAutoFit/>
-          </a:bodyPr>
-          <a:lstStyle/>
-          <a:p>
-            <a:pPr algn="r"/>
-            <a:r>
-              <a:rPr sz="1200">
-                <a:solidFill>
-                  <a:srgbClr val="64748B"/>
-                </a:solidFill>
-                <a:latin typeface="Calibri"/>
-              </a:rPr>
-              <a:t>Ngữ văn 12 · Bài 2: Những Thế Giới Thơ          25</a:t>
-            </a:r>
-          </a:p>
-        </p:txBody>
-      </p:sp>
-      <p:pic>
-        <p:nvPicPr>
-          <p:cNvPr id="7" name="Picture 6" descr="QR_video_886dLSSIYnk.png"/>
-          <p:cNvPicPr>
-            <a:picLocks noChangeAspect="1"/>
-          </p:cNvPicPr>
-          <p:nvPr/>
-        </p:nvPicPr>
-        <p:blipFill>
-          <a:blip r:embed="rId2"/>
-          <a:stretch>
-            <a:fillRect/>
-          </a:stretch>
-        </p:blipFill>
-        <p:spPr>
-          <a:xfrm>
-            <a:off x="8412480" y="1554480"/>
-            <a:ext cx="3108960" cy="3108960"/>
-          </a:xfrm>
-          <a:prstGeom prst="rect">
-            <a:avLst/>
-          </a:prstGeom>
-        </p:spPr>
-      </p:pic>
-      <p:sp>
-        <p:nvSpPr>
-          <p:cNvPr id="8" name="TextBox 7"/>
-          <p:cNvSpPr txBox="1"/>
-          <p:nvPr/>
-        </p:nvSpPr>
-        <p:spPr>
-          <a:xfrm>
-            <a:off x="731520" y="1554480"/>
-            <a:ext cx="7498079" cy="4206240"/>
-          </a:xfrm>
-          <a:prstGeom prst="rect">
-            <a:avLst/>
-          </a:prstGeom>
-          <a:noFill/>
-        </p:spPr>
-        <p:txBody>
-          <a:bodyPr wrap="square" anchor="t" lIns="45720" rIns="45720">
+          <a:bodyPr wrap="square" anchor="ctr" lIns="45720" rIns="45720">
             <a:spAutoFit/>
           </a:bodyPr>
           <a:lstStyle/>
@@ -11274,67 +10972,13 @@
               </a:spcAft>
             </a:pPr>
             <a:r>
-              <a:rPr sz="2600" b="1">
-                <a:solidFill>
-                  <a:srgbClr val="1E293B"/>
+              <a:rPr sz="3600" b="1">
+                <a:solidFill>
+                  <a:srgbClr val="1E40AF"/>
                 </a:solidFill>
                 <a:latin typeface="Calibri"/>
               </a:rPr>
-              <a:t>🎬 Thanh Thảo nói về Đàn ghi-ta của Lorca</a:t>
-            </a:r>
-          </a:p>
-          <a:p>
-            <a:pPr algn="l">
-              <a:spcAft>
-                <a:spcPts val="800"/>
-              </a:spcAft>
-            </a:pPr>
-            <a:r>
-              <a:rPr sz="2000">
-                <a:solidFill>
-                  <a:srgbClr val="64748B"/>
-                </a:solidFill>
-                <a:latin typeface="Calibri"/>
-              </a:rPr>
-              <a:t>Kênh: Trần Hà Nam</a:t>
-            </a:r>
-          </a:p>
-          <a:p>
-            <a:pPr algn="l" marL="365760" indent="-365760">
-              <a:spcAft>
-                <a:spcPts val="800"/>
-              </a:spcAft>
-              <a:buClr>
-                <a:srgbClr val="1E40AF"/>
-              </a:buClr>
-              <a:buFont typeface="Arial"/>
-              <a:buChar char="•"/>
-            </a:pPr>
-            <a:r>
-              <a:rPr sz="2000">
-                <a:solidFill>
-                  <a:srgbClr val="1E293B"/>
-                </a:solidFill>
-                <a:latin typeface="Calibri"/>
-              </a:rPr>
-              <a:t>Mở rộng – tác giả nói về hoàn cảnh sáng tác</a:t>
-            </a:r>
-          </a:p>
-          <a:p>
-            <a:pPr algn="l">
-              <a:spcAft>
-                <a:spcPts val="800"/>
-              </a:spcAft>
-            </a:pPr>
-            <a:r>
-              <a:rPr sz="1600">
-                <a:solidFill>
-                  <a:srgbClr val="64748B"/>
-                </a:solidFill>
-                <a:latin typeface="Calibri"/>
-                <a:hlinkClick r:id="rId3"/>
-              </a:rPr>
-              <a:t>https://www.youtube.com/watch?v=886dLSSIYnk</a:t>
+              <a:t>TIẾT 19: THỰC HÀNH TIẾNG VIỆT</a:t>
             </a:r>
           </a:p>
         </p:txBody>
@@ -11491,7 +11135,7 @@
                 </a:solidFill>
                 <a:latin typeface="Arial"/>
               </a:rPr>
-              <a:t>TIẾNG ĐÀN – CÁI CHẾT VÀ SỰ BẤT TỬ</a:t>
+              <a:t>ẨN DỤ TRONG TÂY TIẾN</a:t>
             </a:r>
           </a:p>
         </p:txBody>
@@ -11609,7 +11253,7 @@
                 </a:solidFill>
                 <a:latin typeface="Calibri"/>
               </a:rPr>
-              <a:t>Chỉ ra biện pháp tu từ miêu tả tiếng đàn; ý nghĩa hình ảnh biểu tượng; hình ảnh thực – ảo về cái chết và sự bất tử của Lor-ca.</a:t>
+              <a:t>Làm rõ mục đích và cách sử dụng ẩn dụ trong đoạn: “Tây Tiến đoàn binh không mọc tóc / Quân xanh màu lá dữ oai hùm / Mắt trừng gửi mộng qua biên giới / Đêm mơ Hà Nội dáng kiều thơm”.</a:t>
             </a:r>
           </a:p>
         </p:txBody>
@@ -11696,7 +11340,7 @@
                 </a:solidFill>
                 <a:latin typeface="Calibri"/>
               </a:rPr>
-              <a:t>💡 Tiếng đàn được “nhìn” bằng màu sắc, hình khối nào?</a:t>
+              <a:t>💡 “Không mọc tóc”, “xanh màu lá” nói tới hiện thực nào?</a:t>
             </a:r>
           </a:p>
         </p:txBody>
@@ -11853,7 +11497,7 @@
                 </a:solidFill>
                 <a:latin typeface="Arial"/>
               </a:rPr>
-              <a:t>TIẾNG ĐÀN – CÁI CHẾT VÀ SỰ BẤT TỬ</a:t>
+              <a:t>ẨN DỤ TRONG TÂY TIẾN</a:t>
             </a:r>
           </a:p>
         </p:txBody>
@@ -11976,7 +11620,7 @@
                 </a:solidFill>
                 <a:latin typeface="Calibri"/>
               </a:rPr>
-              <a:t>Điệp “tiếng ghi ta” + chuyển đổi cảm giác: nâu, lá xanh, tròn bọt nước, ròng ròng máu chảy.</a:t>
+              <a:t>“Không mọc tóc”, “xanh màu lá” – hậu quả sốt rét rừng.</a:t>
             </a:r>
           </a:p>
           <a:p>
@@ -11997,7 +11641,7 @@
                 </a:solidFill>
                 <a:latin typeface="Calibri"/>
               </a:rPr>
-              <a:t>“không ai chôn cất tiếng đàn / tiếng đàn như cỏ mọc hoang” – bất tử.</a:t>
+              <a:t>“dữ oai hùm” – khí thế oai phong.</a:t>
             </a:r>
           </a:p>
           <a:p>
@@ -12018,28 +11662,7 @@
                 </a:solidFill>
                 <a:latin typeface="Calibri"/>
               </a:rPr>
-              <a:t>“Lor-ca bơi sang ngang trên chiếc ghi ta màu bạc” – cái chết hoá giải thoát.</a:t>
-            </a:r>
-          </a:p>
-          <a:p>
-            <a:pPr algn="l" marL="365760" indent="-365760">
-              <a:spcAft>
-                <a:spcPts val="800"/>
-              </a:spcAft>
-              <a:buClr>
-                <a:srgbClr val="1E40AF"/>
-              </a:buClr>
-              <a:buFont typeface="Arial"/>
-              <a:buChar char="•"/>
-            </a:pPr>
-            <a:r>
-              <a:rPr sz="2300">
-                <a:solidFill>
-                  <a:srgbClr val="1E293B"/>
-                </a:solidFill>
-                <a:latin typeface="Calibri"/>
-              </a:rPr>
-              <a:t>Dòng kết “li-la li-la li-la…” – tiếng đàn tiễn biệt.</a:t>
+              <a:t>Hiện thực được nhìn bằng cảm hứng lãng mạn, tránh bi luỵ.</a:t>
             </a:r>
           </a:p>
         </p:txBody>
@@ -12126,7 +11749,7 @@
                 </a:solidFill>
                 <a:latin typeface="Calibri"/>
               </a:rPr>
-              <a:t>Nghệ thuật chân chính bất tử.</a:t>
+              <a:t>Ẩn dụ tạo vẻ đẹp vừa chân thực vừa hào hùng.</a:t>
             </a:r>
           </a:p>
         </p:txBody>
@@ -12145,7 +11768,7 @@
     <p:bg>
       <p:bgPr>
         <a:solidFill>
-          <a:srgbClr val="F8F9FA"/>
+          <a:srgbClr val="FFFFFF"/>
         </a:solidFill>
         <a:effectLst/>
       </p:bgPr>
@@ -12165,14 +11788,14 @@
         </p:nvSpPr>
         <p:spPr>
           <a:xfrm>
-            <a:off x="548640" y="2926080"/>
-            <a:ext cx="164592" cy="1005840"/>
+            <a:off x="457200" y="384048"/>
+            <a:ext cx="109728" cy="658368"/>
           </a:xfrm>
           <a:prstGeom prst="rect">
             <a:avLst/>
           </a:prstGeom>
           <a:solidFill>
-            <a:srgbClr val="991B1B"/>
+            <a:srgbClr val="1E40AF"/>
           </a:solidFill>
           <a:ln>
             <a:noFill/>
@@ -12203,14 +11826,67 @@
       </p:sp>
       <p:sp>
         <p:nvSpPr>
-          <p:cNvPr id="3" name="TextBox 2"/>
+          <p:cNvPr id="3" name="Rounded Rectangle 2"/>
+          <p:cNvSpPr/>
+          <p:nvPr/>
+        </p:nvSpPr>
+        <p:spPr>
+          <a:xfrm>
+            <a:off x="10253167" y="457200"/>
+            <a:ext cx="1389888" cy="457200"/>
+          </a:xfrm>
+          <a:prstGeom prst="roundRect">
+            <a:avLst/>
+          </a:prstGeom>
+          <a:solidFill>
+            <a:srgbClr val="1E40AF"/>
+          </a:solidFill>
+          <a:ln>
+            <a:noFill/>
+          </a:ln>
+          <a:effectLst/>
+        </p:spPr>
+        <p:style>
+          <a:lnRef idx="1">
+            <a:schemeClr val="accent1"/>
+          </a:lnRef>
+          <a:fillRef idx="3">
+            <a:schemeClr val="accent1"/>
+          </a:fillRef>
+          <a:effectRef idx="2">
+            <a:schemeClr val="accent1"/>
+          </a:effectRef>
+          <a:fontRef idx="minor">
+            <a:schemeClr val="lt1"/>
+          </a:fontRef>
+        </p:style>
+        <p:txBody>
+          <a:bodyPr rtlCol="0" anchor="ctr" wrap="none" tIns="0" bIns="0"/>
+          <a:lstStyle/>
+          <a:p>
+            <a:pPr algn="ctr"/>
+            <a:r>
+              <a:rPr sz="1400" b="1">
+                <a:solidFill>
+                  <a:srgbClr val="FFFFFF"/>
+                </a:solidFill>
+                <a:latin typeface="Arial"/>
+              </a:rPr>
+              <a:t>ĐỀ BÀI</a:t>
+            </a:r>
+          </a:p>
+        </p:txBody>
+      </p:sp>
+      <p:sp>
+        <p:nvSpPr>
+          <p:cNvPr id="4" name="TextBox 3"/>
           <p:cNvSpPr txBox="1"/>
           <p:nvPr/>
         </p:nvSpPr>
         <p:spPr>
           <a:xfrm>
-            <a:off x="914400" y="2743200"/>
-            <a:ext cx="10515600" cy="1371600"/>
+            <a:off x="731520" y="274320"/>
+            <a:ext cx="9582912" cy="868680"/>
           </a:xfrm>
           <a:prstGeom prst="rect">
             <a:avLst/>
@@ -12218,7 +11894,120 @@
           <a:noFill/>
         </p:spPr>
         <p:txBody>
-          <a:bodyPr wrap="square" anchor="ctr" lIns="45720" rIns="45720">
+          <a:bodyPr wrap="square" anchor="ctr">
+            <a:spAutoFit/>
+          </a:bodyPr>
+          <a:lstStyle/>
+          <a:p>
+            <a:r>
+              <a:rPr sz="3600" b="1">
+                <a:solidFill>
+                  <a:srgbClr val="1E40AF"/>
+                </a:solidFill>
+                <a:latin typeface="Arial"/>
+              </a:rPr>
+              <a:t>PHÉP ĐỐI</a:t>
+            </a:r>
+          </a:p>
+        </p:txBody>
+      </p:sp>
+      <p:sp>
+        <p:nvSpPr>
+          <p:cNvPr id="5" name="Rectangle 4"/>
+          <p:cNvSpPr/>
+          <p:nvPr/>
+        </p:nvSpPr>
+        <p:spPr>
+          <a:xfrm>
+            <a:off x="457200" y="1207008"/>
+            <a:ext cx="11274552" cy="22000"/>
+          </a:xfrm>
+          <a:prstGeom prst="rect">
+            <a:avLst/>
+          </a:prstGeom>
+          <a:solidFill>
+            <a:srgbClr val="E2E8F0"/>
+          </a:solidFill>
+          <a:ln>
+            <a:noFill/>
+          </a:ln>
+          <a:effectLst/>
+        </p:spPr>
+        <p:style>
+          <a:lnRef idx="1">
+            <a:schemeClr val="accent1"/>
+          </a:lnRef>
+          <a:fillRef idx="3">
+            <a:schemeClr val="accent1"/>
+          </a:fillRef>
+          <a:effectRef idx="2">
+            <a:schemeClr val="accent1"/>
+          </a:effectRef>
+          <a:fontRef idx="minor">
+            <a:schemeClr val="lt1"/>
+          </a:fontRef>
+        </p:style>
+        <p:txBody>
+          <a:bodyPr rtlCol="0" anchor="ctr"/>
+          <a:lstStyle/>
+          <a:p>
+            <a:pPr algn="ctr"/>
+          </a:p>
+        </p:txBody>
+      </p:sp>
+      <p:sp>
+        <p:nvSpPr>
+          <p:cNvPr id="6" name="TextBox 5"/>
+          <p:cNvSpPr txBox="1"/>
+          <p:nvPr/>
+        </p:nvSpPr>
+        <p:spPr>
+          <a:xfrm>
+            <a:off x="457200" y="6355080"/>
+            <a:ext cx="11274552" cy="365760"/>
+          </a:xfrm>
+          <a:prstGeom prst="rect">
+            <a:avLst/>
+          </a:prstGeom>
+          <a:noFill/>
+        </p:spPr>
+        <p:txBody>
+          <a:bodyPr wrap="none">
+            <a:spAutoFit/>
+          </a:bodyPr>
+          <a:lstStyle/>
+          <a:p>
+            <a:pPr algn="r"/>
+            <a:r>
+              <a:rPr sz="1200">
+                <a:solidFill>
+                  <a:srgbClr val="64748B"/>
+                </a:solidFill>
+                <a:latin typeface="Calibri"/>
+              </a:rPr>
+              <a:t>Ngữ văn 12 · Bài 2: Những Thế Giới Thơ          28</a:t>
+            </a:r>
+          </a:p>
+        </p:txBody>
+      </p:sp>
+      <p:sp>
+        <p:nvSpPr>
+          <p:cNvPr id="7" name="TextBox 6"/>
+          <p:cNvSpPr txBox="1"/>
+          <p:nvPr/>
+        </p:nvSpPr>
+        <p:spPr>
+          <a:xfrm>
+            <a:off x="731520" y="1463040"/>
+            <a:ext cx="10789920" cy="3566160"/>
+          </a:xfrm>
+          <a:prstGeom prst="rect">
+            <a:avLst/>
+          </a:prstGeom>
+          <a:noFill/>
+        </p:spPr>
+        <p:txBody>
+          <a:bodyPr wrap="square" anchor="t" lIns="45720" rIns="45720">
             <a:spAutoFit/>
           </a:bodyPr>
           <a:lstStyle/>
@@ -12229,13 +12018,100 @@
               </a:spcAft>
             </a:pPr>
             <a:r>
-              <a:rPr sz="3600" b="1">
+              <a:rPr sz="2600" b="1">
+                <a:solidFill>
+                  <a:srgbClr val="1E293B"/>
+                </a:solidFill>
+                <a:latin typeface="Calibri"/>
+              </a:rPr>
+              <a:t>So sánh cách dùng phép đối trong Cảm hoài (“Gặp thời đồ điếu công thành dễ / Lỡ vận anh hùng hận xót xa”) và Tây Tiến (“Sài Khao sương lấp đoàn quân mỏi / Mường Lát hoa về trong đêm hơi”).</a:t>
+            </a:r>
+          </a:p>
+        </p:txBody>
+      </p:sp>
+      <p:sp>
+        <p:nvSpPr>
+          <p:cNvPr id="8" name="Rounded Rectangle 7"/>
+          <p:cNvSpPr/>
+          <p:nvPr/>
+        </p:nvSpPr>
+        <p:spPr>
+          <a:xfrm>
+            <a:off x="731520" y="5120640"/>
+            <a:ext cx="10789920" cy="693420"/>
+          </a:xfrm>
+          <a:prstGeom prst="roundRect">
+            <a:avLst>
+              <a:gd name="adj" fmla="val 8000"/>
+            </a:avLst>
+          </a:prstGeom>
+          <a:solidFill>
+            <a:srgbClr val="EFF4FF"/>
+          </a:solidFill>
+          <a:ln w="19050">
+            <a:solidFill>
+              <a:srgbClr val="1E40AF"/>
+            </a:solidFill>
+          </a:ln>
+          <a:effectLst/>
+        </p:spPr>
+        <p:style>
+          <a:lnRef idx="1">
+            <a:schemeClr val="accent1"/>
+          </a:lnRef>
+          <a:fillRef idx="3">
+            <a:schemeClr val="accent1"/>
+          </a:fillRef>
+          <a:effectRef idx="2">
+            <a:schemeClr val="accent1"/>
+          </a:effectRef>
+          <a:fontRef idx="minor">
+            <a:schemeClr val="lt1"/>
+          </a:fontRef>
+        </p:style>
+        <p:txBody>
+          <a:bodyPr rtlCol="0" anchor="ctr"/>
+          <a:lstStyle/>
+          <a:p>
+            <a:pPr algn="ctr"/>
+          </a:p>
+        </p:txBody>
+      </p:sp>
+      <p:sp>
+        <p:nvSpPr>
+          <p:cNvPr id="9" name="TextBox 8"/>
+          <p:cNvSpPr txBox="1"/>
+          <p:nvPr/>
+        </p:nvSpPr>
+        <p:spPr>
+          <a:xfrm>
+            <a:off x="914400" y="5120640"/>
+            <a:ext cx="10424160" cy="693420"/>
+          </a:xfrm>
+          <a:prstGeom prst="rect">
+            <a:avLst/>
+          </a:prstGeom>
+          <a:noFill/>
+        </p:spPr>
+        <p:txBody>
+          <a:bodyPr wrap="square" anchor="ctr" lIns="45720" rIns="45720">
+            <a:spAutoFit/>
+          </a:bodyPr>
+          <a:lstStyle/>
+          <a:p>
+            <a:pPr algn="l">
+              <a:spcAft>
+                <a:spcPts val="400"/>
+              </a:spcAft>
+            </a:pPr>
+            <a:r>
+              <a:rPr sz="2200" b="1">
                 <a:solidFill>
                   <a:srgbClr val="1E40AF"/>
                 </a:solidFill>
                 <a:latin typeface="Calibri"/>
               </a:rPr>
-              <a:t>TIẾT 19: THỰC HÀNH TIẾNG VIỆT</a:t>
+              <a:t>💡 Đối chỉnh hay đối linh hoạt?</a:t>
             </a:r>
           </a:p>
         </p:txBody>
@@ -12318,14 +12194,14 @@
         </p:nvSpPr>
         <p:spPr>
           <a:xfrm>
-            <a:off x="10253167" y="457200"/>
-            <a:ext cx="1389888" cy="457200"/>
+            <a:off x="9942271" y="457200"/>
+            <a:ext cx="1700784" cy="457200"/>
           </a:xfrm>
           <a:prstGeom prst="roundRect">
             <a:avLst/>
           </a:prstGeom>
           <a:solidFill>
-            <a:srgbClr val="1E40AF"/>
+            <a:srgbClr val="991B1B"/>
           </a:solidFill>
           <a:ln>
             <a:noFill/>
@@ -12358,7 +12234,7 @@
                 </a:solidFill>
                 <a:latin typeface="Arial"/>
               </a:rPr>
-              <a:t>ĐỀ BÀI</a:t>
+              <a:t>LỜI GIẢI</a:t>
             </a:r>
           </a:p>
         </p:txBody>
@@ -12372,7 +12248,7 @@
         <p:spPr>
           <a:xfrm>
             <a:off x="731520" y="274320"/>
-            <a:ext cx="9582912" cy="868680"/>
+            <a:ext cx="9272016" cy="868680"/>
           </a:xfrm>
           <a:prstGeom prst="rect">
             <a:avLst/>
@@ -12392,7 +12268,7 @@
                 </a:solidFill>
                 <a:latin typeface="Arial"/>
               </a:rPr>
-              <a:t>ẨN DỤ TRONG TÂY TIẾN</a:t>
+              <a:t>PHÉP ĐỐI</a:t>
             </a:r>
           </a:p>
         </p:txBody>
@@ -12485,7 +12361,7 @@
         <p:spPr>
           <a:xfrm>
             <a:off x="731520" y="1463040"/>
-            <a:ext cx="10789920" cy="3566160"/>
+            <a:ext cx="10789920" cy="3474720"/>
           </a:xfrm>
           <a:prstGeom prst="rect">
             <a:avLst/>
@@ -12498,19 +12374,66 @@
           </a:bodyPr>
           <a:lstStyle/>
           <a:p>
-            <a:pPr algn="l">
+            <a:pPr algn="l" marL="365760" indent="-365760">
               <a:spcAft>
                 <a:spcPts val="800"/>
               </a:spcAft>
+              <a:buClr>
+                <a:srgbClr val="1E40AF"/>
+              </a:buClr>
+              <a:buFont typeface="Arial"/>
+              <a:buChar char="•"/>
             </a:pPr>
             <a:r>
-              <a:rPr sz="2600" b="1">
+              <a:rPr sz="2300">
                 <a:solidFill>
                   <a:srgbClr val="1E293B"/>
                 </a:solidFill>
                 <a:latin typeface="Calibri"/>
               </a:rPr>
-              <a:t>Làm rõ mục đích và cách sử dụng ẩn dụ trong đoạn: “Tây Tiến đoàn binh không mọc tóc / Quân xanh màu lá dữ oai hùm / Mắt trừng gửi mộng qua biên giới / Đêm mơ Hà Nội dáng kiều thơm”.</a:t>
+              <a:t>Cảm hoài: đối chỉnh theo luật Đường, ý đối lập rõ: gặp thời – lỡ vận.</a:t>
+            </a:r>
+          </a:p>
+          <a:p>
+            <a:pPr algn="l" marL="365760" indent="-365760">
+              <a:spcAft>
+                <a:spcPts val="800"/>
+              </a:spcAft>
+              <a:buClr>
+                <a:srgbClr val="1E40AF"/>
+              </a:buClr>
+              <a:buFont typeface="Arial"/>
+              <a:buChar char="•"/>
+            </a:pPr>
+            <a:r>
+              <a:rPr sz="2300">
+                <a:solidFill>
+                  <a:srgbClr val="1E293B"/>
+                </a:solidFill>
+                <a:latin typeface="Calibri"/>
+              </a:rPr>
+              <a:t>Tây Tiến: đối linh hoạt, tương phản gian khổ – thơ mộng.</a:t>
+            </a:r>
+          </a:p>
+          <a:p>
+            <a:pPr algn="l" marL="365760" indent="-365760">
+              <a:spcAft>
+                <a:spcPts val="800"/>
+              </a:spcAft>
+              <a:buClr>
+                <a:srgbClr val="1E40AF"/>
+              </a:buClr>
+              <a:buFont typeface="Arial"/>
+              <a:buChar char="•"/>
+            </a:pPr>
+            <a:r>
+              <a:rPr sz="2300">
+                <a:solidFill>
+                  <a:srgbClr val="1E293B"/>
+                </a:solidFill>
+                <a:latin typeface="Calibri"/>
+              </a:rPr>
+              <a:t>Cả hai: tạo cân xứng, nhấn mạnh cảm xúc.</a:t>
             </a:r>
           </a:p>
         </p:txBody>
@@ -12523,8 +12446,8 @@
         </p:nvSpPr>
         <p:spPr>
           <a:xfrm>
-            <a:off x="731520" y="5120640"/>
-            <a:ext cx="10789920" cy="693420"/>
+            <a:off x="731520" y="5074920"/>
+            <a:ext cx="10789920" cy="731520"/>
           </a:xfrm>
           <a:prstGeom prst="roundRect">
             <a:avLst>
@@ -12532,11 +12455,11 @@
             </a:avLst>
           </a:prstGeom>
           <a:solidFill>
-            <a:srgbClr val="EFF4FF"/>
+            <a:srgbClr val="FEF2F2"/>
           </a:solidFill>
           <a:ln w="19050">
             <a:solidFill>
-              <a:srgbClr val="1E40AF"/>
+              <a:srgbClr val="991B1B"/>
             </a:solidFill>
           </a:ln>
           <a:effectLst/>
@@ -12571,8 +12494,8 @@
         </p:nvSpPr>
         <p:spPr>
           <a:xfrm>
-            <a:off x="914400" y="5120640"/>
-            <a:ext cx="10424160" cy="693420"/>
+            <a:off x="914400" y="5074920"/>
+            <a:ext cx="10424160" cy="731520"/>
           </a:xfrm>
           <a:prstGeom prst="rect">
             <a:avLst/>
@@ -12591,13 +12514,13 @@
               </a:spcAft>
             </a:pPr>
             <a:r>
-              <a:rPr sz="2200" b="1">
-                <a:solidFill>
-                  <a:srgbClr val="1E40AF"/>
+              <a:rPr sz="2400" b="1">
+                <a:solidFill>
+                  <a:srgbClr val="991B1B"/>
                 </a:solidFill>
                 <a:latin typeface="Calibri"/>
               </a:rPr>
-              <a:t>💡 “Không mọc tóc”, “xanh màu lá” nói tới hiện thực nào?</a:t>
+              <a:t>Đối – cổ điển chuẩn mực và lãng mạn phóng khoáng.</a:t>
             </a:r>
           </a:p>
         </p:txBody>
@@ -12725,7 +12648,7 @@
     <p:bg>
       <p:bgPr>
         <a:solidFill>
-          <a:srgbClr val="FFFFFF"/>
+          <a:srgbClr val="F8F9FA"/>
         </a:solidFill>
         <a:effectLst/>
       </p:bgPr>
@@ -12745,54 +12668,10 @@
         </p:nvSpPr>
         <p:spPr>
           <a:xfrm>
-            <a:off x="457200" y="384048"/>
-            <a:ext cx="109728" cy="658368"/>
-          </a:xfrm>
-          <a:prstGeom prst="rect">
-            <a:avLst/>
-          </a:prstGeom>
-          <a:solidFill>
-            <a:srgbClr val="1E40AF"/>
-          </a:solidFill>
-          <a:ln>
-            <a:noFill/>
-          </a:ln>
-          <a:effectLst/>
-        </p:spPr>
-        <p:style>
-          <a:lnRef idx="1">
-            <a:schemeClr val="accent1"/>
-          </a:lnRef>
-          <a:fillRef idx="3">
-            <a:schemeClr val="accent1"/>
-          </a:fillRef>
-          <a:effectRef idx="2">
-            <a:schemeClr val="accent1"/>
-          </a:effectRef>
-          <a:fontRef idx="minor">
-            <a:schemeClr val="lt1"/>
-          </a:fontRef>
-        </p:style>
-        <p:txBody>
-          <a:bodyPr rtlCol="0" anchor="ctr"/>
-          <a:lstStyle/>
-          <a:p>
-            <a:pPr algn="ctr"/>
-          </a:p>
-        </p:txBody>
-      </p:sp>
-      <p:sp>
-        <p:nvSpPr>
-          <p:cNvPr id="3" name="Rounded Rectangle 2"/>
-          <p:cNvSpPr/>
-          <p:nvPr/>
-        </p:nvSpPr>
-        <p:spPr>
-          <a:xfrm>
-            <a:off x="9942271" y="457200"/>
-            <a:ext cx="1700784" cy="457200"/>
-          </a:xfrm>
-          <a:prstGeom prst="roundRect">
+            <a:off x="548640" y="2926080"/>
+            <a:ext cx="164592" cy="1005840"/>
+          </a:xfrm>
+          <a:prstGeom prst="rect">
             <a:avLst/>
           </a:prstGeom>
           <a:solidFill>
@@ -12818,32 +12697,23 @@
           </a:fontRef>
         </p:style>
         <p:txBody>
-          <a:bodyPr rtlCol="0" anchor="ctr" wrap="none" tIns="0" bIns="0"/>
+          <a:bodyPr rtlCol="0" anchor="ctr"/>
           <a:lstStyle/>
           <a:p>
             <a:pPr algn="ctr"/>
-            <a:r>
-              <a:rPr sz="1400" b="1">
-                <a:solidFill>
-                  <a:srgbClr val="FFFFFF"/>
-                </a:solidFill>
-                <a:latin typeface="Arial"/>
-              </a:rPr>
-              <a:t>LỜI GIẢI</a:t>
-            </a:r>
-          </a:p>
-        </p:txBody>
-      </p:sp>
-      <p:sp>
-        <p:nvSpPr>
-          <p:cNvPr id="4" name="TextBox 3"/>
+          </a:p>
+        </p:txBody>
+      </p:sp>
+      <p:sp>
+        <p:nvSpPr>
+          <p:cNvPr id="3" name="TextBox 2"/>
           <p:cNvSpPr txBox="1"/>
           <p:nvPr/>
         </p:nvSpPr>
         <p:spPr>
           <a:xfrm>
-            <a:off x="731520" y="274320"/>
-            <a:ext cx="9272016" cy="868680"/>
+            <a:off x="914400" y="2743200"/>
+            <a:ext cx="10515600" cy="1371600"/>
           </a:xfrm>
           <a:prstGeom prst="rect">
             <a:avLst/>
@@ -12851,271 +12721,24 @@
           <a:noFill/>
         </p:spPr>
         <p:txBody>
-          <a:bodyPr wrap="square" anchor="ctr">
+          <a:bodyPr wrap="square" anchor="ctr" lIns="45720" rIns="45720">
             <a:spAutoFit/>
           </a:bodyPr>
           <a:lstStyle/>
           <a:p>
-            <a:r>
-              <a:rPr sz="3600" b="1">
-                <a:solidFill>
-                  <a:srgbClr val="1E40AF"/>
-                </a:solidFill>
-                <a:latin typeface="Arial"/>
-              </a:rPr>
-              <a:t>ẨN DỤ TRONG TÂY TIẾN</a:t>
-            </a:r>
-          </a:p>
-        </p:txBody>
-      </p:sp>
-      <p:sp>
-        <p:nvSpPr>
-          <p:cNvPr id="5" name="Rectangle 4"/>
-          <p:cNvSpPr/>
-          <p:nvPr/>
-        </p:nvSpPr>
-        <p:spPr>
-          <a:xfrm>
-            <a:off x="457200" y="1207008"/>
-            <a:ext cx="11274552" cy="22000"/>
-          </a:xfrm>
-          <a:prstGeom prst="rect">
-            <a:avLst/>
-          </a:prstGeom>
-          <a:solidFill>
-            <a:srgbClr val="E2E8F0"/>
-          </a:solidFill>
-          <a:ln>
-            <a:noFill/>
-          </a:ln>
-          <a:effectLst/>
-        </p:spPr>
-        <p:style>
-          <a:lnRef idx="1">
-            <a:schemeClr val="accent1"/>
-          </a:lnRef>
-          <a:fillRef idx="3">
-            <a:schemeClr val="accent1"/>
-          </a:fillRef>
-          <a:effectRef idx="2">
-            <a:schemeClr val="accent1"/>
-          </a:effectRef>
-          <a:fontRef idx="minor">
-            <a:schemeClr val="lt1"/>
-          </a:fontRef>
-        </p:style>
-        <p:txBody>
-          <a:bodyPr rtlCol="0" anchor="ctr"/>
-          <a:lstStyle/>
-          <a:p>
-            <a:pPr algn="ctr"/>
-          </a:p>
-        </p:txBody>
-      </p:sp>
-      <p:sp>
-        <p:nvSpPr>
-          <p:cNvPr id="6" name="TextBox 5"/>
-          <p:cNvSpPr txBox="1"/>
-          <p:nvPr/>
-        </p:nvSpPr>
-        <p:spPr>
-          <a:xfrm>
-            <a:off x="457200" y="6355080"/>
-            <a:ext cx="11274552" cy="365760"/>
-          </a:xfrm>
-          <a:prstGeom prst="rect">
-            <a:avLst/>
-          </a:prstGeom>
-          <a:noFill/>
-        </p:spPr>
-        <p:txBody>
-          <a:bodyPr wrap="none">
-            <a:spAutoFit/>
-          </a:bodyPr>
-          <a:lstStyle/>
-          <a:p>
-            <a:pPr algn="r"/>
-            <a:r>
-              <a:rPr sz="1200">
-                <a:solidFill>
-                  <a:srgbClr val="64748B"/>
-                </a:solidFill>
-                <a:latin typeface="Calibri"/>
-              </a:rPr>
-              <a:t>Ngữ văn 12 · Bài 2: Những Thế Giới Thơ          30</a:t>
-            </a:r>
-          </a:p>
-        </p:txBody>
-      </p:sp>
-      <p:sp>
-        <p:nvSpPr>
-          <p:cNvPr id="7" name="TextBox 6"/>
-          <p:cNvSpPr txBox="1"/>
-          <p:nvPr/>
-        </p:nvSpPr>
-        <p:spPr>
-          <a:xfrm>
-            <a:off x="731520" y="1463040"/>
-            <a:ext cx="10789920" cy="3474720"/>
-          </a:xfrm>
-          <a:prstGeom prst="rect">
-            <a:avLst/>
-          </a:prstGeom>
-          <a:noFill/>
-        </p:spPr>
-        <p:txBody>
-          <a:bodyPr wrap="square" anchor="t" lIns="45720" rIns="45720">
-            <a:spAutoFit/>
-          </a:bodyPr>
-          <a:lstStyle/>
-          <a:p>
-            <a:pPr algn="l" marL="365760" indent="-365760">
+            <a:pPr algn="l">
               <a:spcAft>
                 <a:spcPts val="800"/>
               </a:spcAft>
-              <a:buClr>
-                <a:srgbClr val="1E40AF"/>
-              </a:buClr>
-              <a:buFont typeface="Arial"/>
-              <a:buChar char="•"/>
             </a:pPr>
             <a:r>
-              <a:rPr sz="2300">
-                <a:solidFill>
-                  <a:srgbClr val="1E293B"/>
+              <a:rPr sz="3600" b="1">
+                <a:solidFill>
+                  <a:srgbClr val="1E40AF"/>
                 </a:solidFill>
                 <a:latin typeface="Calibri"/>
               </a:rPr>
-              <a:t>“Không mọc tóc”, “xanh màu lá” – hậu quả sốt rét rừng.</a:t>
-            </a:r>
-          </a:p>
-          <a:p>
-            <a:pPr algn="l" marL="365760" indent="-365760">
-              <a:spcAft>
-                <a:spcPts val="800"/>
-              </a:spcAft>
-              <a:buClr>
-                <a:srgbClr val="1E40AF"/>
-              </a:buClr>
-              <a:buFont typeface="Arial"/>
-              <a:buChar char="•"/>
-            </a:pPr>
-            <a:r>
-              <a:rPr sz="2300">
-                <a:solidFill>
-                  <a:srgbClr val="1E293B"/>
-                </a:solidFill>
-                <a:latin typeface="Calibri"/>
-              </a:rPr>
-              <a:t>“dữ oai hùm” – khí thế oai phong.</a:t>
-            </a:r>
-          </a:p>
-          <a:p>
-            <a:pPr algn="l" marL="365760" indent="-365760">
-              <a:spcAft>
-                <a:spcPts val="800"/>
-              </a:spcAft>
-              <a:buClr>
-                <a:srgbClr val="1E40AF"/>
-              </a:buClr>
-              <a:buFont typeface="Arial"/>
-              <a:buChar char="•"/>
-            </a:pPr>
-            <a:r>
-              <a:rPr sz="2300">
-                <a:solidFill>
-                  <a:srgbClr val="1E293B"/>
-                </a:solidFill>
-                <a:latin typeface="Calibri"/>
-              </a:rPr>
-              <a:t>Hiện thực được nhìn bằng cảm hứng lãng mạn, tránh bi luỵ.</a:t>
-            </a:r>
-          </a:p>
-        </p:txBody>
-      </p:sp>
-      <p:sp>
-        <p:nvSpPr>
-          <p:cNvPr id="8" name="Rounded Rectangle 7"/>
-          <p:cNvSpPr/>
-          <p:nvPr/>
-        </p:nvSpPr>
-        <p:spPr>
-          <a:xfrm>
-            <a:off x="731520" y="5074920"/>
-            <a:ext cx="10789920" cy="731520"/>
-          </a:xfrm>
-          <a:prstGeom prst="roundRect">
-            <a:avLst>
-              <a:gd name="adj" fmla="val 8000"/>
-            </a:avLst>
-          </a:prstGeom>
-          <a:solidFill>
-            <a:srgbClr val="FEF2F2"/>
-          </a:solidFill>
-          <a:ln w="19050">
-            <a:solidFill>
-              <a:srgbClr val="991B1B"/>
-            </a:solidFill>
-          </a:ln>
-          <a:effectLst/>
-        </p:spPr>
-        <p:style>
-          <a:lnRef idx="1">
-            <a:schemeClr val="accent1"/>
-          </a:lnRef>
-          <a:fillRef idx="3">
-            <a:schemeClr val="accent1"/>
-          </a:fillRef>
-          <a:effectRef idx="2">
-            <a:schemeClr val="accent1"/>
-          </a:effectRef>
-          <a:fontRef idx="minor">
-            <a:schemeClr val="lt1"/>
-          </a:fontRef>
-        </p:style>
-        <p:txBody>
-          <a:bodyPr rtlCol="0" anchor="ctr"/>
-          <a:lstStyle/>
-          <a:p>
-            <a:pPr algn="ctr"/>
-          </a:p>
-        </p:txBody>
-      </p:sp>
-      <p:sp>
-        <p:nvSpPr>
-          <p:cNvPr id="9" name="TextBox 8"/>
-          <p:cNvSpPr txBox="1"/>
-          <p:nvPr/>
-        </p:nvSpPr>
-        <p:spPr>
-          <a:xfrm>
-            <a:off x="914400" y="5074920"/>
-            <a:ext cx="10424160" cy="731520"/>
-          </a:xfrm>
-          <a:prstGeom prst="rect">
-            <a:avLst/>
-          </a:prstGeom>
-          <a:noFill/>
-        </p:spPr>
-        <p:txBody>
-          <a:bodyPr wrap="square" anchor="ctr" lIns="45720" rIns="45720">
-            <a:spAutoFit/>
-          </a:bodyPr>
-          <a:lstStyle/>
-          <a:p>
-            <a:pPr algn="l">
-              <a:spcAft>
-                <a:spcPts val="400"/>
-              </a:spcAft>
-            </a:pPr>
-            <a:r>
-              <a:rPr sz="2400" b="1">
-                <a:solidFill>
-                  <a:srgbClr val="991B1B"/>
-                </a:solidFill>
-                <a:latin typeface="Calibri"/>
-              </a:rPr>
-              <a:t>Ẩn dụ tạo vẻ đẹp vừa chân thực vừa hào hùng.</a:t>
+              <a:t>TIẾT 20 – 22: VIẾT – NÓI VÀ NGHE</a:t>
             </a:r>
           </a:p>
         </p:txBody>
@@ -13198,14 +12821,14 @@
         </p:nvSpPr>
         <p:spPr>
           <a:xfrm>
-            <a:off x="10253167" y="457200"/>
-            <a:ext cx="1389888" cy="457200"/>
+            <a:off x="10408615" y="457200"/>
+            <a:ext cx="1234440" cy="457200"/>
           </a:xfrm>
           <a:prstGeom prst="roundRect">
             <a:avLst/>
           </a:prstGeom>
           <a:solidFill>
-            <a:srgbClr val="1E40AF"/>
+            <a:srgbClr val="991B1B"/>
           </a:solidFill>
           <a:ln>
             <a:noFill/>
@@ -13238,7 +12861,7 @@
                 </a:solidFill>
                 <a:latin typeface="Arial"/>
               </a:rPr>
-              <a:t>ĐỀ BÀI</a:t>
+              <a:t>VIDEO</a:t>
             </a:r>
           </a:p>
         </p:txBody>
@@ -13252,7 +12875,7 @@
         <p:spPr>
           <a:xfrm>
             <a:off x="731520" y="274320"/>
-            <a:ext cx="9582912" cy="868680"/>
+            <a:ext cx="9738360" cy="868680"/>
           </a:xfrm>
           <a:prstGeom prst="rect">
             <a:avLst/>
@@ -13272,7 +12895,7 @@
                 </a:solidFill>
                 <a:latin typeface="Arial"/>
               </a:rPr>
-              <a:t>PHÉP ĐỐI</a:t>
+              <a:t>VIDEO THAM KHẢO</a:t>
             </a:r>
           </a:p>
         </p:txBody>
@@ -13356,16 +12979,40 @@
           </a:p>
         </p:txBody>
       </p:sp>
-      <p:sp>
-        <p:nvSpPr>
-          <p:cNvPr id="7" name="TextBox 6"/>
+      <p:pic>
+        <p:nvPicPr>
+          <p:cNvPr id="7" name="Picture 6" descr="QR_video_CEAto-bbJ6g.png"/>
+          <p:cNvPicPr>
+            <a:picLocks noChangeAspect="1"/>
+          </p:cNvPicPr>
+          <p:nvPr/>
+        </p:nvPicPr>
+        <p:blipFill>
+          <a:blip r:embed="rId2"/>
+          <a:stretch>
+            <a:fillRect/>
+          </a:stretch>
+        </p:blipFill>
+        <p:spPr>
+          <a:xfrm>
+            <a:off x="8412480" y="1554480"/>
+            <a:ext cx="3108960" cy="3108960"/>
+          </a:xfrm>
+          <a:prstGeom prst="rect">
+            <a:avLst/>
+          </a:prstGeom>
+        </p:spPr>
+      </p:pic>
+      <p:sp>
+        <p:nvSpPr>
+          <p:cNvPr id="8" name="TextBox 7"/>
           <p:cNvSpPr txBox="1"/>
           <p:nvPr/>
         </p:nvSpPr>
         <p:spPr>
           <a:xfrm>
-            <a:off x="731520" y="1463040"/>
-            <a:ext cx="10789920" cy="3566160"/>
+            <a:off x="731520" y="1554480"/>
+            <a:ext cx="7498079" cy="4206240"/>
           </a:xfrm>
           <a:prstGeom prst="rect">
             <a:avLst/>
@@ -13390,94 +13037,61 @@
                 </a:solidFill>
                 <a:latin typeface="Calibri"/>
               </a:rPr>
-              <a:t>So sánh cách dùng phép đối trong Cảm hoài (“Gặp thời đồ điếu công thành dễ / Lỡ vận anh hùng hận xót xa”) và Tây Tiến (“Sài Khao sương lấp đoàn quân mỏi / Mường Lát hoa về trong đêm hơi”).</a:t>
-            </a:r>
-          </a:p>
-        </p:txBody>
-      </p:sp>
-      <p:sp>
-        <p:nvSpPr>
-          <p:cNvPr id="8" name="Rounded Rectangle 7"/>
-          <p:cNvSpPr/>
-          <p:nvPr/>
-        </p:nvSpPr>
-        <p:spPr>
-          <a:xfrm>
-            <a:off x="731520" y="5120640"/>
-            <a:ext cx="10789920" cy="693420"/>
-          </a:xfrm>
-          <a:prstGeom prst="roundRect">
-            <a:avLst>
-              <a:gd name="adj" fmla="val 8000"/>
-            </a:avLst>
-          </a:prstGeom>
-          <a:solidFill>
-            <a:srgbClr val="EFF4FF"/>
-          </a:solidFill>
-          <a:ln w="19050">
-            <a:solidFill>
-              <a:srgbClr val="1E40AF"/>
-            </a:solidFill>
-          </a:ln>
-          <a:effectLst/>
-        </p:spPr>
-        <p:style>
-          <a:lnRef idx="1">
-            <a:schemeClr val="accent1"/>
-          </a:lnRef>
-          <a:fillRef idx="3">
-            <a:schemeClr val="accent1"/>
-          </a:fillRef>
-          <a:effectRef idx="2">
-            <a:schemeClr val="accent1"/>
-          </a:effectRef>
-          <a:fontRef idx="minor">
-            <a:schemeClr val="lt1"/>
-          </a:fontRef>
-        </p:style>
-        <p:txBody>
-          <a:bodyPr rtlCol="0" anchor="ctr"/>
-          <a:lstStyle/>
-          <a:p>
-            <a:pPr algn="ctr"/>
-          </a:p>
-        </p:txBody>
-      </p:sp>
-      <p:sp>
-        <p:nvSpPr>
-          <p:cNvPr id="9" name="TextBox 8"/>
-          <p:cNvSpPr txBox="1"/>
-          <p:nvPr/>
-        </p:nvSpPr>
-        <p:spPr>
-          <a:xfrm>
-            <a:off x="914400" y="5120640"/>
-            <a:ext cx="10424160" cy="693420"/>
-          </a:xfrm>
-          <a:prstGeom prst="rect">
-            <a:avLst/>
-          </a:prstGeom>
-          <a:noFill/>
-        </p:spPr>
-        <p:txBody>
-          <a:bodyPr wrap="square" anchor="ctr" lIns="45720" rIns="45720">
-            <a:spAutoFit/>
-          </a:bodyPr>
-          <a:lstStyle/>
+              <a:t>🎬 Nguyễn Khuyến – bậc đại thi nhân của văn học dân tộc cuối thế kỷ XIX (Danh nhân Thăng Long – Hà Nội)</a:t>
+            </a:r>
+          </a:p>
           <a:p>
             <a:pPr algn="l">
               <a:spcAft>
-                <a:spcPts val="400"/>
+                <a:spcPts val="800"/>
               </a:spcAft>
             </a:pPr>
             <a:r>
-              <a:rPr sz="2200" b="1">
-                <a:solidFill>
-                  <a:srgbClr val="1E40AF"/>
+              <a:rPr sz="2000">
+                <a:solidFill>
+                  <a:srgbClr val="64748B"/>
                 </a:solidFill>
                 <a:latin typeface="Calibri"/>
               </a:rPr>
-              <a:t>💡 Đối chỉnh hay đối linh hoạt?</a:t>
+              <a:t>Kênh: HTV – Đài Hà Nội</a:t>
+            </a:r>
+          </a:p>
+          <a:p>
+            <a:pPr algn="l" marL="365760" indent="-365760">
+              <a:spcAft>
+                <a:spcPts val="800"/>
+              </a:spcAft>
+              <a:buClr>
+                <a:srgbClr val="1E40AF"/>
+              </a:buClr>
+              <a:buFont typeface="Arial"/>
+              <a:buChar char="•"/>
+            </a:pPr>
+            <a:r>
+              <a:rPr sz="2000">
+                <a:solidFill>
+                  <a:srgbClr val="1E293B"/>
+                </a:solidFill>
+                <a:latin typeface="Calibri"/>
+              </a:rPr>
+              <a:t>Viết – tìm hiểu bài tham khảo Thu vịnh và Đây mùa thu tới</a:t>
+            </a:r>
+          </a:p>
+          <a:p>
+            <a:pPr algn="l">
+              <a:spcAft>
+                <a:spcPts val="800"/>
+              </a:spcAft>
+            </a:pPr>
+            <a:r>
+              <a:rPr sz="1600">
+                <a:solidFill>
+                  <a:srgbClr val="64748B"/>
+                </a:solidFill>
+                <a:latin typeface="Calibri"/>
+                <a:hlinkClick r:id="rId3"/>
+              </a:rPr>
+              <a:t>https://www.youtube.com/watch?v=CEAto-bbJ6g</a:t>
             </a:r>
           </a:p>
         </p:txBody>
@@ -13560,14 +13174,14 @@
         </p:nvSpPr>
         <p:spPr>
           <a:xfrm>
-            <a:off x="9942271" y="457200"/>
-            <a:ext cx="1700784" cy="457200"/>
+            <a:off x="10097719" y="457200"/>
+            <a:ext cx="1545336" cy="457200"/>
           </a:xfrm>
           <a:prstGeom prst="roundRect">
             <a:avLst/>
           </a:prstGeom>
           <a:solidFill>
-            <a:srgbClr val="991B1B"/>
+            <a:srgbClr val="166534"/>
           </a:solidFill>
           <a:ln>
             <a:noFill/>
@@ -13600,7 +13214,7 @@
                 </a:solidFill>
                 <a:latin typeface="Arial"/>
               </a:rPr>
-              <a:t>LỜI GIẢI</a:t>
+              <a:t>GHI NHỚ</a:t>
             </a:r>
           </a:p>
         </p:txBody>
@@ -13614,7 +13228,7 @@
         <p:spPr>
           <a:xfrm>
             <a:off x="731520" y="274320"/>
-            <a:ext cx="9272016" cy="868680"/>
+            <a:ext cx="9427464" cy="868680"/>
           </a:xfrm>
           <a:prstGeom prst="rect">
             <a:avLst/>
@@ -13634,7 +13248,7 @@
                 </a:solidFill>
                 <a:latin typeface="Arial"/>
               </a:rPr>
-              <a:t>PHÉP ĐỐI</a:t>
+              <a:t>YÊU CẦU BÀI SO SÁNH HAI BÀI THƠ</a:t>
             </a:r>
           </a:p>
         </p:txBody>
@@ -13727,7 +13341,7 @@
         <p:spPr>
           <a:xfrm>
             <a:off x="731520" y="1463040"/>
-            <a:ext cx="10789920" cy="3474720"/>
+            <a:ext cx="10789920" cy="4754880"/>
           </a:xfrm>
           <a:prstGeom prst="rect">
             <a:avLst/>
@@ -13751,13 +13365,13 @@
               <a:buChar char="•"/>
             </a:pPr>
             <a:r>
-              <a:rPr sz="2300">
+              <a:rPr sz="2400">
                 <a:solidFill>
                   <a:srgbClr val="1E293B"/>
                 </a:solidFill>
                 <a:latin typeface="Calibri"/>
               </a:rPr>
-              <a:t>Cảm hoài: đối chỉnh theo luật Đường, ý đối lập rõ: gặp thời – lỡ vận.</a:t>
+              <a:t>Giới thiệu hai bài thơ, cơ sở lựa chọn.</a:t>
             </a:r>
           </a:p>
           <a:p>
@@ -13772,13 +13386,13 @@
               <a:buChar char="•"/>
             </a:pPr>
             <a:r>
-              <a:rPr sz="2300">
+              <a:rPr sz="2400">
                 <a:solidFill>
                   <a:srgbClr val="1E293B"/>
                 </a:solidFill>
                 <a:latin typeface="Calibri"/>
               </a:rPr>
-              <a:t>Tây Tiến: đối linh hoạt, tương phản gian khổ – thơ mộng.</a:t>
+              <a:t>Tương đồng – khác biệt, có bằng chứng cụ thể.</a:t>
             </a:r>
           </a:p>
           <a:p>
@@ -13793,100 +13407,34 @@
               <a:buChar char="•"/>
             </a:pPr>
             <a:r>
-              <a:rPr sz="2300">
+              <a:rPr sz="2400">
                 <a:solidFill>
                   <a:srgbClr val="1E293B"/>
                 </a:solidFill>
                 <a:latin typeface="Calibri"/>
               </a:rPr>
-              <a:t>Cả hai: tạo cân xứng, nhấn mạnh cảm xúc.</a:t>
-            </a:r>
-          </a:p>
-        </p:txBody>
-      </p:sp>
-      <p:sp>
-        <p:nvSpPr>
-          <p:cNvPr id="8" name="Rounded Rectangle 7"/>
-          <p:cNvSpPr/>
-          <p:nvPr/>
-        </p:nvSpPr>
-        <p:spPr>
-          <a:xfrm>
-            <a:off x="731520" y="5074920"/>
-            <a:ext cx="10789920" cy="731520"/>
-          </a:xfrm>
-          <a:prstGeom prst="roundRect">
-            <a:avLst>
-              <a:gd name="adj" fmla="val 8000"/>
-            </a:avLst>
-          </a:prstGeom>
-          <a:solidFill>
-            <a:srgbClr val="FEF2F2"/>
-          </a:solidFill>
-          <a:ln w="19050">
-            <a:solidFill>
-              <a:srgbClr val="991B1B"/>
-            </a:solidFill>
-          </a:ln>
-          <a:effectLst/>
-        </p:spPr>
-        <p:style>
-          <a:lnRef idx="1">
-            <a:schemeClr val="accent1"/>
-          </a:lnRef>
-          <a:fillRef idx="3">
-            <a:schemeClr val="accent1"/>
-          </a:fillRef>
-          <a:effectRef idx="2">
-            <a:schemeClr val="accent1"/>
-          </a:effectRef>
-          <a:fontRef idx="minor">
-            <a:schemeClr val="lt1"/>
-          </a:fontRef>
-        </p:style>
-        <p:txBody>
-          <a:bodyPr rtlCol="0" anchor="ctr"/>
-          <a:lstStyle/>
-          <a:p>
-            <a:pPr algn="ctr"/>
-          </a:p>
-        </p:txBody>
-      </p:sp>
-      <p:sp>
-        <p:nvSpPr>
-          <p:cNvPr id="9" name="TextBox 8"/>
-          <p:cNvSpPr txBox="1"/>
-          <p:nvPr/>
-        </p:nvSpPr>
-        <p:spPr>
-          <a:xfrm>
-            <a:off x="914400" y="5074920"/>
-            <a:ext cx="10424160" cy="731520"/>
-          </a:xfrm>
-          <a:prstGeom prst="rect">
-            <a:avLst/>
-          </a:prstGeom>
-          <a:noFill/>
-        </p:spPr>
-        <p:txBody>
-          <a:bodyPr wrap="square" anchor="ctr" lIns="45720" rIns="45720">
-            <a:spAutoFit/>
-          </a:bodyPr>
-          <a:lstStyle/>
-          <a:p>
-            <a:pPr algn="l">
+              <a:t>Nhận xét đóng góp riêng của mỗi bài.</a:t>
+            </a:r>
+          </a:p>
+          <a:p>
+            <a:pPr algn="l" marL="365760" indent="-365760">
               <a:spcAft>
-                <a:spcPts val="400"/>
+                <a:spcPts val="800"/>
               </a:spcAft>
+              <a:buClr>
+                <a:srgbClr val="1E40AF"/>
+              </a:buClr>
+              <a:buFont typeface="Arial"/>
+              <a:buChar char="•"/>
             </a:pPr>
             <a:r>
-              <a:rPr sz="2400" b="1">
-                <a:solidFill>
-                  <a:srgbClr val="991B1B"/>
+              <a:rPr sz="2400">
+                <a:solidFill>
+                  <a:srgbClr val="1E293B"/>
                 </a:solidFill>
                 <a:latin typeface="Calibri"/>
               </a:rPr>
-              <a:t>Đối – cổ điển chuẩn mực và lãng mạn phóng khoáng.</a:t>
+              <a:t>Ba cách triển khai: từng bài – lồng ghép – từng phương diện.</a:t>
             </a:r>
           </a:p>
         </p:txBody>
@@ -13905,7 +13453,7 @@
     <p:bg>
       <p:bgPr>
         <a:solidFill>
-          <a:srgbClr val="F8F9FA"/>
+          <a:srgbClr val="FFFFFF"/>
         </a:solidFill>
         <a:effectLst/>
       </p:bgPr>
@@ -13925,14 +13473,14 @@
         </p:nvSpPr>
         <p:spPr>
           <a:xfrm>
-            <a:off x="548640" y="2926080"/>
-            <a:ext cx="164592" cy="1005840"/>
+            <a:off x="457200" y="384048"/>
+            <a:ext cx="109728" cy="658368"/>
           </a:xfrm>
           <a:prstGeom prst="rect">
             <a:avLst/>
           </a:prstGeom>
           <a:solidFill>
-            <a:srgbClr val="991B1B"/>
+            <a:srgbClr val="1E40AF"/>
           </a:solidFill>
           <a:ln>
             <a:noFill/>
@@ -13963,14 +13511,67 @@
       </p:sp>
       <p:sp>
         <p:nvSpPr>
-          <p:cNvPr id="3" name="TextBox 2"/>
+          <p:cNvPr id="3" name="Rounded Rectangle 2"/>
+          <p:cNvSpPr/>
+          <p:nvPr/>
+        </p:nvSpPr>
+        <p:spPr>
+          <a:xfrm>
+            <a:off x="10253167" y="457200"/>
+            <a:ext cx="1389888" cy="457200"/>
+          </a:xfrm>
+          <a:prstGeom prst="roundRect">
+            <a:avLst/>
+          </a:prstGeom>
+          <a:solidFill>
+            <a:srgbClr val="1E40AF"/>
+          </a:solidFill>
+          <a:ln>
+            <a:noFill/>
+          </a:ln>
+          <a:effectLst/>
+        </p:spPr>
+        <p:style>
+          <a:lnRef idx="1">
+            <a:schemeClr val="accent1"/>
+          </a:lnRef>
+          <a:fillRef idx="3">
+            <a:schemeClr val="accent1"/>
+          </a:fillRef>
+          <a:effectRef idx="2">
+            <a:schemeClr val="accent1"/>
+          </a:effectRef>
+          <a:fontRef idx="minor">
+            <a:schemeClr val="lt1"/>
+          </a:fontRef>
+        </p:style>
+        <p:txBody>
+          <a:bodyPr rtlCol="0" anchor="ctr" wrap="none" tIns="0" bIns="0"/>
+          <a:lstStyle/>
+          <a:p>
+            <a:pPr algn="ctr"/>
+            <a:r>
+              <a:rPr sz="1400" b="1">
+                <a:solidFill>
+                  <a:srgbClr val="FFFFFF"/>
+                </a:solidFill>
+                <a:latin typeface="Arial"/>
+              </a:rPr>
+              <a:t>ĐỀ BÀI</a:t>
+            </a:r>
+          </a:p>
+        </p:txBody>
+      </p:sp>
+      <p:sp>
+        <p:nvSpPr>
+          <p:cNvPr id="4" name="TextBox 3"/>
           <p:cNvSpPr txBox="1"/>
           <p:nvPr/>
         </p:nvSpPr>
         <p:spPr>
           <a:xfrm>
-            <a:off x="914400" y="2743200"/>
-            <a:ext cx="10515600" cy="1371600"/>
+            <a:off x="731520" y="274320"/>
+            <a:ext cx="9582912" cy="868680"/>
           </a:xfrm>
           <a:prstGeom prst="rect">
             <a:avLst/>
@@ -13978,7 +13579,120 @@
           <a:noFill/>
         </p:spPr>
         <p:txBody>
-          <a:bodyPr wrap="square" anchor="ctr" lIns="45720" rIns="45720">
+          <a:bodyPr wrap="square" anchor="ctr">
+            <a:spAutoFit/>
+          </a:bodyPr>
+          <a:lstStyle/>
+          <a:p>
+            <a:r>
+              <a:rPr sz="3600" b="1">
+                <a:solidFill>
+                  <a:srgbClr val="1E40AF"/>
+                </a:solidFill>
+                <a:latin typeface="Arial"/>
+              </a:rPr>
+              <a:t>ĐỀ THỰC HÀNH VIẾT</a:t>
+            </a:r>
+          </a:p>
+        </p:txBody>
+      </p:sp>
+      <p:sp>
+        <p:nvSpPr>
+          <p:cNvPr id="5" name="Rectangle 4"/>
+          <p:cNvSpPr/>
+          <p:nvPr/>
+        </p:nvSpPr>
+        <p:spPr>
+          <a:xfrm>
+            <a:off x="457200" y="1207008"/>
+            <a:ext cx="11274552" cy="22000"/>
+          </a:xfrm>
+          <a:prstGeom prst="rect">
+            <a:avLst/>
+          </a:prstGeom>
+          <a:solidFill>
+            <a:srgbClr val="E2E8F0"/>
+          </a:solidFill>
+          <a:ln>
+            <a:noFill/>
+          </a:ln>
+          <a:effectLst/>
+        </p:spPr>
+        <p:style>
+          <a:lnRef idx="1">
+            <a:schemeClr val="accent1"/>
+          </a:lnRef>
+          <a:fillRef idx="3">
+            <a:schemeClr val="accent1"/>
+          </a:fillRef>
+          <a:effectRef idx="2">
+            <a:schemeClr val="accent1"/>
+          </a:effectRef>
+          <a:fontRef idx="minor">
+            <a:schemeClr val="lt1"/>
+          </a:fontRef>
+        </p:style>
+        <p:txBody>
+          <a:bodyPr rtlCol="0" anchor="ctr"/>
+          <a:lstStyle/>
+          <a:p>
+            <a:pPr algn="ctr"/>
+          </a:p>
+        </p:txBody>
+      </p:sp>
+      <p:sp>
+        <p:nvSpPr>
+          <p:cNvPr id="6" name="TextBox 5"/>
+          <p:cNvSpPr txBox="1"/>
+          <p:nvPr/>
+        </p:nvSpPr>
+        <p:spPr>
+          <a:xfrm>
+            <a:off x="457200" y="6355080"/>
+            <a:ext cx="11274552" cy="365760"/>
+          </a:xfrm>
+          <a:prstGeom prst="rect">
+            <a:avLst/>
+          </a:prstGeom>
+          <a:noFill/>
+        </p:spPr>
+        <p:txBody>
+          <a:bodyPr wrap="none">
+            <a:spAutoFit/>
+          </a:bodyPr>
+          <a:lstStyle/>
+          <a:p>
+            <a:pPr algn="r"/>
+            <a:r>
+              <a:rPr sz="1200">
+                <a:solidFill>
+                  <a:srgbClr val="64748B"/>
+                </a:solidFill>
+                <a:latin typeface="Calibri"/>
+              </a:rPr>
+              <a:t>Ngữ văn 12 · Bài 2: Những Thế Giới Thơ          33</a:t>
+            </a:r>
+          </a:p>
+        </p:txBody>
+      </p:sp>
+      <p:sp>
+        <p:nvSpPr>
+          <p:cNvPr id="7" name="TextBox 6"/>
+          <p:cNvSpPr txBox="1"/>
+          <p:nvPr/>
+        </p:nvSpPr>
+        <p:spPr>
+          <a:xfrm>
+            <a:off x="731520" y="1463040"/>
+            <a:ext cx="10789920" cy="3566160"/>
+          </a:xfrm>
+          <a:prstGeom prst="rect">
+            <a:avLst/>
+          </a:prstGeom>
+          <a:noFill/>
+        </p:spPr>
+        <p:txBody>
+          <a:bodyPr wrap="square" anchor="t" lIns="45720" rIns="45720">
             <a:spAutoFit/>
           </a:bodyPr>
           <a:lstStyle/>
@@ -13989,13 +13703,100 @@
               </a:spcAft>
             </a:pPr>
             <a:r>
-              <a:rPr sz="3600" b="1">
+              <a:rPr sz="2600" b="1">
+                <a:solidFill>
+                  <a:srgbClr val="1E293B"/>
+                </a:solidFill>
+                <a:latin typeface="Calibri"/>
+              </a:rPr>
+              <a:t>So sánh, đánh giá hình tượng người anh hùng/người lính trong Cảm hoài (Đặng Dung) và Tây Tiến (Quang Dũng).</a:t>
+            </a:r>
+          </a:p>
+        </p:txBody>
+      </p:sp>
+      <p:sp>
+        <p:nvSpPr>
+          <p:cNvPr id="8" name="Rounded Rectangle 7"/>
+          <p:cNvSpPr/>
+          <p:nvPr/>
+        </p:nvSpPr>
+        <p:spPr>
+          <a:xfrm>
+            <a:off x="731520" y="5120640"/>
+            <a:ext cx="10789920" cy="693420"/>
+          </a:xfrm>
+          <a:prstGeom prst="roundRect">
+            <a:avLst>
+              <a:gd name="adj" fmla="val 8000"/>
+            </a:avLst>
+          </a:prstGeom>
+          <a:solidFill>
+            <a:srgbClr val="EFF4FF"/>
+          </a:solidFill>
+          <a:ln w="19050">
+            <a:solidFill>
+              <a:srgbClr val="1E40AF"/>
+            </a:solidFill>
+          </a:ln>
+          <a:effectLst/>
+        </p:spPr>
+        <p:style>
+          <a:lnRef idx="1">
+            <a:schemeClr val="accent1"/>
+          </a:lnRef>
+          <a:fillRef idx="3">
+            <a:schemeClr val="accent1"/>
+          </a:fillRef>
+          <a:effectRef idx="2">
+            <a:schemeClr val="accent1"/>
+          </a:effectRef>
+          <a:fontRef idx="minor">
+            <a:schemeClr val="lt1"/>
+          </a:fontRef>
+        </p:style>
+        <p:txBody>
+          <a:bodyPr rtlCol="0" anchor="ctr"/>
+          <a:lstStyle/>
+          <a:p>
+            <a:pPr algn="ctr"/>
+          </a:p>
+        </p:txBody>
+      </p:sp>
+      <p:sp>
+        <p:nvSpPr>
+          <p:cNvPr id="9" name="TextBox 8"/>
+          <p:cNvSpPr txBox="1"/>
+          <p:nvPr/>
+        </p:nvSpPr>
+        <p:spPr>
+          <a:xfrm>
+            <a:off x="914400" y="5120640"/>
+            <a:ext cx="10424160" cy="693420"/>
+          </a:xfrm>
+          <a:prstGeom prst="rect">
+            <a:avLst/>
+          </a:prstGeom>
+          <a:noFill/>
+        </p:spPr>
+        <p:txBody>
+          <a:bodyPr wrap="square" anchor="ctr" lIns="45720" rIns="45720">
+            <a:spAutoFit/>
+          </a:bodyPr>
+          <a:lstStyle/>
+          <a:p>
+            <a:pPr algn="l">
+              <a:spcAft>
+                <a:spcPts val="400"/>
+              </a:spcAft>
+            </a:pPr>
+            <a:r>
+              <a:rPr sz="2200" b="1">
                 <a:solidFill>
                   <a:srgbClr val="1E40AF"/>
                 </a:solidFill>
                 <a:latin typeface="Calibri"/>
               </a:rPr>
-              <a:t>TIẾT 20 – 22: VIẾT – NÓI VÀ NGHE</a:t>
+              <a:t>💡 Chọn cách triển khai theo từng phương diện.</a:t>
             </a:r>
           </a:p>
         </p:txBody>
@@ -14078,14 +13879,14 @@
         </p:nvSpPr>
         <p:spPr>
           <a:xfrm>
-            <a:off x="10097719" y="457200"/>
-            <a:ext cx="1545336" cy="457200"/>
+            <a:off x="9942271" y="457200"/>
+            <a:ext cx="1700784" cy="457200"/>
           </a:xfrm>
           <a:prstGeom prst="roundRect">
             <a:avLst/>
           </a:prstGeom>
           <a:solidFill>
-            <a:srgbClr val="166534"/>
+            <a:srgbClr val="991B1B"/>
           </a:solidFill>
           <a:ln>
             <a:noFill/>
@@ -14118,7 +13919,7 @@
                 </a:solidFill>
                 <a:latin typeface="Arial"/>
               </a:rPr>
-              <a:t>GHI NHỚ</a:t>
+              <a:t>LỜI GIẢI</a:t>
             </a:r>
           </a:p>
         </p:txBody>
@@ -14132,7 +13933,7 @@
         <p:spPr>
           <a:xfrm>
             <a:off x="731520" y="274320"/>
-            <a:ext cx="9427464" cy="868680"/>
+            <a:ext cx="9272016" cy="868680"/>
           </a:xfrm>
           <a:prstGeom prst="rect">
             <a:avLst/>
@@ -14152,7 +13953,7 @@
                 </a:solidFill>
                 <a:latin typeface="Arial"/>
               </a:rPr>
-              <a:t>YÊU CẦU BÀI SO SÁNH HAI BÀI THƠ</a:t>
+              <a:t>ĐỀ THỰC HÀNH VIẾT</a:t>
             </a:r>
           </a:p>
         </p:txBody>
@@ -14245,7 +14046,7 @@
         <p:spPr>
           <a:xfrm>
             <a:off x="731520" y="1463040"/>
-            <a:ext cx="10789920" cy="4754880"/>
+            <a:ext cx="10789920" cy="3474720"/>
           </a:xfrm>
           <a:prstGeom prst="rect">
             <a:avLst/>
@@ -14269,13 +14070,13 @@
               <a:buChar char="•"/>
             </a:pPr>
             <a:r>
-              <a:rPr sz="2400">
+              <a:rPr sz="2300">
                 <a:solidFill>
                   <a:srgbClr val="1E293B"/>
                 </a:solidFill>
                 <a:latin typeface="Calibri"/>
               </a:rPr>
-              <a:t>Giới thiệu hai bài thơ, cơ sở lựa chọn.</a:t>
+              <a:t>Hoàn cảnh: anh hùng thất thế – người lính giữa núi rừng gian khổ.</a:t>
             </a:r>
           </a:p>
           <a:p>
@@ -14290,13 +14091,13 @@
               <a:buChar char="•"/>
             </a:pPr>
             <a:r>
-              <a:rPr sz="2400">
+              <a:rPr sz="2300">
                 <a:solidFill>
                   <a:srgbClr val="1E293B"/>
                 </a:solidFill>
                 <a:latin typeface="Calibri"/>
               </a:rPr>
-              <a:t>Tương đồng – khác biệt, có bằng chứng cụ thể.</a:t>
+              <a:t>Lí tưởng: xoay trục đất – “gửi mộng qua biên giới”.</a:t>
             </a:r>
           </a:p>
           <a:p>
@@ -14311,13 +14112,13 @@
               <a:buChar char="•"/>
             </a:pPr>
             <a:r>
-              <a:rPr sz="2400">
+              <a:rPr sz="2300">
                 <a:solidFill>
                   <a:srgbClr val="1E293B"/>
                 </a:solidFill>
                 <a:latin typeface="Calibri"/>
               </a:rPr>
-              <a:t>Nhận xét đóng góp riêng của mỗi bài.</a:t>
+              <a:t>Vẻ đẹp bi tráng; phong cách cổ điển – lãng mạn.</a:t>
             </a:r>
           </a:p>
           <a:p>
@@ -14332,13 +14133,100 @@
               <a:buChar char="•"/>
             </a:pPr>
             <a:r>
-              <a:rPr sz="2400">
+              <a:rPr sz="2300">
                 <a:solidFill>
                   <a:srgbClr val="1E293B"/>
                 </a:solidFill>
                 <a:latin typeface="Calibri"/>
               </a:rPr>
-              <a:t>Ba cách triển khai: từng bài – lồng ghép – từng phương diện.</a:t>
+              <a:t>Nguyên nhân khác biệt: thời đại, quan điểm thẩm mĩ.</a:t>
+            </a:r>
+          </a:p>
+        </p:txBody>
+      </p:sp>
+      <p:sp>
+        <p:nvSpPr>
+          <p:cNvPr id="8" name="Rounded Rectangle 7"/>
+          <p:cNvSpPr/>
+          <p:nvPr/>
+        </p:nvSpPr>
+        <p:spPr>
+          <a:xfrm>
+            <a:off x="731520" y="5074920"/>
+            <a:ext cx="10789920" cy="731520"/>
+          </a:xfrm>
+          <a:prstGeom prst="roundRect">
+            <a:avLst>
+              <a:gd name="adj" fmla="val 8000"/>
+            </a:avLst>
+          </a:prstGeom>
+          <a:solidFill>
+            <a:srgbClr val="FEF2F2"/>
+          </a:solidFill>
+          <a:ln w="19050">
+            <a:solidFill>
+              <a:srgbClr val="991B1B"/>
+            </a:solidFill>
+          </a:ln>
+          <a:effectLst/>
+        </p:spPr>
+        <p:style>
+          <a:lnRef idx="1">
+            <a:schemeClr val="accent1"/>
+          </a:lnRef>
+          <a:fillRef idx="3">
+            <a:schemeClr val="accent1"/>
+          </a:fillRef>
+          <a:effectRef idx="2">
+            <a:schemeClr val="accent1"/>
+          </a:effectRef>
+          <a:fontRef idx="minor">
+            <a:schemeClr val="lt1"/>
+          </a:fontRef>
+        </p:style>
+        <p:txBody>
+          <a:bodyPr rtlCol="0" anchor="ctr"/>
+          <a:lstStyle/>
+          <a:p>
+            <a:pPr algn="ctr"/>
+          </a:p>
+        </p:txBody>
+      </p:sp>
+      <p:sp>
+        <p:nvSpPr>
+          <p:cNvPr id="9" name="TextBox 8"/>
+          <p:cNvSpPr txBox="1"/>
+          <p:nvPr/>
+        </p:nvSpPr>
+        <p:spPr>
+          <a:xfrm>
+            <a:off x="914400" y="5074920"/>
+            <a:ext cx="10424160" cy="731520"/>
+          </a:xfrm>
+          <a:prstGeom prst="rect">
+            <a:avLst/>
+          </a:prstGeom>
+          <a:noFill/>
+        </p:spPr>
+        <p:txBody>
+          <a:bodyPr wrap="square" anchor="ctr" lIns="45720" rIns="45720">
+            <a:spAutoFit/>
+          </a:bodyPr>
+          <a:lstStyle/>
+          <a:p>
+            <a:pPr algn="l">
+              <a:spcAft>
+                <a:spcPts val="400"/>
+              </a:spcAft>
+            </a:pPr>
+            <a:r>
+              <a:rPr sz="2400" b="1">
+                <a:solidFill>
+                  <a:srgbClr val="991B1B"/>
+                </a:solidFill>
+                <a:latin typeface="Calibri"/>
+              </a:rPr>
+              <a:t>Đan xen tương đồng và khác biệt.</a:t>
             </a:r>
           </a:p>
         </p:txBody>
@@ -14421,14 +14309,14 @@
         </p:nvSpPr>
         <p:spPr>
           <a:xfrm>
-            <a:off x="10253167" y="457200"/>
-            <a:ext cx="1389888" cy="457200"/>
+            <a:off x="10097719" y="457200"/>
+            <a:ext cx="1545336" cy="457200"/>
           </a:xfrm>
           <a:prstGeom prst="roundRect">
             <a:avLst/>
           </a:prstGeom>
           <a:solidFill>
-            <a:srgbClr val="1E40AF"/>
+            <a:srgbClr val="166534"/>
           </a:solidFill>
           <a:ln>
             <a:noFill/>
@@ -14461,7 +14349,7 @@
                 </a:solidFill>
                 <a:latin typeface="Arial"/>
               </a:rPr>
-              <a:t>ĐỀ BÀI</a:t>
+              <a:t>CỦNG CỐ</a:t>
             </a:r>
           </a:p>
         </p:txBody>
@@ -14475,7 +14363,7 @@
         <p:spPr>
           <a:xfrm>
             <a:off x="731520" y="274320"/>
-            <a:ext cx="9582912" cy="868680"/>
+            <a:ext cx="9427464" cy="868680"/>
           </a:xfrm>
           <a:prstGeom prst="rect">
             <a:avLst/>
@@ -14495,7 +14383,7 @@
                 </a:solidFill>
                 <a:latin typeface="Arial"/>
               </a:rPr>
-              <a:t>ĐỀ THỰC HÀNH VIẾT</a:t>
+              <a:t>SƠ ĐỒ TƯ DUY</a:t>
             </a:r>
           </a:p>
         </p:txBody>
@@ -14579,132 +14467,30 @@
           </a:p>
         </p:txBody>
       </p:sp>
-      <p:sp>
-        <p:nvSpPr>
-          <p:cNvPr id="7" name="TextBox 6"/>
-          <p:cNvSpPr txBox="1"/>
-          <p:nvPr/>
-        </p:nvSpPr>
-        <p:spPr>
-          <a:xfrm>
-            <a:off x="731520" y="1463040"/>
-            <a:ext cx="10789920" cy="3566160"/>
-          </a:xfrm>
-          <a:prstGeom prst="rect">
-            <a:avLst/>
-          </a:prstGeom>
-          <a:noFill/>
-        </p:spPr>
-        <p:txBody>
-          <a:bodyPr wrap="square" anchor="t" lIns="45720" rIns="45720">
-            <a:spAutoFit/>
-          </a:bodyPr>
-          <a:lstStyle/>
-          <a:p>
-            <a:pPr algn="l">
-              <a:spcAft>
-                <a:spcPts val="800"/>
-              </a:spcAft>
-            </a:pPr>
-            <a:r>
-              <a:rPr sz="2600" b="1">
-                <a:solidFill>
-                  <a:srgbClr val="1E293B"/>
-                </a:solidFill>
-                <a:latin typeface="Calibri"/>
-              </a:rPr>
-              <a:t>So sánh, đánh giá hình tượng người anh hùng/người lính trong Cảm hoài (Đặng Dung) và Tây Tiến (Quang Dũng).</a:t>
-            </a:r>
-          </a:p>
-        </p:txBody>
-      </p:sp>
-      <p:sp>
-        <p:nvSpPr>
-          <p:cNvPr id="8" name="Rounded Rectangle 7"/>
-          <p:cNvSpPr/>
-          <p:nvPr/>
-        </p:nvSpPr>
-        <p:spPr>
-          <a:xfrm>
-            <a:off x="731520" y="5120640"/>
-            <a:ext cx="10789920" cy="693420"/>
-          </a:xfrm>
-          <a:prstGeom prst="roundRect">
-            <a:avLst>
-              <a:gd name="adj" fmla="val 8000"/>
-            </a:avLst>
-          </a:prstGeom>
-          <a:solidFill>
-            <a:srgbClr val="EFF4FF"/>
-          </a:solidFill>
-          <a:ln w="19050">
-            <a:solidFill>
-              <a:srgbClr val="1E40AF"/>
-            </a:solidFill>
-          </a:ln>
-          <a:effectLst/>
-        </p:spPr>
-        <p:style>
-          <a:lnRef idx="1">
-            <a:schemeClr val="accent1"/>
-          </a:lnRef>
-          <a:fillRef idx="3">
-            <a:schemeClr val="accent1"/>
-          </a:fillRef>
-          <a:effectRef idx="2">
-            <a:schemeClr val="accent1"/>
-          </a:effectRef>
-          <a:fontRef idx="minor">
-            <a:schemeClr val="lt1"/>
-          </a:fontRef>
-        </p:style>
-        <p:txBody>
-          <a:bodyPr rtlCol="0" anchor="ctr"/>
-          <a:lstStyle/>
-          <a:p>
-            <a:pPr algn="ctr"/>
-          </a:p>
-        </p:txBody>
-      </p:sp>
-      <p:sp>
-        <p:nvSpPr>
-          <p:cNvPr id="9" name="TextBox 8"/>
-          <p:cNvSpPr txBox="1"/>
-          <p:nvPr/>
-        </p:nvSpPr>
-        <p:spPr>
-          <a:xfrm>
-            <a:off x="914400" y="5120640"/>
-            <a:ext cx="10424160" cy="693420"/>
-          </a:xfrm>
-          <a:prstGeom prst="rect">
-            <a:avLst/>
-          </a:prstGeom>
-          <a:noFill/>
-        </p:spPr>
-        <p:txBody>
-          <a:bodyPr wrap="square" anchor="ctr" lIns="45720" rIns="45720">
-            <a:spAutoFit/>
-          </a:bodyPr>
-          <a:lstStyle/>
-          <a:p>
-            <a:pPr algn="l">
-              <a:spcAft>
-                <a:spcPts val="400"/>
-              </a:spcAft>
-            </a:pPr>
-            <a:r>
-              <a:rPr sz="2200" b="1">
-                <a:solidFill>
-                  <a:srgbClr val="1E40AF"/>
-                </a:solidFill>
-                <a:latin typeface="Calibri"/>
-              </a:rPr>
-              <a:t>💡 Chọn cách triển khai theo từng phương diện.</a:t>
-            </a:r>
-          </a:p>
-        </p:txBody>
-      </p:sp>
+      <p:pic>
+        <p:nvPicPr>
+          <p:cNvPr id="7" name="Picture 6" descr="SoDoTuDuy_NGUVAN12_Bai2_NhungTheGioiTho_T12-22.png"/>
+          <p:cNvPicPr>
+            <a:picLocks noChangeAspect="1"/>
+          </p:cNvPicPr>
+          <p:nvPr/>
+        </p:nvPicPr>
+        <p:blipFill>
+          <a:blip r:embed="rId2"/>
+          <a:stretch>
+            <a:fillRect/>
+          </a:stretch>
+        </p:blipFill>
+        <p:spPr>
+          <a:xfrm>
+            <a:off x="1788855" y="1371600"/>
+            <a:ext cx="8675250" cy="4846320"/>
+          </a:xfrm>
+          <a:prstGeom prst="rect">
+            <a:avLst/>
+          </a:prstGeom>
+        </p:spPr>
+      </p:pic>
     </p:spTree>
   </p:cSld>
   <p:clrMapOvr>
@@ -14783,8 +14569,8 @@
         </p:nvSpPr>
         <p:spPr>
           <a:xfrm>
-            <a:off x="9942271" y="457200"/>
-            <a:ext cx="1700784" cy="457200"/>
+            <a:off x="10097719" y="457200"/>
+            <a:ext cx="1545336" cy="457200"/>
           </a:xfrm>
           <a:prstGeom prst="roundRect">
             <a:avLst/>
@@ -14823,7 +14609,7 @@
                 </a:solidFill>
                 <a:latin typeface="Arial"/>
               </a:rPr>
-              <a:t>LỜI GIẢI</a:t>
+              <a:t>CỦNG CỐ</a:t>
             </a:r>
           </a:p>
         </p:txBody>
@@ -14837,7 +14623,7 @@
         <p:spPr>
           <a:xfrm>
             <a:off x="731520" y="274320"/>
-            <a:ext cx="9272016" cy="868680"/>
+            <a:ext cx="9427464" cy="868680"/>
           </a:xfrm>
           <a:prstGeom prst="rect">
             <a:avLst/>
@@ -14857,7 +14643,7 @@
                 </a:solidFill>
                 <a:latin typeface="Arial"/>
               </a:rPr>
-              <a:t>ĐỀ THỰC HÀNH VIẾT</a:t>
+              <a:t>BÀI TẬP CỦA BẠN</a:t>
             </a:r>
           </a:p>
         </p:txBody>
@@ -14937,696 +14723,6 @@
                 <a:latin typeface="Calibri"/>
               </a:rPr>
               <a:t>Ngữ văn 12 · Bài 2: Những Thế Giới Thơ          36</a:t>
-            </a:r>
-          </a:p>
-        </p:txBody>
-      </p:sp>
-      <p:sp>
-        <p:nvSpPr>
-          <p:cNvPr id="7" name="TextBox 6"/>
-          <p:cNvSpPr txBox="1"/>
-          <p:nvPr/>
-        </p:nvSpPr>
-        <p:spPr>
-          <a:xfrm>
-            <a:off x="731520" y="1463040"/>
-            <a:ext cx="10789920" cy="3474720"/>
-          </a:xfrm>
-          <a:prstGeom prst="rect">
-            <a:avLst/>
-          </a:prstGeom>
-          <a:noFill/>
-        </p:spPr>
-        <p:txBody>
-          <a:bodyPr wrap="square" anchor="t" lIns="45720" rIns="45720">
-            <a:spAutoFit/>
-          </a:bodyPr>
-          <a:lstStyle/>
-          <a:p>
-            <a:pPr algn="l" marL="365760" indent="-365760">
-              <a:spcAft>
-                <a:spcPts val="800"/>
-              </a:spcAft>
-              <a:buClr>
-                <a:srgbClr val="1E40AF"/>
-              </a:buClr>
-              <a:buFont typeface="Arial"/>
-              <a:buChar char="•"/>
-            </a:pPr>
-            <a:r>
-              <a:rPr sz="2300">
-                <a:solidFill>
-                  <a:srgbClr val="1E293B"/>
-                </a:solidFill>
-                <a:latin typeface="Calibri"/>
-              </a:rPr>
-              <a:t>Hoàn cảnh: anh hùng thất thế – người lính giữa núi rừng gian khổ.</a:t>
-            </a:r>
-          </a:p>
-          <a:p>
-            <a:pPr algn="l" marL="365760" indent="-365760">
-              <a:spcAft>
-                <a:spcPts val="800"/>
-              </a:spcAft>
-              <a:buClr>
-                <a:srgbClr val="1E40AF"/>
-              </a:buClr>
-              <a:buFont typeface="Arial"/>
-              <a:buChar char="•"/>
-            </a:pPr>
-            <a:r>
-              <a:rPr sz="2300">
-                <a:solidFill>
-                  <a:srgbClr val="1E293B"/>
-                </a:solidFill>
-                <a:latin typeface="Calibri"/>
-              </a:rPr>
-              <a:t>Lí tưởng: xoay trục đất – “gửi mộng qua biên giới”.</a:t>
-            </a:r>
-          </a:p>
-          <a:p>
-            <a:pPr algn="l" marL="365760" indent="-365760">
-              <a:spcAft>
-                <a:spcPts val="800"/>
-              </a:spcAft>
-              <a:buClr>
-                <a:srgbClr val="1E40AF"/>
-              </a:buClr>
-              <a:buFont typeface="Arial"/>
-              <a:buChar char="•"/>
-            </a:pPr>
-            <a:r>
-              <a:rPr sz="2300">
-                <a:solidFill>
-                  <a:srgbClr val="1E293B"/>
-                </a:solidFill>
-                <a:latin typeface="Calibri"/>
-              </a:rPr>
-              <a:t>Vẻ đẹp bi tráng; phong cách cổ điển – lãng mạn.</a:t>
-            </a:r>
-          </a:p>
-          <a:p>
-            <a:pPr algn="l" marL="365760" indent="-365760">
-              <a:spcAft>
-                <a:spcPts val="800"/>
-              </a:spcAft>
-              <a:buClr>
-                <a:srgbClr val="1E40AF"/>
-              </a:buClr>
-              <a:buFont typeface="Arial"/>
-              <a:buChar char="•"/>
-            </a:pPr>
-            <a:r>
-              <a:rPr sz="2300">
-                <a:solidFill>
-                  <a:srgbClr val="1E293B"/>
-                </a:solidFill>
-                <a:latin typeface="Calibri"/>
-              </a:rPr>
-              <a:t>Nguyên nhân khác biệt: thời đại, quan điểm thẩm mĩ.</a:t>
-            </a:r>
-          </a:p>
-        </p:txBody>
-      </p:sp>
-      <p:sp>
-        <p:nvSpPr>
-          <p:cNvPr id="8" name="Rounded Rectangle 7"/>
-          <p:cNvSpPr/>
-          <p:nvPr/>
-        </p:nvSpPr>
-        <p:spPr>
-          <a:xfrm>
-            <a:off x="731520" y="5074920"/>
-            <a:ext cx="10789920" cy="731520"/>
-          </a:xfrm>
-          <a:prstGeom prst="roundRect">
-            <a:avLst>
-              <a:gd name="adj" fmla="val 8000"/>
-            </a:avLst>
-          </a:prstGeom>
-          <a:solidFill>
-            <a:srgbClr val="FEF2F2"/>
-          </a:solidFill>
-          <a:ln w="19050">
-            <a:solidFill>
-              <a:srgbClr val="991B1B"/>
-            </a:solidFill>
-          </a:ln>
-          <a:effectLst/>
-        </p:spPr>
-        <p:style>
-          <a:lnRef idx="1">
-            <a:schemeClr val="accent1"/>
-          </a:lnRef>
-          <a:fillRef idx="3">
-            <a:schemeClr val="accent1"/>
-          </a:fillRef>
-          <a:effectRef idx="2">
-            <a:schemeClr val="accent1"/>
-          </a:effectRef>
-          <a:fontRef idx="minor">
-            <a:schemeClr val="lt1"/>
-          </a:fontRef>
-        </p:style>
-        <p:txBody>
-          <a:bodyPr rtlCol="0" anchor="ctr"/>
-          <a:lstStyle/>
-          <a:p>
-            <a:pPr algn="ctr"/>
-          </a:p>
-        </p:txBody>
-      </p:sp>
-      <p:sp>
-        <p:nvSpPr>
-          <p:cNvPr id="9" name="TextBox 8"/>
-          <p:cNvSpPr txBox="1"/>
-          <p:nvPr/>
-        </p:nvSpPr>
-        <p:spPr>
-          <a:xfrm>
-            <a:off x="914400" y="5074920"/>
-            <a:ext cx="10424160" cy="731520"/>
-          </a:xfrm>
-          <a:prstGeom prst="rect">
-            <a:avLst/>
-          </a:prstGeom>
-          <a:noFill/>
-        </p:spPr>
-        <p:txBody>
-          <a:bodyPr wrap="square" anchor="ctr" lIns="45720" rIns="45720">
-            <a:spAutoFit/>
-          </a:bodyPr>
-          <a:lstStyle/>
-          <a:p>
-            <a:pPr algn="l">
-              <a:spcAft>
-                <a:spcPts val="400"/>
-              </a:spcAft>
-            </a:pPr>
-            <a:r>
-              <a:rPr sz="2400" b="1">
-                <a:solidFill>
-                  <a:srgbClr val="991B1B"/>
-                </a:solidFill>
-                <a:latin typeface="Calibri"/>
-              </a:rPr>
-              <a:t>Đan xen tương đồng và khác biệt.</a:t>
-            </a:r>
-          </a:p>
-        </p:txBody>
-      </p:sp>
-    </p:spTree>
-  </p:cSld>
-  <p:clrMapOvr>
-    <a:masterClrMapping/>
-  </p:clrMapOvr>
-</p:sld>
-</file>
-
-<file path=ppt/slides/slide37.xml><?xml version="1.0" encoding="utf-8"?>
-<p:sld xmlns:a="http://schemas.openxmlformats.org/drawingml/2006/main" xmlns:p="http://schemas.openxmlformats.org/presentationml/2006/main" xmlns:r="http://schemas.openxmlformats.org/officeDocument/2006/relationships">
-  <p:cSld>
-    <p:bg>
-      <p:bgPr>
-        <a:solidFill>
-          <a:srgbClr val="FFFFFF"/>
-        </a:solidFill>
-        <a:effectLst/>
-      </p:bgPr>
-    </p:bg>
-    <p:spTree>
-      <p:nvGrpSpPr>
-        <p:cNvPr id="1" name=""/>
-        <p:cNvGrpSpPr/>
-        <p:nvPr/>
-      </p:nvGrpSpPr>
-      <p:grpSpPr/>
-      <p:sp>
-        <p:nvSpPr>
-          <p:cNvPr id="2" name="Rectangle 1"/>
-          <p:cNvSpPr/>
-          <p:nvPr/>
-        </p:nvSpPr>
-        <p:spPr>
-          <a:xfrm>
-            <a:off x="457200" y="384048"/>
-            <a:ext cx="109728" cy="658368"/>
-          </a:xfrm>
-          <a:prstGeom prst="rect">
-            <a:avLst/>
-          </a:prstGeom>
-          <a:solidFill>
-            <a:srgbClr val="1E40AF"/>
-          </a:solidFill>
-          <a:ln>
-            <a:noFill/>
-          </a:ln>
-          <a:effectLst/>
-        </p:spPr>
-        <p:style>
-          <a:lnRef idx="1">
-            <a:schemeClr val="accent1"/>
-          </a:lnRef>
-          <a:fillRef idx="3">
-            <a:schemeClr val="accent1"/>
-          </a:fillRef>
-          <a:effectRef idx="2">
-            <a:schemeClr val="accent1"/>
-          </a:effectRef>
-          <a:fontRef idx="minor">
-            <a:schemeClr val="lt1"/>
-          </a:fontRef>
-        </p:style>
-        <p:txBody>
-          <a:bodyPr rtlCol="0" anchor="ctr"/>
-          <a:lstStyle/>
-          <a:p>
-            <a:pPr algn="ctr"/>
-          </a:p>
-        </p:txBody>
-      </p:sp>
-      <p:sp>
-        <p:nvSpPr>
-          <p:cNvPr id="3" name="Rounded Rectangle 2"/>
-          <p:cNvSpPr/>
-          <p:nvPr/>
-        </p:nvSpPr>
-        <p:spPr>
-          <a:xfrm>
-            <a:off x="10097719" y="457200"/>
-            <a:ext cx="1545336" cy="457200"/>
-          </a:xfrm>
-          <a:prstGeom prst="roundRect">
-            <a:avLst/>
-          </a:prstGeom>
-          <a:solidFill>
-            <a:srgbClr val="166534"/>
-          </a:solidFill>
-          <a:ln>
-            <a:noFill/>
-          </a:ln>
-          <a:effectLst/>
-        </p:spPr>
-        <p:style>
-          <a:lnRef idx="1">
-            <a:schemeClr val="accent1"/>
-          </a:lnRef>
-          <a:fillRef idx="3">
-            <a:schemeClr val="accent1"/>
-          </a:fillRef>
-          <a:effectRef idx="2">
-            <a:schemeClr val="accent1"/>
-          </a:effectRef>
-          <a:fontRef idx="minor">
-            <a:schemeClr val="lt1"/>
-          </a:fontRef>
-        </p:style>
-        <p:txBody>
-          <a:bodyPr rtlCol="0" anchor="ctr" wrap="none" tIns="0" bIns="0"/>
-          <a:lstStyle/>
-          <a:p>
-            <a:pPr algn="ctr"/>
-            <a:r>
-              <a:rPr sz="1400" b="1">
-                <a:solidFill>
-                  <a:srgbClr val="FFFFFF"/>
-                </a:solidFill>
-                <a:latin typeface="Arial"/>
-              </a:rPr>
-              <a:t>CỦNG CỐ</a:t>
-            </a:r>
-          </a:p>
-        </p:txBody>
-      </p:sp>
-      <p:sp>
-        <p:nvSpPr>
-          <p:cNvPr id="4" name="TextBox 3"/>
-          <p:cNvSpPr txBox="1"/>
-          <p:nvPr/>
-        </p:nvSpPr>
-        <p:spPr>
-          <a:xfrm>
-            <a:off x="731520" y="274320"/>
-            <a:ext cx="9427464" cy="868680"/>
-          </a:xfrm>
-          <a:prstGeom prst="rect">
-            <a:avLst/>
-          </a:prstGeom>
-          <a:noFill/>
-        </p:spPr>
-        <p:txBody>
-          <a:bodyPr wrap="square" anchor="ctr">
-            <a:spAutoFit/>
-          </a:bodyPr>
-          <a:lstStyle/>
-          <a:p>
-            <a:r>
-              <a:rPr sz="3600" b="1">
-                <a:solidFill>
-                  <a:srgbClr val="1E40AF"/>
-                </a:solidFill>
-                <a:latin typeface="Arial"/>
-              </a:rPr>
-              <a:t>SƠ ĐỒ TƯ DUY</a:t>
-            </a:r>
-          </a:p>
-        </p:txBody>
-      </p:sp>
-      <p:sp>
-        <p:nvSpPr>
-          <p:cNvPr id="5" name="Rectangle 4"/>
-          <p:cNvSpPr/>
-          <p:nvPr/>
-        </p:nvSpPr>
-        <p:spPr>
-          <a:xfrm>
-            <a:off x="457200" y="1207008"/>
-            <a:ext cx="11274552" cy="22000"/>
-          </a:xfrm>
-          <a:prstGeom prst="rect">
-            <a:avLst/>
-          </a:prstGeom>
-          <a:solidFill>
-            <a:srgbClr val="E2E8F0"/>
-          </a:solidFill>
-          <a:ln>
-            <a:noFill/>
-          </a:ln>
-          <a:effectLst/>
-        </p:spPr>
-        <p:style>
-          <a:lnRef idx="1">
-            <a:schemeClr val="accent1"/>
-          </a:lnRef>
-          <a:fillRef idx="3">
-            <a:schemeClr val="accent1"/>
-          </a:fillRef>
-          <a:effectRef idx="2">
-            <a:schemeClr val="accent1"/>
-          </a:effectRef>
-          <a:fontRef idx="minor">
-            <a:schemeClr val="lt1"/>
-          </a:fontRef>
-        </p:style>
-        <p:txBody>
-          <a:bodyPr rtlCol="0" anchor="ctr"/>
-          <a:lstStyle/>
-          <a:p>
-            <a:pPr algn="ctr"/>
-          </a:p>
-        </p:txBody>
-      </p:sp>
-      <p:sp>
-        <p:nvSpPr>
-          <p:cNvPr id="6" name="TextBox 5"/>
-          <p:cNvSpPr txBox="1"/>
-          <p:nvPr/>
-        </p:nvSpPr>
-        <p:spPr>
-          <a:xfrm>
-            <a:off x="457200" y="6355080"/>
-            <a:ext cx="11274552" cy="365760"/>
-          </a:xfrm>
-          <a:prstGeom prst="rect">
-            <a:avLst/>
-          </a:prstGeom>
-          <a:noFill/>
-        </p:spPr>
-        <p:txBody>
-          <a:bodyPr wrap="none">
-            <a:spAutoFit/>
-          </a:bodyPr>
-          <a:lstStyle/>
-          <a:p>
-            <a:pPr algn="r"/>
-            <a:r>
-              <a:rPr sz="1200">
-                <a:solidFill>
-                  <a:srgbClr val="64748B"/>
-                </a:solidFill>
-                <a:latin typeface="Calibri"/>
-              </a:rPr>
-              <a:t>Ngữ văn 12 · Bài 2: Những Thế Giới Thơ          37</a:t>
-            </a:r>
-          </a:p>
-        </p:txBody>
-      </p:sp>
-      <p:pic>
-        <p:nvPicPr>
-          <p:cNvPr id="7" name="Picture 6" descr="SoDoTuDuy_NGUVAN12_Bai2_NhungTheGioiTho_T12-22.png"/>
-          <p:cNvPicPr>
-            <a:picLocks noChangeAspect="1"/>
-          </p:cNvPicPr>
-          <p:nvPr/>
-        </p:nvPicPr>
-        <p:blipFill>
-          <a:blip r:embed="rId2"/>
-          <a:stretch>
-            <a:fillRect/>
-          </a:stretch>
-        </p:blipFill>
-        <p:spPr>
-          <a:xfrm>
-            <a:off x="1788855" y="1371600"/>
-            <a:ext cx="8675250" cy="4846320"/>
-          </a:xfrm>
-          <a:prstGeom prst="rect">
-            <a:avLst/>
-          </a:prstGeom>
-        </p:spPr>
-      </p:pic>
-    </p:spTree>
-  </p:cSld>
-  <p:clrMapOvr>
-    <a:masterClrMapping/>
-  </p:clrMapOvr>
-</p:sld>
-</file>
-
-<file path=ppt/slides/slide38.xml><?xml version="1.0" encoding="utf-8"?>
-<p:sld xmlns:a="http://schemas.openxmlformats.org/drawingml/2006/main" xmlns:p="http://schemas.openxmlformats.org/presentationml/2006/main" xmlns:r="http://schemas.openxmlformats.org/officeDocument/2006/relationships">
-  <p:cSld>
-    <p:bg>
-      <p:bgPr>
-        <a:solidFill>
-          <a:srgbClr val="FFFFFF"/>
-        </a:solidFill>
-        <a:effectLst/>
-      </p:bgPr>
-    </p:bg>
-    <p:spTree>
-      <p:nvGrpSpPr>
-        <p:cNvPr id="1" name=""/>
-        <p:cNvGrpSpPr/>
-        <p:nvPr/>
-      </p:nvGrpSpPr>
-      <p:grpSpPr/>
-      <p:sp>
-        <p:nvSpPr>
-          <p:cNvPr id="2" name="Rectangle 1"/>
-          <p:cNvSpPr/>
-          <p:nvPr/>
-        </p:nvSpPr>
-        <p:spPr>
-          <a:xfrm>
-            <a:off x="457200" y="384048"/>
-            <a:ext cx="109728" cy="658368"/>
-          </a:xfrm>
-          <a:prstGeom prst="rect">
-            <a:avLst/>
-          </a:prstGeom>
-          <a:solidFill>
-            <a:srgbClr val="1E40AF"/>
-          </a:solidFill>
-          <a:ln>
-            <a:noFill/>
-          </a:ln>
-          <a:effectLst/>
-        </p:spPr>
-        <p:style>
-          <a:lnRef idx="1">
-            <a:schemeClr val="accent1"/>
-          </a:lnRef>
-          <a:fillRef idx="3">
-            <a:schemeClr val="accent1"/>
-          </a:fillRef>
-          <a:effectRef idx="2">
-            <a:schemeClr val="accent1"/>
-          </a:effectRef>
-          <a:fontRef idx="minor">
-            <a:schemeClr val="lt1"/>
-          </a:fontRef>
-        </p:style>
-        <p:txBody>
-          <a:bodyPr rtlCol="0" anchor="ctr"/>
-          <a:lstStyle/>
-          <a:p>
-            <a:pPr algn="ctr"/>
-          </a:p>
-        </p:txBody>
-      </p:sp>
-      <p:sp>
-        <p:nvSpPr>
-          <p:cNvPr id="3" name="Rounded Rectangle 2"/>
-          <p:cNvSpPr/>
-          <p:nvPr/>
-        </p:nvSpPr>
-        <p:spPr>
-          <a:xfrm>
-            <a:off x="10097719" y="457200"/>
-            <a:ext cx="1545336" cy="457200"/>
-          </a:xfrm>
-          <a:prstGeom prst="roundRect">
-            <a:avLst/>
-          </a:prstGeom>
-          <a:solidFill>
-            <a:srgbClr val="991B1B"/>
-          </a:solidFill>
-          <a:ln>
-            <a:noFill/>
-          </a:ln>
-          <a:effectLst/>
-        </p:spPr>
-        <p:style>
-          <a:lnRef idx="1">
-            <a:schemeClr val="accent1"/>
-          </a:lnRef>
-          <a:fillRef idx="3">
-            <a:schemeClr val="accent1"/>
-          </a:fillRef>
-          <a:effectRef idx="2">
-            <a:schemeClr val="accent1"/>
-          </a:effectRef>
-          <a:fontRef idx="minor">
-            <a:schemeClr val="lt1"/>
-          </a:fontRef>
-        </p:style>
-        <p:txBody>
-          <a:bodyPr rtlCol="0" anchor="ctr" wrap="none" tIns="0" bIns="0"/>
-          <a:lstStyle/>
-          <a:p>
-            <a:pPr algn="ctr"/>
-            <a:r>
-              <a:rPr sz="1400" b="1">
-                <a:solidFill>
-                  <a:srgbClr val="FFFFFF"/>
-                </a:solidFill>
-                <a:latin typeface="Arial"/>
-              </a:rPr>
-              <a:t>CỦNG CỐ</a:t>
-            </a:r>
-          </a:p>
-        </p:txBody>
-      </p:sp>
-      <p:sp>
-        <p:nvSpPr>
-          <p:cNvPr id="4" name="TextBox 3"/>
-          <p:cNvSpPr txBox="1"/>
-          <p:nvPr/>
-        </p:nvSpPr>
-        <p:spPr>
-          <a:xfrm>
-            <a:off x="731520" y="274320"/>
-            <a:ext cx="9427464" cy="868680"/>
-          </a:xfrm>
-          <a:prstGeom prst="rect">
-            <a:avLst/>
-          </a:prstGeom>
-          <a:noFill/>
-        </p:spPr>
-        <p:txBody>
-          <a:bodyPr wrap="square" anchor="ctr">
-            <a:spAutoFit/>
-          </a:bodyPr>
-          <a:lstStyle/>
-          <a:p>
-            <a:r>
-              <a:rPr sz="3600" b="1">
-                <a:solidFill>
-                  <a:srgbClr val="1E40AF"/>
-                </a:solidFill>
-                <a:latin typeface="Arial"/>
-              </a:rPr>
-              <a:t>BÀI TẬP CỦA BẠN</a:t>
-            </a:r>
-          </a:p>
-        </p:txBody>
-      </p:sp>
-      <p:sp>
-        <p:nvSpPr>
-          <p:cNvPr id="5" name="Rectangle 4"/>
-          <p:cNvSpPr/>
-          <p:nvPr/>
-        </p:nvSpPr>
-        <p:spPr>
-          <a:xfrm>
-            <a:off x="457200" y="1207008"/>
-            <a:ext cx="11274552" cy="22000"/>
-          </a:xfrm>
-          <a:prstGeom prst="rect">
-            <a:avLst/>
-          </a:prstGeom>
-          <a:solidFill>
-            <a:srgbClr val="E2E8F0"/>
-          </a:solidFill>
-          <a:ln>
-            <a:noFill/>
-          </a:ln>
-          <a:effectLst/>
-        </p:spPr>
-        <p:style>
-          <a:lnRef idx="1">
-            <a:schemeClr val="accent1"/>
-          </a:lnRef>
-          <a:fillRef idx="3">
-            <a:schemeClr val="accent1"/>
-          </a:fillRef>
-          <a:effectRef idx="2">
-            <a:schemeClr val="accent1"/>
-          </a:effectRef>
-          <a:fontRef idx="minor">
-            <a:schemeClr val="lt1"/>
-          </a:fontRef>
-        </p:style>
-        <p:txBody>
-          <a:bodyPr rtlCol="0" anchor="ctr"/>
-          <a:lstStyle/>
-          <a:p>
-            <a:pPr algn="ctr"/>
-          </a:p>
-        </p:txBody>
-      </p:sp>
-      <p:sp>
-        <p:nvSpPr>
-          <p:cNvPr id="6" name="TextBox 5"/>
-          <p:cNvSpPr txBox="1"/>
-          <p:nvPr/>
-        </p:nvSpPr>
-        <p:spPr>
-          <a:xfrm>
-            <a:off x="457200" y="6355080"/>
-            <a:ext cx="11274552" cy="365760"/>
-          </a:xfrm>
-          <a:prstGeom prst="rect">
-            <a:avLst/>
-          </a:prstGeom>
-          <a:noFill/>
-        </p:spPr>
-        <p:txBody>
-          <a:bodyPr wrap="none">
-            <a:spAutoFit/>
-          </a:bodyPr>
-          <a:lstStyle/>
-          <a:p>
-            <a:pPr algn="r"/>
-            <a:r>
-              <a:rPr sz="1200">
-                <a:solidFill>
-                  <a:srgbClr val="64748B"/>
-                </a:solidFill>
-                <a:latin typeface="Calibri"/>
-              </a:rPr>
-              <a:t>Ngữ văn 12 · Bài 2: Những Thế Giới Thơ          38</a:t>
             </a:r>
           </a:p>
         </p:txBody>
@@ -16537,14 +15633,14 @@
         </p:nvSpPr>
         <p:spPr>
           <a:xfrm>
-            <a:off x="10408615" y="457200"/>
-            <a:ext cx="1234440" cy="457200"/>
+            <a:off x="10253167" y="457200"/>
+            <a:ext cx="1389888" cy="457200"/>
           </a:xfrm>
           <a:prstGeom prst="roundRect">
             <a:avLst/>
           </a:prstGeom>
           <a:solidFill>
-            <a:srgbClr val="991B1B"/>
+            <a:srgbClr val="1E40AF"/>
           </a:solidFill>
           <a:ln>
             <a:noFill/>
@@ -16577,7 +15673,7 @@
                 </a:solidFill>
                 <a:latin typeface="Arial"/>
               </a:rPr>
-              <a:t>VIDEO</a:t>
+              <a:t>ĐỀ BÀI</a:t>
             </a:r>
           </a:p>
         </p:txBody>
@@ -16591,7 +15687,7 @@
         <p:spPr>
           <a:xfrm>
             <a:off x="731520" y="274320"/>
-            <a:ext cx="9738360" cy="868680"/>
+            <a:ext cx="9582912" cy="868680"/>
           </a:xfrm>
           <a:prstGeom prst="rect">
             <a:avLst/>
@@ -16611,7 +15707,7 @@
                 </a:solidFill>
                 <a:latin typeface="Arial"/>
               </a:rPr>
-              <a:t>VIDEO THAM KHẢO</a:t>
+              <a:t>HOÀN CẢNH – TÌNH THẾ</a:t>
             </a:r>
           </a:p>
         </p:txBody>
@@ -16695,40 +15791,16 @@
           </a:p>
         </p:txBody>
       </p:sp>
-      <p:pic>
-        <p:nvPicPr>
-          <p:cNvPr id="7" name="Picture 6" descr="QR_video_lSlcQiQWbUQ.png"/>
-          <p:cNvPicPr>
-            <a:picLocks noChangeAspect="1"/>
-          </p:cNvPicPr>
-          <p:nvPr/>
-        </p:nvPicPr>
-        <p:blipFill>
-          <a:blip r:embed="rId2"/>
-          <a:stretch>
-            <a:fillRect/>
-          </a:stretch>
-        </p:blipFill>
-        <p:spPr>
-          <a:xfrm>
-            <a:off x="8412480" y="1554480"/>
-            <a:ext cx="3108960" cy="3108960"/>
-          </a:xfrm>
-          <a:prstGeom prst="rect">
-            <a:avLst/>
-          </a:prstGeom>
-        </p:spPr>
-      </p:pic>
-      <p:sp>
-        <p:nvSpPr>
-          <p:cNvPr id="8" name="TextBox 7"/>
+      <p:sp>
+        <p:nvSpPr>
+          <p:cNvPr id="7" name="TextBox 6"/>
           <p:cNvSpPr txBox="1"/>
           <p:nvPr/>
         </p:nvSpPr>
         <p:spPr>
           <a:xfrm>
-            <a:off x="731520" y="1554480"/>
-            <a:ext cx="7498079" cy="4206240"/>
+            <a:off x="731520" y="1463040"/>
+            <a:ext cx="10789920" cy="3566160"/>
           </a:xfrm>
           <a:prstGeom prst="rect">
             <a:avLst/>
@@ -16753,61 +15825,94 @@
                 </a:solidFill>
                 <a:latin typeface="Calibri"/>
               </a:rPr>
-              <a:t>🎬 Đặng Dung và bài thơ “Cảm hoài”</a:t>
-            </a:r>
-          </a:p>
+              <a:t>Hình ảnh nào trong bốn câu thơ đầu gợi ra hoàn cảnh – tình thế của nhân vật trữ tình? Hoàn cảnh đó có đặc điểm gì?</a:t>
+            </a:r>
+          </a:p>
+        </p:txBody>
+      </p:sp>
+      <p:sp>
+        <p:nvSpPr>
+          <p:cNvPr id="8" name="Rounded Rectangle 7"/>
+          <p:cNvSpPr/>
+          <p:nvPr/>
+        </p:nvSpPr>
+        <p:spPr>
+          <a:xfrm>
+            <a:off x="731520" y="5120640"/>
+            <a:ext cx="10789920" cy="693420"/>
+          </a:xfrm>
+          <a:prstGeom prst="roundRect">
+            <a:avLst>
+              <a:gd name="adj" fmla="val 8000"/>
+            </a:avLst>
+          </a:prstGeom>
+          <a:solidFill>
+            <a:srgbClr val="EFF4FF"/>
+          </a:solidFill>
+          <a:ln w="19050">
+            <a:solidFill>
+              <a:srgbClr val="1E40AF"/>
+            </a:solidFill>
+          </a:ln>
+          <a:effectLst/>
+        </p:spPr>
+        <p:style>
+          <a:lnRef idx="1">
+            <a:schemeClr val="accent1"/>
+          </a:lnRef>
+          <a:fillRef idx="3">
+            <a:schemeClr val="accent1"/>
+          </a:fillRef>
+          <a:effectRef idx="2">
+            <a:schemeClr val="accent1"/>
+          </a:effectRef>
+          <a:fontRef idx="minor">
+            <a:schemeClr val="lt1"/>
+          </a:fontRef>
+        </p:style>
+        <p:txBody>
+          <a:bodyPr rtlCol="0" anchor="ctr"/>
+          <a:lstStyle/>
+          <a:p>
+            <a:pPr algn="ctr"/>
+          </a:p>
+        </p:txBody>
+      </p:sp>
+      <p:sp>
+        <p:nvSpPr>
+          <p:cNvPr id="9" name="TextBox 8"/>
+          <p:cNvSpPr txBox="1"/>
+          <p:nvPr/>
+        </p:nvSpPr>
+        <p:spPr>
+          <a:xfrm>
+            <a:off x="914400" y="5120640"/>
+            <a:ext cx="10424160" cy="693420"/>
+          </a:xfrm>
+          <a:prstGeom prst="rect">
+            <a:avLst/>
+          </a:prstGeom>
+          <a:noFill/>
+        </p:spPr>
+        <p:txBody>
+          <a:bodyPr wrap="square" anchor="ctr" lIns="45720" rIns="45720">
+            <a:spAutoFit/>
+          </a:bodyPr>
+          <a:lstStyle/>
           <a:p>
             <a:pPr algn="l">
               <a:spcAft>
-                <a:spcPts val="800"/>
+                <a:spcPts val="400"/>
               </a:spcAft>
             </a:pPr>
             <a:r>
-              <a:rPr sz="2000">
-                <a:solidFill>
-                  <a:srgbClr val="64748B"/>
+              <a:rPr sz="2200" b="1">
+                <a:solidFill>
+                  <a:srgbClr val="1E40AF"/>
                 </a:solidFill>
                 <a:latin typeface="Calibri"/>
               </a:rPr>
-              <a:t>Kênh: Cùng Bạn Đọc Sách</a:t>
-            </a:r>
-          </a:p>
-          <a:p>
-            <a:pPr algn="l" marL="365760" indent="-365760">
-              <a:spcAft>
-                <a:spcPts val="800"/>
-              </a:spcAft>
-              <a:buClr>
-                <a:srgbClr val="1E40AF"/>
-              </a:buClr>
-              <a:buFont typeface="Arial"/>
-              <a:buChar char="•"/>
-            </a:pPr>
-            <a:r>
-              <a:rPr sz="2000">
-                <a:solidFill>
-                  <a:srgbClr val="1E293B"/>
-                </a:solidFill>
-                <a:latin typeface="Calibri"/>
-              </a:rPr>
-              <a:t>Đọc bài thơ, tìm hiểu tác giả Đặng Dung</a:t>
-            </a:r>
-          </a:p>
-          <a:p>
-            <a:pPr algn="l">
-              <a:spcAft>
-                <a:spcPts val="800"/>
-              </a:spcAft>
-            </a:pPr>
-            <a:r>
-              <a:rPr sz="1600">
-                <a:solidFill>
-                  <a:srgbClr val="64748B"/>
-                </a:solidFill>
-                <a:latin typeface="Calibri"/>
-                <a:hlinkClick r:id="rId3"/>
-              </a:rPr>
-              <a:t>https://www.youtube.com/watch?v=lSlcQiQWbUQ</a:t>
+              <a:t>💡 Đặt “thế sự” cạnh “đã vội già”.</a:t>
             </a:r>
           </a:p>
         </p:txBody>
@@ -16890,14 +15995,14 @@
         </p:nvSpPr>
         <p:spPr>
           <a:xfrm>
-            <a:off x="10253167" y="457200"/>
-            <a:ext cx="1389888" cy="457200"/>
+            <a:off x="9942271" y="457200"/>
+            <a:ext cx="1700784" cy="457200"/>
           </a:xfrm>
           <a:prstGeom prst="roundRect">
             <a:avLst/>
           </a:prstGeom>
           <a:solidFill>
-            <a:srgbClr val="1E40AF"/>
+            <a:srgbClr val="991B1B"/>
           </a:solidFill>
           <a:ln>
             <a:noFill/>
@@ -16930,7 +16035,7 @@
                 </a:solidFill>
                 <a:latin typeface="Arial"/>
               </a:rPr>
-              <a:t>ĐỀ BÀI</a:t>
+              <a:t>LỜI GIẢI</a:t>
             </a:r>
           </a:p>
         </p:txBody>
@@ -16944,7 +16049,7 @@
         <p:spPr>
           <a:xfrm>
             <a:off x="731520" y="274320"/>
-            <a:ext cx="9582912" cy="868680"/>
+            <a:ext cx="9272016" cy="868680"/>
           </a:xfrm>
           <a:prstGeom prst="rect">
             <a:avLst/>
@@ -17057,7 +16162,7 @@
         <p:spPr>
           <a:xfrm>
             <a:off x="731520" y="1463040"/>
-            <a:ext cx="10789920" cy="3566160"/>
+            <a:ext cx="10789920" cy="3474720"/>
           </a:xfrm>
           <a:prstGeom prst="rect">
             <a:avLst/>
@@ -17070,19 +16175,66 @@
           </a:bodyPr>
           <a:lstStyle/>
           <a:p>
-            <a:pPr algn="l">
+            <a:pPr algn="l" marL="365760" indent="-365760">
               <a:spcAft>
                 <a:spcPts val="800"/>
               </a:spcAft>
+              <a:buClr>
+                <a:srgbClr val="1E40AF"/>
+              </a:buClr>
+              <a:buFont typeface="Arial"/>
+              <a:buChar char="•"/>
             </a:pPr>
             <a:r>
-              <a:rPr sz="2600" b="1">
+              <a:rPr sz="2300">
                 <a:solidFill>
                   <a:srgbClr val="1E293B"/>
                 </a:solidFill>
                 <a:latin typeface="Calibri"/>
               </a:rPr>
-              <a:t>Hình ảnh nào trong bốn câu thơ đầu gợi ra hoàn cảnh – tình thế của nhân vật trữ tình? Hoàn cảnh đó có đặc điểm gì?</a:t>
+              <a:t>Thế sự ngổn ngang – mà đã già.</a:t>
+            </a:r>
+          </a:p>
+          <a:p>
+            <a:pPr algn="l" marL="365760" indent="-365760">
+              <a:spcAft>
+                <a:spcPts val="800"/>
+              </a:spcAft>
+              <a:buClr>
+                <a:srgbClr val="1E40AF"/>
+              </a:buClr>
+              <a:buFont typeface="Arial"/>
+              <a:buChar char="•"/>
+            </a:pPr>
+            <a:r>
+              <a:rPr sz="2300">
+                <a:solidFill>
+                  <a:srgbClr val="1E293B"/>
+                </a:solidFill>
+                <a:latin typeface="Calibri"/>
+              </a:rPr>
+              <a:t>Gặp thời đồ điếu công thành dễ – lỡ vận anh hùng hận xót xa.</a:t>
+            </a:r>
+          </a:p>
+          <a:p>
+            <a:pPr algn="l" marL="365760" indent="-365760">
+              <a:spcAft>
+                <a:spcPts val="800"/>
+              </a:spcAft>
+              <a:buClr>
+                <a:srgbClr val="1E40AF"/>
+              </a:buClr>
+              <a:buFont typeface="Arial"/>
+              <a:buChar char="•"/>
+            </a:pPr>
+            <a:r>
+              <a:rPr sz="2300">
+                <a:solidFill>
+                  <a:srgbClr val="1E293B"/>
+                </a:solidFill>
+                <a:latin typeface="Calibri"/>
+              </a:rPr>
+              <a:t>Mâu thuẫn chí lớn – thời vận, tuổi tác.</a:t>
             </a:r>
           </a:p>
         </p:txBody>
@@ -17095,8 +16247,8 @@
         </p:nvSpPr>
         <p:spPr>
           <a:xfrm>
-            <a:off x="731520" y="5120640"/>
-            <a:ext cx="10789920" cy="693420"/>
+            <a:off x="731520" y="5074920"/>
+            <a:ext cx="10789920" cy="731520"/>
           </a:xfrm>
           <a:prstGeom prst="roundRect">
             <a:avLst>
@@ -17104,11 +16256,11 @@
             </a:avLst>
           </a:prstGeom>
           <a:solidFill>
-            <a:srgbClr val="EFF4FF"/>
+            <a:srgbClr val="FEF2F2"/>
           </a:solidFill>
           <a:ln w="19050">
             <a:solidFill>
-              <a:srgbClr val="1E40AF"/>
+              <a:srgbClr val="991B1B"/>
             </a:solidFill>
           </a:ln>
           <a:effectLst/>
@@ -17143,8 +16295,8 @@
         </p:nvSpPr>
         <p:spPr>
           <a:xfrm>
-            <a:off x="914400" y="5120640"/>
-            <a:ext cx="10424160" cy="693420"/>
+            <a:off x="914400" y="5074920"/>
+            <a:ext cx="10424160" cy="731520"/>
           </a:xfrm>
           <a:prstGeom prst="rect">
             <a:avLst/>
@@ -17163,13 +16315,13 @@
               </a:spcAft>
             </a:pPr>
             <a:r>
-              <a:rPr sz="2200" b="1">
-                <a:solidFill>
-                  <a:srgbClr val="1E40AF"/>
+              <a:rPr sz="2400" b="1">
+                <a:solidFill>
+                  <a:srgbClr val="991B1B"/>
                 </a:solidFill>
                 <a:latin typeface="Calibri"/>
               </a:rPr>
-              <a:t>💡 Đặt “thế sự” cạnh “đã vội già”.</a:t>
+              <a:t>Bi kịch của người anh hùng thất thế.</a:t>
             </a:r>
           </a:p>
         </p:txBody>
@@ -17252,14 +16404,14 @@
         </p:nvSpPr>
         <p:spPr>
           <a:xfrm>
-            <a:off x="9942271" y="457200"/>
-            <a:ext cx="1700784" cy="457200"/>
+            <a:off x="10253167" y="457200"/>
+            <a:ext cx="1389888" cy="457200"/>
           </a:xfrm>
           <a:prstGeom prst="roundRect">
             <a:avLst/>
           </a:prstGeom>
           <a:solidFill>
-            <a:srgbClr val="991B1B"/>
+            <a:srgbClr val="1E40AF"/>
           </a:solidFill>
           <a:ln>
             <a:noFill/>
@@ -17292,7 +16444,7 @@
                 </a:solidFill>
                 <a:latin typeface="Arial"/>
               </a:rPr>
-              <a:t>LỜI GIẢI</a:t>
+              <a:t>ĐỀ BÀI</a:t>
             </a:r>
           </a:p>
         </p:txBody>
@@ -17306,7 +16458,7 @@
         <p:spPr>
           <a:xfrm>
             <a:off x="731520" y="274320"/>
-            <a:ext cx="9272016" cy="868680"/>
+            <a:ext cx="9582912" cy="868680"/>
           </a:xfrm>
           <a:prstGeom prst="rect">
             <a:avLst/>
@@ -17326,7 +16478,7 @@
                 </a:solidFill>
                 <a:latin typeface="Arial"/>
               </a:rPr>
-              <a:t>HOÀN CẢNH – TÌNH THẾ</a:t>
+              <a:t>BIỂU TƯỢNG TRONG HAI CÂU LUẬN</a:t>
             </a:r>
           </a:p>
         </p:txBody>
@@ -17419,7 +16571,7 @@
         <p:spPr>
           <a:xfrm>
             <a:off x="731520" y="1463040"/>
-            <a:ext cx="10789920" cy="3474720"/>
+            <a:ext cx="10789920" cy="3566160"/>
           </a:xfrm>
           <a:prstGeom prst="rect">
             <a:avLst/>
@@ -17432,66 +16584,19 @@
           </a:bodyPr>
           <a:lstStyle/>
           <a:p>
-            <a:pPr algn="l" marL="365760" indent="-365760">
+            <a:pPr algn="l">
               <a:spcAft>
                 <a:spcPts val="800"/>
               </a:spcAft>
-              <a:buClr>
-                <a:srgbClr val="1E40AF"/>
-              </a:buClr>
-              <a:buFont typeface="Arial"/>
-              <a:buChar char="•"/>
             </a:pPr>
             <a:r>
-              <a:rPr sz="2300">
+              <a:rPr sz="2600" b="1">
                 <a:solidFill>
                   <a:srgbClr val="1E293B"/>
                 </a:solidFill>
                 <a:latin typeface="Calibri"/>
               </a:rPr>
-              <a:t>Thế sự ngổn ngang – mà đã già.</a:t>
-            </a:r>
-          </a:p>
-          <a:p>
-            <a:pPr algn="l" marL="365760" indent="-365760">
-              <a:spcAft>
-                <a:spcPts val="800"/>
-              </a:spcAft>
-              <a:buClr>
-                <a:srgbClr val="1E40AF"/>
-              </a:buClr>
-              <a:buFont typeface="Arial"/>
-              <a:buChar char="•"/>
-            </a:pPr>
-            <a:r>
-              <a:rPr sz="2300">
-                <a:solidFill>
-                  <a:srgbClr val="1E293B"/>
-                </a:solidFill>
-                <a:latin typeface="Calibri"/>
-              </a:rPr>
-              <a:t>Gặp thời đồ điếu công thành dễ – lỡ vận anh hùng hận xót xa.</a:t>
-            </a:r>
-          </a:p>
-          <a:p>
-            <a:pPr algn="l" marL="365760" indent="-365760">
-              <a:spcAft>
-                <a:spcPts val="800"/>
-              </a:spcAft>
-              <a:buClr>
-                <a:srgbClr val="1E40AF"/>
-              </a:buClr>
-              <a:buFont typeface="Arial"/>
-              <a:buChar char="•"/>
-            </a:pPr>
-            <a:r>
-              <a:rPr sz="2300">
-                <a:solidFill>
-                  <a:srgbClr val="1E293B"/>
-                </a:solidFill>
-                <a:latin typeface="Calibri"/>
-              </a:rPr>
-              <a:t>Mâu thuẫn chí lớn – thời vận, tuổi tác.</a:t>
+              <a:t>Giải thích ý nghĩa các biểu tượng “xoay trục đất”, “rửa binh khí”, “kéo sông Ngân” và nêu cảm nhận về nỗi lòng nhân vật trữ tình.</a:t>
             </a:r>
           </a:p>
         </p:txBody>
@@ -17504,8 +16609,8 @@
         </p:nvSpPr>
         <p:spPr>
           <a:xfrm>
-            <a:off x="731520" y="5074920"/>
-            <a:ext cx="10789920" cy="731520"/>
+            <a:off x="731520" y="5120640"/>
+            <a:ext cx="10789920" cy="693420"/>
           </a:xfrm>
           <a:prstGeom prst="roundRect">
             <a:avLst>
@@ -17513,11 +16618,11 @@
             </a:avLst>
           </a:prstGeom>
           <a:solidFill>
-            <a:srgbClr val="FEF2F2"/>
+            <a:srgbClr val="EFF4FF"/>
           </a:solidFill>
           <a:ln w="19050">
             <a:solidFill>
-              <a:srgbClr val="991B1B"/>
+              <a:srgbClr val="1E40AF"/>
             </a:solidFill>
           </a:ln>
           <a:effectLst/>
@@ -17552,8 +16657,8 @@
         </p:nvSpPr>
         <p:spPr>
           <a:xfrm>
-            <a:off x="914400" y="5074920"/>
-            <a:ext cx="10424160" cy="731520"/>
+            <a:off x="914400" y="5120640"/>
+            <a:ext cx="10424160" cy="693420"/>
           </a:xfrm>
           <a:prstGeom prst="rect">
             <a:avLst/>
@@ -17572,13 +16677,13 @@
               </a:spcAft>
             </a:pPr>
             <a:r>
-              <a:rPr sz="2400" b="1">
-                <a:solidFill>
-                  <a:srgbClr val="991B1B"/>
+              <a:rPr sz="2200" b="1">
+                <a:solidFill>
+                  <a:srgbClr val="1E40AF"/>
                 </a:solidFill>
                 <a:latin typeface="Calibri"/>
               </a:rPr>
-              <a:t>Bi kịch của người anh hùng thất thế.</a:t>
+              <a:t>💡 Các biểu tượng gắn với khát vọng gì?</a:t>
             </a:r>
           </a:p>
         </p:txBody>
@@ -17661,14 +16766,14 @@
         </p:nvSpPr>
         <p:spPr>
           <a:xfrm>
-            <a:off x="10253167" y="457200"/>
-            <a:ext cx="1389888" cy="457200"/>
+            <a:off x="9942271" y="457200"/>
+            <a:ext cx="1700784" cy="457200"/>
           </a:xfrm>
           <a:prstGeom prst="roundRect">
             <a:avLst/>
           </a:prstGeom>
           <a:solidFill>
-            <a:srgbClr val="1E40AF"/>
+            <a:srgbClr val="991B1B"/>
           </a:solidFill>
           <a:ln>
             <a:noFill/>
@@ -17701,7 +16806,7 @@
                 </a:solidFill>
                 <a:latin typeface="Arial"/>
               </a:rPr>
-              <a:t>ĐỀ BÀI</a:t>
+              <a:t>LỜI GIẢI</a:t>
             </a:r>
           </a:p>
         </p:txBody>
@@ -17715,7 +16820,7 @@
         <p:spPr>
           <a:xfrm>
             <a:off x="731520" y="274320"/>
-            <a:ext cx="9582912" cy="868680"/>
+            <a:ext cx="9272016" cy="868680"/>
           </a:xfrm>
           <a:prstGeom prst="rect">
             <a:avLst/>
@@ -17828,7 +16933,7 @@
         <p:spPr>
           <a:xfrm>
             <a:off x="731520" y="1463040"/>
-            <a:ext cx="10789920" cy="3566160"/>
+            <a:ext cx="10789920" cy="3474720"/>
           </a:xfrm>
           <a:prstGeom prst="rect">
             <a:avLst/>
@@ -17841,19 +16946,66 @@
           </a:bodyPr>
           <a:lstStyle/>
           <a:p>
-            <a:pPr algn="l">
+            <a:pPr algn="l" marL="365760" indent="-365760">
               <a:spcAft>
                 <a:spcPts val="800"/>
               </a:spcAft>
+              <a:buClr>
+                <a:srgbClr val="1E40AF"/>
+              </a:buClr>
+              <a:buFont typeface="Arial"/>
+              <a:buChar char="•"/>
             </a:pPr>
             <a:r>
-              <a:rPr sz="2600" b="1">
+              <a:rPr sz="2300">
                 <a:solidFill>
                   <a:srgbClr val="1E293B"/>
                 </a:solidFill>
                 <a:latin typeface="Calibri"/>
               </a:rPr>
-              <a:t>Giải thích ý nghĩa các biểu tượng “xoay trục đất”, “rửa binh khí”, “kéo sông Ngân” và nêu cảm nhận về nỗi lòng nhân vật trữ tình.</a:t>
+              <a:t>“Xoay trục đất”: xoay chuyển vận mệnh đất nước.</a:t>
+            </a:r>
+          </a:p>
+          <a:p>
+            <a:pPr algn="l" marL="365760" indent="-365760">
+              <a:spcAft>
+                <a:spcPts val="800"/>
+              </a:spcAft>
+              <a:buClr>
+                <a:srgbClr val="1E40AF"/>
+              </a:buClr>
+              <a:buFont typeface="Arial"/>
+              <a:buChar char="•"/>
+            </a:pPr>
+            <a:r>
+              <a:rPr sz="2300">
+                <a:solidFill>
+                  <a:srgbClr val="1E293B"/>
+                </a:solidFill>
+                <a:latin typeface="Calibri"/>
+              </a:rPr>
+              <a:t>“Rửa binh khí”, “kéo sông Ngân”: dẹp yên chiến tranh, lập lại thái bình.</a:t>
+            </a:r>
+          </a:p>
+          <a:p>
+            <a:pPr algn="l" marL="365760" indent="-365760">
+              <a:spcAft>
+                <a:spcPts val="800"/>
+              </a:spcAft>
+              <a:buClr>
+                <a:srgbClr val="1E40AF"/>
+              </a:buClr>
+              <a:buFont typeface="Arial"/>
+              <a:buChar char="•"/>
+            </a:pPr>
+            <a:r>
+              <a:rPr sz="2300">
+                <a:solidFill>
+                  <a:srgbClr val="1E293B"/>
+                </a:solidFill>
+                <a:latin typeface="Calibri"/>
+              </a:rPr>
+              <a:t>Chí lớn kinh bang tế thế mà “khôn lối” – nỗi đau bất lực.</a:t>
             </a:r>
           </a:p>
         </p:txBody>
@@ -17866,8 +17018,8 @@
         </p:nvSpPr>
         <p:spPr>
           <a:xfrm>
-            <a:off x="731520" y="5120640"/>
-            <a:ext cx="10789920" cy="693420"/>
+            <a:off x="731520" y="5074920"/>
+            <a:ext cx="10789920" cy="731520"/>
           </a:xfrm>
           <a:prstGeom prst="roundRect">
             <a:avLst>
@@ -17875,11 +17027,11 @@
             </a:avLst>
           </a:prstGeom>
           <a:solidFill>
-            <a:srgbClr val="EFF4FF"/>
+            <a:srgbClr val="FEF2F2"/>
           </a:solidFill>
           <a:ln w="19050">
             <a:solidFill>
-              <a:srgbClr val="1E40AF"/>
+              <a:srgbClr val="991B1B"/>
             </a:solidFill>
           </a:ln>
           <a:effectLst/>
@@ -17914,8 +17066,8 @@
         </p:nvSpPr>
         <p:spPr>
           <a:xfrm>
-            <a:off x="914400" y="5120640"/>
-            <a:ext cx="10424160" cy="693420"/>
+            <a:off x="914400" y="5074920"/>
+            <a:ext cx="10424160" cy="731520"/>
           </a:xfrm>
           <a:prstGeom prst="rect">
             <a:avLst/>
@@ -17934,13 +17086,13 @@
               </a:spcAft>
             </a:pPr>
             <a:r>
-              <a:rPr sz="2200" b="1">
-                <a:solidFill>
-                  <a:srgbClr val="1E40AF"/>
+              <a:rPr sz="2400" b="1">
+                <a:solidFill>
+                  <a:srgbClr val="991B1B"/>
                 </a:solidFill>
                 <a:latin typeface="Calibri"/>
               </a:rPr>
-              <a:t>💡 Các biểu tượng gắn với khát vọng gì?</a:t>
+              <a:t>Biểu tượng mang tầm vũ trụ – chí lớn của bậc anh hùng.</a:t>
             </a:r>
           </a:p>
         </p:txBody>

--- a/mon/ngu_van/slide/lop12/Slide_NGUVAN12_Bai2_NhungTheGioiTho_T12-22.pptx
+++ b/mon/ngu_van/slide/lop12/Slide_NGUVAN12_Bai2_NhungTheGioiTho_T12-22.pptx
@@ -5434,7 +5434,7 @@
                 </a:solidFill>
                 <a:latin typeface="Calibri"/>
               </a:rPr>
-              <a:t>Trường THPT Vĩnh Thạnh – Tổ Ngữ văn – Tiếng Anh</a:t>
+              <a:t>Trường THPT – Tổ Ngữ văn – Tiếng Anh</a:t>
             </a:r>
           </a:p>
         </p:txBody>
@@ -14259,103 +14259,6 @@
       <p:grpSpPr/>
       <p:sp>
         <p:nvSpPr>
-          <p:cNvPr id="2" name="Rectangle 1"/>
-          <p:cNvSpPr/>
-          <p:nvPr/>
-        </p:nvSpPr>
-        <p:spPr>
-          <a:xfrm>
-            <a:off x="457200" y="384048"/>
-            <a:ext cx="109728" cy="658368"/>
-          </a:xfrm>
-          <a:prstGeom prst="rect">
-            <a:avLst/>
-          </a:prstGeom>
-          <a:solidFill>
-            <a:srgbClr val="1E40AF"/>
-          </a:solidFill>
-          <a:ln>
-            <a:noFill/>
-          </a:ln>
-          <a:effectLst/>
-        </p:spPr>
-        <p:style>
-          <a:lnRef idx="1">
-            <a:schemeClr val="accent1"/>
-          </a:lnRef>
-          <a:fillRef idx="3">
-            <a:schemeClr val="accent1"/>
-          </a:fillRef>
-          <a:effectRef idx="2">
-            <a:schemeClr val="accent1"/>
-          </a:effectRef>
-          <a:fontRef idx="minor">
-            <a:schemeClr val="lt1"/>
-          </a:fontRef>
-        </p:style>
-        <p:txBody>
-          <a:bodyPr rtlCol="0" anchor="ctr"/>
-          <a:lstStyle/>
-          <a:p>
-            <a:pPr algn="ctr"/>
-          </a:p>
-        </p:txBody>
-      </p:sp>
-      <p:sp>
-        <p:nvSpPr>
-          <p:cNvPr id="3" name="Rounded Rectangle 2"/>
-          <p:cNvSpPr/>
-          <p:nvPr/>
-        </p:nvSpPr>
-        <p:spPr>
-          <a:xfrm>
-            <a:off x="10097719" y="457200"/>
-            <a:ext cx="1545336" cy="457200"/>
-          </a:xfrm>
-          <a:prstGeom prst="roundRect">
-            <a:avLst/>
-          </a:prstGeom>
-          <a:solidFill>
-            <a:srgbClr val="166534"/>
-          </a:solidFill>
-          <a:ln>
-            <a:noFill/>
-          </a:ln>
-          <a:effectLst/>
-        </p:spPr>
-        <p:style>
-          <a:lnRef idx="1">
-            <a:schemeClr val="accent1"/>
-          </a:lnRef>
-          <a:fillRef idx="3">
-            <a:schemeClr val="accent1"/>
-          </a:fillRef>
-          <a:effectRef idx="2">
-            <a:schemeClr val="accent1"/>
-          </a:effectRef>
-          <a:fontRef idx="minor">
-            <a:schemeClr val="lt1"/>
-          </a:fontRef>
-        </p:style>
-        <p:txBody>
-          <a:bodyPr rtlCol="0" anchor="ctr" wrap="none" tIns="0" bIns="0"/>
-          <a:lstStyle/>
-          <a:p>
-            <a:pPr algn="ctr"/>
-            <a:r>
-              <a:rPr sz="1400" b="1">
-                <a:solidFill>
-                  <a:srgbClr val="FFFFFF"/>
-                </a:solidFill>
-                <a:latin typeface="Arial"/>
-              </a:rPr>
-              <a:t>CỦNG CỐ</a:t>
-            </a:r>
-          </a:p>
-        </p:txBody>
-      </p:sp>
-      <p:sp>
-        <p:nvSpPr>
           <p:cNvPr id="4" name="TextBox 3"/>
           <p:cNvSpPr txBox="1"/>
           <p:nvPr/>
@@ -14467,30 +14370,2049 @@
           </a:p>
         </p:txBody>
       </p:sp>
-      <p:pic>
-        <p:nvPicPr>
-          <p:cNvPr id="7" name="Picture 6" descr="SoDoTuDuy_NGUVAN12_Bai2_NhungTheGioiTho_T12-22.png"/>
-          <p:cNvPicPr>
-            <a:picLocks noChangeAspect="1"/>
-          </p:cNvPicPr>
-          <p:nvPr/>
-        </p:nvPicPr>
-        <p:blipFill>
-          <a:blip r:embed="rId2"/>
-          <a:stretch>
-            <a:fillRect/>
-          </a:stretch>
-        </p:blipFill>
-        <p:spPr>
-          <a:xfrm>
-            <a:off x="1788855" y="1371600"/>
-            <a:ext cx="8675250" cy="4846320"/>
-          </a:xfrm>
-          <a:prstGeom prst="rect">
-            <a:avLst/>
-          </a:prstGeom>
-        </p:spPr>
-      </p:pic>
+      <p:cxnSp>
+        <p:nvCxnSpPr>
+          <p:cNvPr id="7" name="Connector 6"/>
+          <p:cNvCxnSpPr/>
+          <p:nvPr/>
+        </p:nvCxnSpPr>
+        <p:spPr>
+          <a:xfrm flipH="1" flipV="1">
+            <a:off x="4338888" y="2670962"/>
+            <a:ext cx="1688379" cy="1283818"/>
+          </a:xfrm>
+          <a:prstGeom prst="line">
+            <a:avLst/>
+          </a:prstGeom>
+          <a:ln w="44450">
+            <a:solidFill>
+              <a:srgbClr val="548235"/>
+            </a:solidFill>
+          </a:ln>
+        </p:spPr>
+        <p:style>
+          <a:lnRef idx="2">
+            <a:schemeClr val="accent1"/>
+          </a:lnRef>
+          <a:fillRef idx="0">
+            <a:schemeClr val="accent1"/>
+          </a:fillRef>
+          <a:effectRef idx="1">
+            <a:schemeClr val="accent1"/>
+          </a:effectRef>
+          <a:fontRef idx="minor">
+            <a:schemeClr val="tx1"/>
+          </a:fontRef>
+        </p:style>
+      </p:cxnSp>
+      <p:cxnSp>
+        <p:nvCxnSpPr>
+          <p:cNvPr id="8" name="Connector 7"/>
+          <p:cNvCxnSpPr/>
+          <p:nvPr/>
+        </p:nvCxnSpPr>
+        <p:spPr>
+          <a:xfrm flipH="1" flipV="1">
+            <a:off x="2411463" y="1931116"/>
+            <a:ext cx="1927425" cy="739846"/>
+          </a:xfrm>
+          <a:prstGeom prst="line">
+            <a:avLst/>
+          </a:prstGeom>
+          <a:ln w="15875">
+            <a:solidFill>
+              <a:srgbClr val="548235"/>
+            </a:solidFill>
+          </a:ln>
+        </p:spPr>
+        <p:style>
+          <a:lnRef idx="2">
+            <a:schemeClr val="accent1"/>
+          </a:lnRef>
+          <a:fillRef idx="0">
+            <a:schemeClr val="accent1"/>
+          </a:fillRef>
+          <a:effectRef idx="1">
+            <a:schemeClr val="accent1"/>
+          </a:effectRef>
+          <a:fontRef idx="minor">
+            <a:schemeClr val="tx1"/>
+          </a:fontRef>
+        </p:style>
+      </p:cxnSp>
+      <p:sp>
+        <p:nvSpPr>
+          <p:cNvPr id="9" name="Rounded Rectangle 8"/>
+          <p:cNvSpPr/>
+          <p:nvPr/>
+        </p:nvSpPr>
+        <p:spPr>
+          <a:xfrm>
+            <a:off x="1201178" y="1755515"/>
+            <a:ext cx="1210285" cy="351200"/>
+          </a:xfrm>
+          <a:prstGeom prst="roundRect">
+            <a:avLst>
+              <a:gd name="adj" fmla="val 50000"/>
+            </a:avLst>
+          </a:prstGeom>
+          <a:solidFill>
+            <a:srgbClr val="EDF5E8"/>
+          </a:solidFill>
+          <a:ln w="15875">
+            <a:solidFill>
+              <a:srgbClr val="548235"/>
+            </a:solidFill>
+          </a:ln>
+          <a:effectLst/>
+        </p:spPr>
+        <p:style>
+          <a:lnRef idx="1">
+            <a:schemeClr val="accent1"/>
+          </a:lnRef>
+          <a:fillRef idx="3">
+            <a:schemeClr val="accent1"/>
+          </a:fillRef>
+          <a:effectRef idx="2">
+            <a:schemeClr val="accent1"/>
+          </a:effectRef>
+          <a:fontRef idx="minor">
+            <a:schemeClr val="lt1"/>
+          </a:fontRef>
+        </p:style>
+        <p:txBody>
+          <a:bodyPr rtlCol="0" anchor="ctr" wrap="none" lIns="64000" rIns="64000" tIns="25400" bIns="25400"/>
+          <a:lstStyle/>
+          <a:p>
+            <a:pPr algn="ctr"/>
+            <a:r>
+              <a:rPr sz="1300" b="1">
+                <a:solidFill>
+                  <a:srgbClr val="8B0000"/>
+                </a:solidFill>
+                <a:latin typeface="Calibri"/>
+              </a:rPr>
+              <a:t>Biểu tượng</a:t>
+            </a:r>
+          </a:p>
+        </p:txBody>
+      </p:sp>
+      <p:cxnSp>
+        <p:nvCxnSpPr>
+          <p:cNvPr id="10" name="Connector 9"/>
+          <p:cNvCxnSpPr/>
+          <p:nvPr/>
+        </p:nvCxnSpPr>
+        <p:spPr>
+          <a:xfrm flipH="1" flipV="1">
+            <a:off x="2721851" y="2457917"/>
+            <a:ext cx="1617037" cy="213045"/>
+          </a:xfrm>
+          <a:prstGeom prst="line">
+            <a:avLst/>
+          </a:prstGeom>
+          <a:ln w="15875">
+            <a:solidFill>
+              <a:srgbClr val="548235"/>
+            </a:solidFill>
+          </a:ln>
+        </p:spPr>
+        <p:style>
+          <a:lnRef idx="2">
+            <a:schemeClr val="accent1"/>
+          </a:lnRef>
+          <a:fillRef idx="0">
+            <a:schemeClr val="accent1"/>
+          </a:fillRef>
+          <a:effectRef idx="1">
+            <a:schemeClr val="accent1"/>
+          </a:effectRef>
+          <a:fontRef idx="minor">
+            <a:schemeClr val="tx1"/>
+          </a:fontRef>
+        </p:style>
+      </p:cxnSp>
+      <p:sp>
+        <p:nvSpPr>
+          <p:cNvPr id="11" name="Rounded Rectangle 10"/>
+          <p:cNvSpPr/>
+          <p:nvPr/>
+        </p:nvSpPr>
+        <p:spPr>
+          <a:xfrm>
+            <a:off x="890790" y="2181605"/>
+            <a:ext cx="1831061" cy="552622"/>
+          </a:xfrm>
+          <a:prstGeom prst="roundRect">
+            <a:avLst>
+              <a:gd name="adj" fmla="val 50000"/>
+            </a:avLst>
+          </a:prstGeom>
+          <a:solidFill>
+            <a:srgbClr val="EDF5E8"/>
+          </a:solidFill>
+          <a:ln w="15875">
+            <a:solidFill>
+              <a:srgbClr val="548235"/>
+            </a:solidFill>
+          </a:ln>
+          <a:effectLst/>
+        </p:spPr>
+        <p:style>
+          <a:lnRef idx="1">
+            <a:schemeClr val="accent1"/>
+          </a:lnRef>
+          <a:fillRef idx="3">
+            <a:schemeClr val="accent1"/>
+          </a:fillRef>
+          <a:effectRef idx="2">
+            <a:schemeClr val="accent1"/>
+          </a:effectRef>
+          <a:fontRef idx="minor">
+            <a:schemeClr val="lt1"/>
+          </a:fontRef>
+        </p:style>
+        <p:txBody>
+          <a:bodyPr rtlCol="0" anchor="ctr" wrap="none" lIns="64000" rIns="64000" tIns="25400" bIns="25400"/>
+          <a:lstStyle/>
+          <a:p>
+            <a:pPr algn="ctr"/>
+            <a:r>
+              <a:rPr sz="1300" b="0">
+                <a:solidFill>
+                  <a:srgbClr val="000000"/>
+                </a:solidFill>
+                <a:latin typeface="Calibri"/>
+              </a:rPr>
+              <a:t>Tượng trưng – siêu</a:t>
+            </a:r>
+          </a:p>
+          <a:p>
+            <a:pPr algn="ctr"/>
+            <a:r>
+              <a:rPr sz="1300" b="0">
+                <a:solidFill>
+                  <a:srgbClr val="000000"/>
+                </a:solidFill>
+                <a:latin typeface="Calibri"/>
+              </a:rPr>
+              <a:t>thực</a:t>
+            </a:r>
+          </a:p>
+        </p:txBody>
+      </p:sp>
+      <p:cxnSp>
+        <p:nvCxnSpPr>
+          <p:cNvPr id="12" name="Connector 11"/>
+          <p:cNvCxnSpPr/>
+          <p:nvPr/>
+        </p:nvCxnSpPr>
+        <p:spPr>
+          <a:xfrm flipH="1">
+            <a:off x="2721851" y="2670962"/>
+            <a:ext cx="1617037" cy="313756"/>
+          </a:xfrm>
+          <a:prstGeom prst="line">
+            <a:avLst/>
+          </a:prstGeom>
+          <a:ln w="15875">
+            <a:solidFill>
+              <a:srgbClr val="548235"/>
+            </a:solidFill>
+          </a:ln>
+        </p:spPr>
+        <p:style>
+          <a:lnRef idx="2">
+            <a:schemeClr val="accent1"/>
+          </a:lnRef>
+          <a:fillRef idx="0">
+            <a:schemeClr val="accent1"/>
+          </a:fillRef>
+          <a:effectRef idx="1">
+            <a:schemeClr val="accent1"/>
+          </a:effectRef>
+          <a:fontRef idx="minor">
+            <a:schemeClr val="tx1"/>
+          </a:fontRef>
+        </p:style>
+      </p:cxnSp>
+      <p:sp>
+        <p:nvSpPr>
+          <p:cNvPr id="13" name="Rounded Rectangle 12"/>
+          <p:cNvSpPr/>
+          <p:nvPr/>
+        </p:nvSpPr>
+        <p:spPr>
+          <a:xfrm>
+            <a:off x="890790" y="2809118"/>
+            <a:ext cx="1831061" cy="351200"/>
+          </a:xfrm>
+          <a:prstGeom prst="roundRect">
+            <a:avLst>
+              <a:gd name="adj" fmla="val 50000"/>
+            </a:avLst>
+          </a:prstGeom>
+          <a:solidFill>
+            <a:srgbClr val="EDF5E8"/>
+          </a:solidFill>
+          <a:ln w="15875">
+            <a:solidFill>
+              <a:srgbClr val="548235"/>
+            </a:solidFill>
+          </a:ln>
+          <a:effectLst/>
+        </p:spPr>
+        <p:style>
+          <a:lnRef idx="1">
+            <a:schemeClr val="accent1"/>
+          </a:lnRef>
+          <a:fillRef idx="3">
+            <a:schemeClr val="accent1"/>
+          </a:fillRef>
+          <a:effectRef idx="2">
+            <a:schemeClr val="accent1"/>
+          </a:effectRef>
+          <a:fontRef idx="minor">
+            <a:schemeClr val="lt1"/>
+          </a:fontRef>
+        </p:style>
+        <p:txBody>
+          <a:bodyPr rtlCol="0" anchor="ctr" wrap="none" lIns="64000" rIns="64000" tIns="25400" bIns="25400"/>
+          <a:lstStyle/>
+          <a:p>
+            <a:pPr algn="ctr"/>
+            <a:r>
+              <a:rPr sz="1300" b="0">
+                <a:solidFill>
+                  <a:srgbClr val="000000"/>
+                </a:solidFill>
+                <a:latin typeface="Calibri"/>
+              </a:rPr>
+              <a:t>Phong cách cổ điển</a:t>
+            </a:r>
+          </a:p>
+        </p:txBody>
+      </p:sp>
+      <p:cxnSp>
+        <p:nvCxnSpPr>
+          <p:cNvPr id="14" name="Connector 13"/>
+          <p:cNvCxnSpPr/>
+          <p:nvPr/>
+        </p:nvCxnSpPr>
+        <p:spPr>
+          <a:xfrm flipH="1">
+            <a:off x="2764777" y="2670962"/>
+            <a:ext cx="1574111" cy="739846"/>
+          </a:xfrm>
+          <a:prstGeom prst="line">
+            <a:avLst/>
+          </a:prstGeom>
+          <a:ln w="15875">
+            <a:solidFill>
+              <a:srgbClr val="548235"/>
+            </a:solidFill>
+          </a:ln>
+        </p:spPr>
+        <p:style>
+          <a:lnRef idx="2">
+            <a:schemeClr val="accent1"/>
+          </a:lnRef>
+          <a:fillRef idx="0">
+            <a:schemeClr val="accent1"/>
+          </a:fillRef>
+          <a:effectRef idx="1">
+            <a:schemeClr val="accent1"/>
+          </a:effectRef>
+          <a:fontRef idx="minor">
+            <a:schemeClr val="tx1"/>
+          </a:fontRef>
+        </p:style>
+      </p:cxnSp>
+      <p:sp>
+        <p:nvSpPr>
+          <p:cNvPr id="15" name="Rounded Rectangle 14"/>
+          <p:cNvSpPr/>
+          <p:nvPr/>
+        </p:nvSpPr>
+        <p:spPr>
+          <a:xfrm>
+            <a:off x="847864" y="3235208"/>
+            <a:ext cx="1916913" cy="351200"/>
+          </a:xfrm>
+          <a:prstGeom prst="roundRect">
+            <a:avLst>
+              <a:gd name="adj" fmla="val 50000"/>
+            </a:avLst>
+          </a:prstGeom>
+          <a:solidFill>
+            <a:srgbClr val="EDF5E8"/>
+          </a:solidFill>
+          <a:ln w="15875">
+            <a:solidFill>
+              <a:srgbClr val="548235"/>
+            </a:solidFill>
+          </a:ln>
+          <a:effectLst/>
+        </p:spPr>
+        <p:style>
+          <a:lnRef idx="1">
+            <a:schemeClr val="accent1"/>
+          </a:lnRef>
+          <a:fillRef idx="3">
+            <a:schemeClr val="accent1"/>
+          </a:fillRef>
+          <a:effectRef idx="2">
+            <a:schemeClr val="accent1"/>
+          </a:effectRef>
+          <a:fontRef idx="minor">
+            <a:schemeClr val="lt1"/>
+          </a:fontRef>
+        </p:style>
+        <p:txBody>
+          <a:bodyPr rtlCol="0" anchor="ctr" wrap="none" lIns="64000" rIns="64000" tIns="25400" bIns="25400"/>
+          <a:lstStyle/>
+          <a:p>
+            <a:pPr algn="ctr"/>
+            <a:r>
+              <a:rPr sz="1300" b="0">
+                <a:solidFill>
+                  <a:srgbClr val="000000"/>
+                </a:solidFill>
+                <a:latin typeface="Calibri"/>
+              </a:rPr>
+              <a:t>Phong cách lãng mạn</a:t>
+            </a:r>
+          </a:p>
+        </p:txBody>
+      </p:sp>
+      <p:sp>
+        <p:nvSpPr>
+          <p:cNvPr id="16" name="Oval 15"/>
+          <p:cNvSpPr/>
+          <p:nvPr/>
+        </p:nvSpPr>
+        <p:spPr>
+          <a:xfrm>
+            <a:off x="3502606" y="2259078"/>
+            <a:ext cx="1672565" cy="823767"/>
+          </a:xfrm>
+          <a:prstGeom prst="ellipse">
+            <a:avLst/>
+          </a:prstGeom>
+          <a:solidFill>
+            <a:srgbClr val="E2EFDA"/>
+          </a:solidFill>
+          <a:ln w="31750">
+            <a:solidFill>
+              <a:srgbClr val="375623"/>
+            </a:solidFill>
+          </a:ln>
+          <a:effectLst/>
+        </p:spPr>
+        <p:style>
+          <a:lnRef idx="1">
+            <a:schemeClr val="accent1"/>
+          </a:lnRef>
+          <a:fillRef idx="3">
+            <a:schemeClr val="accent1"/>
+          </a:fillRef>
+          <a:effectRef idx="2">
+            <a:schemeClr val="accent1"/>
+          </a:effectRef>
+          <a:fontRef idx="minor">
+            <a:schemeClr val="lt1"/>
+          </a:fontRef>
+        </p:style>
+        <p:txBody>
+          <a:bodyPr rtlCol="0" anchor="ctr" wrap="none" lIns="64000" rIns="64000" tIns="25400" bIns="25400"/>
+          <a:lstStyle/>
+          <a:p>
+            <a:pPr algn="ctr"/>
+            <a:r>
+              <a:rPr sz="1500" b="1">
+                <a:solidFill>
+                  <a:srgbClr val="000000"/>
+                </a:solidFill>
+                <a:latin typeface="Calibri"/>
+              </a:rPr>
+              <a:t>① Tri thức</a:t>
+            </a:r>
+          </a:p>
+          <a:p>
+            <a:pPr algn="ctr"/>
+            <a:r>
+              <a:rPr sz="1500" b="1">
+                <a:solidFill>
+                  <a:srgbClr val="000000"/>
+                </a:solidFill>
+                <a:latin typeface="Calibri"/>
+              </a:rPr>
+              <a:t>ngữ văn</a:t>
+            </a:r>
+          </a:p>
+        </p:txBody>
+      </p:sp>
+      <p:cxnSp>
+        <p:nvCxnSpPr>
+          <p:cNvPr id="17" name="Connector 16"/>
+          <p:cNvCxnSpPr/>
+          <p:nvPr/>
+        </p:nvCxnSpPr>
+        <p:spPr>
+          <a:xfrm flipV="1">
+            <a:off x="6027267" y="2670962"/>
+            <a:ext cx="1688379" cy="1283818"/>
+          </a:xfrm>
+          <a:prstGeom prst="line">
+            <a:avLst/>
+          </a:prstGeom>
+          <a:ln w="44450">
+            <a:solidFill>
+              <a:srgbClr val="BF8F00"/>
+            </a:solidFill>
+          </a:ln>
+        </p:spPr>
+        <p:style>
+          <a:lnRef idx="2">
+            <a:schemeClr val="accent1"/>
+          </a:lnRef>
+          <a:fillRef idx="0">
+            <a:schemeClr val="accent1"/>
+          </a:fillRef>
+          <a:effectRef idx="1">
+            <a:schemeClr val="accent1"/>
+          </a:effectRef>
+          <a:fontRef idx="minor">
+            <a:schemeClr val="tx1"/>
+          </a:fontRef>
+        </p:style>
+      </p:cxnSp>
+      <p:cxnSp>
+        <p:nvCxnSpPr>
+          <p:cNvPr id="18" name="Connector 17"/>
+          <p:cNvCxnSpPr/>
+          <p:nvPr/>
+        </p:nvCxnSpPr>
+        <p:spPr>
+          <a:xfrm flipV="1">
+            <a:off x="7715646" y="1931116"/>
+            <a:ext cx="1603829" cy="739846"/>
+          </a:xfrm>
+          <a:prstGeom prst="line">
+            <a:avLst/>
+          </a:prstGeom>
+          <a:ln w="15875">
+            <a:solidFill>
+              <a:srgbClr val="BF8F00"/>
+            </a:solidFill>
+          </a:ln>
+        </p:spPr>
+        <p:style>
+          <a:lnRef idx="2">
+            <a:schemeClr val="accent1"/>
+          </a:lnRef>
+          <a:fillRef idx="0">
+            <a:schemeClr val="accent1"/>
+          </a:fillRef>
+          <a:effectRef idx="1">
+            <a:schemeClr val="accent1"/>
+          </a:effectRef>
+          <a:fontRef idx="minor">
+            <a:schemeClr val="tx1"/>
+          </a:fontRef>
+        </p:style>
+      </p:cxnSp>
+      <p:sp>
+        <p:nvSpPr>
+          <p:cNvPr id="19" name="Rounded Rectangle 18"/>
+          <p:cNvSpPr/>
+          <p:nvPr/>
+        </p:nvSpPr>
+        <p:spPr>
+          <a:xfrm>
+            <a:off x="9319475" y="1755515"/>
+            <a:ext cx="1857477" cy="351200"/>
+          </a:xfrm>
+          <a:prstGeom prst="roundRect">
+            <a:avLst>
+              <a:gd name="adj" fmla="val 50000"/>
+            </a:avLst>
+          </a:prstGeom>
+          <a:solidFill>
+            <a:srgbClr val="FFF8E1"/>
+          </a:solidFill>
+          <a:ln w="15875">
+            <a:solidFill>
+              <a:srgbClr val="BF8F00"/>
+            </a:solidFill>
+          </a:ln>
+          <a:effectLst/>
+        </p:spPr>
+        <p:style>
+          <a:lnRef idx="1">
+            <a:schemeClr val="accent1"/>
+          </a:lnRef>
+          <a:fillRef idx="3">
+            <a:schemeClr val="accent1"/>
+          </a:fillRef>
+          <a:effectRef idx="2">
+            <a:schemeClr val="accent1"/>
+          </a:effectRef>
+          <a:fontRef idx="minor">
+            <a:schemeClr val="lt1"/>
+          </a:fontRef>
+        </p:style>
+        <p:txBody>
+          <a:bodyPr rtlCol="0" anchor="ctr" wrap="none" lIns="64000" rIns="64000" tIns="25400" bIns="25400"/>
+          <a:lstStyle/>
+          <a:p>
+            <a:pPr algn="ctr"/>
+            <a:r>
+              <a:rPr sz="1300" b="1">
+                <a:solidFill>
+                  <a:srgbClr val="8B0000"/>
+                </a:solidFill>
+                <a:latin typeface="Calibri"/>
+              </a:rPr>
+              <a:t>Anh hùng thất thế</a:t>
+            </a:r>
+          </a:p>
+        </p:txBody>
+      </p:sp>
+      <p:cxnSp>
+        <p:nvCxnSpPr>
+          <p:cNvPr id="20" name="Connector 19"/>
+          <p:cNvCxnSpPr/>
+          <p:nvPr/>
+        </p:nvCxnSpPr>
+        <p:spPr>
+          <a:xfrm flipV="1">
+            <a:off x="7715646" y="2457917"/>
+            <a:ext cx="1617037" cy="213045"/>
+          </a:xfrm>
+          <a:prstGeom prst="line">
+            <a:avLst/>
+          </a:prstGeom>
+          <a:ln w="15875">
+            <a:solidFill>
+              <a:srgbClr val="BF8F00"/>
+            </a:solidFill>
+          </a:ln>
+        </p:spPr>
+        <p:style>
+          <a:lnRef idx="2">
+            <a:schemeClr val="accent1"/>
+          </a:lnRef>
+          <a:fillRef idx="0">
+            <a:schemeClr val="accent1"/>
+          </a:fillRef>
+          <a:effectRef idx="1">
+            <a:schemeClr val="accent1"/>
+          </a:effectRef>
+          <a:fontRef idx="minor">
+            <a:schemeClr val="tx1"/>
+          </a:fontRef>
+        </p:style>
+      </p:cxnSp>
+      <p:sp>
+        <p:nvSpPr>
+          <p:cNvPr id="21" name="Rounded Rectangle 20"/>
+          <p:cNvSpPr/>
+          <p:nvPr/>
+        </p:nvSpPr>
+        <p:spPr>
+          <a:xfrm>
+            <a:off x="9332683" y="2181605"/>
+            <a:ext cx="1831061" cy="552622"/>
+          </a:xfrm>
+          <a:prstGeom prst="roundRect">
+            <a:avLst>
+              <a:gd name="adj" fmla="val 50000"/>
+            </a:avLst>
+          </a:prstGeom>
+          <a:solidFill>
+            <a:srgbClr val="FFF8E1"/>
+          </a:solidFill>
+          <a:ln w="15875">
+            <a:solidFill>
+              <a:srgbClr val="BF8F00"/>
+            </a:solidFill>
+          </a:ln>
+          <a:effectLst/>
+        </p:spPr>
+        <p:style>
+          <a:lnRef idx="1">
+            <a:schemeClr val="accent1"/>
+          </a:lnRef>
+          <a:fillRef idx="3">
+            <a:schemeClr val="accent1"/>
+          </a:fillRef>
+          <a:effectRef idx="2">
+            <a:schemeClr val="accent1"/>
+          </a:effectRef>
+          <a:fontRef idx="minor">
+            <a:schemeClr val="lt1"/>
+          </a:fontRef>
+        </p:style>
+        <p:txBody>
+          <a:bodyPr rtlCol="0" anchor="ctr" wrap="none" lIns="64000" rIns="64000" tIns="25400" bIns="25400"/>
+          <a:lstStyle/>
+          <a:p>
+            <a:pPr algn="ctr"/>
+            <a:r>
+              <a:rPr sz="1300" b="0">
+                <a:solidFill>
+                  <a:srgbClr val="000000"/>
+                </a:solidFill>
+                <a:latin typeface="Calibri"/>
+              </a:rPr>
+              <a:t>Xoay trục đất, kéo</a:t>
+            </a:r>
+          </a:p>
+          <a:p>
+            <a:pPr algn="ctr"/>
+            <a:r>
+              <a:rPr sz="1300" b="0">
+                <a:solidFill>
+                  <a:srgbClr val="000000"/>
+                </a:solidFill>
+                <a:latin typeface="Calibri"/>
+              </a:rPr>
+              <a:t>sông Ngân</a:t>
+            </a:r>
+          </a:p>
+        </p:txBody>
+      </p:sp>
+      <p:cxnSp>
+        <p:nvCxnSpPr>
+          <p:cNvPr id="22" name="Connector 21"/>
+          <p:cNvCxnSpPr/>
+          <p:nvPr/>
+        </p:nvCxnSpPr>
+        <p:spPr>
+          <a:xfrm>
+            <a:off x="7715646" y="2670962"/>
+            <a:ext cx="1574111" cy="313756"/>
+          </a:xfrm>
+          <a:prstGeom prst="line">
+            <a:avLst/>
+          </a:prstGeom>
+          <a:ln w="15875">
+            <a:solidFill>
+              <a:srgbClr val="BF8F00"/>
+            </a:solidFill>
+          </a:ln>
+        </p:spPr>
+        <p:style>
+          <a:lnRef idx="2">
+            <a:schemeClr val="accent1"/>
+          </a:lnRef>
+          <a:fillRef idx="0">
+            <a:schemeClr val="accent1"/>
+          </a:fillRef>
+          <a:effectRef idx="1">
+            <a:schemeClr val="accent1"/>
+          </a:effectRef>
+          <a:fontRef idx="minor">
+            <a:schemeClr val="tx1"/>
+          </a:fontRef>
+        </p:style>
+      </p:cxnSp>
+      <p:sp>
+        <p:nvSpPr>
+          <p:cNvPr id="23" name="Rounded Rectangle 22"/>
+          <p:cNvSpPr/>
+          <p:nvPr/>
+        </p:nvSpPr>
+        <p:spPr>
+          <a:xfrm>
+            <a:off x="9289757" y="2809118"/>
+            <a:ext cx="1916913" cy="351200"/>
+          </a:xfrm>
+          <a:prstGeom prst="roundRect">
+            <a:avLst>
+              <a:gd name="adj" fmla="val 50000"/>
+            </a:avLst>
+          </a:prstGeom>
+          <a:solidFill>
+            <a:srgbClr val="FFF8E1"/>
+          </a:solidFill>
+          <a:ln w="15875">
+            <a:solidFill>
+              <a:srgbClr val="BF8F00"/>
+            </a:solidFill>
+          </a:ln>
+          <a:effectLst/>
+        </p:spPr>
+        <p:style>
+          <a:lnRef idx="1">
+            <a:schemeClr val="accent1"/>
+          </a:lnRef>
+          <a:fillRef idx="3">
+            <a:schemeClr val="accent1"/>
+          </a:fillRef>
+          <a:effectRef idx="2">
+            <a:schemeClr val="accent1"/>
+          </a:effectRef>
+          <a:fontRef idx="minor">
+            <a:schemeClr val="lt1"/>
+          </a:fontRef>
+        </p:style>
+        <p:txBody>
+          <a:bodyPr rtlCol="0" anchor="ctr" wrap="none" lIns="64000" rIns="64000" tIns="25400" bIns="25400"/>
+          <a:lstStyle/>
+          <a:p>
+            <a:pPr algn="ctr"/>
+            <a:r>
+              <a:rPr sz="1300" b="0">
+                <a:solidFill>
+                  <a:srgbClr val="000000"/>
+                </a:solidFill>
+                <a:latin typeface="Calibri"/>
+              </a:rPr>
+              <a:t>Mài gươm dưới trăng</a:t>
+            </a:r>
+          </a:p>
+        </p:txBody>
+      </p:sp>
+      <p:cxnSp>
+        <p:nvCxnSpPr>
+          <p:cNvPr id="24" name="Connector 23"/>
+          <p:cNvCxnSpPr/>
+          <p:nvPr/>
+        </p:nvCxnSpPr>
+        <p:spPr>
+          <a:xfrm>
+            <a:off x="7715646" y="2670962"/>
+            <a:ext cx="1617037" cy="739846"/>
+          </a:xfrm>
+          <a:prstGeom prst="line">
+            <a:avLst/>
+          </a:prstGeom>
+          <a:ln w="15875">
+            <a:solidFill>
+              <a:srgbClr val="BF8F00"/>
+            </a:solidFill>
+          </a:ln>
+        </p:spPr>
+        <p:style>
+          <a:lnRef idx="2">
+            <a:schemeClr val="accent1"/>
+          </a:lnRef>
+          <a:fillRef idx="0">
+            <a:schemeClr val="accent1"/>
+          </a:fillRef>
+          <a:effectRef idx="1">
+            <a:schemeClr val="accent1"/>
+          </a:effectRef>
+          <a:fontRef idx="minor">
+            <a:schemeClr val="tx1"/>
+          </a:fontRef>
+        </p:style>
+      </p:cxnSp>
+      <p:sp>
+        <p:nvSpPr>
+          <p:cNvPr id="25" name="Rounded Rectangle 24"/>
+          <p:cNvSpPr/>
+          <p:nvPr/>
+        </p:nvSpPr>
+        <p:spPr>
+          <a:xfrm>
+            <a:off x="9332683" y="3235208"/>
+            <a:ext cx="1831061" cy="351200"/>
+          </a:xfrm>
+          <a:prstGeom prst="roundRect">
+            <a:avLst>
+              <a:gd name="adj" fmla="val 50000"/>
+            </a:avLst>
+          </a:prstGeom>
+          <a:solidFill>
+            <a:srgbClr val="FFF8E1"/>
+          </a:solidFill>
+          <a:ln w="15875">
+            <a:solidFill>
+              <a:srgbClr val="BF8F00"/>
+            </a:solidFill>
+          </a:ln>
+          <a:effectLst/>
+        </p:spPr>
+        <p:style>
+          <a:lnRef idx="1">
+            <a:schemeClr val="accent1"/>
+          </a:lnRef>
+          <a:fillRef idx="3">
+            <a:schemeClr val="accent1"/>
+          </a:fillRef>
+          <a:effectRef idx="2">
+            <a:schemeClr val="accent1"/>
+          </a:effectRef>
+          <a:fontRef idx="minor">
+            <a:schemeClr val="lt1"/>
+          </a:fontRef>
+        </p:style>
+        <p:txBody>
+          <a:bodyPr rtlCol="0" anchor="ctr" wrap="none" lIns="64000" rIns="64000" tIns="25400" bIns="25400"/>
+          <a:lstStyle/>
+          <a:p>
+            <a:pPr algn="ctr"/>
+            <a:r>
+              <a:rPr sz="1300" b="0">
+                <a:solidFill>
+                  <a:srgbClr val="000000"/>
+                </a:solidFill>
+                <a:latin typeface="Calibri"/>
+              </a:rPr>
+              <a:t>Phong cách cổ điển</a:t>
+            </a:r>
+          </a:p>
+        </p:txBody>
+      </p:sp>
+      <p:sp>
+        <p:nvSpPr>
+          <p:cNvPr id="26" name="Oval 25"/>
+          <p:cNvSpPr/>
+          <p:nvPr/>
+        </p:nvSpPr>
+        <p:spPr>
+          <a:xfrm>
+            <a:off x="6810021" y="2259078"/>
+            <a:ext cx="1811249" cy="823767"/>
+          </a:xfrm>
+          <a:prstGeom prst="ellipse">
+            <a:avLst/>
+          </a:prstGeom>
+          <a:solidFill>
+            <a:srgbClr val="FFF2CC"/>
+          </a:solidFill>
+          <a:ln w="31750">
+            <a:solidFill>
+              <a:srgbClr val="BF8F00"/>
+            </a:solidFill>
+          </a:ln>
+          <a:effectLst/>
+        </p:spPr>
+        <p:style>
+          <a:lnRef idx="1">
+            <a:schemeClr val="accent1"/>
+          </a:lnRef>
+          <a:fillRef idx="3">
+            <a:schemeClr val="accent1"/>
+          </a:fillRef>
+          <a:effectRef idx="2">
+            <a:schemeClr val="accent1"/>
+          </a:effectRef>
+          <a:fontRef idx="minor">
+            <a:schemeClr val="lt1"/>
+          </a:fontRef>
+        </p:style>
+        <p:txBody>
+          <a:bodyPr rtlCol="0" anchor="ctr" wrap="none" lIns="64000" rIns="64000" tIns="25400" bIns="25400"/>
+          <a:lstStyle/>
+          <a:p>
+            <a:pPr algn="ctr"/>
+            <a:r>
+              <a:rPr sz="1500" b="1">
+                <a:solidFill>
+                  <a:srgbClr val="000000"/>
+                </a:solidFill>
+                <a:latin typeface="Calibri"/>
+              </a:rPr>
+              <a:t>② Cảm hoài</a:t>
+            </a:r>
+          </a:p>
+          <a:p>
+            <a:pPr algn="ctr"/>
+            <a:r>
+              <a:rPr sz="1500" b="1">
+                <a:solidFill>
+                  <a:srgbClr val="000000"/>
+                </a:solidFill>
+                <a:latin typeface="Calibri"/>
+              </a:rPr>
+              <a:t>– Đặng Dung</a:t>
+            </a:r>
+          </a:p>
+        </p:txBody>
+      </p:sp>
+      <p:cxnSp>
+        <p:nvCxnSpPr>
+          <p:cNvPr id="27" name="Connector 26"/>
+          <p:cNvCxnSpPr/>
+          <p:nvPr/>
+        </p:nvCxnSpPr>
+        <p:spPr>
+          <a:xfrm flipH="1">
+            <a:off x="4338888" y="3954780"/>
+            <a:ext cx="1688379" cy="1283817"/>
+          </a:xfrm>
+          <a:prstGeom prst="line">
+            <a:avLst/>
+          </a:prstGeom>
+          <a:ln w="44450">
+            <a:solidFill>
+              <a:srgbClr val="2F5597"/>
+            </a:solidFill>
+          </a:ln>
+        </p:spPr>
+        <p:style>
+          <a:lnRef idx="2">
+            <a:schemeClr val="accent1"/>
+          </a:lnRef>
+          <a:fillRef idx="0">
+            <a:schemeClr val="accent1"/>
+          </a:fillRef>
+          <a:effectRef idx="1">
+            <a:schemeClr val="accent1"/>
+          </a:effectRef>
+          <a:fontRef idx="minor">
+            <a:schemeClr val="tx1"/>
+          </a:fontRef>
+        </p:style>
+      </p:cxnSp>
+      <p:cxnSp>
+        <p:nvCxnSpPr>
+          <p:cNvPr id="28" name="Connector 27"/>
+          <p:cNvCxnSpPr/>
+          <p:nvPr/>
+        </p:nvCxnSpPr>
+        <p:spPr>
+          <a:xfrm flipH="1" flipV="1">
+            <a:off x="2873743" y="4599462"/>
+            <a:ext cx="1465145" cy="639135"/>
+          </a:xfrm>
+          <a:prstGeom prst="line">
+            <a:avLst/>
+          </a:prstGeom>
+          <a:ln w="15875">
+            <a:solidFill>
+              <a:srgbClr val="2F5597"/>
+            </a:solidFill>
+          </a:ln>
+        </p:spPr>
+        <p:style>
+          <a:lnRef idx="2">
+            <a:schemeClr val="accent1"/>
+          </a:lnRef>
+          <a:fillRef idx="0">
+            <a:schemeClr val="accent1"/>
+          </a:fillRef>
+          <a:effectRef idx="1">
+            <a:schemeClr val="accent1"/>
+          </a:effectRef>
+          <a:fontRef idx="minor">
+            <a:schemeClr val="tx1"/>
+          </a:fontRef>
+        </p:style>
+      </p:cxnSp>
+      <p:sp>
+        <p:nvSpPr>
+          <p:cNvPr id="29" name="Rounded Rectangle 28"/>
+          <p:cNvSpPr/>
+          <p:nvPr/>
+        </p:nvSpPr>
+        <p:spPr>
+          <a:xfrm>
+            <a:off x="738898" y="4323151"/>
+            <a:ext cx="2134845" cy="552622"/>
+          </a:xfrm>
+          <a:prstGeom prst="roundRect">
+            <a:avLst>
+              <a:gd name="adj" fmla="val 50000"/>
+            </a:avLst>
+          </a:prstGeom>
+          <a:solidFill>
+            <a:srgbClr val="E3EEF9"/>
+          </a:solidFill>
+          <a:ln w="15875">
+            <a:solidFill>
+              <a:srgbClr val="2F5597"/>
+            </a:solidFill>
+          </a:ln>
+          <a:effectLst/>
+        </p:spPr>
+        <p:style>
+          <a:lnRef idx="1">
+            <a:schemeClr val="accent1"/>
+          </a:lnRef>
+          <a:fillRef idx="3">
+            <a:schemeClr val="accent1"/>
+          </a:fillRef>
+          <a:effectRef idx="2">
+            <a:schemeClr val="accent1"/>
+          </a:effectRef>
+          <a:fontRef idx="minor">
+            <a:schemeClr val="lt1"/>
+          </a:fontRef>
+        </p:style>
+        <p:txBody>
+          <a:bodyPr rtlCol="0" anchor="ctr" wrap="none" lIns="64000" rIns="64000" tIns="25400" bIns="25400"/>
+          <a:lstStyle/>
+          <a:p>
+            <a:pPr algn="ctr"/>
+            <a:r>
+              <a:rPr sz="1300" b="1">
+                <a:solidFill>
+                  <a:srgbClr val="8B0000"/>
+                </a:solidFill>
+                <a:latin typeface="Calibri"/>
+              </a:rPr>
+              <a:t>Người lính hào hùng,</a:t>
+            </a:r>
+          </a:p>
+          <a:p>
+            <a:pPr algn="ctr"/>
+            <a:r>
+              <a:rPr sz="1300" b="1">
+                <a:solidFill>
+                  <a:srgbClr val="8B0000"/>
+                </a:solidFill>
+                <a:latin typeface="Calibri"/>
+              </a:rPr>
+              <a:t>hào hoa</a:t>
+            </a:r>
+          </a:p>
+        </p:txBody>
+      </p:sp>
+      <p:cxnSp>
+        <p:nvCxnSpPr>
+          <p:cNvPr id="30" name="Connector 29"/>
+          <p:cNvCxnSpPr/>
+          <p:nvPr/>
+        </p:nvCxnSpPr>
+        <p:spPr>
+          <a:xfrm flipH="1" flipV="1">
+            <a:off x="2764777" y="5126263"/>
+            <a:ext cx="1574111" cy="112334"/>
+          </a:xfrm>
+          <a:prstGeom prst="line">
+            <a:avLst/>
+          </a:prstGeom>
+          <a:ln w="15875">
+            <a:solidFill>
+              <a:srgbClr val="2F5597"/>
+            </a:solidFill>
+          </a:ln>
+        </p:spPr>
+        <p:style>
+          <a:lnRef idx="2">
+            <a:schemeClr val="accent1"/>
+          </a:lnRef>
+          <a:fillRef idx="0">
+            <a:schemeClr val="accent1"/>
+          </a:fillRef>
+          <a:effectRef idx="1">
+            <a:schemeClr val="accent1"/>
+          </a:effectRef>
+          <a:fontRef idx="minor">
+            <a:schemeClr val="tx1"/>
+          </a:fontRef>
+        </p:style>
+      </p:cxnSp>
+      <p:sp>
+        <p:nvSpPr>
+          <p:cNvPr id="31" name="Rounded Rectangle 30"/>
+          <p:cNvSpPr/>
+          <p:nvPr/>
+        </p:nvSpPr>
+        <p:spPr>
+          <a:xfrm>
+            <a:off x="847864" y="4950663"/>
+            <a:ext cx="1916913" cy="351200"/>
+          </a:xfrm>
+          <a:prstGeom prst="roundRect">
+            <a:avLst>
+              <a:gd name="adj" fmla="val 50000"/>
+            </a:avLst>
+          </a:prstGeom>
+          <a:solidFill>
+            <a:srgbClr val="E3EEF9"/>
+          </a:solidFill>
+          <a:ln w="15875">
+            <a:solidFill>
+              <a:srgbClr val="2F5597"/>
+            </a:solidFill>
+          </a:ln>
+          <a:effectLst/>
+        </p:spPr>
+        <p:style>
+          <a:lnRef idx="1">
+            <a:schemeClr val="accent1"/>
+          </a:lnRef>
+          <a:fillRef idx="3">
+            <a:schemeClr val="accent1"/>
+          </a:fillRef>
+          <a:effectRef idx="2">
+            <a:schemeClr val="accent1"/>
+          </a:effectRef>
+          <a:fontRef idx="minor">
+            <a:schemeClr val="lt1"/>
+          </a:fontRef>
+        </p:style>
+        <p:txBody>
+          <a:bodyPr rtlCol="0" anchor="ctr" wrap="none" lIns="64000" rIns="64000" tIns="25400" bIns="25400"/>
+          <a:lstStyle/>
+          <a:p>
+            <a:pPr algn="ctr"/>
+            <a:r>
+              <a:rPr sz="1300" b="0">
+                <a:solidFill>
+                  <a:srgbClr val="000000"/>
+                </a:solidFill>
+                <a:latin typeface="Calibri"/>
+              </a:rPr>
+              <a:t>Chất nhạc, chất hoạ</a:t>
+            </a:r>
+          </a:p>
+        </p:txBody>
+      </p:sp>
+      <p:cxnSp>
+        <p:nvCxnSpPr>
+          <p:cNvPr id="32" name="Connector 31"/>
+          <p:cNvCxnSpPr/>
+          <p:nvPr/>
+        </p:nvCxnSpPr>
+        <p:spPr>
+          <a:xfrm flipH="1">
+            <a:off x="2635999" y="5238597"/>
+            <a:ext cx="1702889" cy="313756"/>
+          </a:xfrm>
+          <a:prstGeom prst="line">
+            <a:avLst/>
+          </a:prstGeom>
+          <a:ln w="15875">
+            <a:solidFill>
+              <a:srgbClr val="2F5597"/>
+            </a:solidFill>
+          </a:ln>
+        </p:spPr>
+        <p:style>
+          <a:lnRef idx="2">
+            <a:schemeClr val="accent1"/>
+          </a:lnRef>
+          <a:fillRef idx="0">
+            <a:schemeClr val="accent1"/>
+          </a:fillRef>
+          <a:effectRef idx="1">
+            <a:schemeClr val="accent1"/>
+          </a:effectRef>
+          <a:fontRef idx="minor">
+            <a:schemeClr val="tx1"/>
+          </a:fontRef>
+        </p:style>
+      </p:cxnSp>
+      <p:sp>
+        <p:nvSpPr>
+          <p:cNvPr id="33" name="Rounded Rectangle 32"/>
+          <p:cNvSpPr/>
+          <p:nvPr/>
+        </p:nvSpPr>
+        <p:spPr>
+          <a:xfrm>
+            <a:off x="976642" y="5376753"/>
+            <a:ext cx="1659357" cy="351200"/>
+          </a:xfrm>
+          <a:prstGeom prst="roundRect">
+            <a:avLst>
+              <a:gd name="adj" fmla="val 50000"/>
+            </a:avLst>
+          </a:prstGeom>
+          <a:solidFill>
+            <a:srgbClr val="E3EEF9"/>
+          </a:solidFill>
+          <a:ln w="15875">
+            <a:solidFill>
+              <a:srgbClr val="2F5597"/>
+            </a:solidFill>
+          </a:ln>
+          <a:effectLst/>
+        </p:spPr>
+        <p:style>
+          <a:lnRef idx="1">
+            <a:schemeClr val="accent1"/>
+          </a:lnRef>
+          <a:fillRef idx="3">
+            <a:schemeClr val="accent1"/>
+          </a:fillRef>
+          <a:effectRef idx="2">
+            <a:schemeClr val="accent1"/>
+          </a:effectRef>
+          <a:fontRef idx="minor">
+            <a:schemeClr val="lt1"/>
+          </a:fontRef>
+        </p:style>
+        <p:txBody>
+          <a:bodyPr rtlCol="0" anchor="ctr" wrap="none" lIns="64000" rIns="64000" tIns="25400" bIns="25400"/>
+          <a:lstStyle/>
+          <a:p>
+            <a:pPr algn="ctr"/>
+            <a:r>
+              <a:rPr sz="1300" b="0">
+                <a:solidFill>
+                  <a:srgbClr val="000000"/>
+                </a:solidFill>
+                <a:latin typeface="Calibri"/>
+              </a:rPr>
+              <a:t>Tiếng đàn bất tử</a:t>
+            </a:r>
+          </a:p>
+        </p:txBody>
+      </p:sp>
+      <p:cxnSp>
+        <p:nvCxnSpPr>
+          <p:cNvPr id="34" name="Connector 33"/>
+          <p:cNvCxnSpPr/>
+          <p:nvPr/>
+        </p:nvCxnSpPr>
+        <p:spPr>
+          <a:xfrm flipH="1">
+            <a:off x="2893555" y="5238597"/>
+            <a:ext cx="1445333" cy="739846"/>
+          </a:xfrm>
+          <a:prstGeom prst="line">
+            <a:avLst/>
+          </a:prstGeom>
+          <a:ln w="15875">
+            <a:solidFill>
+              <a:srgbClr val="2F5597"/>
+            </a:solidFill>
+          </a:ln>
+        </p:spPr>
+        <p:style>
+          <a:lnRef idx="2">
+            <a:schemeClr val="accent1"/>
+          </a:lnRef>
+          <a:fillRef idx="0">
+            <a:schemeClr val="accent1"/>
+          </a:fillRef>
+          <a:effectRef idx="1">
+            <a:schemeClr val="accent1"/>
+          </a:effectRef>
+          <a:fontRef idx="minor">
+            <a:schemeClr val="tx1"/>
+          </a:fontRef>
+        </p:style>
+      </p:cxnSp>
+      <p:sp>
+        <p:nvSpPr>
+          <p:cNvPr id="35" name="Rounded Rectangle 34"/>
+          <p:cNvSpPr/>
+          <p:nvPr/>
+        </p:nvSpPr>
+        <p:spPr>
+          <a:xfrm>
+            <a:off x="719086" y="5802843"/>
+            <a:ext cx="2174469" cy="351200"/>
+          </a:xfrm>
+          <a:prstGeom prst="roundRect">
+            <a:avLst>
+              <a:gd name="adj" fmla="val 50000"/>
+            </a:avLst>
+          </a:prstGeom>
+          <a:solidFill>
+            <a:srgbClr val="E3EEF9"/>
+          </a:solidFill>
+          <a:ln w="15875">
+            <a:solidFill>
+              <a:srgbClr val="2F5597"/>
+            </a:solidFill>
+          </a:ln>
+          <a:effectLst/>
+        </p:spPr>
+        <p:style>
+          <a:lnRef idx="1">
+            <a:schemeClr val="accent1"/>
+          </a:lnRef>
+          <a:fillRef idx="3">
+            <a:schemeClr val="accent1"/>
+          </a:fillRef>
+          <a:effectRef idx="2">
+            <a:schemeClr val="accent1"/>
+          </a:effectRef>
+          <a:fontRef idx="minor">
+            <a:schemeClr val="lt1"/>
+          </a:fontRef>
+        </p:style>
+        <p:txBody>
+          <a:bodyPr rtlCol="0" anchor="ctr" wrap="none" lIns="64000" rIns="64000" tIns="25400" bIns="25400"/>
+          <a:lstStyle/>
+          <a:p>
+            <a:pPr algn="ctr"/>
+            <a:r>
+              <a:rPr sz="1300" b="0">
+                <a:solidFill>
+                  <a:srgbClr val="000000"/>
+                </a:solidFill>
+                <a:latin typeface="Calibri"/>
+              </a:rPr>
+              <a:t>Siêu thực, tượng trưng</a:t>
+            </a:r>
+          </a:p>
+        </p:txBody>
+      </p:sp>
+      <p:sp>
+        <p:nvSpPr>
+          <p:cNvPr id="36" name="Oval 35"/>
+          <p:cNvSpPr/>
+          <p:nvPr/>
+        </p:nvSpPr>
+        <p:spPr>
+          <a:xfrm>
+            <a:off x="3502606" y="4826713"/>
+            <a:ext cx="1672565" cy="823767"/>
+          </a:xfrm>
+          <a:prstGeom prst="ellipse">
+            <a:avLst/>
+          </a:prstGeom>
+          <a:solidFill>
+            <a:srgbClr val="E2EFDA"/>
+          </a:solidFill>
+          <a:ln w="31750">
+            <a:solidFill>
+              <a:srgbClr val="375623"/>
+            </a:solidFill>
+          </a:ln>
+          <a:effectLst/>
+        </p:spPr>
+        <p:style>
+          <a:lnRef idx="1">
+            <a:schemeClr val="accent1"/>
+          </a:lnRef>
+          <a:fillRef idx="3">
+            <a:schemeClr val="accent1"/>
+          </a:fillRef>
+          <a:effectRef idx="2">
+            <a:schemeClr val="accent1"/>
+          </a:effectRef>
+          <a:fontRef idx="minor">
+            <a:schemeClr val="lt1"/>
+          </a:fontRef>
+        </p:style>
+        <p:txBody>
+          <a:bodyPr rtlCol="0" anchor="ctr" wrap="none" lIns="64000" rIns="64000" tIns="25400" bIns="25400"/>
+          <a:lstStyle/>
+          <a:p>
+            <a:pPr algn="ctr"/>
+            <a:r>
+              <a:rPr sz="1500" b="1">
+                <a:solidFill>
+                  <a:srgbClr val="000000"/>
+                </a:solidFill>
+                <a:latin typeface="Calibri"/>
+              </a:rPr>
+              <a:t>③ Tây Tiến</a:t>
+            </a:r>
+          </a:p>
+          <a:p>
+            <a:pPr algn="ctr"/>
+            <a:r>
+              <a:rPr sz="1500" b="1">
+                <a:solidFill>
+                  <a:srgbClr val="000000"/>
+                </a:solidFill>
+                <a:latin typeface="Calibri"/>
+              </a:rPr>
+              <a:t>– Lor-ca</a:t>
+            </a:r>
+          </a:p>
+        </p:txBody>
+      </p:sp>
+      <p:cxnSp>
+        <p:nvCxnSpPr>
+          <p:cNvPr id="37" name="Connector 36"/>
+          <p:cNvCxnSpPr/>
+          <p:nvPr/>
+        </p:nvCxnSpPr>
+        <p:spPr>
+          <a:xfrm>
+            <a:off x="6027267" y="3954780"/>
+            <a:ext cx="1688379" cy="1283817"/>
+          </a:xfrm>
+          <a:prstGeom prst="line">
+            <a:avLst/>
+          </a:prstGeom>
+          <a:ln w="44450">
+            <a:solidFill>
+              <a:srgbClr val="7030A0"/>
+            </a:solidFill>
+          </a:ln>
+        </p:spPr>
+        <p:style>
+          <a:lnRef idx="2">
+            <a:schemeClr val="accent1"/>
+          </a:lnRef>
+          <a:fillRef idx="0">
+            <a:schemeClr val="accent1"/>
+          </a:fillRef>
+          <a:effectRef idx="1">
+            <a:schemeClr val="accent1"/>
+          </a:effectRef>
+          <a:fontRef idx="minor">
+            <a:schemeClr val="tx1"/>
+          </a:fontRef>
+        </p:style>
+      </p:cxnSp>
+      <p:cxnSp>
+        <p:nvCxnSpPr>
+          <p:cNvPr id="38" name="Connector 37"/>
+          <p:cNvCxnSpPr/>
+          <p:nvPr/>
+        </p:nvCxnSpPr>
+        <p:spPr>
+          <a:xfrm flipV="1">
+            <a:off x="7715646" y="4297329"/>
+            <a:ext cx="1745815" cy="941268"/>
+          </a:xfrm>
+          <a:prstGeom prst="line">
+            <a:avLst/>
+          </a:prstGeom>
+          <a:ln w="15875">
+            <a:solidFill>
+              <a:srgbClr val="7030A0"/>
+            </a:solidFill>
+          </a:ln>
+        </p:spPr>
+        <p:style>
+          <a:lnRef idx="2">
+            <a:schemeClr val="accent1"/>
+          </a:lnRef>
+          <a:fillRef idx="0">
+            <a:schemeClr val="accent1"/>
+          </a:fillRef>
+          <a:effectRef idx="1">
+            <a:schemeClr val="accent1"/>
+          </a:effectRef>
+          <a:fontRef idx="minor">
+            <a:schemeClr val="tx1"/>
+          </a:fontRef>
+        </p:style>
+      </p:cxnSp>
+      <p:sp>
+        <p:nvSpPr>
+          <p:cNvPr id="39" name="Rounded Rectangle 38"/>
+          <p:cNvSpPr/>
+          <p:nvPr/>
+        </p:nvSpPr>
+        <p:spPr>
+          <a:xfrm>
+            <a:off x="9461461" y="4021018"/>
+            <a:ext cx="1573505" cy="552622"/>
+          </a:xfrm>
+          <a:prstGeom prst="roundRect">
+            <a:avLst>
+              <a:gd name="adj" fmla="val 50000"/>
+            </a:avLst>
+          </a:prstGeom>
+          <a:solidFill>
+            <a:srgbClr val="F3E8F7"/>
+          </a:solidFill>
+          <a:ln w="15875">
+            <a:solidFill>
+              <a:srgbClr val="7030A0"/>
+            </a:solidFill>
+          </a:ln>
+          <a:effectLst/>
+        </p:spPr>
+        <p:style>
+          <a:lnRef idx="1">
+            <a:schemeClr val="accent1"/>
+          </a:lnRef>
+          <a:fillRef idx="3">
+            <a:schemeClr val="accent1"/>
+          </a:fillRef>
+          <a:effectRef idx="2">
+            <a:schemeClr val="accent1"/>
+          </a:effectRef>
+          <a:fontRef idx="minor">
+            <a:schemeClr val="lt1"/>
+          </a:fontRef>
+        </p:style>
+        <p:txBody>
+          <a:bodyPr rtlCol="0" anchor="ctr" wrap="none" lIns="64000" rIns="64000" tIns="25400" bIns="25400"/>
+          <a:lstStyle/>
+          <a:p>
+            <a:pPr algn="ctr"/>
+            <a:r>
+              <a:rPr sz="1300" b="0">
+                <a:solidFill>
+                  <a:srgbClr val="000000"/>
+                </a:solidFill>
+                <a:latin typeface="Calibri"/>
+              </a:rPr>
+              <a:t>Biện pháp tu từ</a:t>
+            </a:r>
+          </a:p>
+          <a:p>
+            <a:pPr algn="ctr"/>
+            <a:r>
+              <a:rPr sz="1300" b="0">
+                <a:solidFill>
+                  <a:srgbClr val="000000"/>
+                </a:solidFill>
+                <a:latin typeface="Calibri"/>
+              </a:rPr>
+              <a:t>trong thơ</a:t>
+            </a:r>
+          </a:p>
+        </p:txBody>
+      </p:sp>
+      <p:cxnSp>
+        <p:nvCxnSpPr>
+          <p:cNvPr id="40" name="Connector 39"/>
+          <p:cNvCxnSpPr/>
+          <p:nvPr/>
+        </p:nvCxnSpPr>
+        <p:spPr>
+          <a:xfrm flipV="1">
+            <a:off x="7715646" y="4924841"/>
+            <a:ext cx="1603829" cy="313756"/>
+          </a:xfrm>
+          <a:prstGeom prst="line">
+            <a:avLst/>
+          </a:prstGeom>
+          <a:ln w="15875">
+            <a:solidFill>
+              <a:srgbClr val="7030A0"/>
+            </a:solidFill>
+          </a:ln>
+        </p:spPr>
+        <p:style>
+          <a:lnRef idx="2">
+            <a:schemeClr val="accent1"/>
+          </a:lnRef>
+          <a:fillRef idx="0">
+            <a:schemeClr val="accent1"/>
+          </a:fillRef>
+          <a:effectRef idx="1">
+            <a:schemeClr val="accent1"/>
+          </a:effectRef>
+          <a:fontRef idx="minor">
+            <a:schemeClr val="tx1"/>
+          </a:fontRef>
+        </p:style>
+      </p:cxnSp>
+      <p:sp>
+        <p:nvSpPr>
+          <p:cNvPr id="41" name="Rounded Rectangle 40"/>
+          <p:cNvSpPr/>
+          <p:nvPr/>
+        </p:nvSpPr>
+        <p:spPr>
+          <a:xfrm>
+            <a:off x="9319475" y="4648530"/>
+            <a:ext cx="1857477" cy="552622"/>
+          </a:xfrm>
+          <a:prstGeom prst="roundRect">
+            <a:avLst>
+              <a:gd name="adj" fmla="val 50000"/>
+            </a:avLst>
+          </a:prstGeom>
+          <a:solidFill>
+            <a:srgbClr val="F3E8F7"/>
+          </a:solidFill>
+          <a:ln w="15875">
+            <a:solidFill>
+              <a:srgbClr val="7030A0"/>
+            </a:solidFill>
+          </a:ln>
+          <a:effectLst/>
+        </p:spPr>
+        <p:style>
+          <a:lnRef idx="1">
+            <a:schemeClr val="accent1"/>
+          </a:lnRef>
+          <a:fillRef idx="3">
+            <a:schemeClr val="accent1"/>
+          </a:fillRef>
+          <a:effectRef idx="2">
+            <a:schemeClr val="accent1"/>
+          </a:effectRef>
+          <a:fontRef idx="minor">
+            <a:schemeClr val="lt1"/>
+          </a:fontRef>
+        </p:style>
+        <p:txBody>
+          <a:bodyPr rtlCol="0" anchor="ctr" wrap="none" lIns="64000" rIns="64000" tIns="25400" bIns="25400"/>
+          <a:lstStyle/>
+          <a:p>
+            <a:pPr algn="ctr"/>
+            <a:r>
+              <a:rPr sz="1300" b="1">
+                <a:solidFill>
+                  <a:srgbClr val="8B0000"/>
+                </a:solidFill>
+                <a:latin typeface="Calibri"/>
+              </a:rPr>
+              <a:t>So sánh, đánh giá</a:t>
+            </a:r>
+          </a:p>
+          <a:p>
+            <a:pPr algn="ctr"/>
+            <a:r>
+              <a:rPr sz="1300" b="1">
+                <a:solidFill>
+                  <a:srgbClr val="8B0000"/>
+                </a:solidFill>
+                <a:latin typeface="Calibri"/>
+              </a:rPr>
+              <a:t>2 bài thơ</a:t>
+            </a:r>
+          </a:p>
+        </p:txBody>
+      </p:sp>
+      <p:cxnSp>
+        <p:nvCxnSpPr>
+          <p:cNvPr id="42" name="Connector 41"/>
+          <p:cNvCxnSpPr/>
+          <p:nvPr/>
+        </p:nvCxnSpPr>
+        <p:spPr>
+          <a:xfrm>
+            <a:off x="7715646" y="5238597"/>
+            <a:ext cx="1659963" cy="313756"/>
+          </a:xfrm>
+          <a:prstGeom prst="line">
+            <a:avLst/>
+          </a:prstGeom>
+          <a:ln w="15875">
+            <a:solidFill>
+              <a:srgbClr val="7030A0"/>
+            </a:solidFill>
+          </a:ln>
+        </p:spPr>
+        <p:style>
+          <a:lnRef idx="2">
+            <a:schemeClr val="accent1"/>
+          </a:lnRef>
+          <a:fillRef idx="0">
+            <a:schemeClr val="accent1"/>
+          </a:fillRef>
+          <a:effectRef idx="1">
+            <a:schemeClr val="accent1"/>
+          </a:effectRef>
+          <a:fontRef idx="minor">
+            <a:schemeClr val="tx1"/>
+          </a:fontRef>
+        </p:style>
+      </p:cxnSp>
+      <p:sp>
+        <p:nvSpPr>
+          <p:cNvPr id="43" name="Rounded Rectangle 42"/>
+          <p:cNvSpPr/>
+          <p:nvPr/>
+        </p:nvSpPr>
+        <p:spPr>
+          <a:xfrm>
+            <a:off x="9375609" y="5276042"/>
+            <a:ext cx="1745209" cy="552622"/>
+          </a:xfrm>
+          <a:prstGeom prst="roundRect">
+            <a:avLst>
+              <a:gd name="adj" fmla="val 50000"/>
+            </a:avLst>
+          </a:prstGeom>
+          <a:solidFill>
+            <a:srgbClr val="F3E8F7"/>
+          </a:solidFill>
+          <a:ln w="15875">
+            <a:solidFill>
+              <a:srgbClr val="7030A0"/>
+            </a:solidFill>
+          </a:ln>
+          <a:effectLst/>
+        </p:spPr>
+        <p:style>
+          <a:lnRef idx="1">
+            <a:schemeClr val="accent1"/>
+          </a:lnRef>
+          <a:fillRef idx="3">
+            <a:schemeClr val="accent1"/>
+          </a:fillRef>
+          <a:effectRef idx="2">
+            <a:schemeClr val="accent1"/>
+          </a:effectRef>
+          <a:fontRef idx="minor">
+            <a:schemeClr val="lt1"/>
+          </a:fontRef>
+        </p:style>
+        <p:txBody>
+          <a:bodyPr rtlCol="0" anchor="ctr" wrap="none" lIns="64000" rIns="64000" tIns="25400" bIns="25400"/>
+          <a:lstStyle/>
+          <a:p>
+            <a:pPr algn="ctr"/>
+            <a:r>
+              <a:rPr sz="1300" b="0">
+                <a:solidFill>
+                  <a:srgbClr val="000000"/>
+                </a:solidFill>
+                <a:latin typeface="Calibri"/>
+              </a:rPr>
+              <a:t>Trình bày kết quả</a:t>
+            </a:r>
+          </a:p>
+          <a:p>
+            <a:pPr algn="ctr"/>
+            <a:r>
+              <a:rPr sz="1300" b="0">
+                <a:solidFill>
+                  <a:srgbClr val="000000"/>
+                </a:solidFill>
+                <a:latin typeface="Calibri"/>
+              </a:rPr>
+              <a:t>so sánh</a:t>
+            </a:r>
+          </a:p>
+        </p:txBody>
+      </p:sp>
+      <p:cxnSp>
+        <p:nvCxnSpPr>
+          <p:cNvPr id="44" name="Connector 43"/>
+          <p:cNvCxnSpPr/>
+          <p:nvPr/>
+        </p:nvCxnSpPr>
+        <p:spPr>
+          <a:xfrm>
+            <a:off x="7715646" y="5238597"/>
+            <a:ext cx="1617037" cy="941268"/>
+          </a:xfrm>
+          <a:prstGeom prst="line">
+            <a:avLst/>
+          </a:prstGeom>
+          <a:ln w="15875">
+            <a:solidFill>
+              <a:srgbClr val="7030A0"/>
+            </a:solidFill>
+          </a:ln>
+        </p:spPr>
+        <p:style>
+          <a:lnRef idx="2">
+            <a:schemeClr val="accent1"/>
+          </a:lnRef>
+          <a:fillRef idx="0">
+            <a:schemeClr val="accent1"/>
+          </a:fillRef>
+          <a:effectRef idx="1">
+            <a:schemeClr val="accent1"/>
+          </a:effectRef>
+          <a:fontRef idx="minor">
+            <a:schemeClr val="tx1"/>
+          </a:fontRef>
+        </p:style>
+      </p:cxnSp>
+      <p:sp>
+        <p:nvSpPr>
+          <p:cNvPr id="45" name="Rounded Rectangle 44"/>
+          <p:cNvSpPr/>
+          <p:nvPr/>
+        </p:nvSpPr>
+        <p:spPr>
+          <a:xfrm>
+            <a:off x="9332683" y="5903554"/>
+            <a:ext cx="1831061" cy="552622"/>
+          </a:xfrm>
+          <a:prstGeom prst="roundRect">
+            <a:avLst>
+              <a:gd name="adj" fmla="val 50000"/>
+            </a:avLst>
+          </a:prstGeom>
+          <a:solidFill>
+            <a:srgbClr val="F3E8F7"/>
+          </a:solidFill>
+          <a:ln w="15875">
+            <a:solidFill>
+              <a:srgbClr val="7030A0"/>
+            </a:solidFill>
+          </a:ln>
+          <a:effectLst/>
+        </p:spPr>
+        <p:style>
+          <a:lnRef idx="1">
+            <a:schemeClr val="accent1"/>
+          </a:lnRef>
+          <a:fillRef idx="3">
+            <a:schemeClr val="accent1"/>
+          </a:fillRef>
+          <a:effectRef idx="2">
+            <a:schemeClr val="accent1"/>
+          </a:effectRef>
+          <a:fontRef idx="minor">
+            <a:schemeClr val="lt1"/>
+          </a:fontRef>
+        </p:style>
+        <p:txBody>
+          <a:bodyPr rtlCol="0" anchor="ctr" wrap="none" lIns="64000" rIns="64000" tIns="25400" bIns="25400"/>
+          <a:lstStyle/>
+          <a:p>
+            <a:pPr algn="ctr"/>
+            <a:r>
+              <a:rPr sz="1300" b="0">
+                <a:solidFill>
+                  <a:srgbClr val="000000"/>
+                </a:solidFill>
+                <a:latin typeface="Calibri"/>
+              </a:rPr>
+              <a:t>Củng cố trực tuyến</a:t>
+            </a:r>
+          </a:p>
+          <a:p>
+            <a:pPr algn="ctr"/>
+            <a:r>
+              <a:rPr sz="1300" b="0">
+                <a:solidFill>
+                  <a:srgbClr val="000000"/>
+                </a:solidFill>
+                <a:latin typeface="Calibri"/>
+              </a:rPr>
+              <a:t>(QR)</a:t>
+            </a:r>
+          </a:p>
+        </p:txBody>
+      </p:sp>
+      <p:sp>
+        <p:nvSpPr>
+          <p:cNvPr id="46" name="Oval 45"/>
+          <p:cNvSpPr/>
+          <p:nvPr/>
+        </p:nvSpPr>
+        <p:spPr>
+          <a:xfrm>
+            <a:off x="6740679" y="4658216"/>
+            <a:ext cx="1949933" cy="1160762"/>
+          </a:xfrm>
+          <a:prstGeom prst="ellipse">
+            <a:avLst/>
+          </a:prstGeom>
+          <a:solidFill>
+            <a:srgbClr val="FFF2CC"/>
+          </a:solidFill>
+          <a:ln w="31750">
+            <a:solidFill>
+              <a:srgbClr val="BF8F00"/>
+            </a:solidFill>
+          </a:ln>
+          <a:effectLst/>
+        </p:spPr>
+        <p:style>
+          <a:lnRef idx="1">
+            <a:schemeClr val="accent1"/>
+          </a:lnRef>
+          <a:fillRef idx="3">
+            <a:schemeClr val="accent1"/>
+          </a:fillRef>
+          <a:effectRef idx="2">
+            <a:schemeClr val="accent1"/>
+          </a:effectRef>
+          <a:fontRef idx="minor">
+            <a:schemeClr val="lt1"/>
+          </a:fontRef>
+        </p:style>
+        <p:txBody>
+          <a:bodyPr rtlCol="0" anchor="ctr" wrap="none" lIns="64000" rIns="64000" tIns="25400" bIns="25400"/>
+          <a:lstStyle/>
+          <a:p>
+            <a:pPr algn="ctr"/>
+            <a:r>
+              <a:rPr sz="1500" b="1">
+                <a:solidFill>
+                  <a:srgbClr val="000000"/>
+                </a:solidFill>
+                <a:latin typeface="Calibri"/>
+              </a:rPr>
+              <a:t>④ Tiếng Việt</a:t>
+            </a:r>
+          </a:p>
+          <a:p>
+            <a:pPr algn="ctr"/>
+            <a:r>
+              <a:rPr sz="1500" b="1">
+                <a:solidFill>
+                  <a:srgbClr val="000000"/>
+                </a:solidFill>
+                <a:latin typeface="Calibri"/>
+              </a:rPr>
+              <a:t>– Viết –</a:t>
+            </a:r>
+          </a:p>
+          <a:p>
+            <a:pPr algn="ctr"/>
+            <a:r>
+              <a:rPr sz="1500" b="1">
+                <a:solidFill>
+                  <a:srgbClr val="000000"/>
+                </a:solidFill>
+                <a:latin typeface="Calibri"/>
+              </a:rPr>
+              <a:t>Nói</a:t>
+            </a:r>
+          </a:p>
+        </p:txBody>
+      </p:sp>
+      <p:sp>
+        <p:nvSpPr>
+          <p:cNvPr id="47" name="Oval 46"/>
+          <p:cNvSpPr/>
+          <p:nvPr/>
+        </p:nvSpPr>
+        <p:spPr>
+          <a:xfrm>
+            <a:off x="4784178" y="3484793"/>
+            <a:ext cx="2486178" cy="939972"/>
+          </a:xfrm>
+          <a:prstGeom prst="ellipse">
+            <a:avLst/>
+          </a:prstGeom>
+          <a:solidFill>
+            <a:srgbClr val="002060"/>
+          </a:solidFill>
+          <a:ln w="25400">
+            <a:solidFill>
+              <a:srgbClr val="000B1E"/>
+            </a:solidFill>
+          </a:ln>
+          <a:effectLst/>
+        </p:spPr>
+        <p:style>
+          <a:lnRef idx="1">
+            <a:schemeClr val="accent1"/>
+          </a:lnRef>
+          <a:fillRef idx="3">
+            <a:schemeClr val="accent1"/>
+          </a:fillRef>
+          <a:effectRef idx="2">
+            <a:schemeClr val="accent1"/>
+          </a:effectRef>
+          <a:fontRef idx="minor">
+            <a:schemeClr val="lt1"/>
+          </a:fontRef>
+        </p:style>
+        <p:txBody>
+          <a:bodyPr rtlCol="0" anchor="ctr" wrap="none" lIns="64000" rIns="64000" tIns="25400" bIns="25400"/>
+          <a:lstStyle/>
+          <a:p>
+            <a:pPr algn="ctr"/>
+            <a:r>
+              <a:rPr sz="1700" b="1">
+                <a:solidFill>
+                  <a:srgbClr val="FFFFFF"/>
+                </a:solidFill>
+                <a:latin typeface="Calibri"/>
+              </a:rPr>
+              <a:t>NHỮNG THẾ GIỚI</a:t>
+            </a:r>
+          </a:p>
+          <a:p>
+            <a:pPr algn="ctr"/>
+            <a:r>
+              <a:rPr sz="1700" b="1">
+                <a:solidFill>
+                  <a:srgbClr val="FFFFFF"/>
+                </a:solidFill>
+                <a:latin typeface="Calibri"/>
+              </a:rPr>
+              <a:t>THƠ</a:t>
+            </a:r>
+          </a:p>
+        </p:txBody>
+      </p:sp>
     </p:spTree>
   </p:cSld>
   <p:clrMapOvr>
